--- a/decks/LabMgmt_01_Quality-Management-Systems.pptx
+++ b/decks/LabMgmt_01_Quality-Management-Systems.pptx
@@ -26,9 +26,13 @@
     <p:sldId id="274" r:id="rId20"/>
     <p:sldId id="275" r:id="rId21"/>
     <p:sldId id="276" r:id="rId22"/>
+    <p:sldId id="277" r:id="rId23"/>
+    <p:sldId id="278" r:id="rId24"/>
+    <p:sldId id="279" r:id="rId25"/>
+    <p:sldId id="280" r:id="rId26"/>
   </p:sldIdLst>
   <p:notesMasterIdLst>
-    <p:notesMasterId r:id="rId23"/>
+    <p:notesMasterId r:id="rId27"/>
   </p:notesMasterIdLst>
   <p:sldSz cx="12191695" cy="6858000"/>
   <p:notesSz cx="6858000" cy="12191695"/>
@@ -1690,6 +1694,358 @@
             <a:fld id="{F7021451-1387-4CA6-816F-3879F97B5CBC}" type="slidenum">
               <a:rPr lang="en-US"/>
               <a:t>21</a:t>
+            </a:fld>
+            <a:endParaRPr lang="en-US"/>
+          </a:p>
+        </p:txBody>
+      </p:sp>
+    </p:spTree>
+    <p:extLst>
+      <p:ext uri="{BB962C8B-B14F-4D97-AF65-F5344CB8AC3E}">
+        <p14:creationId xmlns:p14="http://schemas.microsoft.com/office/powerpoint/2010/main" val="1024086991"/>
+      </p:ext>
+    </p:extLst>
+  </p:cSld>
+  <p:clrMapOvr>
+    <a:masterClrMapping/>
+  </p:clrMapOvr>
+</p:notes>
+</file>
+
+<file path=ppt/notesSlides/notesSlide22.xml><?xml version="1.0" encoding="utf-8"?>
+<p:notes xmlns:a="http://schemas.openxmlformats.org/drawingml/2006/main" xmlns:r="http://schemas.openxmlformats.org/officeDocument/2006/relationships" xmlns:p="http://schemas.openxmlformats.org/presentationml/2006/main">
+  <p:cSld>
+    <p:spTree>
+      <p:nvGrpSpPr>
+        <p:cNvPr id="1" name=""/>
+        <p:cNvGrpSpPr/>
+        <p:nvPr/>
+      </p:nvGrpSpPr>
+      <p:grpSpPr>
+        <a:xfrm>
+          <a:off x="0" y="0"/>
+          <a:ext cx="0" cy="0"/>
+          <a:chOff x="0" y="0"/>
+          <a:chExt cx="0" cy="0"/>
+        </a:xfrm>
+      </p:grpSpPr>
+      <p:sp>
+        <p:nvSpPr>
+          <p:cNvPr id="2" name="Slide Image Placeholder 1"/>
+          <p:cNvSpPr>
+            <a:spLocks noGrp="1" noRot="1" noChangeAspect="1"/>
+          </p:cNvSpPr>
+          <p:nvPr>
+            <p:ph type="sldImg"/>
+          </p:nvPr>
+        </p:nvSpPr>
+        <p:spPr/>
+      </p:sp>
+      <p:sp>
+        <p:nvSpPr>
+          <p:cNvPr id="3" name="Notes Placeholder 2"/>
+          <p:cNvSpPr>
+            <a:spLocks noGrp="1"/>
+          </p:cNvSpPr>
+          <p:nvPr>
+            <p:ph type="body" idx="1"/>
+          </p:nvPr>
+        </p:nvSpPr>
+        <p:spPr/>
+        <p:txBody>
+          <a:bodyPr/>
+          <a:lstStyle/>
+          <a:p>
+            <a:r>
+              <a:rPr lang="en-US" dirty="0"/>
+              <a:t/>
+            </a:r>
+            <a:endParaRPr lang="en-US" dirty="0"/>
+          </a:p>
+        </p:txBody>
+      </p:sp>
+      <p:sp>
+        <p:nvSpPr>
+          <p:cNvPr id="4" name="Slide Number Placeholder 3"/>
+          <p:cNvSpPr>
+            <a:spLocks noGrp="1"/>
+          </p:cNvSpPr>
+          <p:nvPr>
+            <p:ph type="sldNum" sz="quarter" idx="10"/>
+          </p:nvPr>
+        </p:nvSpPr>
+        <p:spPr/>
+        <p:txBody>
+          <a:bodyPr/>
+          <a:lstStyle/>
+          <a:p>
+            <a:fld id="{F7021451-1387-4CA6-816F-3879F97B5CBC}" type="slidenum">
+              <a:rPr lang="en-US"/>
+              <a:t>22</a:t>
+            </a:fld>
+            <a:endParaRPr lang="en-US"/>
+          </a:p>
+        </p:txBody>
+      </p:sp>
+    </p:spTree>
+    <p:extLst>
+      <p:ext uri="{BB962C8B-B14F-4D97-AF65-F5344CB8AC3E}">
+        <p14:creationId xmlns:p14="http://schemas.microsoft.com/office/powerpoint/2010/main" val="1024086991"/>
+      </p:ext>
+    </p:extLst>
+  </p:cSld>
+  <p:clrMapOvr>
+    <a:masterClrMapping/>
+  </p:clrMapOvr>
+</p:notes>
+</file>
+
+<file path=ppt/notesSlides/notesSlide23.xml><?xml version="1.0" encoding="utf-8"?>
+<p:notes xmlns:a="http://schemas.openxmlformats.org/drawingml/2006/main" xmlns:r="http://schemas.openxmlformats.org/officeDocument/2006/relationships" xmlns:p="http://schemas.openxmlformats.org/presentationml/2006/main">
+  <p:cSld>
+    <p:spTree>
+      <p:nvGrpSpPr>
+        <p:cNvPr id="1" name=""/>
+        <p:cNvGrpSpPr/>
+        <p:nvPr/>
+      </p:nvGrpSpPr>
+      <p:grpSpPr>
+        <a:xfrm>
+          <a:off x="0" y="0"/>
+          <a:ext cx="0" cy="0"/>
+          <a:chOff x="0" y="0"/>
+          <a:chExt cx="0" cy="0"/>
+        </a:xfrm>
+      </p:grpSpPr>
+      <p:sp>
+        <p:nvSpPr>
+          <p:cNvPr id="2" name="Slide Image Placeholder 1"/>
+          <p:cNvSpPr>
+            <a:spLocks noGrp="1" noRot="1" noChangeAspect="1"/>
+          </p:cNvSpPr>
+          <p:nvPr>
+            <p:ph type="sldImg"/>
+          </p:nvPr>
+        </p:nvSpPr>
+        <p:spPr/>
+      </p:sp>
+      <p:sp>
+        <p:nvSpPr>
+          <p:cNvPr id="3" name="Notes Placeholder 2"/>
+          <p:cNvSpPr>
+            <a:spLocks noGrp="1"/>
+          </p:cNvSpPr>
+          <p:nvPr>
+            <p:ph type="body" idx="1"/>
+          </p:nvPr>
+        </p:nvSpPr>
+        <p:spPr/>
+        <p:txBody>
+          <a:bodyPr/>
+          <a:lstStyle/>
+          <a:p>
+            <a:r>
+              <a:rPr lang="en-US" dirty="0"/>
+              <a:t/>
+            </a:r>
+            <a:endParaRPr lang="en-US" dirty="0"/>
+          </a:p>
+        </p:txBody>
+      </p:sp>
+      <p:sp>
+        <p:nvSpPr>
+          <p:cNvPr id="4" name="Slide Number Placeholder 3"/>
+          <p:cNvSpPr>
+            <a:spLocks noGrp="1"/>
+          </p:cNvSpPr>
+          <p:nvPr>
+            <p:ph type="sldNum" sz="quarter" idx="10"/>
+          </p:nvPr>
+        </p:nvSpPr>
+        <p:spPr/>
+        <p:txBody>
+          <a:bodyPr/>
+          <a:lstStyle/>
+          <a:p>
+            <a:fld id="{F7021451-1387-4CA6-816F-3879F97B5CBC}" type="slidenum">
+              <a:rPr lang="en-US"/>
+              <a:t>23</a:t>
+            </a:fld>
+            <a:endParaRPr lang="en-US"/>
+          </a:p>
+        </p:txBody>
+      </p:sp>
+    </p:spTree>
+    <p:extLst>
+      <p:ext uri="{BB962C8B-B14F-4D97-AF65-F5344CB8AC3E}">
+        <p14:creationId xmlns:p14="http://schemas.microsoft.com/office/powerpoint/2010/main" val="1024086991"/>
+      </p:ext>
+    </p:extLst>
+  </p:cSld>
+  <p:clrMapOvr>
+    <a:masterClrMapping/>
+  </p:clrMapOvr>
+</p:notes>
+</file>
+
+<file path=ppt/notesSlides/notesSlide24.xml><?xml version="1.0" encoding="utf-8"?>
+<p:notes xmlns:a="http://schemas.openxmlformats.org/drawingml/2006/main" xmlns:r="http://schemas.openxmlformats.org/officeDocument/2006/relationships" xmlns:p="http://schemas.openxmlformats.org/presentationml/2006/main">
+  <p:cSld>
+    <p:spTree>
+      <p:nvGrpSpPr>
+        <p:cNvPr id="1" name=""/>
+        <p:cNvGrpSpPr/>
+        <p:nvPr/>
+      </p:nvGrpSpPr>
+      <p:grpSpPr>
+        <a:xfrm>
+          <a:off x="0" y="0"/>
+          <a:ext cx="0" cy="0"/>
+          <a:chOff x="0" y="0"/>
+          <a:chExt cx="0" cy="0"/>
+        </a:xfrm>
+      </p:grpSpPr>
+      <p:sp>
+        <p:nvSpPr>
+          <p:cNvPr id="2" name="Slide Image Placeholder 1"/>
+          <p:cNvSpPr>
+            <a:spLocks noGrp="1" noRot="1" noChangeAspect="1"/>
+          </p:cNvSpPr>
+          <p:nvPr>
+            <p:ph type="sldImg"/>
+          </p:nvPr>
+        </p:nvSpPr>
+        <p:spPr/>
+      </p:sp>
+      <p:sp>
+        <p:nvSpPr>
+          <p:cNvPr id="3" name="Notes Placeholder 2"/>
+          <p:cNvSpPr>
+            <a:spLocks noGrp="1"/>
+          </p:cNvSpPr>
+          <p:nvPr>
+            <p:ph type="body" idx="1"/>
+          </p:nvPr>
+        </p:nvSpPr>
+        <p:spPr/>
+        <p:txBody>
+          <a:bodyPr/>
+          <a:lstStyle/>
+          <a:p>
+            <a:r>
+              <a:rPr lang="en-US" dirty="0"/>
+              <a:t/>
+            </a:r>
+            <a:endParaRPr lang="en-US" dirty="0"/>
+          </a:p>
+        </p:txBody>
+      </p:sp>
+      <p:sp>
+        <p:nvSpPr>
+          <p:cNvPr id="4" name="Slide Number Placeholder 3"/>
+          <p:cNvSpPr>
+            <a:spLocks noGrp="1"/>
+          </p:cNvSpPr>
+          <p:nvPr>
+            <p:ph type="sldNum" sz="quarter" idx="10"/>
+          </p:nvPr>
+        </p:nvSpPr>
+        <p:spPr/>
+        <p:txBody>
+          <a:bodyPr/>
+          <a:lstStyle/>
+          <a:p>
+            <a:fld id="{F7021451-1387-4CA6-816F-3879F97B5CBC}" type="slidenum">
+              <a:rPr lang="en-US"/>
+              <a:t>24</a:t>
+            </a:fld>
+            <a:endParaRPr lang="en-US"/>
+          </a:p>
+        </p:txBody>
+      </p:sp>
+    </p:spTree>
+    <p:extLst>
+      <p:ext uri="{BB962C8B-B14F-4D97-AF65-F5344CB8AC3E}">
+        <p14:creationId xmlns:p14="http://schemas.microsoft.com/office/powerpoint/2010/main" val="1024086991"/>
+      </p:ext>
+    </p:extLst>
+  </p:cSld>
+  <p:clrMapOvr>
+    <a:masterClrMapping/>
+  </p:clrMapOvr>
+</p:notes>
+</file>
+
+<file path=ppt/notesSlides/notesSlide25.xml><?xml version="1.0" encoding="utf-8"?>
+<p:notes xmlns:a="http://schemas.openxmlformats.org/drawingml/2006/main" xmlns:r="http://schemas.openxmlformats.org/officeDocument/2006/relationships" xmlns:p="http://schemas.openxmlformats.org/presentationml/2006/main">
+  <p:cSld>
+    <p:spTree>
+      <p:nvGrpSpPr>
+        <p:cNvPr id="1" name=""/>
+        <p:cNvGrpSpPr/>
+        <p:nvPr/>
+      </p:nvGrpSpPr>
+      <p:grpSpPr>
+        <a:xfrm>
+          <a:off x="0" y="0"/>
+          <a:ext cx="0" cy="0"/>
+          <a:chOff x="0" y="0"/>
+          <a:chExt cx="0" cy="0"/>
+        </a:xfrm>
+      </p:grpSpPr>
+      <p:sp>
+        <p:nvSpPr>
+          <p:cNvPr id="2" name="Slide Image Placeholder 1"/>
+          <p:cNvSpPr>
+            <a:spLocks noGrp="1" noRot="1" noChangeAspect="1"/>
+          </p:cNvSpPr>
+          <p:nvPr>
+            <p:ph type="sldImg"/>
+          </p:nvPr>
+        </p:nvSpPr>
+        <p:spPr/>
+      </p:sp>
+      <p:sp>
+        <p:nvSpPr>
+          <p:cNvPr id="3" name="Notes Placeholder 2"/>
+          <p:cNvSpPr>
+            <a:spLocks noGrp="1"/>
+          </p:cNvSpPr>
+          <p:nvPr>
+            <p:ph type="body" idx="1"/>
+          </p:nvPr>
+        </p:nvSpPr>
+        <p:spPr/>
+        <p:txBody>
+          <a:bodyPr/>
+          <a:lstStyle/>
+          <a:p>
+            <a:r>
+              <a:rPr lang="en-US" dirty="0"/>
+              <a:t/>
+            </a:r>
+            <a:endParaRPr lang="en-US" dirty="0"/>
+          </a:p>
+        </p:txBody>
+      </p:sp>
+      <p:sp>
+        <p:nvSpPr>
+          <p:cNvPr id="4" name="Slide Number Placeholder 3"/>
+          <p:cNvSpPr>
+            <a:spLocks noGrp="1"/>
+          </p:cNvSpPr>
+          <p:nvPr>
+            <p:ph type="sldNum" sz="quarter" idx="10"/>
+          </p:nvPr>
+        </p:nvSpPr>
+        <p:spPr/>
+        <p:txBody>
+          <a:bodyPr/>
+          <a:lstStyle/>
+          <a:p>
+            <a:fld id="{F7021451-1387-4CA6-816F-3879F97B5CBC}" type="slidenum">
+              <a:rPr lang="en-US"/>
+              <a:t>25</a:t>
             </a:fld>
             <a:endParaRPr lang="en-US"/>
           </a:p>
@@ -2815,7 +3171,7 @@
                 <a:ea typeface="Calibri" pitchFamily="34" charset="-122"/>
                 <a:cs typeface="Calibri" pitchFamily="34" charset="-120"/>
               </a:rPr>
-              <a:t>LAB MANAGEMENT &amp; QUALITY  ·  LECTURE 1 OF 5</a:t>
+              <a:t>LABORATORY MANAGEMENT  ·  LECTURE 1 OF 5</a:t>
             </a:r>
             <a:endParaRPr lang="en-US" sz="1300" dirty="0"/>
           </a:p>
@@ -2893,7 +3249,7 @@
                 <a:ea typeface="Calibri" pitchFamily="34" charset="-122"/>
                 <a:cs typeface="Calibri" pitchFamily="34" charset="-120"/>
               </a:rPr>
-              <a:t>QC, QA, Westgard, Proficiency Testing, and Occurrence Management</a:t>
+              <a:t>QC, Quality Indicators, and a Culture of Improvement</a:t>
             </a:r>
             <a:endParaRPr lang="en-US" sz="1900" dirty="0"/>
           </a:p>
@@ -3085,7 +3441,7 @@
                 <a:ea typeface="Calibri" pitchFamily="34" charset="-122"/>
                 <a:cs typeface="Calibri" pitchFamily="34" charset="-120"/>
               </a:rPr>
-              <a:t>LAB MANAGEMENT &amp; QUALITY   ·   EXTERNAL QUALITY</a:t>
+              <a:t>LAB MANAGEMENT &amp; QUALITY   ·   ERROR TYPES</a:t>
             </a:r>
             <a:endParaRPr lang="en-US" sz="1100" dirty="0"/>
           </a:p>
@@ -3124,7 +3480,7 @@
                 <a:ea typeface="Calibri" pitchFamily="34" charset="-122"/>
                 <a:cs typeface="Calibri" pitchFamily="34" charset="-120"/>
               </a:rPr>
-              <a:t>Proficiency Testing &amp; Delta Checks</a:t>
+              <a:t>Random vs Systematic Error</a:t>
             </a:r>
             <a:endParaRPr lang="en-US" sz="3000" dirty="0"/>
           </a:p>
@@ -3192,7 +3548,7 @@
                 <a:ea typeface="Calibri" pitchFamily="34" charset="-122"/>
                 <a:cs typeface="Calibri" pitchFamily="34" charset="-120"/>
               </a:rPr>
-              <a:t>PROFICIENCY TESTING (PT)</a:t>
+              <a:t>RANDOM ERROR (IMPRECISION)</a:t>
             </a:r>
             <a:endParaRPr lang="en-US" sz="1200" dirty="0"/>
           </a:p>
@@ -3235,7 +3591,7 @@
                 <a:ea typeface="Calibri" pitchFamily="34" charset="-122"/>
                 <a:cs typeface="Calibri" pitchFamily="34" charset="-120"/>
               </a:rPr>
-              <a:t>External samples tested blindly and compared with peers/reference — a regulatory requirement.</a:t>
+              <a:t>Scatter around the mean — detected by rules like 1_3s and R_4s.</a:t>
             </a:r>
             <a:endParaRPr lang="en-US" sz="1250" dirty="0"/>
           </a:p>
@@ -3256,7 +3612,7 @@
                 <a:ea typeface="Calibri" pitchFamily="34" charset="-122"/>
                 <a:cs typeface="Calibri" pitchFamily="34" charset="-120"/>
               </a:rPr>
-              <a:t>PT failures trigger investigation and corrective action.</a:t>
+              <a:t>Causes: bubbles, pipetting variation, instability.</a:t>
             </a:r>
             <a:endParaRPr lang="en-US" sz="1250" dirty="0"/>
           </a:p>
@@ -3277,7 +3633,7 @@
                 <a:ea typeface="Calibri" pitchFamily="34" charset="-122"/>
                 <a:cs typeface="Calibri" pitchFamily="34" charset="-120"/>
               </a:rPr>
-              <a:t>PT must be handled like patient samples (no special treatment, no referral/sharing).</a:t>
+              <a:t>Worsens reproducibility.</a:t>
             </a:r>
             <a:endParaRPr lang="en-US" sz="1250" dirty="0"/>
           </a:p>
@@ -3298,7 +3654,7 @@
                 <a:ea typeface="Calibri" pitchFamily="34" charset="-122"/>
                 <a:cs typeface="Calibri" pitchFamily="34" charset="-120"/>
               </a:rPr>
-              <a:t>Alternative assessment is needed where formal PT is unavailable.</a:t>
+              <a:t>Address the source of variability.</a:t>
             </a:r>
             <a:endParaRPr lang="en-US" sz="1250" dirty="0"/>
           </a:p>
@@ -3321,7 +3677,7 @@
             </a:avLst>
           </a:prstGeom>
           <a:solidFill>
-            <a:srgbClr val="ECEFF1"/>
+            <a:srgbClr val="E6EAED"/>
           </a:solidFill>
           <a:ln/>
           <a:effectLst>
@@ -3366,7 +3722,7 @@
                 <a:ea typeface="Calibri" pitchFamily="34" charset="-122"/>
                 <a:cs typeface="Calibri" pitchFamily="34" charset="-120"/>
               </a:rPr>
-              <a:t>DELTA CHECKS &amp; INDICATORS</a:t>
+              <a:t>SYSTEMATIC ERROR (BIAS)</a:t>
             </a:r>
             <a:endParaRPr lang="en-US" sz="1200" dirty="0"/>
           </a:p>
@@ -3409,7 +3765,7 @@
                 <a:ea typeface="Calibri" pitchFamily="34" charset="-122"/>
                 <a:cs typeface="Calibri" pitchFamily="34" charset="-120"/>
               </a:rPr>
-              <a:t>Delta checks compare a new result with the patient’s prior value to catch mix-ups and large shifts.</a:t>
+              <a:t>A shift or trend away from the mean — detected by 2_2s, 4_1s, 10x.</a:t>
             </a:r>
             <a:endParaRPr lang="en-US" sz="1250" dirty="0"/>
           </a:p>
@@ -3430,7 +3786,7 @@
                 <a:ea typeface="Calibri" pitchFamily="34" charset="-122"/>
                 <a:cs typeface="Calibri" pitchFamily="34" charset="-120"/>
               </a:rPr>
-              <a:t>Quality indicators monitor TAT, specimen rejection, critical-value reporting, and more.</a:t>
+              <a:t>Causes: calibration drift, reagent lot change, deterioration.</a:t>
             </a:r>
             <a:endParaRPr lang="en-US" sz="1250" dirty="0"/>
           </a:p>
@@ -3451,7 +3807,7 @@
                 <a:ea typeface="Calibri" pitchFamily="34" charset="-122"/>
                 <a:cs typeface="Calibri" pitchFamily="34" charset="-120"/>
               </a:rPr>
-              <a:t>Track and trend indicators against targets.</a:t>
+              <a:t>Affects accuracy in one direction.</a:t>
             </a:r>
             <a:endParaRPr lang="en-US" sz="1250" dirty="0"/>
           </a:p>
@@ -3472,7 +3828,7 @@
                 <a:ea typeface="Calibri" pitchFamily="34" charset="-122"/>
                 <a:cs typeface="Calibri" pitchFamily="34" charset="-120"/>
               </a:rPr>
-              <a:t>Use them to drive improvement projects.</a:t>
+              <a:t>Recalibrate / investigate reagents.</a:t>
             </a:r>
             <a:endParaRPr lang="en-US" sz="1250" dirty="0"/>
           </a:p>
@@ -3649,7 +4005,7 @@
                 <a:ea typeface="Calibri" pitchFamily="34" charset="-122"/>
                 <a:cs typeface="Calibri" pitchFamily="34" charset="-120"/>
               </a:rPr>
-              <a:t>LAB MANAGEMENT &amp; QUALITY   ·   OCCURRENCES</a:t>
+              <a:t>LAB MANAGEMENT &amp; QUALITY   ·   INDICATORS</a:t>
             </a:r>
             <a:endParaRPr lang="en-US" sz="1100" dirty="0"/>
           </a:p>
@@ -3688,7 +4044,7 @@
                 <a:ea typeface="Calibri" pitchFamily="34" charset="-122"/>
                 <a:cs typeface="Calibri" pitchFamily="34" charset="-120"/>
               </a:rPr>
-              <a:t>Occurrence Management and CAPA</a:t>
+              <a:t>Quality Across the Total Testing Process</a:t>
             </a:r>
             <a:endParaRPr lang="en-US" sz="3000" dirty="0"/>
           </a:p>
@@ -3702,18 +4058,23 @@
         </p:nvSpPr>
         <p:spPr>
           <a:xfrm>
-            <a:off x="566928" y="1517904"/>
-            <a:ext cx="5346040" cy="4114800"/>
+            <a:off x="792328" y="1481328"/>
+            <a:ext cx="10607040" cy="4498848"/>
           </a:xfrm>
           <a:prstGeom prst="roundRect">
             <a:avLst>
-              <a:gd name="adj" fmla="val 2000"/>
+              <a:gd name="adj" fmla="val 1829"/>
             </a:avLst>
           </a:prstGeom>
           <a:solidFill>
-            <a:srgbClr val="ECEFF1"/>
+            <a:srgbClr val="FFFFFF"/>
           </a:solidFill>
-          <a:ln/>
+          <a:ln w="12700">
+            <a:solidFill>
+              <a:srgbClr val="DCE4EC"/>
+            </a:solidFill>
+            <a:prstDash val="solid"/>
+          </a:ln>
           <a:effectLst>
             <a:outerShdw sx="100000" sy="100000" kx="0" ky="0" algn="bl" rotWithShape="0" blurRad="88900" dist="25400" dir="5400000">
               <a:srgbClr val="22303C">
@@ -3723,55 +4084,40 @@
           </a:effectLst>
         </p:spPr>
       </p:sp>
-      <p:sp>
-        <p:nvSpPr>
-          <p:cNvPr id="5" name="Text 3"/>
-          <p:cNvSpPr/>
-          <p:nvPr/>
-        </p:nvSpPr>
-        <p:spPr>
-          <a:xfrm>
-            <a:off x="804672" y="1682496"/>
-            <a:ext cx="4888840" cy="274320"/>
-          </a:xfrm>
-          <a:prstGeom prst="rect">
-            <a:avLst/>
-          </a:prstGeom>
-          <a:noFill/>
-          <a:ln/>
-        </p:spPr>
-        <p:txBody>
-          <a:bodyPr wrap="square" lIns="0" tIns="0" rIns="0" bIns="0" rtlCol="0" anchor="ctr"/>
-          <a:lstStyle/>
-          <a:p>
-            <a:pPr indent="0" marL="0">
-              <a:buNone/>
-            </a:pPr>
-            <a:r>
-              <a:rPr lang="en-US" sz="1200" b="1" spc="100" kern="0" dirty="0">
-                <a:solidFill>
-                  <a:srgbClr val="2C3A41"/>
-                </a:solidFill>
-                <a:latin typeface="Calibri" pitchFamily="34" charset="0"/>
-                <a:ea typeface="Calibri" pitchFamily="34" charset="-122"/>
-                <a:cs typeface="Calibri" pitchFamily="34" charset="-120"/>
-              </a:rPr>
-              <a:t>MANAGE EVENTS</a:t>
-            </a:r>
-            <a:endParaRPr lang="en-US" sz="1200" dirty="0"/>
-          </a:p>
-        </p:txBody>
-      </p:sp>
-      <p:sp>
-        <p:nvSpPr>
-          <p:cNvPr id="6" name="Text 4"/>
-          <p:cNvSpPr/>
-          <p:nvPr/>
-        </p:nvSpPr>
-        <p:spPr>
-          <a:xfrm>
-            <a:off x="804672" y="2029968"/>
-            <a:ext cx="4870552" cy="3474720"/>
+      <p:pic>
+        <p:nvPicPr>
+          <p:cNvPr id="5" name="Image 0" descr="/tmp/cp_work2/art/lab_ttp.png">    </p:cNvPr>
+          <p:cNvPicPr>
+            <a:picLocks noChangeAspect="1"/>
+          </p:cNvPicPr>
+          <p:nvPr/>
+        </p:nvPicPr>
+        <p:blipFill>
+          <a:blip r:embed="rId1"/>
+          <a:stretch>
+            <a:fillRect/>
+          </a:stretch>
+        </p:blipFill>
+        <p:spPr>
+          <a:xfrm>
+            <a:off x="920344" y="1609344"/>
+            <a:ext cx="10351008" cy="4242816"/>
+          </a:xfrm>
+          <a:prstGeom prst="rect">
+            <a:avLst/>
+          </a:prstGeom>
+        </p:spPr>
+      </p:pic>
+      <p:sp>
+        <p:nvSpPr>
+          <p:cNvPr id="6" name="Text 3"/>
+          <p:cNvSpPr/>
+          <p:nvPr/>
+        </p:nvSpPr>
+        <p:spPr>
+          <a:xfrm>
+            <a:off x="566928" y="6053328"/>
+            <a:ext cx="11057839" cy="365760"/>
           </a:xfrm>
           <a:prstGeom prst="rect">
             <a:avLst/>
@@ -3783,268 +4129,27 @@
           <a:bodyPr wrap="square" lIns="0" tIns="0" rIns="0" bIns="0" rtlCol="0" anchor="t"/>
           <a:lstStyle/>
           <a:p>
-            <a:pPr algn="l" marL="177800" indent="-177800">
-              <a:spcAft>
-                <a:spcPts val="900"/>
-              </a:spcAft>
-              <a:buSzPct val="100000"/>
-              <a:buChar char="•"/>
-            </a:pPr>
-            <a:r>
-              <a:rPr lang="en-US" sz="1250" b="1" dirty="0">
-                <a:solidFill>
-                  <a:srgbClr val="1B2A38"/>
-                </a:solidFill>
-                <a:latin typeface="Calibri" pitchFamily="34" charset="0"/>
-                <a:ea typeface="Calibri" pitchFamily="34" charset="-122"/>
-                <a:cs typeface="Calibri" pitchFamily="34" charset="-120"/>
-              </a:rPr>
-              <a:t>Capture occurrences and near misses without blame to learn from them.</a:t>
-            </a:r>
-            <a:endParaRPr lang="en-US" sz="1250" dirty="0"/>
-          </a:p>
-          <a:p>
-            <a:pPr algn="l" marL="177800" indent="-177800">
-              <a:spcAft>
-                <a:spcPts val="900"/>
-              </a:spcAft>
-              <a:buSzPct val="100000"/>
-              <a:buChar char="•"/>
-            </a:pPr>
-            <a:r>
-              <a:rPr lang="en-US" sz="1250" dirty="0">
-                <a:solidFill>
-                  <a:srgbClr val="33444F"/>
-                </a:solidFill>
-                <a:latin typeface="Calibri" pitchFamily="34" charset="0"/>
-                <a:ea typeface="Calibri" pitchFamily="34" charset="-122"/>
-                <a:cs typeface="Calibri" pitchFamily="34" charset="-120"/>
-              </a:rPr>
-              <a:t>Classify by severity and investigate proportionately.</a:t>
-            </a:r>
-            <a:endParaRPr lang="en-US" sz="1250" dirty="0"/>
-          </a:p>
-          <a:p>
-            <a:pPr algn="l" marL="177800" indent="-177800">
-              <a:spcAft>
-                <a:spcPts val="900"/>
-              </a:spcAft>
-              <a:buSzPct val="100000"/>
-              <a:buChar char="•"/>
-            </a:pPr>
-            <a:r>
-              <a:rPr lang="en-US" sz="1250" dirty="0">
-                <a:solidFill>
-                  <a:srgbClr val="33444F"/>
-                </a:solidFill>
-                <a:latin typeface="Calibri" pitchFamily="34" charset="0"/>
-                <a:ea typeface="Calibri" pitchFamily="34" charset="-122"/>
-                <a:cs typeface="Calibri" pitchFamily="34" charset="-120"/>
-              </a:rPr>
-              <a:t>Root-cause analysis for significant events (see Patient Safety lecture).</a:t>
-            </a:r>
-            <a:endParaRPr lang="en-US" sz="1250" dirty="0"/>
-          </a:p>
-          <a:p>
-            <a:pPr algn="l" marL="177800" indent="-177800">
-              <a:spcAft>
-                <a:spcPts val="900"/>
-              </a:spcAft>
-              <a:buSzPct val="100000"/>
-              <a:buChar char="•"/>
-            </a:pPr>
-            <a:r>
-              <a:rPr lang="en-US" sz="1250" dirty="0">
-                <a:solidFill>
-                  <a:srgbClr val="33444F"/>
-                </a:solidFill>
-                <a:latin typeface="Calibri" pitchFamily="34" charset="0"/>
-                <a:ea typeface="Calibri" pitchFamily="34" charset="-122"/>
-                <a:cs typeface="Calibri" pitchFamily="34" charset="-120"/>
-              </a:rPr>
-              <a:t>Corrective action fixes the event; preventive action stops recurrence (CAPA).</a:t>
-            </a:r>
-            <a:endParaRPr lang="en-US" sz="1250" dirty="0"/>
-          </a:p>
-        </p:txBody>
-      </p:sp>
-      <p:sp>
-        <p:nvSpPr>
-          <p:cNvPr id="7" name="Shape 5"/>
-          <p:cNvSpPr/>
-          <p:nvPr/>
-        </p:nvSpPr>
-        <p:spPr>
-          <a:xfrm>
-            <a:off x="6278728" y="1517904"/>
-            <a:ext cx="5346040" cy="4114800"/>
-          </a:xfrm>
-          <a:prstGeom prst="roundRect">
-            <a:avLst>
-              <a:gd name="adj" fmla="val 2000"/>
-            </a:avLst>
-          </a:prstGeom>
-          <a:solidFill>
-            <a:srgbClr val="ECEFF1"/>
-          </a:solidFill>
-          <a:ln/>
-          <a:effectLst>
-            <a:outerShdw sx="100000" sy="100000" kx="0" ky="0" algn="bl" rotWithShape="0" blurRad="88900" dist="25400" dir="5400000">
-              <a:srgbClr val="22303C">
-                <a:alpha val="12000"/>
-              </a:srgbClr>
-            </a:outerShdw>
-          </a:effectLst>
-        </p:spPr>
-      </p:sp>
-      <p:sp>
-        <p:nvSpPr>
-          <p:cNvPr id="8" name="Text 6"/>
-          <p:cNvSpPr/>
-          <p:nvPr/>
-        </p:nvSpPr>
-        <p:spPr>
-          <a:xfrm>
-            <a:off x="6516472" y="1682496"/>
-            <a:ext cx="4888840" cy="274320"/>
-          </a:xfrm>
-          <a:prstGeom prst="rect">
-            <a:avLst/>
-          </a:prstGeom>
-          <a:noFill/>
-          <a:ln/>
-        </p:spPr>
-        <p:txBody>
-          <a:bodyPr wrap="square" lIns="0" tIns="0" rIns="0" bIns="0" rtlCol="0" anchor="ctr"/>
-          <a:lstStyle/>
-          <a:p>
-            <a:pPr indent="0" marL="0">
-              <a:buNone/>
-            </a:pPr>
-            <a:r>
-              <a:rPr lang="en-US" sz="1200" b="1" spc="100" kern="0" dirty="0">
-                <a:solidFill>
-                  <a:srgbClr val="2C3A41"/>
-                </a:solidFill>
-                <a:latin typeface="Calibri" pitchFamily="34" charset="0"/>
-                <a:ea typeface="Calibri" pitchFamily="34" charset="-122"/>
-                <a:cs typeface="Calibri" pitchFamily="34" charset="-120"/>
-              </a:rPr>
-              <a:t>CONTINUAL IMPROVEMENT</a:t>
-            </a:r>
-            <a:endParaRPr lang="en-US" sz="1200" dirty="0"/>
-          </a:p>
-        </p:txBody>
-      </p:sp>
-      <p:sp>
-        <p:nvSpPr>
-          <p:cNvPr id="9" name="Text 7"/>
-          <p:cNvSpPr/>
-          <p:nvPr/>
-        </p:nvSpPr>
-        <p:spPr>
-          <a:xfrm>
-            <a:off x="6516472" y="2029968"/>
-            <a:ext cx="4870552" cy="3474720"/>
-          </a:xfrm>
-          <a:prstGeom prst="rect">
-            <a:avLst/>
-          </a:prstGeom>
-          <a:noFill/>
-          <a:ln/>
-        </p:spPr>
-        <p:txBody>
-          <a:bodyPr wrap="square" lIns="0" tIns="0" rIns="0" bIns="0" rtlCol="0" anchor="t"/>
-          <a:lstStyle/>
-          <a:p>
-            <a:pPr algn="l" marL="177800" indent="-177800">
-              <a:spcAft>
-                <a:spcPts val="900"/>
-              </a:spcAft>
-              <a:buSzPct val="100000"/>
-              <a:buChar char="•"/>
-            </a:pPr>
-            <a:r>
-              <a:rPr lang="en-US" sz="1250" b="1" dirty="0">
-                <a:solidFill>
-                  <a:srgbClr val="1B2A38"/>
-                </a:solidFill>
-                <a:latin typeface="Calibri" pitchFamily="34" charset="0"/>
-                <a:ea typeface="Calibri" pitchFamily="34" charset="-122"/>
-                <a:cs typeface="Calibri" pitchFamily="34" charset="-120"/>
-              </a:rPr>
-              <a:t>Plan-Do-Check-Act / PDSA cycles structure improvement.</a:t>
-            </a:r>
-            <a:endParaRPr lang="en-US" sz="1250" dirty="0"/>
-          </a:p>
-          <a:p>
-            <a:pPr algn="l" marL="177800" indent="-177800">
-              <a:spcAft>
-                <a:spcPts val="900"/>
-              </a:spcAft>
-              <a:buSzPct val="100000"/>
-              <a:buChar char="•"/>
-            </a:pPr>
-            <a:r>
-              <a:rPr lang="en-US" sz="1250" dirty="0">
-                <a:solidFill>
-                  <a:srgbClr val="33444F"/>
-                </a:solidFill>
-                <a:latin typeface="Calibri" pitchFamily="34" charset="0"/>
-                <a:ea typeface="Calibri" pitchFamily="34" charset="-122"/>
-                <a:cs typeface="Calibri" pitchFamily="34" charset="-120"/>
-              </a:rPr>
-              <a:t>Measure, change, re-measure — close the loop.</a:t>
-            </a:r>
-            <a:endParaRPr lang="en-US" sz="1250" dirty="0"/>
-          </a:p>
-          <a:p>
-            <a:pPr algn="l" marL="177800" indent="-177800">
-              <a:spcAft>
-                <a:spcPts val="900"/>
-              </a:spcAft>
-              <a:buSzPct val="100000"/>
-              <a:buChar char="•"/>
-            </a:pPr>
-            <a:r>
-              <a:rPr lang="en-US" sz="1250" dirty="0">
-                <a:solidFill>
-                  <a:srgbClr val="33444F"/>
-                </a:solidFill>
-                <a:latin typeface="Calibri" pitchFamily="34" charset="0"/>
-                <a:ea typeface="Calibri" pitchFamily="34" charset="-122"/>
-                <a:cs typeface="Calibri" pitchFamily="34" charset="-120"/>
-              </a:rPr>
-              <a:t>Engage the bench staff who know the process.</a:t>
-            </a:r>
-            <a:endParaRPr lang="en-US" sz="1250" dirty="0"/>
-          </a:p>
-          <a:p>
-            <a:pPr algn="l" marL="177800" indent="-177800">
-              <a:spcAft>
-                <a:spcPts val="900"/>
-              </a:spcAft>
-              <a:buSzPct val="100000"/>
-              <a:buChar char="•"/>
-            </a:pPr>
-            <a:r>
-              <a:rPr lang="en-US" sz="1250" dirty="0">
-                <a:solidFill>
-                  <a:srgbClr val="33444F"/>
-                </a:solidFill>
-                <a:latin typeface="Calibri" pitchFamily="34" charset="0"/>
-                <a:ea typeface="Calibri" pitchFamily="34" charset="-122"/>
-                <a:cs typeface="Calibri" pitchFamily="34" charset="-120"/>
-              </a:rPr>
-              <a:t>Sustain gains with standard work and monitoring.</a:t>
-            </a:r>
-            <a:endParaRPr lang="en-US" sz="1250" dirty="0"/>
-          </a:p>
-        </p:txBody>
-      </p:sp>
-      <p:sp>
-        <p:nvSpPr>
-          <p:cNvPr id="10" name="Text 8"/>
+            <a:pPr algn="ctr" indent="0" marL="0">
+              <a:buNone/>
+            </a:pPr>
+            <a:r>
+              <a:rPr lang="en-US" sz="1150" i="1" dirty="0">
+                <a:solidFill>
+                  <a:srgbClr val="6B7B8A"/>
+                </a:solidFill>
+                <a:latin typeface="Calibri" pitchFamily="34" charset="0"/>
+                <a:ea typeface="Calibri" pitchFamily="34" charset="-122"/>
+                <a:cs typeface="Calibri" pitchFamily="34" charset="-120"/>
+              </a:rPr>
+              <a:t>Original schematic. Quality indicators must span pre-analytic, analytic, and post-analytic phases — not just the bench.</a:t>
+            </a:r>
+            <a:endParaRPr lang="en-US" sz="1150" dirty="0"/>
+          </a:p>
+        </p:txBody>
+      </p:sp>
+      <p:sp>
+        <p:nvSpPr>
+          <p:cNvPr id="7" name="Text 4"/>
           <p:cNvSpPr/>
           <p:nvPr/>
         </p:nvSpPr>
@@ -4083,7 +4188,7 @@
       </p:sp>
       <p:sp>
         <p:nvSpPr>
-          <p:cNvPr id="11" name="Text 9"/>
+          <p:cNvPr id="8" name="Text 5"/>
           <p:cNvSpPr/>
           <p:nvPr/>
         </p:nvSpPr>
@@ -4159,6 +4264,570 @@
 <file path=ppt/slides/slide12.xml><?xml version="1.0" encoding="utf-8"?>
 <p:sld xmlns:a="http://schemas.openxmlformats.org/drawingml/2006/main" xmlns:r="http://schemas.openxmlformats.org/officeDocument/2006/relationships" xmlns:p="http://schemas.openxmlformats.org/presentationml/2006/main">
   <p:cSld name="Slide 12">
+    <p:bg>
+      <p:bgPr>
+        <a:solidFill>
+          <a:srgbClr val="FFFFFF"/>
+        </a:solidFill>
+      </p:bgPr>
+    </p:bg>
+    <p:spTree>
+      <p:nvGrpSpPr>
+        <p:cNvPr id="1" name=""/>
+        <p:cNvGrpSpPr/>
+        <p:nvPr/>
+      </p:nvGrpSpPr>
+      <p:grpSpPr>
+        <a:xfrm>
+          <a:off x="0" y="0"/>
+          <a:ext cx="0" cy="0"/>
+          <a:chOff x="0" y="0"/>
+          <a:chExt cx="0" cy="0"/>
+        </a:xfrm>
+      </p:grpSpPr>
+      <p:sp>
+        <p:nvSpPr>
+          <p:cNvPr id="2" name="Text 0"/>
+          <p:cNvSpPr/>
+          <p:nvPr/>
+        </p:nvSpPr>
+        <p:spPr>
+          <a:xfrm>
+            <a:off x="566928" y="329184"/>
+            <a:ext cx="10515600" cy="310896"/>
+          </a:xfrm>
+          <a:prstGeom prst="rect">
+            <a:avLst/>
+          </a:prstGeom>
+          <a:noFill/>
+          <a:ln/>
+        </p:spPr>
+        <p:txBody>
+          <a:bodyPr wrap="square" lIns="0" tIns="0" rIns="0" bIns="0" rtlCol="0" anchor="ctr"/>
+          <a:lstStyle/>
+          <a:p>
+            <a:pPr algn="l" indent="0" marL="0">
+              <a:buNone/>
+            </a:pPr>
+            <a:r>
+              <a:rPr lang="en-US" sz="1100" b="1" spc="150" kern="0" dirty="0">
+                <a:solidFill>
+                  <a:srgbClr val="455A64"/>
+                </a:solidFill>
+                <a:latin typeface="Calibri" pitchFamily="34" charset="0"/>
+                <a:ea typeface="Calibri" pitchFamily="34" charset="-122"/>
+                <a:cs typeface="Calibri" pitchFamily="34" charset="-120"/>
+              </a:rPr>
+              <a:t>LAB MANAGEMENT &amp; QUALITY   ·   IMPROVEMENT</a:t>
+            </a:r>
+            <a:endParaRPr lang="en-US" sz="1100" dirty="0"/>
+          </a:p>
+        </p:txBody>
+      </p:sp>
+      <p:sp>
+        <p:nvSpPr>
+          <p:cNvPr id="3" name="Text 1"/>
+          <p:cNvSpPr/>
+          <p:nvPr/>
+        </p:nvSpPr>
+        <p:spPr>
+          <a:xfrm>
+            <a:off x="566928" y="713232"/>
+            <a:ext cx="11064240" cy="749808"/>
+          </a:xfrm>
+          <a:prstGeom prst="rect">
+            <a:avLst/>
+          </a:prstGeom>
+          <a:noFill/>
+          <a:ln/>
+        </p:spPr>
+        <p:txBody>
+          <a:bodyPr wrap="square" lIns="0" tIns="0" rIns="0" bIns="0" rtlCol="0" anchor="ctr"/>
+          <a:lstStyle/>
+          <a:p>
+            <a:pPr algn="l" indent="0" marL="0">
+              <a:buNone/>
+            </a:pPr>
+            <a:r>
+              <a:rPr lang="en-US" sz="3000" b="1" dirty="0">
+                <a:solidFill>
+                  <a:srgbClr val="0E3A5F"/>
+                </a:solidFill>
+                <a:latin typeface="Calibri" pitchFamily="34" charset="0"/>
+                <a:ea typeface="Calibri" pitchFamily="34" charset="-122"/>
+                <a:cs typeface="Calibri" pitchFamily="34" charset="-120"/>
+              </a:rPr>
+              <a:t>Monitoring &amp; Continuous Improvement</a:t>
+            </a:r>
+            <a:endParaRPr lang="en-US" sz="3000" dirty="0"/>
+          </a:p>
+        </p:txBody>
+      </p:sp>
+      <p:sp>
+        <p:nvSpPr>
+          <p:cNvPr id="4" name="Shape 2"/>
+          <p:cNvSpPr/>
+          <p:nvPr/>
+        </p:nvSpPr>
+        <p:spPr>
+          <a:xfrm>
+            <a:off x="566928" y="1517904"/>
+            <a:ext cx="5346040" cy="4114800"/>
+          </a:xfrm>
+          <a:prstGeom prst="roundRect">
+            <a:avLst>
+              <a:gd name="adj" fmla="val 2000"/>
+            </a:avLst>
+          </a:prstGeom>
+          <a:solidFill>
+            <a:srgbClr val="ECEFF1"/>
+          </a:solidFill>
+          <a:ln/>
+          <a:effectLst>
+            <a:outerShdw sx="100000" sy="100000" kx="0" ky="0" algn="bl" rotWithShape="0" blurRad="88900" dist="25400" dir="5400000">
+              <a:srgbClr val="22303C">
+                <a:alpha val="12000"/>
+              </a:srgbClr>
+            </a:outerShdw>
+          </a:effectLst>
+        </p:spPr>
+      </p:sp>
+      <p:sp>
+        <p:nvSpPr>
+          <p:cNvPr id="5" name="Text 3"/>
+          <p:cNvSpPr/>
+          <p:nvPr/>
+        </p:nvSpPr>
+        <p:spPr>
+          <a:xfrm>
+            <a:off x="804672" y="1682496"/>
+            <a:ext cx="4888840" cy="274320"/>
+          </a:xfrm>
+          <a:prstGeom prst="rect">
+            <a:avLst/>
+          </a:prstGeom>
+          <a:noFill/>
+          <a:ln/>
+        </p:spPr>
+        <p:txBody>
+          <a:bodyPr wrap="square" lIns="0" tIns="0" rIns="0" bIns="0" rtlCol="0" anchor="ctr"/>
+          <a:lstStyle/>
+          <a:p>
+            <a:pPr indent="0" marL="0">
+              <a:buNone/>
+            </a:pPr>
+            <a:r>
+              <a:rPr lang="en-US" sz="1200" b="1" spc="100" kern="0" dirty="0">
+                <a:solidFill>
+                  <a:srgbClr val="2C3A41"/>
+                </a:solidFill>
+                <a:latin typeface="Calibri" pitchFamily="34" charset="0"/>
+                <a:ea typeface="Calibri" pitchFamily="34" charset="-122"/>
+                <a:cs typeface="Calibri" pitchFamily="34" charset="-120"/>
+              </a:rPr>
+              <a:t>QUALITY INDICATORS</a:t>
+            </a:r>
+            <a:endParaRPr lang="en-US" sz="1200" dirty="0"/>
+          </a:p>
+        </p:txBody>
+      </p:sp>
+      <p:sp>
+        <p:nvSpPr>
+          <p:cNvPr id="6" name="Text 4"/>
+          <p:cNvSpPr/>
+          <p:nvPr/>
+        </p:nvSpPr>
+        <p:spPr>
+          <a:xfrm>
+            <a:off x="804672" y="2029968"/>
+            <a:ext cx="4870552" cy="3474720"/>
+          </a:xfrm>
+          <a:prstGeom prst="rect">
+            <a:avLst/>
+          </a:prstGeom>
+          <a:noFill/>
+          <a:ln/>
+        </p:spPr>
+        <p:txBody>
+          <a:bodyPr wrap="square" lIns="0" tIns="0" rIns="0" bIns="0" rtlCol="0" anchor="t"/>
+          <a:lstStyle/>
+          <a:p>
+            <a:pPr algn="l" marL="177800" indent="-177800">
+              <a:spcAft>
+                <a:spcPts val="900"/>
+              </a:spcAft>
+              <a:buSzPct val="100000"/>
+              <a:buChar char="•"/>
+            </a:pPr>
+            <a:r>
+              <a:rPr lang="en-US" sz="1250" b="1" dirty="0">
+                <a:solidFill>
+                  <a:srgbClr val="1B2A38"/>
+                </a:solidFill>
+                <a:latin typeface="Calibri" pitchFamily="34" charset="0"/>
+                <a:ea typeface="Calibri" pitchFamily="34" charset="-122"/>
+                <a:cs typeface="Calibri" pitchFamily="34" charset="-120"/>
+              </a:rPr>
+              <a:t>Track measurable metrics across all phases (e.g., specimen rejection, TAT, critical-value reporting, amended reports).</a:t>
+            </a:r>
+            <a:endParaRPr lang="en-US" sz="1250" dirty="0"/>
+          </a:p>
+          <a:p>
+            <a:pPr algn="l" marL="177800" indent="-177800">
+              <a:spcAft>
+                <a:spcPts val="900"/>
+              </a:spcAft>
+              <a:buSzPct val="100000"/>
+              <a:buChar char="•"/>
+            </a:pPr>
+            <a:r>
+              <a:rPr lang="en-US" sz="1250" dirty="0">
+                <a:solidFill>
+                  <a:srgbClr val="33444F"/>
+                </a:solidFill>
+                <a:latin typeface="Calibri" pitchFamily="34" charset="0"/>
+                <a:ea typeface="Calibri" pitchFamily="34" charset="-122"/>
+                <a:cs typeface="Calibri" pitchFamily="34" charset="-120"/>
+              </a:rPr>
+              <a:t>Set targets and monitor trends.</a:t>
+            </a:r>
+            <a:endParaRPr lang="en-US" sz="1250" dirty="0"/>
+          </a:p>
+          <a:p>
+            <a:pPr algn="l" marL="177800" indent="-177800">
+              <a:spcAft>
+                <a:spcPts val="900"/>
+              </a:spcAft>
+              <a:buSzPct val="100000"/>
+              <a:buChar char="•"/>
+            </a:pPr>
+            <a:r>
+              <a:rPr lang="en-US" sz="1250" dirty="0">
+                <a:solidFill>
+                  <a:srgbClr val="33444F"/>
+                </a:solidFill>
+                <a:latin typeface="Calibri" pitchFamily="34" charset="0"/>
+                <a:ea typeface="Calibri" pitchFamily="34" charset="-122"/>
+                <a:cs typeface="Calibri" pitchFamily="34" charset="-120"/>
+              </a:rPr>
+              <a:t>Benchmark internally and externally.</a:t>
+            </a:r>
+            <a:endParaRPr lang="en-US" sz="1250" dirty="0"/>
+          </a:p>
+          <a:p>
+            <a:pPr algn="l" marL="177800" indent="-177800">
+              <a:spcAft>
+                <a:spcPts val="900"/>
+              </a:spcAft>
+              <a:buSzPct val="100000"/>
+              <a:buChar char="•"/>
+            </a:pPr>
+            <a:r>
+              <a:rPr lang="en-US" sz="1250" dirty="0">
+                <a:solidFill>
+                  <a:srgbClr val="33444F"/>
+                </a:solidFill>
+                <a:latin typeface="Calibri" pitchFamily="34" charset="0"/>
+                <a:ea typeface="Calibri" pitchFamily="34" charset="-122"/>
+                <a:cs typeface="Calibri" pitchFamily="34" charset="-120"/>
+              </a:rPr>
+              <a:t>Use data, not anecdote, to drive change.</a:t>
+            </a:r>
+            <a:endParaRPr lang="en-US" sz="1250" dirty="0"/>
+          </a:p>
+        </p:txBody>
+      </p:sp>
+      <p:sp>
+        <p:nvSpPr>
+          <p:cNvPr id="7" name="Shape 5"/>
+          <p:cNvSpPr/>
+          <p:nvPr/>
+        </p:nvSpPr>
+        <p:spPr>
+          <a:xfrm>
+            <a:off x="6278728" y="1517904"/>
+            <a:ext cx="5346040" cy="4114800"/>
+          </a:xfrm>
+          <a:prstGeom prst="roundRect">
+            <a:avLst>
+              <a:gd name="adj" fmla="val 2000"/>
+            </a:avLst>
+          </a:prstGeom>
+          <a:solidFill>
+            <a:srgbClr val="E6EAED"/>
+          </a:solidFill>
+          <a:ln/>
+          <a:effectLst>
+            <a:outerShdw sx="100000" sy="100000" kx="0" ky="0" algn="bl" rotWithShape="0" blurRad="88900" dist="25400" dir="5400000">
+              <a:srgbClr val="22303C">
+                <a:alpha val="12000"/>
+              </a:srgbClr>
+            </a:outerShdw>
+          </a:effectLst>
+        </p:spPr>
+      </p:sp>
+      <p:sp>
+        <p:nvSpPr>
+          <p:cNvPr id="8" name="Text 6"/>
+          <p:cNvSpPr/>
+          <p:nvPr/>
+        </p:nvSpPr>
+        <p:spPr>
+          <a:xfrm>
+            <a:off x="6516472" y="1682496"/>
+            <a:ext cx="4888840" cy="274320"/>
+          </a:xfrm>
+          <a:prstGeom prst="rect">
+            <a:avLst/>
+          </a:prstGeom>
+          <a:noFill/>
+          <a:ln/>
+        </p:spPr>
+        <p:txBody>
+          <a:bodyPr wrap="square" lIns="0" tIns="0" rIns="0" bIns="0" rtlCol="0" anchor="ctr"/>
+          <a:lstStyle/>
+          <a:p>
+            <a:pPr indent="0" marL="0">
+              <a:buNone/>
+            </a:pPr>
+            <a:r>
+              <a:rPr lang="en-US" sz="1200" b="1" spc="100" kern="0" dirty="0">
+                <a:solidFill>
+                  <a:srgbClr val="2C3A41"/>
+                </a:solidFill>
+                <a:latin typeface="Calibri" pitchFamily="34" charset="0"/>
+                <a:ea typeface="Calibri" pitchFamily="34" charset="-122"/>
+                <a:cs typeface="Calibri" pitchFamily="34" charset="-120"/>
+              </a:rPr>
+              <a:t>PDCA CYCLE</a:t>
+            </a:r>
+            <a:endParaRPr lang="en-US" sz="1200" dirty="0"/>
+          </a:p>
+        </p:txBody>
+      </p:sp>
+      <p:sp>
+        <p:nvSpPr>
+          <p:cNvPr id="9" name="Text 7"/>
+          <p:cNvSpPr/>
+          <p:nvPr/>
+        </p:nvSpPr>
+        <p:spPr>
+          <a:xfrm>
+            <a:off x="6516472" y="2029968"/>
+            <a:ext cx="4870552" cy="3474720"/>
+          </a:xfrm>
+          <a:prstGeom prst="rect">
+            <a:avLst/>
+          </a:prstGeom>
+          <a:noFill/>
+          <a:ln/>
+        </p:spPr>
+        <p:txBody>
+          <a:bodyPr wrap="square" lIns="0" tIns="0" rIns="0" bIns="0" rtlCol="0" anchor="t"/>
+          <a:lstStyle/>
+          <a:p>
+            <a:pPr algn="l" marL="177800" indent="-177800">
+              <a:spcAft>
+                <a:spcPts val="900"/>
+              </a:spcAft>
+              <a:buSzPct val="100000"/>
+              <a:buChar char="•"/>
+            </a:pPr>
+            <a:r>
+              <a:rPr lang="en-US" sz="1250" b="1" dirty="0">
+                <a:solidFill>
+                  <a:srgbClr val="1B2A38"/>
+                </a:solidFill>
+                <a:latin typeface="Calibri" pitchFamily="34" charset="0"/>
+                <a:ea typeface="Calibri" pitchFamily="34" charset="-122"/>
+                <a:cs typeface="Calibri" pitchFamily="34" charset="-120"/>
+              </a:rPr>
+              <a:t>Plan-Do-Check-Act structures iterative improvement.</a:t>
+            </a:r>
+            <a:endParaRPr lang="en-US" sz="1250" dirty="0"/>
+          </a:p>
+          <a:p>
+            <a:pPr algn="l" marL="177800" indent="-177800">
+              <a:spcAft>
+                <a:spcPts val="900"/>
+              </a:spcAft>
+              <a:buSzPct val="100000"/>
+              <a:buChar char="•"/>
+            </a:pPr>
+            <a:r>
+              <a:rPr lang="en-US" sz="1250" dirty="0">
+                <a:solidFill>
+                  <a:srgbClr val="33444F"/>
+                </a:solidFill>
+                <a:latin typeface="Calibri" pitchFamily="34" charset="0"/>
+                <a:ea typeface="Calibri" pitchFamily="34" charset="-122"/>
+                <a:cs typeface="Calibri" pitchFamily="34" charset="-120"/>
+              </a:rPr>
+              <a:t>Pair with root-cause analysis for problems.</a:t>
+            </a:r>
+            <a:endParaRPr lang="en-US" sz="1250" dirty="0"/>
+          </a:p>
+          <a:p>
+            <a:pPr algn="l" marL="177800" indent="-177800">
+              <a:spcAft>
+                <a:spcPts val="900"/>
+              </a:spcAft>
+              <a:buSzPct val="100000"/>
+              <a:buChar char="•"/>
+            </a:pPr>
+            <a:r>
+              <a:rPr lang="en-US" sz="1250" dirty="0">
+                <a:solidFill>
+                  <a:srgbClr val="33444F"/>
+                </a:solidFill>
+                <a:latin typeface="Calibri" pitchFamily="34" charset="0"/>
+                <a:ea typeface="Calibri" pitchFamily="34" charset="-122"/>
+                <a:cs typeface="Calibri" pitchFamily="34" charset="-120"/>
+              </a:rPr>
+              <a:t>Engage staff in identifying issues.</a:t>
+            </a:r>
+            <a:endParaRPr lang="en-US" sz="1250" dirty="0"/>
+          </a:p>
+          <a:p>
+            <a:pPr algn="l" marL="177800" indent="-177800">
+              <a:spcAft>
+                <a:spcPts val="900"/>
+              </a:spcAft>
+              <a:buSzPct val="100000"/>
+              <a:buChar char="•"/>
+            </a:pPr>
+            <a:r>
+              <a:rPr lang="en-US" sz="1250" dirty="0">
+                <a:solidFill>
+                  <a:srgbClr val="33444F"/>
+                </a:solidFill>
+                <a:latin typeface="Calibri" pitchFamily="34" charset="0"/>
+                <a:ea typeface="Calibri" pitchFamily="34" charset="-122"/>
+                <a:cs typeface="Calibri" pitchFamily="34" charset="-120"/>
+              </a:rPr>
+              <a:t>Close the loop and verify effectiveness.</a:t>
+            </a:r>
+            <a:endParaRPr lang="en-US" sz="1250" dirty="0"/>
+          </a:p>
+        </p:txBody>
+      </p:sp>
+      <p:sp>
+        <p:nvSpPr>
+          <p:cNvPr id="10" name="Text 8"/>
+          <p:cNvSpPr/>
+          <p:nvPr/>
+        </p:nvSpPr>
+        <p:spPr>
+          <a:xfrm>
+            <a:off x="566928" y="6473952"/>
+            <a:ext cx="7772400" cy="274320"/>
+          </a:xfrm>
+          <a:prstGeom prst="rect">
+            <a:avLst/>
+          </a:prstGeom>
+          <a:noFill/>
+          <a:ln/>
+        </p:spPr>
+        <p:txBody>
+          <a:bodyPr wrap="square" lIns="0" tIns="0" rIns="0" bIns="0" rtlCol="0" anchor="ctr"/>
+          <a:lstStyle/>
+          <a:p>
+            <a:pPr algn="l" indent="0" marL="0">
+              <a:buNone/>
+            </a:pPr>
+            <a:r>
+              <a:rPr lang="en-US" sz="850" dirty="0">
+                <a:solidFill>
+                  <a:srgbClr val="9AA8B4"/>
+                </a:solidFill>
+                <a:latin typeface="Calibri" pitchFamily="34" charset="0"/>
+                <a:ea typeface="Calibri" pitchFamily="34" charset="-122"/>
+                <a:cs typeface="Calibri" pitchFamily="34" charset="-120"/>
+              </a:rPr>
+              <a:t>Makassed General Hospital  ·  Department of Laboratory Medicine</a:t>
+            </a:r>
+            <a:endParaRPr lang="en-US" sz="850" dirty="0"/>
+          </a:p>
+        </p:txBody>
+      </p:sp>
+      <p:sp>
+        <p:nvSpPr>
+          <p:cNvPr id="11" name="Text 9"/>
+          <p:cNvSpPr/>
+          <p:nvPr/>
+        </p:nvSpPr>
+        <p:spPr>
+          <a:xfrm>
+            <a:off x="9814255" y="6473952"/>
+            <a:ext cx="1828800" cy="274320"/>
+          </a:xfrm>
+          <a:prstGeom prst="rect">
+            <a:avLst/>
+          </a:prstGeom>
+          <a:noFill/>
+          <a:ln/>
+        </p:spPr>
+        <p:txBody>
+          <a:bodyPr wrap="square" lIns="0" tIns="0" rIns="0" bIns="0" rtlCol="0" anchor="ctr"/>
+          <a:lstStyle/>
+          <a:p>
+            <a:pPr algn="r" indent="0" marL="0">
+              <a:buNone/>
+            </a:pPr>
+            <a:r>
+              <a:rPr lang="en-US" sz="850" dirty="0">
+                <a:solidFill>
+                  <a:srgbClr val="9AA8B4"/>
+                </a:solidFill>
+                <a:latin typeface="Calibri" pitchFamily="34" charset="0"/>
+                <a:ea typeface="Calibri" pitchFamily="34" charset="-122"/>
+                <a:cs typeface="Calibri" pitchFamily="34" charset="-120"/>
+              </a:rPr>
+              <a:t>CP Lecture Series</a:t>
+            </a:r>
+            <a:pPr algn="r" indent="0" marL="0">
+              <a:buNone/>
+            </a:pPr>
+            <a:r>
+              <a:rPr lang="en-US" sz="850" dirty="0">
+                <a:solidFill>
+                  <a:srgbClr val="DCE4EC"/>
+                </a:solidFill>
+                <a:latin typeface="Calibri" pitchFamily="34" charset="0"/>
+                <a:ea typeface="Calibri" pitchFamily="34" charset="-122"/>
+                <a:cs typeface="Calibri" pitchFamily="34" charset="-120"/>
+              </a:rPr>
+              <a:t>   ·   </a:t>
+            </a:r>
+            <a:pPr algn="r" indent="0" marL="0">
+              <a:buNone/>
+            </a:pPr>
+            <a:r>
+              <a:rPr lang="en-US" sz="850" b="1" dirty="0">
+                <a:solidFill>
+                  <a:srgbClr val="455A64"/>
+                </a:solidFill>
+                <a:latin typeface="Calibri" pitchFamily="34" charset="0"/>
+                <a:ea typeface="Calibri" pitchFamily="34" charset="-122"/>
+                <a:cs typeface="Calibri" pitchFamily="34" charset="-120"/>
+              </a:rPr>
+              <a:t>10</a:t>
+            </a:r>
+            <a:endParaRPr lang="en-US" sz="850" dirty="0"/>
+          </a:p>
+        </p:txBody>
+      </p:sp>
+    </p:spTree>
+  </p:cSld>
+  <p:clrMapOvr>
+    <a:masterClrMapping/>
+  </p:clrMapOvr>
+</p:sld>
+</file>
+
+<file path=ppt/slides/slide13.xml><?xml version="1.0" encoding="utf-8"?>
+<p:sld xmlns:a="http://schemas.openxmlformats.org/drawingml/2006/main" xmlns:r="http://schemas.openxmlformats.org/officeDocument/2006/relationships" xmlns:p="http://schemas.openxmlformats.org/presentationml/2006/main">
+  <p:cSld name="Slide 13">
     <p:bg>
       <p:bgPr>
         <a:solidFill>
@@ -4338,439 +5007,6 @@
               <a:t>Cases &amp; Board Review</a:t>
             </a:r>
             <a:endParaRPr lang="en-US" sz="3800" dirty="0"/>
-          </a:p>
-        </p:txBody>
-      </p:sp>
-    </p:spTree>
-  </p:cSld>
-  <p:clrMapOvr>
-    <a:masterClrMapping/>
-  </p:clrMapOvr>
-</p:sld>
-</file>
-
-<file path=ppt/slides/slide13.xml><?xml version="1.0" encoding="utf-8"?>
-<p:sld xmlns:a="http://schemas.openxmlformats.org/drawingml/2006/main" xmlns:r="http://schemas.openxmlformats.org/officeDocument/2006/relationships" xmlns:p="http://schemas.openxmlformats.org/presentationml/2006/main">
-  <p:cSld name="Slide 13">
-    <p:bg>
-      <p:bgPr>
-        <a:solidFill>
-          <a:srgbClr val="FFFFFF"/>
-        </a:solidFill>
-      </p:bgPr>
-    </p:bg>
-    <p:spTree>
-      <p:nvGrpSpPr>
-        <p:cNvPr id="1" name=""/>
-        <p:cNvGrpSpPr/>
-        <p:nvPr/>
-      </p:nvGrpSpPr>
-      <p:grpSpPr>
-        <a:xfrm>
-          <a:off x="0" y="0"/>
-          <a:ext cx="0" cy="0"/>
-          <a:chOff x="0" y="0"/>
-          <a:chExt cx="0" cy="0"/>
-        </a:xfrm>
-      </p:grpSpPr>
-      <p:sp>
-        <p:nvSpPr>
-          <p:cNvPr id="2" name="Text 0"/>
-          <p:cNvSpPr/>
-          <p:nvPr/>
-        </p:nvSpPr>
-        <p:spPr>
-          <a:xfrm>
-            <a:off x="566928" y="329184"/>
-            <a:ext cx="10515600" cy="310896"/>
-          </a:xfrm>
-          <a:prstGeom prst="rect">
-            <a:avLst/>
-          </a:prstGeom>
-          <a:noFill/>
-          <a:ln/>
-        </p:spPr>
-        <p:txBody>
-          <a:bodyPr wrap="square" lIns="0" tIns="0" rIns="0" bIns="0" rtlCol="0" anchor="ctr"/>
-          <a:lstStyle/>
-          <a:p>
-            <a:pPr algn="l" indent="0" marL="0">
-              <a:buNone/>
-            </a:pPr>
-            <a:r>
-              <a:rPr lang="en-US" sz="1100" b="1" spc="150" kern="0" dirty="0">
-                <a:solidFill>
-                  <a:srgbClr val="455A64"/>
-                </a:solidFill>
-                <a:latin typeface="Calibri" pitchFamily="34" charset="0"/>
-                <a:ea typeface="Calibri" pitchFamily="34" charset="-122"/>
-                <a:cs typeface="Calibri" pitchFamily="34" charset="-120"/>
-              </a:rPr>
-              <a:t>LAB MANAGEMENT &amp; QUALITY   ·   CASE 1</a:t>
-            </a:r>
-            <a:endParaRPr lang="en-US" sz="1100" dirty="0"/>
-          </a:p>
-        </p:txBody>
-      </p:sp>
-      <p:sp>
-        <p:nvSpPr>
-          <p:cNvPr id="3" name="Text 1"/>
-          <p:cNvSpPr/>
-          <p:nvPr/>
-        </p:nvSpPr>
-        <p:spPr>
-          <a:xfrm>
-            <a:off x="566928" y="713232"/>
-            <a:ext cx="11064240" cy="749808"/>
-          </a:xfrm>
-          <a:prstGeom prst="rect">
-            <a:avLst/>
-          </a:prstGeom>
-          <a:noFill/>
-          <a:ln/>
-        </p:spPr>
-        <p:txBody>
-          <a:bodyPr wrap="square" lIns="0" tIns="0" rIns="0" bIns="0" rtlCol="0" anchor="ctr"/>
-          <a:lstStyle/>
-          <a:p>
-            <a:pPr algn="l" indent="0" marL="0">
-              <a:buNone/>
-            </a:pPr>
-            <a:r>
-              <a:rPr lang="en-US" sz="3000" b="1" dirty="0">
-                <a:solidFill>
-                  <a:srgbClr val="0E3A5F"/>
-                </a:solidFill>
-                <a:latin typeface="Calibri" pitchFamily="34" charset="0"/>
-                <a:ea typeface="Calibri" pitchFamily="34" charset="-122"/>
-                <a:cs typeface="Calibri" pitchFamily="34" charset="-120"/>
-              </a:rPr>
-              <a:t>Case 1</a:t>
-            </a:r>
-            <a:endParaRPr lang="en-US" sz="3000" dirty="0"/>
-          </a:p>
-        </p:txBody>
-      </p:sp>
-      <p:sp>
-        <p:nvSpPr>
-          <p:cNvPr id="4" name="Shape 2"/>
-          <p:cNvSpPr/>
-          <p:nvPr/>
-        </p:nvSpPr>
-        <p:spPr>
-          <a:xfrm>
-            <a:off x="566928" y="1517904"/>
-            <a:ext cx="11057839" cy="2788920"/>
-          </a:xfrm>
-          <a:prstGeom prst="roundRect">
-            <a:avLst>
-              <a:gd name="adj" fmla="val 2951"/>
-            </a:avLst>
-          </a:prstGeom>
-          <a:solidFill>
-            <a:srgbClr val="ECEFF1"/>
-          </a:solidFill>
-          <a:ln/>
-          <a:effectLst>
-            <a:outerShdw sx="100000" sy="100000" kx="0" ky="0" algn="bl" rotWithShape="0" blurRad="88900" dist="25400" dir="5400000">
-              <a:srgbClr val="22303C">
-                <a:alpha val="12000"/>
-              </a:srgbClr>
-            </a:outerShdw>
-          </a:effectLst>
-        </p:spPr>
-      </p:sp>
-      <p:sp>
-        <p:nvSpPr>
-          <p:cNvPr id="5" name="Text 3"/>
-          <p:cNvSpPr/>
-          <p:nvPr/>
-        </p:nvSpPr>
-        <p:spPr>
-          <a:xfrm>
-            <a:off x="841248" y="1700784"/>
-            <a:ext cx="5486400" cy="292608"/>
-          </a:xfrm>
-          <a:prstGeom prst="rect">
-            <a:avLst/>
-          </a:prstGeom>
-          <a:noFill/>
-          <a:ln/>
-        </p:spPr>
-        <p:txBody>
-          <a:bodyPr wrap="square" lIns="0" tIns="0" rIns="0" bIns="0" rtlCol="0" anchor="ctr"/>
-          <a:lstStyle/>
-          <a:p>
-            <a:pPr indent="0" marL="0">
-              <a:buNone/>
-            </a:pPr>
-            <a:r>
-              <a:rPr lang="en-US" sz="1100" b="1" spc="150" kern="0" dirty="0">
-                <a:solidFill>
-                  <a:srgbClr val="455A64"/>
-                </a:solidFill>
-                <a:latin typeface="Calibri" pitchFamily="34" charset="0"/>
-                <a:ea typeface="Calibri" pitchFamily="34" charset="-122"/>
-                <a:cs typeface="Calibri" pitchFamily="34" charset="-120"/>
-              </a:rPr>
-              <a:t>CLINICAL VIGNETTE</a:t>
-            </a:r>
-            <a:endParaRPr lang="en-US" sz="1100" dirty="0"/>
-          </a:p>
-        </p:txBody>
-      </p:sp>
-      <p:sp>
-        <p:nvSpPr>
-          <p:cNvPr id="6" name="Text 4"/>
-          <p:cNvSpPr/>
-          <p:nvPr/>
-        </p:nvSpPr>
-        <p:spPr>
-          <a:xfrm>
-            <a:off x="841248" y="2029968"/>
-            <a:ext cx="10509199" cy="2148840"/>
-          </a:xfrm>
-          <a:prstGeom prst="rect">
-            <a:avLst/>
-          </a:prstGeom>
-          <a:noFill/>
-          <a:ln/>
-        </p:spPr>
-        <p:txBody>
-          <a:bodyPr wrap="square" lIns="0" tIns="0" rIns="0" bIns="0" rtlCol="0" anchor="t"/>
-          <a:lstStyle/>
-          <a:p>
-            <a:pPr algn="l" indent="0" marL="0">
-              <a:lnSpc>
-                <a:spcPct val="108000"/>
-              </a:lnSpc>
-              <a:buNone/>
-            </a:pPr>
-            <a:r>
-              <a:rPr lang="en-US" sz="1450" dirty="0">
-                <a:solidFill>
-                  <a:srgbClr val="33444F"/>
-                </a:solidFill>
-                <a:latin typeface="Calibri" pitchFamily="34" charset="0"/>
-                <a:ea typeface="Calibri" pitchFamily="34" charset="-122"/>
-                <a:cs typeface="Calibri" pitchFamily="34" charset="-120"/>
-              </a:rPr>
-              <a:t>A chemistry analyzer’s control suddenly jumps from around the mean to consistently +2.5 SD after a reagent lot change, holding steady there across the next several runs.</a:t>
-            </a:r>
-            <a:endParaRPr lang="en-US" sz="1450" dirty="0"/>
-          </a:p>
-        </p:txBody>
-      </p:sp>
-      <p:sp>
-        <p:nvSpPr>
-          <p:cNvPr id="7" name="Shape 5"/>
-          <p:cNvSpPr/>
-          <p:nvPr/>
-        </p:nvSpPr>
-        <p:spPr>
-          <a:xfrm>
-            <a:off x="566928" y="4553712"/>
-            <a:ext cx="11057839" cy="1325880"/>
-          </a:xfrm>
-          <a:prstGeom prst="roundRect">
-            <a:avLst>
-              <a:gd name="adj" fmla="val 6207"/>
-            </a:avLst>
-          </a:prstGeom>
-          <a:solidFill>
-            <a:srgbClr val="0E3A5F"/>
-          </a:solidFill>
-          <a:ln/>
-          <a:effectLst>
-            <a:outerShdw sx="100000" sy="100000" kx="0" ky="0" algn="bl" rotWithShape="0" blurRad="88900" dist="25400" dir="5400000">
-              <a:srgbClr val="22303C">
-                <a:alpha val="12000"/>
-              </a:srgbClr>
-            </a:outerShdw>
-          </a:effectLst>
-        </p:spPr>
-      </p:sp>
-      <p:sp>
-        <p:nvSpPr>
-          <p:cNvPr id="8" name="Text 6"/>
-          <p:cNvSpPr/>
-          <p:nvPr/>
-        </p:nvSpPr>
-        <p:spPr>
-          <a:xfrm>
-            <a:off x="822960" y="4681728"/>
-            <a:ext cx="640080" cy="960120"/>
-          </a:xfrm>
-          <a:prstGeom prst="rect">
-            <a:avLst/>
-          </a:prstGeom>
-          <a:noFill/>
-          <a:ln/>
-        </p:spPr>
-        <p:txBody>
-          <a:bodyPr wrap="square" lIns="0" tIns="0" rIns="0" bIns="0" rtlCol="0" anchor="ctr"/>
-          <a:lstStyle/>
-          <a:p>
-            <a:pPr algn="ctr" indent="0" marL="0">
-              <a:buNone/>
-            </a:pPr>
-            <a:r>
-              <a:rPr lang="en-US" sz="4000" b="1" dirty="0">
-                <a:solidFill>
-                  <a:srgbClr val="455A64"/>
-                </a:solidFill>
-                <a:latin typeface="Calibri" pitchFamily="34" charset="0"/>
-                <a:ea typeface="Calibri" pitchFamily="34" charset="-122"/>
-                <a:cs typeface="Calibri" pitchFamily="34" charset="-120"/>
-              </a:rPr>
-              <a:t>?</a:t>
-            </a:r>
-            <a:endParaRPr lang="en-US" sz="4000" dirty="0"/>
-          </a:p>
-        </p:txBody>
-      </p:sp>
-      <p:sp>
-        <p:nvSpPr>
-          <p:cNvPr id="9" name="Text 7"/>
-          <p:cNvSpPr/>
-          <p:nvPr/>
-        </p:nvSpPr>
-        <p:spPr>
-          <a:xfrm>
-            <a:off x="1618488" y="4553712"/>
-            <a:ext cx="9686239" cy="1325880"/>
-          </a:xfrm>
-          <a:prstGeom prst="rect">
-            <a:avLst/>
-          </a:prstGeom>
-          <a:noFill/>
-          <a:ln/>
-        </p:spPr>
-        <p:txBody>
-          <a:bodyPr wrap="square" lIns="0" tIns="0" rIns="0" bIns="0" rtlCol="0" anchor="ctr"/>
-          <a:lstStyle/>
-          <a:p>
-            <a:pPr algn="l" indent="0" marL="0">
-              <a:buNone/>
-            </a:pPr>
-            <a:r>
-              <a:rPr lang="en-US" sz="1500" b="1" dirty="0">
-                <a:solidFill>
-                  <a:srgbClr val="FFFFFF"/>
-                </a:solidFill>
-                <a:latin typeface="Calibri" pitchFamily="34" charset="0"/>
-                <a:ea typeface="Calibri" pitchFamily="34" charset="-122"/>
-                <a:cs typeface="Calibri" pitchFamily="34" charset="-120"/>
-              </a:rPr>
-              <a:t>Random or systematic error? What is the likely cause and action?</a:t>
-            </a:r>
-            <a:endParaRPr lang="en-US" sz="1500" dirty="0"/>
-          </a:p>
-        </p:txBody>
-      </p:sp>
-      <p:sp>
-        <p:nvSpPr>
-          <p:cNvPr id="10" name="Text 8"/>
-          <p:cNvSpPr/>
-          <p:nvPr/>
-        </p:nvSpPr>
-        <p:spPr>
-          <a:xfrm>
-            <a:off x="566928" y="6473952"/>
-            <a:ext cx="7772400" cy="274320"/>
-          </a:xfrm>
-          <a:prstGeom prst="rect">
-            <a:avLst/>
-          </a:prstGeom>
-          <a:noFill/>
-          <a:ln/>
-        </p:spPr>
-        <p:txBody>
-          <a:bodyPr wrap="square" lIns="0" tIns="0" rIns="0" bIns="0" rtlCol="0" anchor="ctr"/>
-          <a:lstStyle/>
-          <a:p>
-            <a:pPr algn="l" indent="0" marL="0">
-              <a:buNone/>
-            </a:pPr>
-            <a:r>
-              <a:rPr lang="en-US" sz="850" dirty="0">
-                <a:solidFill>
-                  <a:srgbClr val="9AA8B4"/>
-                </a:solidFill>
-                <a:latin typeface="Calibri" pitchFamily="34" charset="0"/>
-                <a:ea typeface="Calibri" pitchFamily="34" charset="-122"/>
-                <a:cs typeface="Calibri" pitchFamily="34" charset="-120"/>
-              </a:rPr>
-              <a:t>Makassed General Hospital  ·  Department of Laboratory Medicine</a:t>
-            </a:r>
-            <a:endParaRPr lang="en-US" sz="850" dirty="0"/>
-          </a:p>
-        </p:txBody>
-      </p:sp>
-      <p:sp>
-        <p:nvSpPr>
-          <p:cNvPr id="11" name="Text 9"/>
-          <p:cNvSpPr/>
-          <p:nvPr/>
-        </p:nvSpPr>
-        <p:spPr>
-          <a:xfrm>
-            <a:off x="9814255" y="6473952"/>
-            <a:ext cx="1828800" cy="274320"/>
-          </a:xfrm>
-          <a:prstGeom prst="rect">
-            <a:avLst/>
-          </a:prstGeom>
-          <a:noFill/>
-          <a:ln/>
-        </p:spPr>
-        <p:txBody>
-          <a:bodyPr wrap="square" lIns="0" tIns="0" rIns="0" bIns="0" rtlCol="0" anchor="ctr"/>
-          <a:lstStyle/>
-          <a:p>
-            <a:pPr algn="r" indent="0" marL="0">
-              <a:buNone/>
-            </a:pPr>
-            <a:r>
-              <a:rPr lang="en-US" sz="850" dirty="0">
-                <a:solidFill>
-                  <a:srgbClr val="9AA8B4"/>
-                </a:solidFill>
-                <a:latin typeface="Calibri" pitchFamily="34" charset="0"/>
-                <a:ea typeface="Calibri" pitchFamily="34" charset="-122"/>
-                <a:cs typeface="Calibri" pitchFamily="34" charset="-120"/>
-              </a:rPr>
-              <a:t>CP Lecture Series</a:t>
-            </a:r>
-            <a:pPr algn="r" indent="0" marL="0">
-              <a:buNone/>
-            </a:pPr>
-            <a:r>
-              <a:rPr lang="en-US" sz="850" dirty="0">
-                <a:solidFill>
-                  <a:srgbClr val="DCE4EC"/>
-                </a:solidFill>
-                <a:latin typeface="Calibri" pitchFamily="34" charset="0"/>
-                <a:ea typeface="Calibri" pitchFamily="34" charset="-122"/>
-                <a:cs typeface="Calibri" pitchFamily="34" charset="-120"/>
-              </a:rPr>
-              <a:t>   ·   </a:t>
-            </a:r>
-            <a:pPr algn="r" indent="0" marL="0">
-              <a:buNone/>
-            </a:pPr>
-            <a:r>
-              <a:rPr lang="en-US" sz="850" b="1" dirty="0">
-                <a:solidFill>
-                  <a:srgbClr val="455A64"/>
-                </a:solidFill>
-                <a:latin typeface="Calibri" pitchFamily="34" charset="0"/>
-                <a:ea typeface="Calibri" pitchFamily="34" charset="-122"/>
-                <a:cs typeface="Calibri" pitchFamily="34" charset="-120"/>
-              </a:rPr>
-              <a:t>10</a:t>
-            </a:r>
-            <a:endParaRPr lang="en-US" sz="850" dirty="0"/>
           </a:p>
         </p:txBody>
       </p:sp>
@@ -4839,7 +5075,7 @@
                 <a:ea typeface="Calibri" pitchFamily="34" charset="-122"/>
                 <a:cs typeface="Calibri" pitchFamily="34" charset="-120"/>
               </a:rPr>
-              <a:t>LAB MANAGEMENT &amp; QUALITY   ·   CASE 1  ·  RESOLUTION</a:t>
+              <a:t>LAB MANAGEMENT &amp; QUALITY   ·   CASE 1</a:t>
             </a:r>
             <a:endParaRPr lang="en-US" sz="1100" dirty="0"/>
           </a:p>
@@ -4878,7 +5114,7 @@
                 <a:ea typeface="Calibri" pitchFamily="34" charset="-122"/>
                 <a:cs typeface="Calibri" pitchFamily="34" charset="-120"/>
               </a:rPr>
-              <a:t>Case 1: Systematic Shift</a:t>
+              <a:t>Case 1</a:t>
             </a:r>
             <a:endParaRPr lang="en-US" sz="3000" dirty="0"/>
           </a:p>
@@ -4886,124 +5122,18 @@
       </p:sp>
       <p:sp>
         <p:nvSpPr>
-          <p:cNvPr id="4" name="Text 2"/>
-          <p:cNvSpPr/>
-          <p:nvPr/>
-        </p:nvSpPr>
-        <p:spPr>
-          <a:xfrm>
-            <a:off x="566928" y="1554480"/>
-            <a:ext cx="6413547" cy="4023360"/>
-          </a:xfrm>
-          <a:prstGeom prst="rect">
-            <a:avLst/>
-          </a:prstGeom>
-          <a:noFill/>
-          <a:ln/>
-        </p:spPr>
-        <p:txBody>
-          <a:bodyPr wrap="square" lIns="0" tIns="0" rIns="0" bIns="0" rtlCol="0" anchor="t"/>
-          <a:lstStyle/>
-          <a:p>
-            <a:pPr algn="l" marL="177800" indent="-177800">
-              <a:spcAft>
-                <a:spcPts val="900"/>
-              </a:spcAft>
-              <a:buSzPct val="100000"/>
-              <a:buChar char="•"/>
-            </a:pPr>
-            <a:r>
-              <a:rPr lang="en-US" sz="1400" b="1" dirty="0">
-                <a:solidFill>
-                  <a:srgbClr val="1B2A38"/>
-                </a:solidFill>
-                <a:latin typeface="Calibri" pitchFamily="34" charset="0"/>
-                <a:ea typeface="Calibri" pitchFamily="34" charset="-122"/>
-                <a:cs typeface="Calibri" pitchFamily="34" charset="-120"/>
-              </a:rPr>
-              <a:t>An abrupt, sustained move off the mean is a SHIFT — a systematic (accuracy) error.</a:t>
-            </a:r>
-            <a:endParaRPr lang="en-US" sz="1400" dirty="0"/>
-          </a:p>
-          <a:p>
-            <a:pPr algn="l" marL="177800" indent="-177800">
-              <a:spcAft>
-                <a:spcPts val="900"/>
-              </a:spcAft>
-              <a:buSzPct val="100000"/>
-              <a:buChar char="•"/>
-            </a:pPr>
-            <a:r>
-              <a:rPr lang="en-US" sz="1400" dirty="0">
-                <a:solidFill>
-                  <a:srgbClr val="33444F"/>
-                </a:solidFill>
-                <a:latin typeface="Calibri" pitchFamily="34" charset="0"/>
-                <a:ea typeface="Calibri" pitchFamily="34" charset="-122"/>
-                <a:cs typeface="Calibri" pitchFamily="34" charset="-120"/>
-              </a:rPr>
-              <a:t>Timing with the reagent lot change points to lot/calibration as the cause.</a:t>
-            </a:r>
-            <a:endParaRPr lang="en-US" sz="1400" dirty="0"/>
-          </a:p>
-          <a:p>
-            <a:pPr algn="l" marL="177800" indent="-177800">
-              <a:spcAft>
-                <a:spcPts val="900"/>
-              </a:spcAft>
-              <a:buSzPct val="100000"/>
-              <a:buChar char="•"/>
-            </a:pPr>
-            <a:r>
-              <a:rPr lang="en-US" sz="1400" dirty="0">
-                <a:solidFill>
-                  <a:srgbClr val="33444F"/>
-                </a:solidFill>
-                <a:latin typeface="Calibri" pitchFamily="34" charset="0"/>
-                <a:ea typeface="Calibri" pitchFamily="34" charset="-122"/>
-                <a:cs typeface="Calibri" pitchFamily="34" charset="-120"/>
-              </a:rPr>
-              <a:t>Stop reporting; recalibrate / verify the new lot; repeat QC before resuming.</a:t>
-            </a:r>
-            <a:endParaRPr lang="en-US" sz="1400" dirty="0"/>
-          </a:p>
-          <a:p>
-            <a:pPr algn="l" marL="177800" indent="-177800">
-              <a:spcAft>
-                <a:spcPts val="900"/>
-              </a:spcAft>
-              <a:buSzPct val="100000"/>
-              <a:buChar char="•"/>
-            </a:pPr>
-            <a:r>
-              <a:rPr lang="en-US" sz="1400" dirty="0">
-                <a:solidFill>
-                  <a:srgbClr val="33444F"/>
-                </a:solidFill>
-                <a:latin typeface="Calibri" pitchFamily="34" charset="0"/>
-                <a:ea typeface="Calibri" pitchFamily="34" charset="-122"/>
-                <a:cs typeface="Calibri" pitchFamily="34" charset="-120"/>
-              </a:rPr>
-              <a:t>Document the investigation and corrective action.</a:t>
-            </a:r>
-            <a:endParaRPr lang="en-US" sz="1400" dirty="0"/>
-          </a:p>
-        </p:txBody>
-      </p:sp>
-      <p:sp>
-        <p:nvSpPr>
-          <p:cNvPr id="5" name="Shape 3"/>
-          <p:cNvSpPr/>
-          <p:nvPr/>
-        </p:nvSpPr>
-        <p:spPr>
-          <a:xfrm>
-            <a:off x="7422788" y="1554480"/>
-            <a:ext cx="4201979" cy="3977640"/>
+          <p:cNvPr id="4" name="Shape 2"/>
+          <p:cNvSpPr/>
+          <p:nvPr/>
+        </p:nvSpPr>
+        <p:spPr>
+          <a:xfrm>
+            <a:off x="566928" y="1517904"/>
+            <a:ext cx="11057839" cy="2788920"/>
           </a:xfrm>
           <a:prstGeom prst="roundRect">
             <a:avLst>
-              <a:gd name="adj" fmla="val 2069"/>
+              <a:gd name="adj" fmla="val 2951"/>
             </a:avLst>
           </a:prstGeom>
           <a:solidFill>
@@ -5021,53 +5151,53 @@
       </p:sp>
       <p:sp>
         <p:nvSpPr>
+          <p:cNvPr id="5" name="Text 3"/>
+          <p:cNvSpPr/>
+          <p:nvPr/>
+        </p:nvSpPr>
+        <p:spPr>
+          <a:xfrm>
+            <a:off x="841248" y="1700784"/>
+            <a:ext cx="5486400" cy="292608"/>
+          </a:xfrm>
+          <a:prstGeom prst="rect">
+            <a:avLst/>
+          </a:prstGeom>
+          <a:noFill/>
+          <a:ln/>
+        </p:spPr>
+        <p:txBody>
+          <a:bodyPr wrap="square" lIns="0" tIns="0" rIns="0" bIns="0" rtlCol="0" anchor="ctr"/>
+          <a:lstStyle/>
+          <a:p>
+            <a:pPr indent="0" marL="0">
+              <a:buNone/>
+            </a:pPr>
+            <a:r>
+              <a:rPr lang="en-US" sz="1100" b="1" spc="150" kern="0" dirty="0">
+                <a:solidFill>
+                  <a:srgbClr val="455A64"/>
+                </a:solidFill>
+                <a:latin typeface="Calibri" pitchFamily="34" charset="0"/>
+                <a:ea typeface="Calibri" pitchFamily="34" charset="-122"/>
+                <a:cs typeface="Calibri" pitchFamily="34" charset="-120"/>
+              </a:rPr>
+              <a:t>CLINICAL VIGNETTE</a:t>
+            </a:r>
+            <a:endParaRPr lang="en-US" sz="1100" dirty="0"/>
+          </a:p>
+        </p:txBody>
+      </p:sp>
+      <p:sp>
+        <p:nvSpPr>
           <p:cNvPr id="6" name="Text 4"/>
           <p:cNvSpPr/>
           <p:nvPr/>
         </p:nvSpPr>
         <p:spPr>
           <a:xfrm>
-            <a:off x="7660532" y="1755648"/>
-            <a:ext cx="3744779" cy="310896"/>
-          </a:xfrm>
-          <a:prstGeom prst="rect">
-            <a:avLst/>
-          </a:prstGeom>
-          <a:noFill/>
-          <a:ln/>
-        </p:spPr>
-        <p:txBody>
-          <a:bodyPr wrap="square" lIns="0" tIns="0" rIns="0" bIns="0" rtlCol="0" anchor="ctr"/>
-          <a:lstStyle/>
-          <a:p>
-            <a:pPr indent="0" marL="0">
-              <a:buNone/>
-            </a:pPr>
-            <a:r>
-              <a:rPr lang="en-US" sz="1100" b="1" spc="140" kern="0" dirty="0">
-                <a:solidFill>
-                  <a:srgbClr val="455A64"/>
-                </a:solidFill>
-                <a:latin typeface="Calibri" pitchFamily="34" charset="0"/>
-                <a:ea typeface="Calibri" pitchFamily="34" charset="-122"/>
-                <a:cs typeface="Calibri" pitchFamily="34" charset="-120"/>
-              </a:rPr>
-              <a:t>TEACHING POINT</a:t>
-            </a:r>
-            <a:endParaRPr lang="en-US" sz="1100" dirty="0"/>
-          </a:p>
-        </p:txBody>
-      </p:sp>
-      <p:sp>
-        <p:nvSpPr>
-          <p:cNvPr id="7" name="Text 5"/>
-          <p:cNvSpPr/>
-          <p:nvPr/>
-        </p:nvSpPr>
-        <p:spPr>
-          <a:xfrm>
-            <a:off x="7660532" y="2121408"/>
-            <a:ext cx="3726491" cy="3291840"/>
+            <a:off x="841248" y="2029968"/>
+            <a:ext cx="10509199" cy="2148840"/>
           </a:xfrm>
           <a:prstGeom prst="rect">
             <a:avLst/>
@@ -5081,12 +5211,12 @@
           <a:p>
             <a:pPr algn="l" indent="0" marL="0">
               <a:lnSpc>
-                <a:spcPct val="110000"/>
+                <a:spcPct val="108000"/>
               </a:lnSpc>
               <a:buNone/>
             </a:pPr>
             <a:r>
-              <a:rPr lang="en-US" sz="1350" dirty="0">
+              <a:rPr lang="en-US" sz="1450" dirty="0">
                 <a:solidFill>
                   <a:srgbClr val="33444F"/>
                 </a:solidFill>
@@ -5094,15 +5224,122 @@
                 <a:ea typeface="Calibri" pitchFamily="34" charset="-122"/>
                 <a:cs typeface="Calibri" pitchFamily="34" charset="-120"/>
               </a:rPr>
-              <a:t>A sudden, sustained offset = shift (often new lot/calibration); a gradual drift = trend (deterioration). The pattern names the cause.</a:t>
-            </a:r>
-            <a:endParaRPr lang="en-US" sz="1350" dirty="0"/>
-          </a:p>
-        </p:txBody>
+              <a:t>After a reagent lot change, controls drift to consistently higher values, triggering a 4_1s and then a 10x rule.</a:t>
+            </a:r>
+            <a:endParaRPr lang="en-US" sz="1450" dirty="0"/>
+          </a:p>
+        </p:txBody>
+      </p:sp>
+      <p:sp>
+        <p:nvSpPr>
+          <p:cNvPr id="7" name="Shape 5"/>
+          <p:cNvSpPr/>
+          <p:nvPr/>
+        </p:nvSpPr>
+        <p:spPr>
+          <a:xfrm>
+            <a:off x="566928" y="4553712"/>
+            <a:ext cx="11057839" cy="1325880"/>
+          </a:xfrm>
+          <a:prstGeom prst="roundRect">
+            <a:avLst>
+              <a:gd name="adj" fmla="val 6207"/>
+            </a:avLst>
+          </a:prstGeom>
+          <a:solidFill>
+            <a:srgbClr val="0E3A5F"/>
+          </a:solidFill>
+          <a:ln/>
+          <a:effectLst>
+            <a:outerShdw sx="100000" sy="100000" kx="0" ky="0" algn="bl" rotWithShape="0" blurRad="88900" dist="25400" dir="5400000">
+              <a:srgbClr val="22303C">
+                <a:alpha val="12000"/>
+              </a:srgbClr>
+            </a:outerShdw>
+          </a:effectLst>
+        </p:spPr>
       </p:sp>
       <p:sp>
         <p:nvSpPr>
           <p:cNvPr id="8" name="Text 6"/>
+          <p:cNvSpPr/>
+          <p:nvPr/>
+        </p:nvSpPr>
+        <p:spPr>
+          <a:xfrm>
+            <a:off x="822960" y="4681728"/>
+            <a:ext cx="640080" cy="960120"/>
+          </a:xfrm>
+          <a:prstGeom prst="rect">
+            <a:avLst/>
+          </a:prstGeom>
+          <a:noFill/>
+          <a:ln/>
+        </p:spPr>
+        <p:txBody>
+          <a:bodyPr wrap="square" lIns="0" tIns="0" rIns="0" bIns="0" rtlCol="0" anchor="ctr"/>
+          <a:lstStyle/>
+          <a:p>
+            <a:pPr algn="ctr" indent="0" marL="0">
+              <a:buNone/>
+            </a:pPr>
+            <a:r>
+              <a:rPr lang="en-US" sz="4000" b="1" dirty="0">
+                <a:solidFill>
+                  <a:srgbClr val="455A64"/>
+                </a:solidFill>
+                <a:latin typeface="Calibri" pitchFamily="34" charset="0"/>
+                <a:ea typeface="Calibri" pitchFamily="34" charset="-122"/>
+                <a:cs typeface="Calibri" pitchFamily="34" charset="-120"/>
+              </a:rPr>
+              <a:t>?</a:t>
+            </a:r>
+            <a:endParaRPr lang="en-US" sz="4000" dirty="0"/>
+          </a:p>
+        </p:txBody>
+      </p:sp>
+      <p:sp>
+        <p:nvSpPr>
+          <p:cNvPr id="9" name="Text 7"/>
+          <p:cNvSpPr/>
+          <p:nvPr/>
+        </p:nvSpPr>
+        <p:spPr>
+          <a:xfrm>
+            <a:off x="1618488" y="4553712"/>
+            <a:ext cx="9686239" cy="1325880"/>
+          </a:xfrm>
+          <a:prstGeom prst="rect">
+            <a:avLst/>
+          </a:prstGeom>
+          <a:noFill/>
+          <a:ln/>
+        </p:spPr>
+        <p:txBody>
+          <a:bodyPr wrap="square" lIns="0" tIns="0" rIns="0" bIns="0" rtlCol="0" anchor="ctr"/>
+          <a:lstStyle/>
+          <a:p>
+            <a:pPr algn="l" indent="0" marL="0">
+              <a:buNone/>
+            </a:pPr>
+            <a:r>
+              <a:rPr lang="en-US" sz="1500" b="1" dirty="0">
+                <a:solidFill>
+                  <a:srgbClr val="FFFFFF"/>
+                </a:solidFill>
+                <a:latin typeface="Calibri" pitchFamily="34" charset="0"/>
+                <a:ea typeface="Calibri" pitchFamily="34" charset="-122"/>
+                <a:cs typeface="Calibri" pitchFamily="34" charset="-120"/>
+              </a:rPr>
+              <a:t>What type of error is this, and what is the likely cause?</a:t>
+            </a:r>
+            <a:endParaRPr lang="en-US" sz="1500" dirty="0"/>
+          </a:p>
+        </p:txBody>
+      </p:sp>
+      <p:sp>
+        <p:nvSpPr>
+          <p:cNvPr id="10" name="Text 8"/>
           <p:cNvSpPr/>
           <p:nvPr/>
         </p:nvSpPr>
@@ -5141,7 +5378,7 @@
       </p:sp>
       <p:sp>
         <p:nvSpPr>
-          <p:cNvPr id="9" name="Text 7"/>
+          <p:cNvPr id="11" name="Text 9"/>
           <p:cNvSpPr/>
           <p:nvPr/>
         </p:nvSpPr>
@@ -5271,7 +5508,7 @@
                 <a:ea typeface="Calibri" pitchFamily="34" charset="-122"/>
                 <a:cs typeface="Calibri" pitchFamily="34" charset="-120"/>
               </a:rPr>
-              <a:t>LAB MANAGEMENT &amp; QUALITY   ·   CASE 2</a:t>
+              <a:t>LAB MANAGEMENT &amp; QUALITY   ·   CASE 1  ·  RESOLUTION</a:t>
             </a:r>
             <a:endParaRPr lang="en-US" sz="1100" dirty="0"/>
           </a:p>
@@ -5310,7 +5547,7 @@
                 <a:ea typeface="Calibri" pitchFamily="34" charset="-122"/>
                 <a:cs typeface="Calibri" pitchFamily="34" charset="-120"/>
               </a:rPr>
-              <a:t>Case 2</a:t>
+              <a:t>Case 1: Systematic Shift</a:t>
             </a:r>
             <a:endParaRPr lang="en-US" sz="3000" dirty="0"/>
           </a:p>
@@ -5318,18 +5555,124 @@
       </p:sp>
       <p:sp>
         <p:nvSpPr>
-          <p:cNvPr id="4" name="Shape 2"/>
-          <p:cNvSpPr/>
-          <p:nvPr/>
-        </p:nvSpPr>
-        <p:spPr>
-          <a:xfrm>
-            <a:off x="566928" y="1517904"/>
-            <a:ext cx="11057839" cy="2788920"/>
+          <p:cNvPr id="4" name="Text 2"/>
+          <p:cNvSpPr/>
+          <p:nvPr/>
+        </p:nvSpPr>
+        <p:spPr>
+          <a:xfrm>
+            <a:off x="566928" y="1554480"/>
+            <a:ext cx="6413547" cy="4023360"/>
+          </a:xfrm>
+          <a:prstGeom prst="rect">
+            <a:avLst/>
+          </a:prstGeom>
+          <a:noFill/>
+          <a:ln/>
+        </p:spPr>
+        <p:txBody>
+          <a:bodyPr wrap="square" lIns="0" tIns="0" rIns="0" bIns="0" rtlCol="0" anchor="t"/>
+          <a:lstStyle/>
+          <a:p>
+            <a:pPr algn="l" marL="177800" indent="-177800">
+              <a:spcAft>
+                <a:spcPts val="900"/>
+              </a:spcAft>
+              <a:buSzPct val="100000"/>
+              <a:buChar char="•"/>
+            </a:pPr>
+            <a:r>
+              <a:rPr lang="en-US" sz="1400" b="1" dirty="0">
+                <a:solidFill>
+                  <a:srgbClr val="1B2A38"/>
+                </a:solidFill>
+                <a:latin typeface="Calibri" pitchFamily="34" charset="0"/>
+                <a:ea typeface="Calibri" pitchFamily="34" charset="-122"/>
+                <a:cs typeface="Calibri" pitchFamily="34" charset="-120"/>
+              </a:rPr>
+              <a:t>A consistent one-directional shift indicates systematic error (bias), here following a reagent lot change.</a:t>
+            </a:r>
+            <a:endParaRPr lang="en-US" sz="1400" dirty="0"/>
+          </a:p>
+          <a:p>
+            <a:pPr algn="l" marL="177800" indent="-177800">
+              <a:spcAft>
+                <a:spcPts val="900"/>
+              </a:spcAft>
+              <a:buSzPct val="100000"/>
+              <a:buChar char="•"/>
+            </a:pPr>
+            <a:r>
+              <a:rPr lang="en-US" sz="1400" dirty="0">
+                <a:solidFill>
+                  <a:srgbClr val="33444F"/>
+                </a:solidFill>
+                <a:latin typeface="Calibri" pitchFamily="34" charset="0"/>
+                <a:ea typeface="Calibri" pitchFamily="34" charset="-122"/>
+                <a:cs typeface="Calibri" pitchFamily="34" charset="-120"/>
+              </a:rPr>
+              <a:t>4_1s and 10x are systematic-error rules.</a:t>
+            </a:r>
+            <a:endParaRPr lang="en-US" sz="1400" dirty="0"/>
+          </a:p>
+          <a:p>
+            <a:pPr algn="l" marL="177800" indent="-177800">
+              <a:spcAft>
+                <a:spcPts val="900"/>
+              </a:spcAft>
+              <a:buSzPct val="100000"/>
+              <a:buChar char="•"/>
+            </a:pPr>
+            <a:r>
+              <a:rPr lang="en-US" sz="1400" dirty="0">
+                <a:solidFill>
+                  <a:srgbClr val="33444F"/>
+                </a:solidFill>
+                <a:latin typeface="Calibri" pitchFamily="34" charset="0"/>
+                <a:ea typeface="Calibri" pitchFamily="34" charset="-122"/>
+                <a:cs typeface="Calibri" pitchFamily="34" charset="-120"/>
+              </a:rPr>
+              <a:t>Investigate calibration and the new lot; recalibrate as needed.</a:t>
+            </a:r>
+            <a:endParaRPr lang="en-US" sz="1400" dirty="0"/>
+          </a:p>
+          <a:p>
+            <a:pPr algn="l" marL="177800" indent="-177800">
+              <a:spcAft>
+                <a:spcPts val="900"/>
+              </a:spcAft>
+              <a:buSzPct val="100000"/>
+              <a:buChar char="•"/>
+            </a:pPr>
+            <a:r>
+              <a:rPr lang="en-US" sz="1400" dirty="0">
+                <a:solidFill>
+                  <a:srgbClr val="33444F"/>
+                </a:solidFill>
+                <a:latin typeface="Calibri" pitchFamily="34" charset="0"/>
+                <a:ea typeface="Calibri" pitchFamily="34" charset="-122"/>
+                <a:cs typeface="Calibri" pitchFamily="34" charset="-120"/>
+              </a:rPr>
+              <a:t>Hold reporting until resolved.</a:t>
+            </a:r>
+            <a:endParaRPr lang="en-US" sz="1400" dirty="0"/>
+          </a:p>
+        </p:txBody>
+      </p:sp>
+      <p:sp>
+        <p:nvSpPr>
+          <p:cNvPr id="5" name="Shape 3"/>
+          <p:cNvSpPr/>
+          <p:nvPr/>
+        </p:nvSpPr>
+        <p:spPr>
+          <a:xfrm>
+            <a:off x="7422788" y="1554480"/>
+            <a:ext cx="4201979" cy="3977640"/>
           </a:xfrm>
           <a:prstGeom prst="roundRect">
             <a:avLst>
-              <a:gd name="adj" fmla="val 2951"/>
+              <a:gd name="adj" fmla="val 2069"/>
             </a:avLst>
           </a:prstGeom>
           <a:solidFill>
@@ -5347,14 +5690,14 @@
       </p:sp>
       <p:sp>
         <p:nvSpPr>
-          <p:cNvPr id="5" name="Text 3"/>
-          <p:cNvSpPr/>
-          <p:nvPr/>
-        </p:nvSpPr>
-        <p:spPr>
-          <a:xfrm>
-            <a:off x="841248" y="1700784"/>
-            <a:ext cx="5486400" cy="292608"/>
+          <p:cNvPr id="6" name="Text 4"/>
+          <p:cNvSpPr/>
+          <p:nvPr/>
+        </p:nvSpPr>
+        <p:spPr>
+          <a:xfrm>
+            <a:off x="7660532" y="1755648"/>
+            <a:ext cx="3744779" cy="310896"/>
           </a:xfrm>
           <a:prstGeom prst="rect">
             <a:avLst/>
@@ -5370,7 +5713,7 @@
               <a:buNone/>
             </a:pPr>
             <a:r>
-              <a:rPr lang="en-US" sz="1100" b="1" spc="150" kern="0" dirty="0">
+              <a:rPr lang="en-US" sz="1100" b="1" spc="140" kern="0" dirty="0">
                 <a:solidFill>
                   <a:srgbClr val="455A64"/>
                 </a:solidFill>
@@ -5378,7 +5721,7 @@
                 <a:ea typeface="Calibri" pitchFamily="34" charset="-122"/>
                 <a:cs typeface="Calibri" pitchFamily="34" charset="-120"/>
               </a:rPr>
-              <a:t>CLINICAL VIGNETTE</a:t>
+              <a:t>TEACHING POINT</a:t>
             </a:r>
             <a:endParaRPr lang="en-US" sz="1100" dirty="0"/>
           </a:p>
@@ -5386,14 +5729,14 @@
       </p:sp>
       <p:sp>
         <p:nvSpPr>
-          <p:cNvPr id="6" name="Text 4"/>
-          <p:cNvSpPr/>
-          <p:nvPr/>
-        </p:nvSpPr>
-        <p:spPr>
-          <a:xfrm>
-            <a:off x="841248" y="2029968"/>
-            <a:ext cx="10509199" cy="2148840"/>
+          <p:cNvPr id="7" name="Text 5"/>
+          <p:cNvSpPr/>
+          <p:nvPr/>
+        </p:nvSpPr>
+        <p:spPr>
+          <a:xfrm>
+            <a:off x="7660532" y="2121408"/>
+            <a:ext cx="3726491" cy="3291840"/>
           </a:xfrm>
           <a:prstGeom prst="rect">
             <a:avLst/>
@@ -5407,12 +5750,12 @@
           <a:p>
             <a:pPr algn="l" indent="0" marL="0">
               <a:lnSpc>
-                <a:spcPct val="108000"/>
+                <a:spcPct val="110000"/>
               </a:lnSpc>
               <a:buNone/>
             </a:pPr>
             <a:r>
-              <a:rPr lang="en-US" sz="1450" dirty="0">
+              <a:rPr lang="en-US" sz="1350" dirty="0">
                 <a:solidFill>
                   <a:srgbClr val="33444F"/>
                 </a:solidFill>
@@ -5420,122 +5763,15 @@
                 <a:ea typeface="Calibri" pitchFamily="34" charset="-122"/>
                 <a:cs typeface="Calibri" pitchFamily="34" charset="-120"/>
               </a:rPr>
-              <a:t>A potassium result of 6.8 triggers a delta-check flag because the patient’s value yesterday was 4.0, with no clinical change. The sample looks hemolyzed.</a:t>
-            </a:r>
-            <a:endParaRPr lang="en-US" sz="1450" dirty="0"/>
-          </a:p>
-        </p:txBody>
-      </p:sp>
-      <p:sp>
-        <p:nvSpPr>
-          <p:cNvPr id="7" name="Shape 5"/>
-          <p:cNvSpPr/>
-          <p:nvPr/>
-        </p:nvSpPr>
-        <p:spPr>
-          <a:xfrm>
-            <a:off x="566928" y="4553712"/>
-            <a:ext cx="11057839" cy="1325880"/>
-          </a:xfrm>
-          <a:prstGeom prst="roundRect">
-            <a:avLst>
-              <a:gd name="adj" fmla="val 6207"/>
-            </a:avLst>
-          </a:prstGeom>
-          <a:solidFill>
-            <a:srgbClr val="0E3A5F"/>
-          </a:solidFill>
-          <a:ln/>
-          <a:effectLst>
-            <a:outerShdw sx="100000" sy="100000" kx="0" ky="0" algn="bl" rotWithShape="0" blurRad="88900" dist="25400" dir="5400000">
-              <a:srgbClr val="22303C">
-                <a:alpha val="12000"/>
-              </a:srgbClr>
-            </a:outerShdw>
-          </a:effectLst>
-        </p:spPr>
+              <a:t>Systematic-error rules (2_2s, 4_1s, 10x) point to bias — look at calibration, reagent lots, and instrument drift.</a:t>
+            </a:r>
+            <a:endParaRPr lang="en-US" sz="1350" dirty="0"/>
+          </a:p>
+        </p:txBody>
       </p:sp>
       <p:sp>
         <p:nvSpPr>
           <p:cNvPr id="8" name="Text 6"/>
-          <p:cNvSpPr/>
-          <p:nvPr/>
-        </p:nvSpPr>
-        <p:spPr>
-          <a:xfrm>
-            <a:off x="822960" y="4681728"/>
-            <a:ext cx="640080" cy="960120"/>
-          </a:xfrm>
-          <a:prstGeom prst="rect">
-            <a:avLst/>
-          </a:prstGeom>
-          <a:noFill/>
-          <a:ln/>
-        </p:spPr>
-        <p:txBody>
-          <a:bodyPr wrap="square" lIns="0" tIns="0" rIns="0" bIns="0" rtlCol="0" anchor="ctr"/>
-          <a:lstStyle/>
-          <a:p>
-            <a:pPr algn="ctr" indent="0" marL="0">
-              <a:buNone/>
-            </a:pPr>
-            <a:r>
-              <a:rPr lang="en-US" sz="4000" b="1" dirty="0">
-                <a:solidFill>
-                  <a:srgbClr val="455A64"/>
-                </a:solidFill>
-                <a:latin typeface="Calibri" pitchFamily="34" charset="0"/>
-                <a:ea typeface="Calibri" pitchFamily="34" charset="-122"/>
-                <a:cs typeface="Calibri" pitchFamily="34" charset="-120"/>
-              </a:rPr>
-              <a:t>?</a:t>
-            </a:r>
-            <a:endParaRPr lang="en-US" sz="4000" dirty="0"/>
-          </a:p>
-        </p:txBody>
-      </p:sp>
-      <p:sp>
-        <p:nvSpPr>
-          <p:cNvPr id="9" name="Text 7"/>
-          <p:cNvSpPr/>
-          <p:nvPr/>
-        </p:nvSpPr>
-        <p:spPr>
-          <a:xfrm>
-            <a:off x="1618488" y="4553712"/>
-            <a:ext cx="9686239" cy="1325880"/>
-          </a:xfrm>
-          <a:prstGeom prst="rect">
-            <a:avLst/>
-          </a:prstGeom>
-          <a:noFill/>
-          <a:ln/>
-        </p:spPr>
-        <p:txBody>
-          <a:bodyPr wrap="square" lIns="0" tIns="0" rIns="0" bIns="0" rtlCol="0" anchor="ctr"/>
-          <a:lstStyle/>
-          <a:p>
-            <a:pPr algn="l" indent="0" marL="0">
-              <a:buNone/>
-            </a:pPr>
-            <a:r>
-              <a:rPr lang="en-US" sz="1500" b="1" dirty="0">
-                <a:solidFill>
-                  <a:srgbClr val="FFFFFF"/>
-                </a:solidFill>
-                <a:latin typeface="Calibri" pitchFamily="34" charset="0"/>
-                <a:ea typeface="Calibri" pitchFamily="34" charset="-122"/>
-                <a:cs typeface="Calibri" pitchFamily="34" charset="-120"/>
-              </a:rPr>
-              <a:t>What does the delta check accomplish here?</a:t>
-            </a:r>
-            <a:endParaRPr lang="en-US" sz="1500" dirty="0"/>
-          </a:p>
-        </p:txBody>
-      </p:sp>
-      <p:sp>
-        <p:nvSpPr>
-          <p:cNvPr id="10" name="Text 8"/>
           <p:cNvSpPr/>
           <p:nvPr/>
         </p:nvSpPr>
@@ -5574,7 +5810,7 @@
       </p:sp>
       <p:sp>
         <p:nvSpPr>
-          <p:cNvPr id="11" name="Text 9"/>
+          <p:cNvPr id="9" name="Text 7"/>
           <p:cNvSpPr/>
           <p:nvPr/>
         </p:nvSpPr>
@@ -5704,7 +5940,7 @@
                 <a:ea typeface="Calibri" pitchFamily="34" charset="-122"/>
                 <a:cs typeface="Calibri" pitchFamily="34" charset="-120"/>
               </a:rPr>
-              <a:t>LAB MANAGEMENT &amp; QUALITY   ·   CASE 2  ·  RESOLUTION</a:t>
+              <a:t>LAB MANAGEMENT &amp; QUALITY   ·   CASE 2</a:t>
             </a:r>
             <a:endParaRPr lang="en-US" sz="1100" dirty="0"/>
           </a:p>
@@ -5743,7 +5979,7 @@
                 <a:ea typeface="Calibri" pitchFamily="34" charset="-122"/>
                 <a:cs typeface="Calibri" pitchFamily="34" charset="-120"/>
               </a:rPr>
-              <a:t>Case 2: Delta Check Catches an Artifact</a:t>
+              <a:t>Case 2</a:t>
             </a:r>
             <a:endParaRPr lang="en-US" sz="3000" dirty="0"/>
           </a:p>
@@ -5751,124 +5987,18 @@
       </p:sp>
       <p:sp>
         <p:nvSpPr>
-          <p:cNvPr id="4" name="Text 2"/>
-          <p:cNvSpPr/>
-          <p:nvPr/>
-        </p:nvSpPr>
-        <p:spPr>
-          <a:xfrm>
-            <a:off x="566928" y="1554480"/>
-            <a:ext cx="6413547" cy="4023360"/>
-          </a:xfrm>
-          <a:prstGeom prst="rect">
-            <a:avLst/>
-          </a:prstGeom>
-          <a:noFill/>
-          <a:ln/>
-        </p:spPr>
-        <p:txBody>
-          <a:bodyPr wrap="square" lIns="0" tIns="0" rIns="0" bIns="0" rtlCol="0" anchor="t"/>
-          <a:lstStyle/>
-          <a:p>
-            <a:pPr algn="l" marL="177800" indent="-177800">
-              <a:spcAft>
-                <a:spcPts val="900"/>
-              </a:spcAft>
-              <a:buSzPct val="100000"/>
-              <a:buChar char="•"/>
-            </a:pPr>
-            <a:r>
-              <a:rPr lang="en-US" sz="1400" b="1" dirty="0">
-                <a:solidFill>
-                  <a:srgbClr val="1B2A38"/>
-                </a:solidFill>
-                <a:latin typeface="Calibri" pitchFamily="34" charset="0"/>
-                <a:ea typeface="Calibri" pitchFamily="34" charset="-122"/>
-                <a:cs typeface="Calibri" pitchFamily="34" charset="-120"/>
-              </a:rPr>
-              <a:t>The delta check flagged a large, unexplained change — prompting review before release.</a:t>
-            </a:r>
-            <a:endParaRPr lang="en-US" sz="1400" dirty="0"/>
-          </a:p>
-          <a:p>
-            <a:pPr algn="l" marL="177800" indent="-177800">
-              <a:spcAft>
-                <a:spcPts val="900"/>
-              </a:spcAft>
-              <a:buSzPct val="100000"/>
-              <a:buChar char="•"/>
-            </a:pPr>
-            <a:r>
-              <a:rPr lang="en-US" sz="1400" dirty="0">
-                <a:solidFill>
-                  <a:srgbClr val="33444F"/>
-                </a:solidFill>
-                <a:latin typeface="Calibri" pitchFamily="34" charset="0"/>
-                <a:ea typeface="Calibri" pitchFamily="34" charset="-122"/>
-                <a:cs typeface="Calibri" pitchFamily="34" charset="-120"/>
-              </a:rPr>
-              <a:t>Hemolysis explains the spurious hyperkalemia (preanalytic error).</a:t>
-            </a:r>
-            <a:endParaRPr lang="en-US" sz="1400" dirty="0"/>
-          </a:p>
-          <a:p>
-            <a:pPr algn="l" marL="177800" indent="-177800">
-              <a:spcAft>
-                <a:spcPts val="900"/>
-              </a:spcAft>
-              <a:buSzPct val="100000"/>
-              <a:buChar char="•"/>
-            </a:pPr>
-            <a:r>
-              <a:rPr lang="en-US" sz="1400" dirty="0">
-                <a:solidFill>
-                  <a:srgbClr val="33444F"/>
-                </a:solidFill>
-                <a:latin typeface="Calibri" pitchFamily="34" charset="0"/>
-                <a:ea typeface="Calibri" pitchFamily="34" charset="-122"/>
-                <a:cs typeface="Calibri" pitchFamily="34" charset="-120"/>
-              </a:rPr>
-              <a:t>Delta checks catch sample mix-ups and analytic/preanalytic problems.</a:t>
-            </a:r>
-            <a:endParaRPr lang="en-US" sz="1400" dirty="0"/>
-          </a:p>
-          <a:p>
-            <a:pPr algn="l" marL="177800" indent="-177800">
-              <a:spcAft>
-                <a:spcPts val="900"/>
-              </a:spcAft>
-              <a:buSzPct val="100000"/>
-              <a:buChar char="•"/>
-            </a:pPr>
-            <a:r>
-              <a:rPr lang="en-US" sz="1400" dirty="0">
-                <a:solidFill>
-                  <a:srgbClr val="33444F"/>
-                </a:solidFill>
-                <a:latin typeface="Calibri" pitchFamily="34" charset="0"/>
-                <a:ea typeface="Calibri" pitchFamily="34" charset="-122"/>
-                <a:cs typeface="Calibri" pitchFamily="34" charset="-120"/>
-              </a:rPr>
-              <a:t>Investigate, recollect, and report appropriately.</a:t>
-            </a:r>
-            <a:endParaRPr lang="en-US" sz="1400" dirty="0"/>
-          </a:p>
-        </p:txBody>
-      </p:sp>
-      <p:sp>
-        <p:nvSpPr>
-          <p:cNvPr id="5" name="Shape 3"/>
-          <p:cNvSpPr/>
-          <p:nvPr/>
-        </p:nvSpPr>
-        <p:spPr>
-          <a:xfrm>
-            <a:off x="7422788" y="1554480"/>
-            <a:ext cx="4201979" cy="3977640"/>
+          <p:cNvPr id="4" name="Shape 2"/>
+          <p:cNvSpPr/>
+          <p:nvPr/>
+        </p:nvSpPr>
+        <p:spPr>
+          <a:xfrm>
+            <a:off x="566928" y="1517904"/>
+            <a:ext cx="11057839" cy="2788920"/>
           </a:xfrm>
           <a:prstGeom prst="roundRect">
             <a:avLst>
-              <a:gd name="adj" fmla="val 2069"/>
+              <a:gd name="adj" fmla="val 2951"/>
             </a:avLst>
           </a:prstGeom>
           <a:solidFill>
@@ -5886,53 +6016,53 @@
       </p:sp>
       <p:sp>
         <p:nvSpPr>
+          <p:cNvPr id="5" name="Text 3"/>
+          <p:cNvSpPr/>
+          <p:nvPr/>
+        </p:nvSpPr>
+        <p:spPr>
+          <a:xfrm>
+            <a:off x="841248" y="1700784"/>
+            <a:ext cx="5486400" cy="292608"/>
+          </a:xfrm>
+          <a:prstGeom prst="rect">
+            <a:avLst/>
+          </a:prstGeom>
+          <a:noFill/>
+          <a:ln/>
+        </p:spPr>
+        <p:txBody>
+          <a:bodyPr wrap="square" lIns="0" tIns="0" rIns="0" bIns="0" rtlCol="0" anchor="ctr"/>
+          <a:lstStyle/>
+          <a:p>
+            <a:pPr indent="0" marL="0">
+              <a:buNone/>
+            </a:pPr>
+            <a:r>
+              <a:rPr lang="en-US" sz="1100" b="1" spc="150" kern="0" dirty="0">
+                <a:solidFill>
+                  <a:srgbClr val="455A64"/>
+                </a:solidFill>
+                <a:latin typeface="Calibri" pitchFamily="34" charset="0"/>
+                <a:ea typeface="Calibri" pitchFamily="34" charset="-122"/>
+                <a:cs typeface="Calibri" pitchFamily="34" charset="-120"/>
+              </a:rPr>
+              <a:t>CLINICAL VIGNETTE</a:t>
+            </a:r>
+            <a:endParaRPr lang="en-US" sz="1100" dirty="0"/>
+          </a:p>
+        </p:txBody>
+      </p:sp>
+      <p:sp>
+        <p:nvSpPr>
           <p:cNvPr id="6" name="Text 4"/>
           <p:cNvSpPr/>
           <p:nvPr/>
         </p:nvSpPr>
         <p:spPr>
           <a:xfrm>
-            <a:off x="7660532" y="1755648"/>
-            <a:ext cx="3744779" cy="310896"/>
-          </a:xfrm>
-          <a:prstGeom prst="rect">
-            <a:avLst/>
-          </a:prstGeom>
-          <a:noFill/>
-          <a:ln/>
-        </p:spPr>
-        <p:txBody>
-          <a:bodyPr wrap="square" lIns="0" tIns="0" rIns="0" bIns="0" rtlCol="0" anchor="ctr"/>
-          <a:lstStyle/>
-          <a:p>
-            <a:pPr indent="0" marL="0">
-              <a:buNone/>
-            </a:pPr>
-            <a:r>
-              <a:rPr lang="en-US" sz="1100" b="1" spc="140" kern="0" dirty="0">
-                <a:solidFill>
-                  <a:srgbClr val="455A64"/>
-                </a:solidFill>
-                <a:latin typeface="Calibri" pitchFamily="34" charset="0"/>
-                <a:ea typeface="Calibri" pitchFamily="34" charset="-122"/>
-                <a:cs typeface="Calibri" pitchFamily="34" charset="-120"/>
-              </a:rPr>
-              <a:t>TEACHING POINT</a:t>
-            </a:r>
-            <a:endParaRPr lang="en-US" sz="1100" dirty="0"/>
-          </a:p>
-        </p:txBody>
-      </p:sp>
-      <p:sp>
-        <p:nvSpPr>
-          <p:cNvPr id="7" name="Text 5"/>
-          <p:cNvSpPr/>
-          <p:nvPr/>
-        </p:nvSpPr>
-        <p:spPr>
-          <a:xfrm>
-            <a:off x="7660532" y="2121408"/>
-            <a:ext cx="3726491" cy="3291840"/>
+            <a:off x="841248" y="2029968"/>
+            <a:ext cx="10509199" cy="2148840"/>
           </a:xfrm>
           <a:prstGeom prst="rect">
             <a:avLst/>
@@ -5946,12 +6076,12 @@
           <a:p>
             <a:pPr algn="l" indent="0" marL="0">
               <a:lnSpc>
-                <a:spcPct val="110000"/>
+                <a:spcPct val="108000"/>
               </a:lnSpc>
               <a:buNone/>
             </a:pPr>
             <a:r>
-              <a:rPr lang="en-US" sz="1350" dirty="0">
+              <a:rPr lang="en-US" sz="1450" dirty="0">
                 <a:solidFill>
                   <a:srgbClr val="33444F"/>
                 </a:solidFill>
@@ -5959,15 +6089,122 @@
                 <a:ea typeface="Calibri" pitchFamily="34" charset="-122"/>
                 <a:cs typeface="Calibri" pitchFamily="34" charset="-120"/>
               </a:rPr>
-              <a:t>Delta checks are a safety net for sample mix-ups and artifacts — a large unexplained change should be reconciled, not released.</a:t>
-            </a:r>
-            <a:endParaRPr lang="en-US" sz="1350" dirty="0"/>
-          </a:p>
-        </p:txBody>
+              <a:t>A single control value falls beyond +3 SD with no trend; the next run is in control.</a:t>
+            </a:r>
+            <a:endParaRPr lang="en-US" sz="1450" dirty="0"/>
+          </a:p>
+        </p:txBody>
+      </p:sp>
+      <p:sp>
+        <p:nvSpPr>
+          <p:cNvPr id="7" name="Shape 5"/>
+          <p:cNvSpPr/>
+          <p:nvPr/>
+        </p:nvSpPr>
+        <p:spPr>
+          <a:xfrm>
+            <a:off x="566928" y="4553712"/>
+            <a:ext cx="11057839" cy="1325880"/>
+          </a:xfrm>
+          <a:prstGeom prst="roundRect">
+            <a:avLst>
+              <a:gd name="adj" fmla="val 6207"/>
+            </a:avLst>
+          </a:prstGeom>
+          <a:solidFill>
+            <a:srgbClr val="0E3A5F"/>
+          </a:solidFill>
+          <a:ln/>
+          <a:effectLst>
+            <a:outerShdw sx="100000" sy="100000" kx="0" ky="0" algn="bl" rotWithShape="0" blurRad="88900" dist="25400" dir="5400000">
+              <a:srgbClr val="22303C">
+                <a:alpha val="12000"/>
+              </a:srgbClr>
+            </a:outerShdw>
+          </a:effectLst>
+        </p:spPr>
       </p:sp>
       <p:sp>
         <p:nvSpPr>
           <p:cNvPr id="8" name="Text 6"/>
+          <p:cNvSpPr/>
+          <p:nvPr/>
+        </p:nvSpPr>
+        <p:spPr>
+          <a:xfrm>
+            <a:off x="822960" y="4681728"/>
+            <a:ext cx="640080" cy="960120"/>
+          </a:xfrm>
+          <a:prstGeom prst="rect">
+            <a:avLst/>
+          </a:prstGeom>
+          <a:noFill/>
+          <a:ln/>
+        </p:spPr>
+        <p:txBody>
+          <a:bodyPr wrap="square" lIns="0" tIns="0" rIns="0" bIns="0" rtlCol="0" anchor="ctr"/>
+          <a:lstStyle/>
+          <a:p>
+            <a:pPr algn="ctr" indent="0" marL="0">
+              <a:buNone/>
+            </a:pPr>
+            <a:r>
+              <a:rPr lang="en-US" sz="4000" b="1" dirty="0">
+                <a:solidFill>
+                  <a:srgbClr val="455A64"/>
+                </a:solidFill>
+                <a:latin typeface="Calibri" pitchFamily="34" charset="0"/>
+                <a:ea typeface="Calibri" pitchFamily="34" charset="-122"/>
+                <a:cs typeface="Calibri" pitchFamily="34" charset="-120"/>
+              </a:rPr>
+              <a:t>?</a:t>
+            </a:r>
+            <a:endParaRPr lang="en-US" sz="4000" dirty="0"/>
+          </a:p>
+        </p:txBody>
+      </p:sp>
+      <p:sp>
+        <p:nvSpPr>
+          <p:cNvPr id="9" name="Text 7"/>
+          <p:cNvSpPr/>
+          <p:nvPr/>
+        </p:nvSpPr>
+        <p:spPr>
+          <a:xfrm>
+            <a:off x="1618488" y="4553712"/>
+            <a:ext cx="9686239" cy="1325880"/>
+          </a:xfrm>
+          <a:prstGeom prst="rect">
+            <a:avLst/>
+          </a:prstGeom>
+          <a:noFill/>
+          <a:ln/>
+        </p:spPr>
+        <p:txBody>
+          <a:bodyPr wrap="square" lIns="0" tIns="0" rIns="0" bIns="0" rtlCol="0" anchor="ctr"/>
+          <a:lstStyle/>
+          <a:p>
+            <a:pPr algn="l" indent="0" marL="0">
+              <a:buNone/>
+            </a:pPr>
+            <a:r>
+              <a:rPr lang="en-US" sz="1500" b="1" dirty="0">
+                <a:solidFill>
+                  <a:srgbClr val="FFFFFF"/>
+                </a:solidFill>
+                <a:latin typeface="Calibri" pitchFamily="34" charset="0"/>
+                <a:ea typeface="Calibri" pitchFamily="34" charset="-122"/>
+                <a:cs typeface="Calibri" pitchFamily="34" charset="-120"/>
+              </a:rPr>
+              <a:t>Which rule applies and what error type is suggested?</a:t>
+            </a:r>
+            <a:endParaRPr lang="en-US" sz="1500" dirty="0"/>
+          </a:p>
+        </p:txBody>
+      </p:sp>
+      <p:sp>
+        <p:nvSpPr>
+          <p:cNvPr id="10" name="Text 8"/>
           <p:cNvSpPr/>
           <p:nvPr/>
         </p:nvSpPr>
@@ -6006,7 +6243,7 @@
       </p:sp>
       <p:sp>
         <p:nvSpPr>
-          <p:cNvPr id="9" name="Text 7"/>
+          <p:cNvPr id="11" name="Text 9"/>
           <p:cNvSpPr/>
           <p:nvPr/>
         </p:nvSpPr>
@@ -6136,7 +6373,7 @@
                 <a:ea typeface="Calibri" pitchFamily="34" charset="-122"/>
                 <a:cs typeface="Calibri" pitchFamily="34" charset="-120"/>
               </a:rPr>
-              <a:t>LAB MANAGEMENT &amp; QUALITY   ·   BOARD REVIEW  ·  Q1</a:t>
+              <a:t>LAB MANAGEMENT &amp; QUALITY   ·   CASE 2  ·  RESOLUTION</a:t>
             </a:r>
             <a:endParaRPr lang="en-US" sz="1100" dirty="0"/>
           </a:p>
@@ -6167,7 +6404,7 @@
               <a:buNone/>
             </a:pPr>
             <a:r>
-              <a:rPr lang="en-US" sz="2600" b="1" dirty="0">
+              <a:rPr lang="en-US" sz="3000" b="1" dirty="0">
                 <a:solidFill>
                   <a:srgbClr val="0E3A5F"/>
                 </a:solidFill>
@@ -6175,9 +6412,9 @@
                 <a:ea typeface="Calibri" pitchFamily="34" charset="-122"/>
                 <a:cs typeface="Calibri" pitchFamily="34" charset="-120"/>
               </a:rPr>
-              <a:t>Board-Style Review</a:t>
-            </a:r>
-            <a:endParaRPr lang="en-US" sz="2600" dirty="0"/>
+              <a:t>Case 2: Random Error</a:t>
+            </a:r>
+            <a:endParaRPr lang="en-US" sz="3000" dirty="0"/>
           </a:p>
         </p:txBody>
       </p:sp>
@@ -6189,8 +6426,8 @@
         </p:nvSpPr>
         <p:spPr>
           <a:xfrm>
-            <a:off x="566928" y="1417320"/>
-            <a:ext cx="11057839" cy="914400"/>
+            <a:off x="566928" y="1554480"/>
+            <a:ext cx="6413547" cy="4023360"/>
           </a:xfrm>
           <a:prstGeom prst="rect">
             <a:avLst/>
@@ -6202,14 +6439,15 @@
           <a:bodyPr wrap="square" lIns="0" tIns="0" rIns="0" bIns="0" rtlCol="0" anchor="t"/>
           <a:lstStyle/>
           <a:p>
-            <a:pPr algn="l" indent="0" marL="0">
-              <a:lnSpc>
-                <a:spcPct val="105000"/>
-              </a:lnSpc>
-              <a:buNone/>
-            </a:pPr>
-            <a:r>
-              <a:rPr lang="en-US" sz="1450" b="1" dirty="0">
+            <a:pPr algn="l" marL="177800" indent="-177800">
+              <a:spcAft>
+                <a:spcPts val="900"/>
+              </a:spcAft>
+              <a:buSzPct val="100000"/>
+              <a:buChar char="•"/>
+            </a:pPr>
+            <a:r>
+              <a:rPr lang="en-US" sz="1400" b="1" dirty="0">
                 <a:solidFill>
                   <a:srgbClr val="1B2A38"/>
                 </a:solidFill>
@@ -6217,41 +6455,20 @@
                 <a:ea typeface="Calibri" pitchFamily="34" charset="-122"/>
                 <a:cs typeface="Calibri" pitchFamily="34" charset="-120"/>
               </a:rPr>
-              <a:t>On a Levey-Jennings chart, a gradual upward drift of the control mean over two weeks indicates:</a:t>
-            </a:r>
-            <a:endParaRPr lang="en-US" sz="1450" dirty="0"/>
-          </a:p>
-        </p:txBody>
-      </p:sp>
-      <p:sp>
-        <p:nvSpPr>
-          <p:cNvPr id="5" name="Text 3"/>
-          <p:cNvSpPr/>
-          <p:nvPr/>
-        </p:nvSpPr>
-        <p:spPr>
-          <a:xfrm>
-            <a:off x="658368" y="2395728"/>
-            <a:ext cx="6192390" cy="3017520"/>
-          </a:xfrm>
-          <a:prstGeom prst="rect">
-            <a:avLst/>
-          </a:prstGeom>
-          <a:noFill/>
-          <a:ln/>
-        </p:spPr>
-        <p:txBody>
-          <a:bodyPr wrap="square" lIns="0" tIns="0" rIns="0" bIns="0" rtlCol="0" anchor="t"/>
-          <a:lstStyle/>
-          <a:p>
-            <a:pPr algn="l" indent="0" marL="0">
+              <a:t>A single point beyond ±3 SD violates 1_3s, suggesting random error.</a:t>
+            </a:r>
+            <a:endParaRPr lang="en-US" sz="1400" dirty="0"/>
+          </a:p>
+          <a:p>
+            <a:pPr algn="l" marL="177800" indent="-177800">
               <a:spcAft>
-                <a:spcPts val="600"/>
+                <a:spcPts val="900"/>
               </a:spcAft>
-              <a:buNone/>
-            </a:pPr>
-            <a:r>
-              <a:rPr lang="en-US" sz="1350" dirty="0">
+              <a:buSzPct val="100000"/>
+              <a:buChar char="•"/>
+            </a:pPr>
+            <a:r>
+              <a:rPr lang="en-US" sz="1400" dirty="0">
                 <a:solidFill>
                   <a:srgbClr val="33444F"/>
                 </a:solidFill>
@@ -6259,39 +6476,41 @@
                 <a:ea typeface="Calibri" pitchFamily="34" charset="-122"/>
                 <a:cs typeface="Calibri" pitchFamily="34" charset="-120"/>
               </a:rPr>
-              <a:t>A. Random error</a:t>
-            </a:r>
-            <a:endParaRPr lang="en-US" sz="1350" dirty="0"/>
-          </a:p>
-          <a:p>
-            <a:pPr algn="l" indent="0" marL="0">
+              <a:t>Likely causes: a bubble, pipetting error, or transient instability.</a:t>
+            </a:r>
+            <a:endParaRPr lang="en-US" sz="1400" dirty="0"/>
+          </a:p>
+          <a:p>
+            <a:pPr algn="l" marL="177800" indent="-177800">
               <a:spcAft>
-                <a:spcPts val="600"/>
+                <a:spcPts val="900"/>
               </a:spcAft>
-              <a:buNone/>
-            </a:pPr>
-            <a:r>
-              <a:rPr lang="en-US" sz="1350" b="1" dirty="0">
-                <a:solidFill>
-                  <a:srgbClr val="2C3A41"/>
-                </a:solidFill>
-                <a:latin typeface="Calibri" pitchFamily="34" charset="0"/>
-                <a:ea typeface="Calibri" pitchFamily="34" charset="-122"/>
-                <a:cs typeface="Calibri" pitchFamily="34" charset="-120"/>
-              </a:rPr>
-              <a:t>B. A trend (systematic error, e.g., reagent deterioration)</a:t>
-            </a:r>
-            <a:endParaRPr lang="en-US" sz="1350" dirty="0"/>
-          </a:p>
-          <a:p>
-            <a:pPr algn="l" indent="0" marL="0">
+              <a:buSzPct val="100000"/>
+              <a:buChar char="•"/>
+            </a:pPr>
+            <a:r>
+              <a:rPr lang="en-US" sz="1400" dirty="0">
+                <a:solidFill>
+                  <a:srgbClr val="33444F"/>
+                </a:solidFill>
+                <a:latin typeface="Calibri" pitchFamily="34" charset="0"/>
+                <a:ea typeface="Calibri" pitchFamily="34" charset="-122"/>
+                <a:cs typeface="Calibri" pitchFamily="34" charset="-120"/>
+              </a:rPr>
+              <a:t>Investigate, repeat, and document.</a:t>
+            </a:r>
+            <a:endParaRPr lang="en-US" sz="1400" dirty="0"/>
+          </a:p>
+          <a:p>
+            <a:pPr algn="l" marL="177800" indent="-177800">
               <a:spcAft>
-                <a:spcPts val="600"/>
+                <a:spcPts val="900"/>
               </a:spcAft>
-              <a:buNone/>
-            </a:pPr>
-            <a:r>
-              <a:rPr lang="en-US" sz="1350" dirty="0">
+              <a:buSzPct val="100000"/>
+              <a:buChar char="•"/>
+            </a:pPr>
+            <a:r>
+              <a:rPr lang="en-US" sz="1400" dirty="0">
                 <a:solidFill>
                   <a:srgbClr val="33444F"/>
                 </a:solidFill>
@@ -6299,66 +6518,26 @@
                 <a:ea typeface="Calibri" pitchFamily="34" charset="-122"/>
                 <a:cs typeface="Calibri" pitchFamily="34" charset="-120"/>
               </a:rPr>
-              <a:t>C. Acceptable performance</a:t>
-            </a:r>
-            <a:endParaRPr lang="en-US" sz="1350" dirty="0"/>
-          </a:p>
-          <a:p>
-            <a:pPr algn="l" indent="0" marL="0">
-              <a:spcAft>
-                <a:spcPts val="600"/>
-              </a:spcAft>
-              <a:buNone/>
-            </a:pPr>
-            <a:r>
-              <a:rPr lang="en-US" sz="1350" dirty="0">
-                <a:solidFill>
-                  <a:srgbClr val="33444F"/>
-                </a:solidFill>
-                <a:latin typeface="Calibri" pitchFamily="34" charset="0"/>
-                <a:ea typeface="Calibri" pitchFamily="34" charset="-122"/>
-                <a:cs typeface="Calibri" pitchFamily="34" charset="-120"/>
-              </a:rPr>
-              <a:t>D. A shift from a new lot</a:t>
-            </a:r>
-            <a:endParaRPr lang="en-US" sz="1350" dirty="0"/>
-          </a:p>
-          <a:p>
-            <a:pPr algn="l" indent="0" marL="0">
-              <a:spcAft>
-                <a:spcPts val="600"/>
-              </a:spcAft>
-              <a:buNone/>
-            </a:pPr>
-            <a:r>
-              <a:rPr lang="en-US" sz="1350" dirty="0">
-                <a:solidFill>
-                  <a:srgbClr val="33444F"/>
-                </a:solidFill>
-                <a:latin typeface="Calibri" pitchFamily="34" charset="0"/>
-                <a:ea typeface="Calibri" pitchFamily="34" charset="-122"/>
-                <a:cs typeface="Calibri" pitchFamily="34" charset="-120"/>
-              </a:rPr>
-              <a:t>E. Clerical error</a:t>
-            </a:r>
-            <a:endParaRPr lang="en-US" sz="1350" dirty="0"/>
-          </a:p>
-        </p:txBody>
-      </p:sp>
-      <p:sp>
-        <p:nvSpPr>
-          <p:cNvPr id="6" name="Shape 4"/>
-          <p:cNvSpPr/>
-          <p:nvPr/>
-        </p:nvSpPr>
-        <p:spPr>
-          <a:xfrm>
-            <a:off x="7201632" y="2395728"/>
-            <a:ext cx="4423136" cy="3246120"/>
+              <a:t>If isolated and resolved, controlled results can resume.</a:t>
+            </a:r>
+            <a:endParaRPr lang="en-US" sz="1400" dirty="0"/>
+          </a:p>
+        </p:txBody>
+      </p:sp>
+      <p:sp>
+        <p:nvSpPr>
+          <p:cNvPr id="5" name="Shape 3"/>
+          <p:cNvSpPr/>
+          <p:nvPr/>
+        </p:nvSpPr>
+        <p:spPr>
+          <a:xfrm>
+            <a:off x="7422788" y="1554480"/>
+            <a:ext cx="4201979" cy="3977640"/>
           </a:xfrm>
           <a:prstGeom prst="roundRect">
             <a:avLst>
-              <a:gd name="adj" fmla="val 2535"/>
+              <a:gd name="adj" fmla="val 2069"/>
             </a:avLst>
           </a:prstGeom>
           <a:solidFill>
@@ -6376,67 +6555,53 @@
       </p:sp>
       <p:sp>
         <p:nvSpPr>
+          <p:cNvPr id="6" name="Text 4"/>
+          <p:cNvSpPr/>
+          <p:nvPr/>
+        </p:nvSpPr>
+        <p:spPr>
+          <a:xfrm>
+            <a:off x="7660532" y="1755648"/>
+            <a:ext cx="3744779" cy="310896"/>
+          </a:xfrm>
+          <a:prstGeom prst="rect">
+            <a:avLst/>
+          </a:prstGeom>
+          <a:noFill/>
+          <a:ln/>
+        </p:spPr>
+        <p:txBody>
+          <a:bodyPr wrap="square" lIns="0" tIns="0" rIns="0" bIns="0" rtlCol="0" anchor="ctr"/>
+          <a:lstStyle/>
+          <a:p>
+            <a:pPr indent="0" marL="0">
+              <a:buNone/>
+            </a:pPr>
+            <a:r>
+              <a:rPr lang="en-US" sz="1100" b="1" spc="140" kern="0" dirty="0">
+                <a:solidFill>
+                  <a:srgbClr val="455A64"/>
+                </a:solidFill>
+                <a:latin typeface="Calibri" pitchFamily="34" charset="0"/>
+                <a:ea typeface="Calibri" pitchFamily="34" charset="-122"/>
+                <a:cs typeface="Calibri" pitchFamily="34" charset="-120"/>
+              </a:rPr>
+              <a:t>TEACHING POINT</a:t>
+            </a:r>
+            <a:endParaRPr lang="en-US" sz="1100" dirty="0"/>
+          </a:p>
+        </p:txBody>
+      </p:sp>
+      <p:sp>
+        <p:nvSpPr>
           <p:cNvPr id="7" name="Text 5"/>
           <p:cNvSpPr/>
           <p:nvPr/>
         </p:nvSpPr>
         <p:spPr>
           <a:xfrm>
-            <a:off x="7439376" y="2578608"/>
-            <a:ext cx="3965936" cy="457200"/>
-          </a:xfrm>
-          <a:prstGeom prst="rect">
-            <a:avLst/>
-          </a:prstGeom>
-          <a:noFill/>
-          <a:ln/>
-        </p:spPr>
-        <p:txBody>
-          <a:bodyPr wrap="square" lIns="0" tIns="0" rIns="0" bIns="0" rtlCol="0" anchor="ctr"/>
-          <a:lstStyle/>
-          <a:p>
-            <a:pPr indent="0" marL="0">
-              <a:buNone/>
-            </a:pPr>
-            <a:r>
-              <a:rPr lang="en-US" sz="1500" b="1" dirty="0">
-                <a:solidFill>
-                  <a:srgbClr val="455A64"/>
-                </a:solidFill>
-                <a:latin typeface="Calibri" pitchFamily="34" charset="0"/>
-                <a:ea typeface="Calibri" pitchFamily="34" charset="-122"/>
-                <a:cs typeface="Calibri" pitchFamily="34" charset="-120"/>
-              </a:rPr>
-              <a:t>ANSWER  </a:t>
-            </a:r>
-            <a:pPr indent="0" marL="0">
-              <a:buNone/>
-            </a:pPr>
-            <a:r>
-              <a:rPr lang="en-US" sz="1500" b="1" dirty="0">
-                <a:solidFill>
-                  <a:srgbClr val="1B2A38"/>
-                </a:solidFill>
-                <a:latin typeface="Calibri" pitchFamily="34" charset="0"/>
-                <a:ea typeface="Calibri" pitchFamily="34" charset="-122"/>
-                <a:cs typeface="Calibri" pitchFamily="34" charset="-120"/>
-              </a:rPr>
-              <a:t>B — A trend (systematic error)</a:t>
-            </a:r>
-            <a:endParaRPr lang="en-US" sz="1500" dirty="0"/>
-          </a:p>
-        </p:txBody>
-      </p:sp>
-      <p:sp>
-        <p:nvSpPr>
-          <p:cNvPr id="8" name="Text 6"/>
-          <p:cNvSpPr/>
-          <p:nvPr/>
-        </p:nvSpPr>
-        <p:spPr>
-          <a:xfrm>
-            <a:off x="7439376" y="3127248"/>
-            <a:ext cx="3947648" cy="2377440"/>
+            <a:off x="7660532" y="2121408"/>
+            <a:ext cx="3726491" cy="3291840"/>
           </a:xfrm>
           <a:prstGeom prst="rect">
             <a:avLst/>
@@ -6450,12 +6615,12 @@
           <a:p>
             <a:pPr algn="l" indent="0" marL="0">
               <a:lnSpc>
-                <a:spcPct val="108000"/>
+                <a:spcPct val="110000"/>
               </a:lnSpc>
               <a:buNone/>
             </a:pPr>
             <a:r>
-              <a:rPr lang="en-US" sz="1250" dirty="0">
+              <a:rPr lang="en-US" sz="1350" dirty="0">
                 <a:solidFill>
                   <a:srgbClr val="33444F"/>
                 </a:solidFill>
@@ -6463,15 +6628,15 @@
                 <a:ea typeface="Calibri" pitchFamily="34" charset="-122"/>
                 <a:cs typeface="Calibri" pitchFamily="34" charset="-120"/>
               </a:rPr>
-              <a:t>A progressive drift is a trend, indicating systematic error such as deteriorating reagent or a failing electrode; an abrupt step would be a shift.</a:t>
-            </a:r>
-            <a:endParaRPr lang="en-US" sz="1250" dirty="0"/>
-          </a:p>
-        </p:txBody>
-      </p:sp>
-      <p:sp>
-        <p:nvSpPr>
-          <p:cNvPr id="9" name="Text 7"/>
+              <a:t>1_3s and R_4s flag random error (imprecision) — often a one-off; investigate and repeat before releasing results.</a:t>
+            </a:r>
+            <a:endParaRPr lang="en-US" sz="1350" dirty="0"/>
+          </a:p>
+        </p:txBody>
+      </p:sp>
+      <p:sp>
+        <p:nvSpPr>
+          <p:cNvPr id="8" name="Text 6"/>
           <p:cNvSpPr/>
           <p:nvPr/>
         </p:nvSpPr>
@@ -6510,7 +6675,7 @@
       </p:sp>
       <p:sp>
         <p:nvSpPr>
-          <p:cNvPr id="10" name="Text 8"/>
+          <p:cNvPr id="9" name="Text 7"/>
           <p:cNvSpPr/>
           <p:nvPr/>
         </p:nvSpPr>
@@ -6640,7 +6805,7 @@
                 <a:ea typeface="Calibri" pitchFamily="34" charset="-122"/>
                 <a:cs typeface="Calibri" pitchFamily="34" charset="-120"/>
               </a:rPr>
-              <a:t>LAB MANAGEMENT &amp; QUALITY   ·   BOARD REVIEW  ·  Q2</a:t>
+              <a:t>LAB MANAGEMENT &amp; QUALITY   ·   CASE 3</a:t>
             </a:r>
             <a:endParaRPr lang="en-US" sz="1100" dirty="0"/>
           </a:p>
@@ -6671,7 +6836,7 @@
               <a:buNone/>
             </a:pPr>
             <a:r>
-              <a:rPr lang="en-US" sz="2600" b="1" dirty="0">
+              <a:rPr lang="en-US" sz="3000" b="1" dirty="0">
                 <a:solidFill>
                   <a:srgbClr val="0E3A5F"/>
                 </a:solidFill>
@@ -6679,190 +6844,26 @@
                 <a:ea typeface="Calibri" pitchFamily="34" charset="-122"/>
                 <a:cs typeface="Calibri" pitchFamily="34" charset="-120"/>
               </a:rPr>
-              <a:t>Board-Style Review</a:t>
-            </a:r>
-            <a:endParaRPr lang="en-US" sz="2600" dirty="0"/>
-          </a:p>
-        </p:txBody>
-      </p:sp>
-      <p:sp>
-        <p:nvSpPr>
-          <p:cNvPr id="4" name="Text 2"/>
-          <p:cNvSpPr/>
-          <p:nvPr/>
-        </p:nvSpPr>
-        <p:spPr>
-          <a:xfrm>
-            <a:off x="566928" y="1417320"/>
-            <a:ext cx="11057839" cy="914400"/>
-          </a:xfrm>
-          <a:prstGeom prst="rect">
-            <a:avLst/>
-          </a:prstGeom>
-          <a:noFill/>
-          <a:ln/>
-        </p:spPr>
-        <p:txBody>
-          <a:bodyPr wrap="square" lIns="0" tIns="0" rIns="0" bIns="0" rtlCol="0" anchor="t"/>
-          <a:lstStyle/>
-          <a:p>
-            <a:pPr algn="l" indent="0" marL="0">
-              <a:lnSpc>
-                <a:spcPct val="105000"/>
-              </a:lnSpc>
-              <a:buNone/>
-            </a:pPr>
-            <a:r>
-              <a:rPr lang="en-US" sz="1450" b="1" dirty="0">
-                <a:solidFill>
-                  <a:srgbClr val="1B2A38"/>
-                </a:solidFill>
-                <a:latin typeface="Calibri" pitchFamily="34" charset="0"/>
-                <a:ea typeface="Calibri" pitchFamily="34" charset="-122"/>
-                <a:cs typeface="Calibri" pitchFamily="34" charset="-120"/>
-              </a:rPr>
-              <a:t>Proficiency testing samples must be:</a:t>
-            </a:r>
-            <a:endParaRPr lang="en-US" sz="1450" dirty="0"/>
-          </a:p>
-        </p:txBody>
-      </p:sp>
-      <p:sp>
-        <p:nvSpPr>
-          <p:cNvPr id="5" name="Text 3"/>
-          <p:cNvSpPr/>
-          <p:nvPr/>
-        </p:nvSpPr>
-        <p:spPr>
-          <a:xfrm>
-            <a:off x="658368" y="2395728"/>
-            <a:ext cx="6192390" cy="3017520"/>
-          </a:xfrm>
-          <a:prstGeom prst="rect">
-            <a:avLst/>
-          </a:prstGeom>
-          <a:noFill/>
-          <a:ln/>
-        </p:spPr>
-        <p:txBody>
-          <a:bodyPr wrap="square" lIns="0" tIns="0" rIns="0" bIns="0" rtlCol="0" anchor="t"/>
-          <a:lstStyle/>
-          <a:p>
-            <a:pPr algn="l" indent="0" marL="0">
-              <a:spcAft>
-                <a:spcPts val="600"/>
-              </a:spcAft>
-              <a:buNone/>
-            </a:pPr>
-            <a:r>
-              <a:rPr lang="en-US" sz="1350" dirty="0">
-                <a:solidFill>
-                  <a:srgbClr val="33444F"/>
-                </a:solidFill>
-                <a:latin typeface="Calibri" pitchFamily="34" charset="0"/>
-                <a:ea typeface="Calibri" pitchFamily="34" charset="-122"/>
-                <a:cs typeface="Calibri" pitchFamily="34" charset="-120"/>
-              </a:rPr>
-              <a:t>A. Referred to another lab for help</a:t>
-            </a:r>
-            <a:endParaRPr lang="en-US" sz="1350" dirty="0"/>
-          </a:p>
-          <a:p>
-            <a:pPr algn="l" indent="0" marL="0">
-              <a:spcAft>
-                <a:spcPts val="600"/>
-              </a:spcAft>
-              <a:buNone/>
-            </a:pPr>
-            <a:r>
-              <a:rPr lang="en-US" sz="1350" b="1" dirty="0">
-                <a:solidFill>
-                  <a:srgbClr val="2C3A41"/>
-                </a:solidFill>
-                <a:latin typeface="Calibri" pitchFamily="34" charset="0"/>
-                <a:ea typeface="Calibri" pitchFamily="34" charset="-122"/>
-                <a:cs typeface="Calibri" pitchFamily="34" charset="-120"/>
-              </a:rPr>
-              <a:t>B. Treated like routine patient samples, without inter-lab communication</a:t>
-            </a:r>
-            <a:endParaRPr lang="en-US" sz="1350" dirty="0"/>
-          </a:p>
-          <a:p>
-            <a:pPr algn="l" indent="0" marL="0">
-              <a:spcAft>
-                <a:spcPts val="600"/>
-              </a:spcAft>
-              <a:buNone/>
-            </a:pPr>
-            <a:r>
-              <a:rPr lang="en-US" sz="1350" dirty="0">
-                <a:solidFill>
-                  <a:srgbClr val="33444F"/>
-                </a:solidFill>
-                <a:latin typeface="Calibri" pitchFamily="34" charset="0"/>
-                <a:ea typeface="Calibri" pitchFamily="34" charset="-122"/>
-                <a:cs typeface="Calibri" pitchFamily="34" charset="-120"/>
-              </a:rPr>
-              <a:t>C. Run only by the director</a:t>
-            </a:r>
-            <a:endParaRPr lang="en-US" sz="1350" dirty="0"/>
-          </a:p>
-          <a:p>
-            <a:pPr algn="l" indent="0" marL="0">
-              <a:spcAft>
-                <a:spcPts val="600"/>
-              </a:spcAft>
-              <a:buNone/>
-            </a:pPr>
-            <a:r>
-              <a:rPr lang="en-US" sz="1350" dirty="0">
-                <a:solidFill>
-                  <a:srgbClr val="33444F"/>
-                </a:solidFill>
-                <a:latin typeface="Calibri" pitchFamily="34" charset="0"/>
-                <a:ea typeface="Calibri" pitchFamily="34" charset="-122"/>
-                <a:cs typeface="Calibri" pitchFamily="34" charset="-120"/>
-              </a:rPr>
-              <a:t>D. Discarded if abnormal</a:t>
-            </a:r>
-            <a:endParaRPr lang="en-US" sz="1350" dirty="0"/>
-          </a:p>
-          <a:p>
-            <a:pPr algn="l" indent="0" marL="0">
-              <a:spcAft>
-                <a:spcPts val="600"/>
-              </a:spcAft>
-              <a:buNone/>
-            </a:pPr>
-            <a:r>
-              <a:rPr lang="en-US" sz="1350" dirty="0">
-                <a:solidFill>
-                  <a:srgbClr val="33444F"/>
-                </a:solidFill>
-                <a:latin typeface="Calibri" pitchFamily="34" charset="0"/>
-                <a:ea typeface="Calibri" pitchFamily="34" charset="-122"/>
-                <a:cs typeface="Calibri" pitchFamily="34" charset="-120"/>
-              </a:rPr>
-              <a:t>E. Tested in duplicate only for PT</a:t>
-            </a:r>
-            <a:endParaRPr lang="en-US" sz="1350" dirty="0"/>
-          </a:p>
-        </p:txBody>
-      </p:sp>
-      <p:sp>
-        <p:nvSpPr>
-          <p:cNvPr id="6" name="Shape 4"/>
-          <p:cNvSpPr/>
-          <p:nvPr/>
-        </p:nvSpPr>
-        <p:spPr>
-          <a:xfrm>
-            <a:off x="7201632" y="2395728"/>
-            <a:ext cx="4423136" cy="3246120"/>
+              <a:t>Case 3</a:t>
+            </a:r>
+            <a:endParaRPr lang="en-US" sz="3000" dirty="0"/>
+          </a:p>
+        </p:txBody>
+      </p:sp>
+      <p:sp>
+        <p:nvSpPr>
+          <p:cNvPr id="4" name="Shape 2"/>
+          <p:cNvSpPr/>
+          <p:nvPr/>
+        </p:nvSpPr>
+        <p:spPr>
+          <a:xfrm>
+            <a:off x="566928" y="1517904"/>
+            <a:ext cx="11057839" cy="2788920"/>
           </a:xfrm>
           <a:prstGeom prst="roundRect">
             <a:avLst>
-              <a:gd name="adj" fmla="val 2535"/>
+              <a:gd name="adj" fmla="val 2951"/>
             </a:avLst>
           </a:prstGeom>
           <a:solidFill>
@@ -6880,14 +6881,14 @@
       </p:sp>
       <p:sp>
         <p:nvSpPr>
-          <p:cNvPr id="7" name="Text 5"/>
-          <p:cNvSpPr/>
-          <p:nvPr/>
-        </p:nvSpPr>
-        <p:spPr>
-          <a:xfrm>
-            <a:off x="7439376" y="2578608"/>
-            <a:ext cx="3965936" cy="457200"/>
+          <p:cNvPr id="5" name="Text 3"/>
+          <p:cNvSpPr/>
+          <p:nvPr/>
+        </p:nvSpPr>
+        <p:spPr>
+          <a:xfrm>
+            <a:off x="841248" y="1700784"/>
+            <a:ext cx="5486400" cy="292608"/>
           </a:xfrm>
           <a:prstGeom prst="rect">
             <a:avLst/>
@@ -6903,7 +6904,7 @@
               <a:buNone/>
             </a:pPr>
             <a:r>
-              <a:rPr lang="en-US" sz="1500" b="1" dirty="0">
+              <a:rPr lang="en-US" sz="1100" b="1" spc="150" kern="0" dirty="0">
                 <a:solidFill>
                   <a:srgbClr val="455A64"/>
                 </a:solidFill>
@@ -6911,36 +6912,22 @@
                 <a:ea typeface="Calibri" pitchFamily="34" charset="-122"/>
                 <a:cs typeface="Calibri" pitchFamily="34" charset="-120"/>
               </a:rPr>
-              <a:t>ANSWER  </a:t>
-            </a:r>
-            <a:pPr indent="0" marL="0">
-              <a:buNone/>
-            </a:pPr>
-            <a:r>
-              <a:rPr lang="en-US" sz="1500" b="1" dirty="0">
-                <a:solidFill>
-                  <a:srgbClr val="1B2A38"/>
-                </a:solidFill>
-                <a:latin typeface="Calibri" pitchFamily="34" charset="0"/>
-                <a:ea typeface="Calibri" pitchFamily="34" charset="-122"/>
-                <a:cs typeface="Calibri" pitchFamily="34" charset="-120"/>
-              </a:rPr>
-              <a:t>B — Treated like patient samples; no inter-lab sharing</a:t>
-            </a:r>
-            <a:endParaRPr lang="en-US" sz="1500" dirty="0"/>
-          </a:p>
-        </p:txBody>
-      </p:sp>
-      <p:sp>
-        <p:nvSpPr>
-          <p:cNvPr id="8" name="Text 6"/>
-          <p:cNvSpPr/>
-          <p:nvPr/>
-        </p:nvSpPr>
-        <p:spPr>
-          <a:xfrm>
-            <a:off x="7439376" y="3127248"/>
-            <a:ext cx="3947648" cy="2377440"/>
+              <a:t>CLINICAL VIGNETTE</a:t>
+            </a:r>
+            <a:endParaRPr lang="en-US" sz="1100" dirty="0"/>
+          </a:p>
+        </p:txBody>
+      </p:sp>
+      <p:sp>
+        <p:nvSpPr>
+          <p:cNvPr id="6" name="Text 4"/>
+          <p:cNvSpPr/>
+          <p:nvPr/>
+        </p:nvSpPr>
+        <p:spPr>
+          <a:xfrm>
+            <a:off x="841248" y="2029968"/>
+            <a:ext cx="10509199" cy="2148840"/>
           </a:xfrm>
           <a:prstGeom prst="rect">
             <a:avLst/>
@@ -6959,7 +6946,7 @@
               <a:buNone/>
             </a:pPr>
             <a:r>
-              <a:rPr lang="en-US" sz="1250" dirty="0">
+              <a:rPr lang="en-US" sz="1450" dirty="0">
                 <a:solidFill>
                   <a:srgbClr val="33444F"/>
                 </a:solidFill>
@@ -6967,15 +6954,122 @@
                 <a:ea typeface="Calibri" pitchFamily="34" charset="-122"/>
                 <a:cs typeface="Calibri" pitchFamily="34" charset="-120"/>
               </a:rPr>
-              <a:t>PT must reflect routine performance; referring PT samples or sharing results between laboratories is prohibited and a serious violation.</a:t>
-            </a:r>
-            <a:endParaRPr lang="en-US" sz="1250" dirty="0"/>
+              <a:t>The specimen-rejection rate rises sharply on one inpatient unit.</a:t>
+            </a:r>
+            <a:endParaRPr lang="en-US" sz="1450" dirty="0"/>
+          </a:p>
+        </p:txBody>
+      </p:sp>
+      <p:sp>
+        <p:nvSpPr>
+          <p:cNvPr id="7" name="Shape 5"/>
+          <p:cNvSpPr/>
+          <p:nvPr/>
+        </p:nvSpPr>
+        <p:spPr>
+          <a:xfrm>
+            <a:off x="566928" y="4553712"/>
+            <a:ext cx="11057839" cy="1325880"/>
+          </a:xfrm>
+          <a:prstGeom prst="roundRect">
+            <a:avLst>
+              <a:gd name="adj" fmla="val 6207"/>
+            </a:avLst>
+          </a:prstGeom>
+          <a:solidFill>
+            <a:srgbClr val="0E3A5F"/>
+          </a:solidFill>
+          <a:ln/>
+          <a:effectLst>
+            <a:outerShdw sx="100000" sy="100000" kx="0" ky="0" algn="bl" rotWithShape="0" blurRad="88900" dist="25400" dir="5400000">
+              <a:srgbClr val="22303C">
+                <a:alpha val="12000"/>
+              </a:srgbClr>
+            </a:outerShdw>
+          </a:effectLst>
+        </p:spPr>
+      </p:sp>
+      <p:sp>
+        <p:nvSpPr>
+          <p:cNvPr id="8" name="Text 6"/>
+          <p:cNvSpPr/>
+          <p:nvPr/>
+        </p:nvSpPr>
+        <p:spPr>
+          <a:xfrm>
+            <a:off x="822960" y="4681728"/>
+            <a:ext cx="640080" cy="960120"/>
+          </a:xfrm>
+          <a:prstGeom prst="rect">
+            <a:avLst/>
+          </a:prstGeom>
+          <a:noFill/>
+          <a:ln/>
+        </p:spPr>
+        <p:txBody>
+          <a:bodyPr wrap="square" lIns="0" tIns="0" rIns="0" bIns="0" rtlCol="0" anchor="ctr"/>
+          <a:lstStyle/>
+          <a:p>
+            <a:pPr algn="ctr" indent="0" marL="0">
+              <a:buNone/>
+            </a:pPr>
+            <a:r>
+              <a:rPr lang="en-US" sz="4000" b="1" dirty="0">
+                <a:solidFill>
+                  <a:srgbClr val="455A64"/>
+                </a:solidFill>
+                <a:latin typeface="Calibri" pitchFamily="34" charset="0"/>
+                <a:ea typeface="Calibri" pitchFamily="34" charset="-122"/>
+                <a:cs typeface="Calibri" pitchFamily="34" charset="-120"/>
+              </a:rPr>
+              <a:t>?</a:t>
+            </a:r>
+            <a:endParaRPr lang="en-US" sz="4000" dirty="0"/>
           </a:p>
         </p:txBody>
       </p:sp>
       <p:sp>
         <p:nvSpPr>
           <p:cNvPr id="9" name="Text 7"/>
+          <p:cNvSpPr/>
+          <p:nvPr/>
+        </p:nvSpPr>
+        <p:spPr>
+          <a:xfrm>
+            <a:off x="1618488" y="4553712"/>
+            <a:ext cx="9686239" cy="1325880"/>
+          </a:xfrm>
+          <a:prstGeom prst="rect">
+            <a:avLst/>
+          </a:prstGeom>
+          <a:noFill/>
+          <a:ln/>
+        </p:spPr>
+        <p:txBody>
+          <a:bodyPr wrap="square" lIns="0" tIns="0" rIns="0" bIns="0" rtlCol="0" anchor="ctr"/>
+          <a:lstStyle/>
+          <a:p>
+            <a:pPr algn="l" indent="0" marL="0">
+              <a:buNone/>
+            </a:pPr>
+            <a:r>
+              <a:rPr lang="en-US" sz="1500" b="1" dirty="0">
+                <a:solidFill>
+                  <a:srgbClr val="FFFFFF"/>
+                </a:solidFill>
+                <a:latin typeface="Calibri" pitchFamily="34" charset="0"/>
+                <a:ea typeface="Calibri" pitchFamily="34" charset="-122"/>
+                <a:cs typeface="Calibri" pitchFamily="34" charset="-120"/>
+              </a:rPr>
+              <a:t>How should a quality program respond?</a:t>
+            </a:r>
+            <a:endParaRPr lang="en-US" sz="1500" dirty="0"/>
+          </a:p>
+        </p:txBody>
+      </p:sp>
+      <p:sp>
+        <p:nvSpPr>
+          <p:cNvPr id="10" name="Text 8"/>
           <p:cNvSpPr/>
           <p:nvPr/>
         </p:nvSpPr>
@@ -7014,7 +7108,7 @@
       </p:sp>
       <p:sp>
         <p:nvSpPr>
-          <p:cNvPr id="10" name="Text 8"/>
+          <p:cNvPr id="11" name="Text 9"/>
           <p:cNvSpPr/>
           <p:nvPr/>
         </p:nvSpPr>
@@ -7144,7 +7238,7 @@
                 <a:ea typeface="Calibri" pitchFamily="34" charset="-122"/>
                 <a:cs typeface="Calibri" pitchFamily="34" charset="-120"/>
               </a:rPr>
-              <a:t>LAB MANAGEMENT &amp; QUALITY   ·   BOARD REVIEW  ·  Q3</a:t>
+              <a:t>LAB MANAGEMENT &amp; QUALITY   ·   CASE 3  ·  RESOLUTION</a:t>
             </a:r>
             <a:endParaRPr lang="en-US" sz="1100" dirty="0"/>
           </a:p>
@@ -7175,7 +7269,7 @@
               <a:buNone/>
             </a:pPr>
             <a:r>
-              <a:rPr lang="en-US" sz="2600" b="1" dirty="0">
+              <a:rPr lang="en-US" sz="3000" b="1" dirty="0">
                 <a:solidFill>
                   <a:srgbClr val="0E3A5F"/>
                 </a:solidFill>
@@ -7183,9 +7277,9 @@
                 <a:ea typeface="Calibri" pitchFamily="34" charset="-122"/>
                 <a:cs typeface="Calibri" pitchFamily="34" charset="-120"/>
               </a:rPr>
-              <a:t>Board-Style Review</a:t>
-            </a:r>
-            <a:endParaRPr lang="en-US" sz="2600" dirty="0"/>
+              <a:t>Case 3: A Pre-Analytic Indicator</a:t>
+            </a:r>
+            <a:endParaRPr lang="en-US" sz="3000" dirty="0"/>
           </a:p>
         </p:txBody>
       </p:sp>
@@ -7197,8 +7291,8 @@
         </p:nvSpPr>
         <p:spPr>
           <a:xfrm>
-            <a:off x="566928" y="1417320"/>
-            <a:ext cx="11057839" cy="914400"/>
+            <a:off x="566928" y="1554480"/>
+            <a:ext cx="6413547" cy="4023360"/>
           </a:xfrm>
           <a:prstGeom prst="rect">
             <a:avLst/>
@@ -7210,14 +7304,15 @@
           <a:bodyPr wrap="square" lIns="0" tIns="0" rIns="0" bIns="0" rtlCol="0" anchor="t"/>
           <a:lstStyle/>
           <a:p>
-            <a:pPr algn="l" indent="0" marL="0">
-              <a:lnSpc>
-                <a:spcPct val="105000"/>
-              </a:lnSpc>
-              <a:buNone/>
-            </a:pPr>
-            <a:r>
-              <a:rPr lang="en-US" sz="1450" b="1" dirty="0">
+            <a:pPr algn="l" marL="177800" indent="-177800">
+              <a:spcAft>
+                <a:spcPts val="900"/>
+              </a:spcAft>
+              <a:buSzPct val="100000"/>
+              <a:buChar char="•"/>
+            </a:pPr>
+            <a:r>
+              <a:rPr lang="en-US" sz="1400" b="1" dirty="0">
                 <a:solidFill>
                   <a:srgbClr val="1B2A38"/>
                 </a:solidFill>
@@ -7225,41 +7320,20 @@
                 <a:ea typeface="Calibri" pitchFamily="34" charset="-122"/>
                 <a:cs typeface="Calibri" pitchFamily="34" charset="-120"/>
               </a:rPr>
-              <a:t>A delta check is most useful for detecting:</a:t>
-            </a:r>
-            <a:endParaRPr lang="en-US" sz="1450" dirty="0"/>
-          </a:p>
-        </p:txBody>
-      </p:sp>
-      <p:sp>
-        <p:nvSpPr>
-          <p:cNvPr id="5" name="Text 3"/>
-          <p:cNvSpPr/>
-          <p:nvPr/>
-        </p:nvSpPr>
-        <p:spPr>
-          <a:xfrm>
-            <a:off x="658368" y="2395728"/>
-            <a:ext cx="6192390" cy="3017520"/>
-          </a:xfrm>
-          <a:prstGeom prst="rect">
-            <a:avLst/>
-          </a:prstGeom>
-          <a:noFill/>
-          <a:ln/>
-        </p:spPr>
-        <p:txBody>
-          <a:bodyPr wrap="square" lIns="0" tIns="0" rIns="0" bIns="0" rtlCol="0" anchor="t"/>
-          <a:lstStyle/>
-          <a:p>
-            <a:pPr algn="l" indent="0" marL="0">
+              <a:t>A rising rejection rate is a pre-analytic quality signal warranting investigation.</a:t>
+            </a:r>
+            <a:endParaRPr lang="en-US" sz="1400" dirty="0"/>
+          </a:p>
+          <a:p>
+            <a:pPr algn="l" marL="177800" indent="-177800">
               <a:spcAft>
-                <a:spcPts val="600"/>
+                <a:spcPts val="900"/>
               </a:spcAft>
-              <a:buNone/>
-            </a:pPr>
-            <a:r>
-              <a:rPr lang="en-US" sz="1350" dirty="0">
+              <a:buSzPct val="100000"/>
+              <a:buChar char="•"/>
+            </a:pPr>
+            <a:r>
+              <a:rPr lang="en-US" sz="1400" dirty="0">
                 <a:solidFill>
                   <a:srgbClr val="33444F"/>
                 </a:solidFill>
@@ -7267,39 +7341,41 @@
                 <a:ea typeface="Calibri" pitchFamily="34" charset="-122"/>
                 <a:cs typeface="Calibri" pitchFamily="34" charset="-120"/>
               </a:rPr>
-              <a:t>A. A new reagent lot</a:t>
-            </a:r>
-            <a:endParaRPr lang="en-US" sz="1350" dirty="0"/>
-          </a:p>
-          <a:p>
-            <a:pPr algn="l" indent="0" marL="0">
+              <a:t>Use root-cause analysis (collection technique, labeling, training).</a:t>
+            </a:r>
+            <a:endParaRPr lang="en-US" sz="1400" dirty="0"/>
+          </a:p>
+          <a:p>
+            <a:pPr algn="l" marL="177800" indent="-177800">
               <a:spcAft>
-                <a:spcPts val="600"/>
+                <a:spcPts val="900"/>
               </a:spcAft>
-              <a:buNone/>
-            </a:pPr>
-            <a:r>
-              <a:rPr lang="en-US" sz="1350" b="1" dirty="0">
-                <a:solidFill>
-                  <a:srgbClr val="2C3A41"/>
-                </a:solidFill>
-                <a:latin typeface="Calibri" pitchFamily="34" charset="0"/>
-                <a:ea typeface="Calibri" pitchFamily="34" charset="-122"/>
-                <a:cs typeface="Calibri" pitchFamily="34" charset="-120"/>
-              </a:rPr>
-              <a:t>B. Sample misidentification or a large unexplained change</a:t>
-            </a:r>
-            <a:endParaRPr lang="en-US" sz="1350" dirty="0"/>
-          </a:p>
-          <a:p>
-            <a:pPr algn="l" indent="0" marL="0">
+              <a:buSzPct val="100000"/>
+              <a:buChar char="•"/>
+            </a:pPr>
+            <a:r>
+              <a:rPr lang="en-US" sz="1400" dirty="0">
+                <a:solidFill>
+                  <a:srgbClr val="33444F"/>
+                </a:solidFill>
+                <a:latin typeface="Calibri" pitchFamily="34" charset="0"/>
+                <a:ea typeface="Calibri" pitchFamily="34" charset="-122"/>
+                <a:cs typeface="Calibri" pitchFamily="34" charset="-120"/>
+              </a:rPr>
+              <a:t>Apply a PDCA improvement cycle and re-measure.</a:t>
+            </a:r>
+            <a:endParaRPr lang="en-US" sz="1400" dirty="0"/>
+          </a:p>
+          <a:p>
+            <a:pPr algn="l" marL="177800" indent="-177800">
               <a:spcAft>
-                <a:spcPts val="600"/>
+                <a:spcPts val="900"/>
               </a:spcAft>
-              <a:buNone/>
-            </a:pPr>
-            <a:r>
-              <a:rPr lang="en-US" sz="1350" dirty="0">
+              <a:buSzPct val="100000"/>
+              <a:buChar char="•"/>
+            </a:pPr>
+            <a:r>
+              <a:rPr lang="en-US" sz="1400" dirty="0">
                 <a:solidFill>
                   <a:srgbClr val="33444F"/>
                 </a:solidFill>
@@ -7307,66 +7383,26 @@
                 <a:ea typeface="Calibri" pitchFamily="34" charset="-122"/>
                 <a:cs typeface="Calibri" pitchFamily="34" charset="-120"/>
               </a:rPr>
-              <a:t>C. Calibration drift</a:t>
-            </a:r>
-            <a:endParaRPr lang="en-US" sz="1350" dirty="0"/>
-          </a:p>
-          <a:p>
-            <a:pPr algn="l" indent="0" marL="0">
-              <a:spcAft>
-                <a:spcPts val="600"/>
-              </a:spcAft>
-              <a:buNone/>
-            </a:pPr>
-            <a:r>
-              <a:rPr lang="en-US" sz="1350" dirty="0">
-                <a:solidFill>
-                  <a:srgbClr val="33444F"/>
-                </a:solidFill>
-                <a:latin typeface="Calibri" pitchFamily="34" charset="0"/>
-                <a:ea typeface="Calibri" pitchFamily="34" charset="-122"/>
-                <a:cs typeface="Calibri" pitchFamily="34" charset="-120"/>
-              </a:rPr>
-              <a:t>D. Proficiency testing failure</a:t>
-            </a:r>
-            <a:endParaRPr lang="en-US" sz="1350" dirty="0"/>
-          </a:p>
-          <a:p>
-            <a:pPr algn="l" indent="0" marL="0">
-              <a:spcAft>
-                <a:spcPts val="600"/>
-              </a:spcAft>
-              <a:buNone/>
-            </a:pPr>
-            <a:r>
-              <a:rPr lang="en-US" sz="1350" dirty="0">
-                <a:solidFill>
-                  <a:srgbClr val="33444F"/>
-                </a:solidFill>
-                <a:latin typeface="Calibri" pitchFamily="34" charset="0"/>
-                <a:ea typeface="Calibri" pitchFamily="34" charset="-122"/>
-                <a:cs typeface="Calibri" pitchFamily="34" charset="-120"/>
-              </a:rPr>
-              <a:t>E. Reference interval errors</a:t>
-            </a:r>
-            <a:endParaRPr lang="en-US" sz="1350" dirty="0"/>
-          </a:p>
-        </p:txBody>
-      </p:sp>
-      <p:sp>
-        <p:nvSpPr>
-          <p:cNvPr id="6" name="Shape 4"/>
-          <p:cNvSpPr/>
-          <p:nvPr/>
-        </p:nvSpPr>
-        <p:spPr>
-          <a:xfrm>
-            <a:off x="7201632" y="2395728"/>
-            <a:ext cx="4423136" cy="3246120"/>
+              <a:t>Most errors are pre-analytic — quality must reach beyond the bench.</a:t>
+            </a:r>
+            <a:endParaRPr lang="en-US" sz="1400" dirty="0"/>
+          </a:p>
+        </p:txBody>
+      </p:sp>
+      <p:sp>
+        <p:nvSpPr>
+          <p:cNvPr id="5" name="Shape 3"/>
+          <p:cNvSpPr/>
+          <p:nvPr/>
+        </p:nvSpPr>
+        <p:spPr>
+          <a:xfrm>
+            <a:off x="7422788" y="1554480"/>
+            <a:ext cx="4201979" cy="3977640"/>
           </a:xfrm>
           <a:prstGeom prst="roundRect">
             <a:avLst>
-              <a:gd name="adj" fmla="val 2535"/>
+              <a:gd name="adj" fmla="val 2069"/>
             </a:avLst>
           </a:prstGeom>
           <a:solidFill>
@@ -7384,67 +7420,53 @@
       </p:sp>
       <p:sp>
         <p:nvSpPr>
+          <p:cNvPr id="6" name="Text 4"/>
+          <p:cNvSpPr/>
+          <p:nvPr/>
+        </p:nvSpPr>
+        <p:spPr>
+          <a:xfrm>
+            <a:off x="7660532" y="1755648"/>
+            <a:ext cx="3744779" cy="310896"/>
+          </a:xfrm>
+          <a:prstGeom prst="rect">
+            <a:avLst/>
+          </a:prstGeom>
+          <a:noFill/>
+          <a:ln/>
+        </p:spPr>
+        <p:txBody>
+          <a:bodyPr wrap="square" lIns="0" tIns="0" rIns="0" bIns="0" rtlCol="0" anchor="ctr"/>
+          <a:lstStyle/>
+          <a:p>
+            <a:pPr indent="0" marL="0">
+              <a:buNone/>
+            </a:pPr>
+            <a:r>
+              <a:rPr lang="en-US" sz="1100" b="1" spc="140" kern="0" dirty="0">
+                <a:solidFill>
+                  <a:srgbClr val="455A64"/>
+                </a:solidFill>
+                <a:latin typeface="Calibri" pitchFamily="34" charset="0"/>
+                <a:ea typeface="Calibri" pitchFamily="34" charset="-122"/>
+                <a:cs typeface="Calibri" pitchFamily="34" charset="-120"/>
+              </a:rPr>
+              <a:t>TEACHING POINT</a:t>
+            </a:r>
+            <a:endParaRPr lang="en-US" sz="1100" dirty="0"/>
+          </a:p>
+        </p:txBody>
+      </p:sp>
+      <p:sp>
+        <p:nvSpPr>
           <p:cNvPr id="7" name="Text 5"/>
           <p:cNvSpPr/>
           <p:nvPr/>
         </p:nvSpPr>
         <p:spPr>
           <a:xfrm>
-            <a:off x="7439376" y="2578608"/>
-            <a:ext cx="3965936" cy="457200"/>
-          </a:xfrm>
-          <a:prstGeom prst="rect">
-            <a:avLst/>
-          </a:prstGeom>
-          <a:noFill/>
-          <a:ln/>
-        </p:spPr>
-        <p:txBody>
-          <a:bodyPr wrap="square" lIns="0" tIns="0" rIns="0" bIns="0" rtlCol="0" anchor="ctr"/>
-          <a:lstStyle/>
-          <a:p>
-            <a:pPr indent="0" marL="0">
-              <a:buNone/>
-            </a:pPr>
-            <a:r>
-              <a:rPr lang="en-US" sz="1500" b="1" dirty="0">
-                <a:solidFill>
-                  <a:srgbClr val="455A64"/>
-                </a:solidFill>
-                <a:latin typeface="Calibri" pitchFamily="34" charset="0"/>
-                <a:ea typeface="Calibri" pitchFamily="34" charset="-122"/>
-                <a:cs typeface="Calibri" pitchFamily="34" charset="-120"/>
-              </a:rPr>
-              <a:t>ANSWER  </a:t>
-            </a:r>
-            <a:pPr indent="0" marL="0">
-              <a:buNone/>
-            </a:pPr>
-            <a:r>
-              <a:rPr lang="en-US" sz="1500" b="1" dirty="0">
-                <a:solidFill>
-                  <a:srgbClr val="1B2A38"/>
-                </a:solidFill>
-                <a:latin typeface="Calibri" pitchFamily="34" charset="0"/>
-                <a:ea typeface="Calibri" pitchFamily="34" charset="-122"/>
-                <a:cs typeface="Calibri" pitchFamily="34" charset="-120"/>
-              </a:rPr>
-              <a:t>B — Sample mix-ups / large unexplained changes</a:t>
-            </a:r>
-            <a:endParaRPr lang="en-US" sz="1500" dirty="0"/>
-          </a:p>
-        </p:txBody>
-      </p:sp>
-      <p:sp>
-        <p:nvSpPr>
-          <p:cNvPr id="8" name="Text 6"/>
-          <p:cNvSpPr/>
-          <p:nvPr/>
-        </p:nvSpPr>
-        <p:spPr>
-          <a:xfrm>
-            <a:off x="7439376" y="3127248"/>
-            <a:ext cx="3947648" cy="2377440"/>
+            <a:off x="7660532" y="2121408"/>
+            <a:ext cx="3726491" cy="3291840"/>
           </a:xfrm>
           <a:prstGeom prst="rect">
             <a:avLst/>
@@ -7458,12 +7480,12 @@
           <a:p>
             <a:pPr algn="l" indent="0" marL="0">
               <a:lnSpc>
-                <a:spcPct val="108000"/>
+                <a:spcPct val="110000"/>
               </a:lnSpc>
               <a:buNone/>
             </a:pPr>
             <a:r>
-              <a:rPr lang="en-US" sz="1250" dirty="0">
+              <a:rPr lang="en-US" sz="1350" dirty="0">
                 <a:solidFill>
                   <a:srgbClr val="33444F"/>
                 </a:solidFill>
@@ -7471,15 +7493,15 @@
                 <a:ea typeface="Calibri" pitchFamily="34" charset="-122"/>
                 <a:cs typeface="Calibri" pitchFamily="34" charset="-120"/>
               </a:rPr>
-              <a:t>Delta checks compare current and prior results for the same patient, flagging implausible changes that suggest mislabeling or artifact.</a:t>
-            </a:r>
-            <a:endParaRPr lang="en-US" sz="1250" dirty="0"/>
-          </a:p>
-        </p:txBody>
-      </p:sp>
-      <p:sp>
-        <p:nvSpPr>
-          <p:cNvPr id="9" name="Text 7"/>
+              <a:t>Quality indicators across the total testing process catch pre-analytic problems that pure analytic QC would miss.</a:t>
+            </a:r>
+            <a:endParaRPr lang="en-US" sz="1350" dirty="0"/>
+          </a:p>
+        </p:txBody>
+      </p:sp>
+      <p:sp>
+        <p:nvSpPr>
+          <p:cNvPr id="8" name="Text 6"/>
           <p:cNvSpPr/>
           <p:nvPr/>
         </p:nvSpPr>
@@ -7518,7 +7540,7 @@
       </p:sp>
       <p:sp>
         <p:nvSpPr>
-          <p:cNvPr id="10" name="Text 8"/>
+          <p:cNvPr id="9" name="Text 7"/>
           <p:cNvSpPr/>
           <p:nvPr/>
         </p:nvSpPr>
@@ -7794,7 +7816,7 @@
                 <a:ea typeface="Calibri" pitchFamily="34" charset="-122"/>
                 <a:cs typeface="Calibri" pitchFamily="34" charset="-120"/>
               </a:rPr>
-              <a:t>Detects analytic error before results reach patients</a:t>
+              <a:t>Statistical control detects error before it reaches patients</a:t>
             </a:r>
             <a:endParaRPr lang="en-US" sz="1150" dirty="0"/>
           </a:p>
@@ -7862,7 +7884,7 @@
                 <a:ea typeface="Calibri" pitchFamily="34" charset="-122"/>
                 <a:cs typeface="Calibri" pitchFamily="34" charset="-120"/>
               </a:rPr>
-              <a:t>Westgard</a:t>
+              <a:t>Random vs systematic</a:t>
             </a:r>
             <a:endParaRPr lang="en-US" sz="3600" dirty="0"/>
           </a:p>
@@ -7901,7 +7923,7 @@
                 <a:ea typeface="Calibri" pitchFamily="34" charset="-122"/>
                 <a:cs typeface="Calibri" pitchFamily="34" charset="-120"/>
               </a:rPr>
-              <a:t>Multirules separate random from systematic error</a:t>
+              <a:t>The type of error points to the fix</a:t>
             </a:r>
             <a:endParaRPr lang="en-US" sz="1150" dirty="0"/>
           </a:p>
@@ -7969,7 +7991,7 @@
                 <a:ea typeface="Calibri" pitchFamily="34" charset="-122"/>
                 <a:cs typeface="Calibri" pitchFamily="34" charset="-120"/>
               </a:rPr>
-              <a:t>PT</a:t>
+              <a:t>QMS</a:t>
             </a:r>
             <a:endParaRPr lang="en-US" sz="3600" dirty="0"/>
           </a:p>
@@ -8008,7 +8030,7 @@
                 <a:ea typeface="Calibri" pitchFamily="34" charset="-122"/>
                 <a:cs typeface="Calibri" pitchFamily="34" charset="-120"/>
               </a:rPr>
-              <a:t>Proficiency testing benchmarks you against peers</a:t>
+              <a:t>Quality is a managed system, not an event</a:t>
             </a:r>
             <a:endParaRPr lang="en-US" sz="1150" dirty="0"/>
           </a:p>
@@ -8079,7 +8101,7 @@
                 <a:ea typeface="Calibri" pitchFamily="34" charset="-122"/>
                 <a:cs typeface="Calibri" pitchFamily="34" charset="-120"/>
               </a:rPr>
-              <a:t>A quality management system makes good results reproducible. Residents who understand QC charts, Westgard rules, proficiency testing, and occurrence management can keep a laboratory in control and improve it.</a:t>
+              <a:t>A quality management system turns good intentions into reliable results: defined processes, statistical quality control, monitored indicators, and a culture that surfaces and fixes problems.</a:t>
             </a:r>
             <a:endParaRPr lang="en-US" sz="1450" dirty="0"/>
           </a:p>
@@ -8122,7 +8144,7 @@
                 <a:ea typeface="Calibri" pitchFamily="34" charset="-122"/>
                 <a:cs typeface="Calibri" pitchFamily="34" charset="-120"/>
               </a:rPr>
-              <a:t>Quality is built into the whole system — QC is one tool within a broader QMS spanning people, process, and documents.</a:t>
+              <a:t>Quality control catches error statistically; a quality management system prevents it organizationally.</a:t>
             </a:r>
             <a:endParaRPr lang="en-US" sz="1300" dirty="0"/>
           </a:p>
@@ -8248,7 +8270,7 @@
     <p:bg>
       <p:bgPr>
         <a:solidFill>
-          <a:srgbClr val="0A2A45"/>
+          <a:srgbClr val="FFFFFF"/>
         </a:solidFill>
       </p:bgPr>
     </p:bg>
@@ -8275,7 +8297,7 @@
         <p:spPr>
           <a:xfrm>
             <a:off x="566928" y="329184"/>
-            <a:ext cx="10058400" cy="310896"/>
+            <a:ext cx="10515600" cy="310896"/>
           </a:xfrm>
           <a:prstGeom prst="rect">
             <a:avLst/>
@@ -8287,7 +8309,7 @@
           <a:bodyPr wrap="square" lIns="0" tIns="0" rIns="0" bIns="0" rtlCol="0" anchor="ctr"/>
           <a:lstStyle/>
           <a:p>
-            <a:pPr indent="0" marL="0">
+            <a:pPr algn="l" indent="0" marL="0">
               <a:buNone/>
             </a:pPr>
             <a:r>
@@ -8299,7 +8321,7 @@
                 <a:ea typeface="Calibri" pitchFamily="34" charset="-122"/>
                 <a:cs typeface="Calibri" pitchFamily="34" charset="-120"/>
               </a:rPr>
-              <a:t>LAB MANAGEMENT &amp; QUALITY</a:t>
+              <a:t>LAB MANAGEMENT &amp; QUALITY   ·   BOARD REVIEW  ·  Q1</a:t>
             </a:r>
             <a:endParaRPr lang="en-US" sz="1100" dirty="0"/>
           </a:p>
@@ -8313,8 +8335,8 @@
         </p:nvSpPr>
         <p:spPr>
           <a:xfrm>
-            <a:off x="566928" y="676656"/>
-            <a:ext cx="10972800" cy="749808"/>
+            <a:off x="566928" y="713232"/>
+            <a:ext cx="11064240" cy="749808"/>
           </a:xfrm>
           <a:prstGeom prst="rect">
             <a:avLst/>
@@ -8326,62 +8348,206 @@
           <a:bodyPr wrap="square" lIns="0" tIns="0" rIns="0" bIns="0" rtlCol="0" anchor="ctr"/>
           <a:lstStyle/>
           <a:p>
-            <a:pPr indent="0" marL="0">
-              <a:buNone/>
-            </a:pPr>
-            <a:r>
-              <a:rPr lang="en-US" sz="3000" b="1" dirty="0">
-                <a:solidFill>
-                  <a:srgbClr val="FFFFFF"/>
-                </a:solidFill>
-                <a:latin typeface="Calibri" pitchFamily="34" charset="0"/>
-                <a:ea typeface="Calibri" pitchFamily="34" charset="-122"/>
-                <a:cs typeface="Calibri" pitchFamily="34" charset="-120"/>
-              </a:rPr>
-              <a:t>Key Take-Home Points</a:t>
-            </a:r>
-            <a:endParaRPr lang="en-US" sz="3000" dirty="0"/>
-          </a:p>
-        </p:txBody>
-      </p:sp>
-      <p:sp>
-        <p:nvSpPr>
-          <p:cNvPr id="4" name="Shape 2"/>
-          <p:cNvSpPr/>
-          <p:nvPr/>
-        </p:nvSpPr>
-        <p:spPr>
-          <a:xfrm>
-            <a:off x="566928" y="1517904"/>
-            <a:ext cx="11057839" cy="841248"/>
+            <a:pPr algn="l" indent="0" marL="0">
+              <a:buNone/>
+            </a:pPr>
+            <a:r>
+              <a:rPr lang="en-US" sz="2600" b="1" dirty="0">
+                <a:solidFill>
+                  <a:srgbClr val="0E3A5F"/>
+                </a:solidFill>
+                <a:latin typeface="Calibri" pitchFamily="34" charset="0"/>
+                <a:ea typeface="Calibri" pitchFamily="34" charset="-122"/>
+                <a:cs typeface="Calibri" pitchFamily="34" charset="-120"/>
+              </a:rPr>
+              <a:t>Board-Style Review</a:t>
+            </a:r>
+            <a:endParaRPr lang="en-US" sz="2600" dirty="0"/>
+          </a:p>
+        </p:txBody>
+      </p:sp>
+      <p:sp>
+        <p:nvSpPr>
+          <p:cNvPr id="4" name="Text 2"/>
+          <p:cNvSpPr/>
+          <p:nvPr/>
+        </p:nvSpPr>
+        <p:spPr>
+          <a:xfrm>
+            <a:off x="566928" y="1417320"/>
+            <a:ext cx="11057839" cy="914400"/>
+          </a:xfrm>
+          <a:prstGeom prst="rect">
+            <a:avLst/>
+          </a:prstGeom>
+          <a:noFill/>
+          <a:ln/>
+        </p:spPr>
+        <p:txBody>
+          <a:bodyPr wrap="square" lIns="0" tIns="0" rIns="0" bIns="0" rtlCol="0" anchor="t"/>
+          <a:lstStyle/>
+          <a:p>
+            <a:pPr algn="l" indent="0" marL="0">
+              <a:lnSpc>
+                <a:spcPct val="105000"/>
+              </a:lnSpc>
+              <a:buNone/>
+            </a:pPr>
+            <a:r>
+              <a:rPr lang="en-US" sz="1450" b="1" dirty="0">
+                <a:solidFill>
+                  <a:srgbClr val="1B2A38"/>
+                </a:solidFill>
+                <a:latin typeface="Calibri" pitchFamily="34" charset="0"/>
+                <a:ea typeface="Calibri" pitchFamily="34" charset="-122"/>
+                <a:cs typeface="Calibri" pitchFamily="34" charset="-120"/>
+              </a:rPr>
+              <a:t>A 1_3s Westgard rule violation most suggests:</a:t>
+            </a:r>
+            <a:endParaRPr lang="en-US" sz="1450" dirty="0"/>
+          </a:p>
+        </p:txBody>
+      </p:sp>
+      <p:sp>
+        <p:nvSpPr>
+          <p:cNvPr id="5" name="Text 3"/>
+          <p:cNvSpPr/>
+          <p:nvPr/>
+        </p:nvSpPr>
+        <p:spPr>
+          <a:xfrm>
+            <a:off x="658368" y="2395728"/>
+            <a:ext cx="6192390" cy="3017520"/>
+          </a:xfrm>
+          <a:prstGeom prst="rect">
+            <a:avLst/>
+          </a:prstGeom>
+          <a:noFill/>
+          <a:ln/>
+        </p:spPr>
+        <p:txBody>
+          <a:bodyPr wrap="square" lIns="0" tIns="0" rIns="0" bIns="0" rtlCol="0" anchor="t"/>
+          <a:lstStyle/>
+          <a:p>
+            <a:pPr algn="l" indent="0" marL="0">
+              <a:spcAft>
+                <a:spcPts val="600"/>
+              </a:spcAft>
+              <a:buNone/>
+            </a:pPr>
+            <a:r>
+              <a:rPr lang="en-US" sz="1350" dirty="0">
+                <a:solidFill>
+                  <a:srgbClr val="33444F"/>
+                </a:solidFill>
+                <a:latin typeface="Calibri" pitchFamily="34" charset="0"/>
+                <a:ea typeface="Calibri" pitchFamily="34" charset="-122"/>
+                <a:cs typeface="Calibri" pitchFamily="34" charset="-120"/>
+              </a:rPr>
+              <a:t>A. Systematic error</a:t>
+            </a:r>
+            <a:endParaRPr lang="en-US" sz="1350" dirty="0"/>
+          </a:p>
+          <a:p>
+            <a:pPr algn="l" indent="0" marL="0">
+              <a:spcAft>
+                <a:spcPts val="600"/>
+              </a:spcAft>
+              <a:buNone/>
+            </a:pPr>
+            <a:r>
+              <a:rPr lang="en-US" sz="1350" b="1" dirty="0">
+                <a:solidFill>
+                  <a:srgbClr val="2C3A41"/>
+                </a:solidFill>
+                <a:latin typeface="Calibri" pitchFamily="34" charset="0"/>
+                <a:ea typeface="Calibri" pitchFamily="34" charset="-122"/>
+                <a:cs typeface="Calibri" pitchFamily="34" charset="-120"/>
+              </a:rPr>
+              <a:t>B. Random error</a:t>
+            </a:r>
+            <a:endParaRPr lang="en-US" sz="1350" dirty="0"/>
+          </a:p>
+          <a:p>
+            <a:pPr algn="l" indent="0" marL="0">
+              <a:spcAft>
+                <a:spcPts val="600"/>
+              </a:spcAft>
+              <a:buNone/>
+            </a:pPr>
+            <a:r>
+              <a:rPr lang="en-US" sz="1350" dirty="0">
+                <a:solidFill>
+                  <a:srgbClr val="33444F"/>
+                </a:solidFill>
+                <a:latin typeface="Calibri" pitchFamily="34" charset="0"/>
+                <a:ea typeface="Calibri" pitchFamily="34" charset="-122"/>
+                <a:cs typeface="Calibri" pitchFamily="34" charset="-120"/>
+              </a:rPr>
+              <a:t>C. Calibration bias</a:t>
+            </a:r>
+            <a:endParaRPr lang="en-US" sz="1350" dirty="0"/>
+          </a:p>
+          <a:p>
+            <a:pPr algn="l" indent="0" marL="0">
+              <a:spcAft>
+                <a:spcPts val="600"/>
+              </a:spcAft>
+              <a:buNone/>
+            </a:pPr>
+            <a:r>
+              <a:rPr lang="en-US" sz="1350" dirty="0">
+                <a:solidFill>
+                  <a:srgbClr val="33444F"/>
+                </a:solidFill>
+                <a:latin typeface="Calibri" pitchFamily="34" charset="0"/>
+                <a:ea typeface="Calibri" pitchFamily="34" charset="-122"/>
+                <a:cs typeface="Calibri" pitchFamily="34" charset="-120"/>
+              </a:rPr>
+              <a:t>D. Reagent deterioration trend</a:t>
+            </a:r>
+            <a:endParaRPr lang="en-US" sz="1350" dirty="0"/>
+          </a:p>
+          <a:p>
+            <a:pPr algn="l" indent="0" marL="0">
+              <a:spcAft>
+                <a:spcPts val="600"/>
+              </a:spcAft>
+              <a:buNone/>
+            </a:pPr>
+            <a:r>
+              <a:rPr lang="en-US" sz="1350" dirty="0">
+                <a:solidFill>
+                  <a:srgbClr val="33444F"/>
+                </a:solidFill>
+                <a:latin typeface="Calibri" pitchFamily="34" charset="0"/>
+                <a:ea typeface="Calibri" pitchFamily="34" charset="-122"/>
+                <a:cs typeface="Calibri" pitchFamily="34" charset="-120"/>
+              </a:rPr>
+              <a:t>E. A warning only</a:t>
+            </a:r>
+            <a:endParaRPr lang="en-US" sz="1350" dirty="0"/>
+          </a:p>
+        </p:txBody>
+      </p:sp>
+      <p:sp>
+        <p:nvSpPr>
+          <p:cNvPr id="6" name="Shape 4"/>
+          <p:cNvSpPr/>
+          <p:nvPr/>
+        </p:nvSpPr>
+        <p:spPr>
+          <a:xfrm>
+            <a:off x="7201632" y="2395728"/>
+            <a:ext cx="4423136" cy="3246120"/>
           </a:xfrm>
           <a:prstGeom prst="roundRect">
             <a:avLst>
-              <a:gd name="adj" fmla="val 7609"/>
+              <a:gd name="adj" fmla="val 2535"/>
             </a:avLst>
           </a:prstGeom>
           <a:solidFill>
-            <a:srgbClr val="143651"/>
-          </a:solidFill>
-          <a:ln/>
-        </p:spPr>
-      </p:sp>
-      <p:sp>
-        <p:nvSpPr>
-          <p:cNvPr id="5" name="Shape 3"/>
-          <p:cNvSpPr/>
-          <p:nvPr/>
-        </p:nvSpPr>
-        <p:spPr>
-          <a:xfrm>
-            <a:off x="749808" y="1755648"/>
-            <a:ext cx="365760" cy="365760"/>
-          </a:xfrm>
-          <a:prstGeom prst="ellipse">
-            <a:avLst/>
-          </a:prstGeom>
-          <a:solidFill>
-            <a:srgbClr val="455A64"/>
+            <a:srgbClr val="ECEFF1"/>
           </a:solidFill>
           <a:ln/>
           <a:effectLst>
@@ -8395,14 +8561,14 @@
       </p:sp>
       <p:sp>
         <p:nvSpPr>
-          <p:cNvPr id="6" name="Text 4"/>
-          <p:cNvSpPr/>
-          <p:nvPr/>
-        </p:nvSpPr>
-        <p:spPr>
-          <a:xfrm>
-            <a:off x="749808" y="1755648"/>
-            <a:ext cx="365760" cy="365760"/>
+          <p:cNvPr id="7" name="Text 5"/>
+          <p:cNvSpPr/>
+          <p:nvPr/>
+        </p:nvSpPr>
+        <p:spPr>
+          <a:xfrm>
+            <a:off x="7439376" y="2578608"/>
+            <a:ext cx="3965936" cy="457200"/>
           </a:xfrm>
           <a:prstGeom prst="rect">
             <a:avLst/>
@@ -8414,19 +8580,33 @@
           <a:bodyPr wrap="square" lIns="0" tIns="0" rIns="0" bIns="0" rtlCol="0" anchor="ctr"/>
           <a:lstStyle/>
           <a:p>
-            <a:pPr algn="ctr" indent="0" marL="0">
+            <a:pPr indent="0" marL="0">
               <a:buNone/>
             </a:pPr>
             <a:r>
               <a:rPr lang="en-US" sz="1500" b="1" dirty="0">
                 <a:solidFill>
-                  <a:srgbClr val="FFFFFF"/>
-                </a:solidFill>
-                <a:latin typeface="Calibri" pitchFamily="34" charset="0"/>
-                <a:ea typeface="Calibri" pitchFamily="34" charset="-122"/>
-                <a:cs typeface="Calibri" pitchFamily="34" charset="-120"/>
-              </a:rPr>
-              <a:t>1</a:t>
+                  <a:srgbClr val="455A64"/>
+                </a:solidFill>
+                <a:latin typeface="Calibri" pitchFamily="34" charset="0"/>
+                <a:ea typeface="Calibri" pitchFamily="34" charset="-122"/>
+                <a:cs typeface="Calibri" pitchFamily="34" charset="-120"/>
+              </a:rPr>
+              <a:t>ANSWER  </a:t>
+            </a:r>
+            <a:pPr indent="0" marL="0">
+              <a:buNone/>
+            </a:pPr>
+            <a:r>
+              <a:rPr lang="en-US" sz="1500" b="1" dirty="0">
+                <a:solidFill>
+                  <a:srgbClr val="1B2A38"/>
+                </a:solidFill>
+                <a:latin typeface="Calibri" pitchFamily="34" charset="0"/>
+                <a:ea typeface="Calibri" pitchFamily="34" charset="-122"/>
+                <a:cs typeface="Calibri" pitchFamily="34" charset="-120"/>
+              </a:rPr>
+              <a:t>B — Random error</a:t>
             </a:r>
             <a:endParaRPr lang="en-US" sz="1500" dirty="0"/>
           </a:p>
@@ -8434,14 +8614,56 @@
       </p:sp>
       <p:sp>
         <p:nvSpPr>
-          <p:cNvPr id="7" name="Text 5"/>
-          <p:cNvSpPr/>
-          <p:nvPr/>
-        </p:nvSpPr>
-        <p:spPr>
-          <a:xfrm>
-            <a:off x="1280160" y="1517904"/>
-            <a:ext cx="10143439" cy="841248"/>
+          <p:cNvPr id="8" name="Text 6"/>
+          <p:cNvSpPr/>
+          <p:nvPr/>
+        </p:nvSpPr>
+        <p:spPr>
+          <a:xfrm>
+            <a:off x="7439376" y="3127248"/>
+            <a:ext cx="3947648" cy="2377440"/>
+          </a:xfrm>
+          <a:prstGeom prst="rect">
+            <a:avLst/>
+          </a:prstGeom>
+          <a:noFill/>
+          <a:ln/>
+        </p:spPr>
+        <p:txBody>
+          <a:bodyPr wrap="square" lIns="0" tIns="0" rIns="0" bIns="0" rtlCol="0" anchor="t"/>
+          <a:lstStyle/>
+          <a:p>
+            <a:pPr algn="l" indent="0" marL="0">
+              <a:lnSpc>
+                <a:spcPct val="108000"/>
+              </a:lnSpc>
+              <a:buNone/>
+            </a:pPr>
+            <a:r>
+              <a:rPr lang="en-US" sz="1250" dirty="0">
+                <a:solidFill>
+                  <a:srgbClr val="33444F"/>
+                </a:solidFill>
+                <a:latin typeface="Calibri" pitchFamily="34" charset="0"/>
+                <a:ea typeface="Calibri" pitchFamily="34" charset="-122"/>
+                <a:cs typeface="Calibri" pitchFamily="34" charset="-120"/>
+              </a:rPr>
+              <a:t>A single point beyond ±3 SD indicates random error (imprecision); systematic rules involve consecutive directional violations.</a:t>
+            </a:r>
+            <a:endParaRPr lang="en-US" sz="1250" dirty="0"/>
+          </a:p>
+        </p:txBody>
+      </p:sp>
+      <p:sp>
+        <p:nvSpPr>
+          <p:cNvPr id="9" name="Text 7"/>
+          <p:cNvSpPr/>
+          <p:nvPr/>
+        </p:nvSpPr>
+        <p:spPr>
+          <a:xfrm>
+            <a:off x="566928" y="6473952"/>
+            <a:ext cx="7772400" cy="274320"/>
           </a:xfrm>
           <a:prstGeom prst="rect">
             <a:avLst/>
@@ -8457,68 +8679,19 @@
               <a:buNone/>
             </a:pPr>
             <a:r>
-              <a:rPr lang="en-US" sz="1350" dirty="0">
-                <a:solidFill>
-                  <a:srgbClr val="E7EEF4"/>
-                </a:solidFill>
-                <a:latin typeface="Calibri" pitchFamily="34" charset="0"/>
-                <a:ea typeface="Calibri" pitchFamily="34" charset="-122"/>
-                <a:cs typeface="Calibri" pitchFamily="34" charset="-120"/>
-              </a:rPr>
-              <a:t>QC catches the failing run; QA and the QMS prevent future failures across the whole testing cycle.</a:t>
-            </a:r>
-            <a:endParaRPr lang="en-US" sz="1350" dirty="0"/>
-          </a:p>
-        </p:txBody>
-      </p:sp>
-      <p:sp>
-        <p:nvSpPr>
-          <p:cNvPr id="8" name="Shape 6"/>
-          <p:cNvSpPr/>
-          <p:nvPr/>
-        </p:nvSpPr>
-        <p:spPr>
-          <a:xfrm>
-            <a:off x="566928" y="2505456"/>
-            <a:ext cx="11057839" cy="841248"/>
-          </a:xfrm>
-          <a:prstGeom prst="roundRect">
-            <a:avLst>
-              <a:gd name="adj" fmla="val 7609"/>
-            </a:avLst>
-          </a:prstGeom>
-          <a:solidFill>
-            <a:srgbClr val="143651"/>
-          </a:solidFill>
-          <a:ln/>
-        </p:spPr>
-      </p:sp>
-      <p:sp>
-        <p:nvSpPr>
-          <p:cNvPr id="9" name="Shape 7"/>
-          <p:cNvSpPr/>
-          <p:nvPr/>
-        </p:nvSpPr>
-        <p:spPr>
-          <a:xfrm>
-            <a:off x="749808" y="2743200"/>
-            <a:ext cx="365760" cy="365760"/>
-          </a:xfrm>
-          <a:prstGeom prst="ellipse">
-            <a:avLst/>
-          </a:prstGeom>
-          <a:solidFill>
-            <a:srgbClr val="455A64"/>
-          </a:solidFill>
-          <a:ln/>
-          <a:effectLst>
-            <a:outerShdw sx="100000" sy="100000" kx="0" ky="0" algn="bl" rotWithShape="0" blurRad="88900" dist="25400" dir="5400000">
-              <a:srgbClr val="22303C">
-                <a:alpha val="12000"/>
-              </a:srgbClr>
-            </a:outerShdw>
-          </a:effectLst>
-        </p:spPr>
+              <a:rPr lang="en-US" sz="850" dirty="0">
+                <a:solidFill>
+                  <a:srgbClr val="9AA8B4"/>
+                </a:solidFill>
+                <a:latin typeface="Calibri" pitchFamily="34" charset="0"/>
+                <a:ea typeface="Calibri" pitchFamily="34" charset="-122"/>
+                <a:cs typeface="Calibri" pitchFamily="34" charset="-120"/>
+              </a:rPr>
+              <a:t>Makassed General Hospital  ·  Department of Laboratory Medicine</a:t>
+            </a:r>
+            <a:endParaRPr lang="en-US" sz="850" dirty="0"/>
+          </a:p>
+        </p:txBody>
       </p:sp>
       <p:sp>
         <p:nvSpPr>
@@ -8528,8 +8701,8 @@
         </p:nvSpPr>
         <p:spPr>
           <a:xfrm>
-            <a:off x="749808" y="2743200"/>
-            <a:ext cx="365760" cy="365760"/>
+            <a:off x="9814255" y="6473952"/>
+            <a:ext cx="1828800" cy="274320"/>
           </a:xfrm>
           <a:prstGeom prst="rect">
             <a:avLst/>
@@ -8541,504 +8714,34 @@
           <a:bodyPr wrap="square" lIns="0" tIns="0" rIns="0" bIns="0" rtlCol="0" anchor="ctr"/>
           <a:lstStyle/>
           <a:p>
-            <a:pPr algn="ctr" indent="0" marL="0">
-              <a:buNone/>
-            </a:pPr>
-            <a:r>
-              <a:rPr lang="en-US" sz="1500" b="1" dirty="0">
-                <a:solidFill>
-                  <a:srgbClr val="FFFFFF"/>
-                </a:solidFill>
-                <a:latin typeface="Calibri" pitchFamily="34" charset="0"/>
-                <a:ea typeface="Calibri" pitchFamily="34" charset="-122"/>
-                <a:cs typeface="Calibri" pitchFamily="34" charset="-120"/>
-              </a:rPr>
-              <a:t>2</a:t>
-            </a:r>
-            <a:endParaRPr lang="en-US" sz="1500" dirty="0"/>
-          </a:p>
-        </p:txBody>
-      </p:sp>
-      <p:sp>
-        <p:nvSpPr>
-          <p:cNvPr id="11" name="Text 9"/>
-          <p:cNvSpPr/>
-          <p:nvPr/>
-        </p:nvSpPr>
-        <p:spPr>
-          <a:xfrm>
-            <a:off x="1280160" y="2505456"/>
-            <a:ext cx="10143439" cy="841248"/>
-          </a:xfrm>
-          <a:prstGeom prst="rect">
-            <a:avLst/>
-          </a:prstGeom>
-          <a:noFill/>
-          <a:ln/>
-        </p:spPr>
-        <p:txBody>
-          <a:bodyPr wrap="square" lIns="0" tIns="0" rIns="0" bIns="0" rtlCol="0" anchor="ctr"/>
-          <a:lstStyle/>
-          <a:p>
-            <a:pPr algn="l" indent="0" marL="0">
-              <a:buNone/>
-            </a:pPr>
-            <a:r>
-              <a:rPr lang="en-US" sz="1350" dirty="0">
-                <a:solidFill>
-                  <a:srgbClr val="E7EEF4"/>
-                </a:solidFill>
-                <a:latin typeface="Calibri" pitchFamily="34" charset="0"/>
-                <a:ea typeface="Calibri" pitchFamily="34" charset="-122"/>
-                <a:cs typeface="Calibri" pitchFamily="34" charset="-120"/>
-              </a:rPr>
-              <a:t>Levey-Jennings + Westgard rules separate random (precision) from systematic (accuracy) error; a shift suggests lot/calibration, a trend suggests deterioration.</a:t>
-            </a:r>
-            <a:endParaRPr lang="en-US" sz="1350" dirty="0"/>
-          </a:p>
-        </p:txBody>
-      </p:sp>
-      <p:sp>
-        <p:nvSpPr>
-          <p:cNvPr id="12" name="Shape 10"/>
-          <p:cNvSpPr/>
-          <p:nvPr/>
-        </p:nvSpPr>
-        <p:spPr>
-          <a:xfrm>
-            <a:off x="566928" y="3493008"/>
-            <a:ext cx="11057839" cy="841248"/>
-          </a:xfrm>
-          <a:prstGeom prst="roundRect">
-            <a:avLst>
-              <a:gd name="adj" fmla="val 7609"/>
-            </a:avLst>
-          </a:prstGeom>
-          <a:solidFill>
-            <a:srgbClr val="143651"/>
-          </a:solidFill>
-          <a:ln/>
-        </p:spPr>
-      </p:sp>
-      <p:sp>
-        <p:nvSpPr>
-          <p:cNvPr id="13" name="Shape 11"/>
-          <p:cNvSpPr/>
-          <p:nvPr/>
-        </p:nvSpPr>
-        <p:spPr>
-          <a:xfrm>
-            <a:off x="749808" y="3730752"/>
-            <a:ext cx="365760" cy="365760"/>
-          </a:xfrm>
-          <a:prstGeom prst="ellipse">
-            <a:avLst/>
-          </a:prstGeom>
-          <a:solidFill>
-            <a:srgbClr val="455A64"/>
-          </a:solidFill>
-          <a:ln/>
-          <a:effectLst>
-            <a:outerShdw sx="100000" sy="100000" kx="0" ky="0" algn="bl" rotWithShape="0" blurRad="88900" dist="25400" dir="5400000">
-              <a:srgbClr val="22303C">
-                <a:alpha val="12000"/>
-              </a:srgbClr>
-            </a:outerShdw>
-          </a:effectLst>
-        </p:spPr>
-      </p:sp>
-      <p:sp>
-        <p:nvSpPr>
-          <p:cNvPr id="14" name="Text 12"/>
-          <p:cNvSpPr/>
-          <p:nvPr/>
-        </p:nvSpPr>
-        <p:spPr>
-          <a:xfrm>
-            <a:off x="749808" y="3730752"/>
-            <a:ext cx="365760" cy="365760"/>
-          </a:xfrm>
-          <a:prstGeom prst="rect">
-            <a:avLst/>
-          </a:prstGeom>
-          <a:noFill/>
-          <a:ln/>
-        </p:spPr>
-        <p:txBody>
-          <a:bodyPr wrap="square" lIns="0" tIns="0" rIns="0" bIns="0" rtlCol="0" anchor="ctr"/>
-          <a:lstStyle/>
-          <a:p>
-            <a:pPr algn="ctr" indent="0" marL="0">
-              <a:buNone/>
-            </a:pPr>
-            <a:r>
-              <a:rPr lang="en-US" sz="1500" b="1" dirty="0">
-                <a:solidFill>
-                  <a:srgbClr val="FFFFFF"/>
-                </a:solidFill>
-                <a:latin typeface="Calibri" pitchFamily="34" charset="0"/>
-                <a:ea typeface="Calibri" pitchFamily="34" charset="-122"/>
-                <a:cs typeface="Calibri" pitchFamily="34" charset="-120"/>
-              </a:rPr>
-              <a:t>3</a:t>
-            </a:r>
-            <a:endParaRPr lang="en-US" sz="1500" dirty="0"/>
-          </a:p>
-        </p:txBody>
-      </p:sp>
-      <p:sp>
-        <p:nvSpPr>
-          <p:cNvPr id="15" name="Text 13"/>
-          <p:cNvSpPr/>
-          <p:nvPr/>
-        </p:nvSpPr>
-        <p:spPr>
-          <a:xfrm>
-            <a:off x="1280160" y="3493008"/>
-            <a:ext cx="10143439" cy="841248"/>
-          </a:xfrm>
-          <a:prstGeom prst="rect">
-            <a:avLst/>
-          </a:prstGeom>
-          <a:noFill/>
-          <a:ln/>
-        </p:spPr>
-        <p:txBody>
-          <a:bodyPr wrap="square" lIns="0" tIns="0" rIns="0" bIns="0" rtlCol="0" anchor="ctr"/>
-          <a:lstStyle/>
-          <a:p>
-            <a:pPr algn="l" indent="0" marL="0">
-              <a:buNone/>
-            </a:pPr>
-            <a:r>
-              <a:rPr lang="en-US" sz="1350" dirty="0">
-                <a:solidFill>
-                  <a:srgbClr val="E7EEF4"/>
-                </a:solidFill>
-                <a:latin typeface="Calibri" pitchFamily="34" charset="0"/>
-                <a:ea typeface="Calibri" pitchFamily="34" charset="-122"/>
-                <a:cs typeface="Calibri" pitchFamily="34" charset="-120"/>
-              </a:rPr>
-              <a:t>Never report patient results from an out-of-control run; investigate, fix, and repeat QC.</a:t>
-            </a:r>
-            <a:endParaRPr lang="en-US" sz="1350" dirty="0"/>
-          </a:p>
-        </p:txBody>
-      </p:sp>
-      <p:sp>
-        <p:nvSpPr>
-          <p:cNvPr id="16" name="Shape 14"/>
-          <p:cNvSpPr/>
-          <p:nvPr/>
-        </p:nvSpPr>
-        <p:spPr>
-          <a:xfrm>
-            <a:off x="566928" y="4480560"/>
-            <a:ext cx="11057839" cy="841248"/>
-          </a:xfrm>
-          <a:prstGeom prst="roundRect">
-            <a:avLst>
-              <a:gd name="adj" fmla="val 7609"/>
-            </a:avLst>
-          </a:prstGeom>
-          <a:solidFill>
-            <a:srgbClr val="143651"/>
-          </a:solidFill>
-          <a:ln/>
-        </p:spPr>
-      </p:sp>
-      <p:sp>
-        <p:nvSpPr>
-          <p:cNvPr id="17" name="Shape 15"/>
-          <p:cNvSpPr/>
-          <p:nvPr/>
-        </p:nvSpPr>
-        <p:spPr>
-          <a:xfrm>
-            <a:off x="749808" y="4718304"/>
-            <a:ext cx="365760" cy="365760"/>
-          </a:xfrm>
-          <a:prstGeom prst="ellipse">
-            <a:avLst/>
-          </a:prstGeom>
-          <a:solidFill>
-            <a:srgbClr val="455A64"/>
-          </a:solidFill>
-          <a:ln/>
-          <a:effectLst>
-            <a:outerShdw sx="100000" sy="100000" kx="0" ky="0" algn="bl" rotWithShape="0" blurRad="88900" dist="25400" dir="5400000">
-              <a:srgbClr val="22303C">
-                <a:alpha val="12000"/>
-              </a:srgbClr>
-            </a:outerShdw>
-          </a:effectLst>
-        </p:spPr>
-      </p:sp>
-      <p:sp>
-        <p:nvSpPr>
-          <p:cNvPr id="18" name="Text 16"/>
-          <p:cNvSpPr/>
-          <p:nvPr/>
-        </p:nvSpPr>
-        <p:spPr>
-          <a:xfrm>
-            <a:off x="749808" y="4718304"/>
-            <a:ext cx="365760" cy="365760"/>
-          </a:xfrm>
-          <a:prstGeom prst="rect">
-            <a:avLst/>
-          </a:prstGeom>
-          <a:noFill/>
-          <a:ln/>
-        </p:spPr>
-        <p:txBody>
-          <a:bodyPr wrap="square" lIns="0" tIns="0" rIns="0" bIns="0" rtlCol="0" anchor="ctr"/>
-          <a:lstStyle/>
-          <a:p>
-            <a:pPr algn="ctr" indent="0" marL="0">
-              <a:buNone/>
-            </a:pPr>
-            <a:r>
-              <a:rPr lang="en-US" sz="1500" b="1" dirty="0">
-                <a:solidFill>
-                  <a:srgbClr val="FFFFFF"/>
-                </a:solidFill>
-                <a:latin typeface="Calibri" pitchFamily="34" charset="0"/>
-                <a:ea typeface="Calibri" pitchFamily="34" charset="-122"/>
-                <a:cs typeface="Calibri" pitchFamily="34" charset="-120"/>
-              </a:rPr>
-              <a:t>4</a:t>
-            </a:r>
-            <a:endParaRPr lang="en-US" sz="1500" dirty="0"/>
-          </a:p>
-        </p:txBody>
-      </p:sp>
-      <p:sp>
-        <p:nvSpPr>
-          <p:cNvPr id="19" name="Text 17"/>
-          <p:cNvSpPr/>
-          <p:nvPr/>
-        </p:nvSpPr>
-        <p:spPr>
-          <a:xfrm>
-            <a:off x="1280160" y="4480560"/>
-            <a:ext cx="10143439" cy="841248"/>
-          </a:xfrm>
-          <a:prstGeom prst="rect">
-            <a:avLst/>
-          </a:prstGeom>
-          <a:noFill/>
-          <a:ln/>
-        </p:spPr>
-        <p:txBody>
-          <a:bodyPr wrap="square" lIns="0" tIns="0" rIns="0" bIns="0" rtlCol="0" anchor="ctr"/>
-          <a:lstStyle/>
-          <a:p>
-            <a:pPr algn="l" indent="0" marL="0">
-              <a:buNone/>
-            </a:pPr>
-            <a:r>
-              <a:rPr lang="en-US" sz="1350" dirty="0">
-                <a:solidFill>
-                  <a:srgbClr val="E7EEF4"/>
-                </a:solidFill>
-                <a:latin typeface="Calibri" pitchFamily="34" charset="0"/>
-                <a:ea typeface="Calibri" pitchFamily="34" charset="-122"/>
-                <a:cs typeface="Calibri" pitchFamily="34" charset="-120"/>
-              </a:rPr>
-              <a:t>Proficiency testing benchmarks performance and must be handled like routine samples (no sharing/referral).</a:t>
-            </a:r>
-            <a:endParaRPr lang="en-US" sz="1350" dirty="0"/>
-          </a:p>
-        </p:txBody>
-      </p:sp>
-      <p:sp>
-        <p:nvSpPr>
-          <p:cNvPr id="20" name="Shape 18"/>
-          <p:cNvSpPr/>
-          <p:nvPr/>
-        </p:nvSpPr>
-        <p:spPr>
-          <a:xfrm>
-            <a:off x="566928" y="5468112"/>
-            <a:ext cx="11057839" cy="841248"/>
-          </a:xfrm>
-          <a:prstGeom prst="roundRect">
-            <a:avLst>
-              <a:gd name="adj" fmla="val 7609"/>
-            </a:avLst>
-          </a:prstGeom>
-          <a:solidFill>
-            <a:srgbClr val="143651"/>
-          </a:solidFill>
-          <a:ln/>
-        </p:spPr>
-      </p:sp>
-      <p:sp>
-        <p:nvSpPr>
-          <p:cNvPr id="21" name="Shape 19"/>
-          <p:cNvSpPr/>
-          <p:nvPr/>
-        </p:nvSpPr>
-        <p:spPr>
-          <a:xfrm>
-            <a:off x="749808" y="5705856"/>
-            <a:ext cx="365760" cy="365760"/>
-          </a:xfrm>
-          <a:prstGeom prst="ellipse">
-            <a:avLst/>
-          </a:prstGeom>
-          <a:solidFill>
-            <a:srgbClr val="455A64"/>
-          </a:solidFill>
-          <a:ln/>
-          <a:effectLst>
-            <a:outerShdw sx="100000" sy="100000" kx="0" ky="0" algn="bl" rotWithShape="0" blurRad="88900" dist="25400" dir="5400000">
-              <a:srgbClr val="22303C">
-                <a:alpha val="12000"/>
-              </a:srgbClr>
-            </a:outerShdw>
-          </a:effectLst>
-        </p:spPr>
-      </p:sp>
-      <p:sp>
-        <p:nvSpPr>
-          <p:cNvPr id="22" name="Text 20"/>
-          <p:cNvSpPr/>
-          <p:nvPr/>
-        </p:nvSpPr>
-        <p:spPr>
-          <a:xfrm>
-            <a:off x="749808" y="5705856"/>
-            <a:ext cx="365760" cy="365760"/>
-          </a:xfrm>
-          <a:prstGeom prst="rect">
-            <a:avLst/>
-          </a:prstGeom>
-          <a:noFill/>
-          <a:ln/>
-        </p:spPr>
-        <p:txBody>
-          <a:bodyPr wrap="square" lIns="0" tIns="0" rIns="0" bIns="0" rtlCol="0" anchor="ctr"/>
-          <a:lstStyle/>
-          <a:p>
-            <a:pPr algn="ctr" indent="0" marL="0">
-              <a:buNone/>
-            </a:pPr>
-            <a:r>
-              <a:rPr lang="en-US" sz="1500" b="1" dirty="0">
-                <a:solidFill>
-                  <a:srgbClr val="FFFFFF"/>
-                </a:solidFill>
-                <a:latin typeface="Calibri" pitchFamily="34" charset="0"/>
-                <a:ea typeface="Calibri" pitchFamily="34" charset="-122"/>
-                <a:cs typeface="Calibri" pitchFamily="34" charset="-120"/>
-              </a:rPr>
-              <a:t>5</a:t>
-            </a:r>
-            <a:endParaRPr lang="en-US" sz="1500" dirty="0"/>
-          </a:p>
-        </p:txBody>
-      </p:sp>
-      <p:sp>
-        <p:nvSpPr>
-          <p:cNvPr id="23" name="Text 21"/>
-          <p:cNvSpPr/>
-          <p:nvPr/>
-        </p:nvSpPr>
-        <p:spPr>
-          <a:xfrm>
-            <a:off x="1280160" y="5468112"/>
-            <a:ext cx="10143439" cy="841248"/>
-          </a:xfrm>
-          <a:prstGeom prst="rect">
-            <a:avLst/>
-          </a:prstGeom>
-          <a:noFill/>
-          <a:ln/>
-        </p:spPr>
-        <p:txBody>
-          <a:bodyPr wrap="square" lIns="0" tIns="0" rIns="0" bIns="0" rtlCol="0" anchor="ctr"/>
-          <a:lstStyle/>
-          <a:p>
-            <a:pPr algn="l" indent="0" marL="0">
-              <a:buNone/>
-            </a:pPr>
-            <a:r>
-              <a:rPr lang="en-US" sz="1350" dirty="0">
-                <a:solidFill>
-                  <a:srgbClr val="E7EEF4"/>
-                </a:solidFill>
-                <a:latin typeface="Calibri" pitchFamily="34" charset="0"/>
-                <a:ea typeface="Calibri" pitchFamily="34" charset="-122"/>
-                <a:cs typeface="Calibri" pitchFamily="34" charset="-120"/>
-              </a:rPr>
-              <a:t>Delta checks catch mix-ups and artifacts; manage occurrences with blameless CAPA and PDSA improvement.</a:t>
-            </a:r>
-            <a:endParaRPr lang="en-US" sz="1350" dirty="0"/>
-          </a:p>
-        </p:txBody>
-      </p:sp>
-      <p:sp>
-        <p:nvSpPr>
-          <p:cNvPr id="24" name="Text 22"/>
-          <p:cNvSpPr/>
-          <p:nvPr/>
-        </p:nvSpPr>
-        <p:spPr>
-          <a:xfrm>
-            <a:off x="566928" y="6473952"/>
-            <a:ext cx="8229600" cy="274320"/>
-          </a:xfrm>
-          <a:prstGeom prst="rect">
-            <a:avLst/>
-          </a:prstGeom>
-          <a:noFill/>
-          <a:ln/>
-        </p:spPr>
-        <p:txBody>
-          <a:bodyPr wrap="square" lIns="0" tIns="0" rIns="0" bIns="0" rtlCol="0" anchor="ctr"/>
-          <a:lstStyle/>
-          <a:p>
-            <a:pPr indent="0" marL="0">
+            <a:pPr algn="r" indent="0" marL="0">
               <a:buNone/>
             </a:pPr>
             <a:r>
               <a:rPr lang="en-US" sz="850" dirty="0">
                 <a:solidFill>
-                  <a:srgbClr val="5E7488"/>
-                </a:solidFill>
-                <a:latin typeface="Calibri" pitchFamily="34" charset="0"/>
-                <a:ea typeface="Calibri" pitchFamily="34" charset="-122"/>
-                <a:cs typeface="Calibri" pitchFamily="34" charset="-120"/>
-              </a:rPr>
-              <a:t>Makassed General Hospital  ·  Department of Laboratory Medicine</a:t>
-            </a:r>
-            <a:endParaRPr lang="en-US" sz="850" dirty="0"/>
-          </a:p>
-        </p:txBody>
-      </p:sp>
-      <p:sp>
-        <p:nvSpPr>
-          <p:cNvPr id="25" name="Text 23"/>
-          <p:cNvSpPr/>
-          <p:nvPr/>
-        </p:nvSpPr>
-        <p:spPr>
-          <a:xfrm>
-            <a:off x="11002975" y="6473952"/>
-            <a:ext cx="640080" cy="274320"/>
-          </a:xfrm>
-          <a:prstGeom prst="rect">
-            <a:avLst/>
-          </a:prstGeom>
-          <a:noFill/>
-          <a:ln/>
-        </p:spPr>
-        <p:txBody>
-          <a:bodyPr wrap="square" lIns="0" tIns="0" rIns="0" bIns="0" rtlCol="0" anchor="ctr"/>
-          <a:lstStyle/>
-          <a:p>
+                  <a:srgbClr val="9AA8B4"/>
+                </a:solidFill>
+                <a:latin typeface="Calibri" pitchFamily="34" charset="0"/>
+                <a:ea typeface="Calibri" pitchFamily="34" charset="-122"/>
+                <a:cs typeface="Calibri" pitchFamily="34" charset="-120"/>
+              </a:rPr>
+              <a:t>CP Lecture Series</a:t>
+            </a:r>
+            <a:pPr algn="r" indent="0" marL="0">
+              <a:buNone/>
+            </a:pPr>
+            <a:r>
+              <a:rPr lang="en-US" sz="850" dirty="0">
+                <a:solidFill>
+                  <a:srgbClr val="DCE4EC"/>
+                </a:solidFill>
+                <a:latin typeface="Calibri" pitchFamily="34" charset="0"/>
+                <a:ea typeface="Calibri" pitchFamily="34" charset="-122"/>
+                <a:cs typeface="Calibri" pitchFamily="34" charset="-120"/>
+              </a:rPr>
+              <a:t>   ·   </a:t>
+            </a:r>
             <a:pPr algn="r" indent="0" marL="0">
               <a:buNone/>
             </a:pPr>
@@ -9122,6 +8825,2341 @@
                 <a:ea typeface="Calibri" pitchFamily="34" charset="-122"/>
                 <a:cs typeface="Calibri" pitchFamily="34" charset="-120"/>
               </a:rPr>
+              <a:t>LAB MANAGEMENT &amp; QUALITY   ·   BOARD REVIEW  ·  Q2</a:t>
+            </a:r>
+            <a:endParaRPr lang="en-US" sz="1100" dirty="0"/>
+          </a:p>
+        </p:txBody>
+      </p:sp>
+      <p:sp>
+        <p:nvSpPr>
+          <p:cNvPr id="3" name="Text 1"/>
+          <p:cNvSpPr/>
+          <p:nvPr/>
+        </p:nvSpPr>
+        <p:spPr>
+          <a:xfrm>
+            <a:off x="566928" y="713232"/>
+            <a:ext cx="11064240" cy="749808"/>
+          </a:xfrm>
+          <a:prstGeom prst="rect">
+            <a:avLst/>
+          </a:prstGeom>
+          <a:noFill/>
+          <a:ln/>
+        </p:spPr>
+        <p:txBody>
+          <a:bodyPr wrap="square" lIns="0" tIns="0" rIns="0" bIns="0" rtlCol="0" anchor="ctr"/>
+          <a:lstStyle/>
+          <a:p>
+            <a:pPr algn="l" indent="0" marL="0">
+              <a:buNone/>
+            </a:pPr>
+            <a:r>
+              <a:rPr lang="en-US" sz="2600" b="1" dirty="0">
+                <a:solidFill>
+                  <a:srgbClr val="0E3A5F"/>
+                </a:solidFill>
+                <a:latin typeface="Calibri" pitchFamily="34" charset="0"/>
+                <a:ea typeface="Calibri" pitchFamily="34" charset="-122"/>
+                <a:cs typeface="Calibri" pitchFamily="34" charset="-120"/>
+              </a:rPr>
+              <a:t>Board-Style Review</a:t>
+            </a:r>
+            <a:endParaRPr lang="en-US" sz="2600" dirty="0"/>
+          </a:p>
+        </p:txBody>
+      </p:sp>
+      <p:sp>
+        <p:nvSpPr>
+          <p:cNvPr id="4" name="Text 2"/>
+          <p:cNvSpPr/>
+          <p:nvPr/>
+        </p:nvSpPr>
+        <p:spPr>
+          <a:xfrm>
+            <a:off x="566928" y="1417320"/>
+            <a:ext cx="11057839" cy="914400"/>
+          </a:xfrm>
+          <a:prstGeom prst="rect">
+            <a:avLst/>
+          </a:prstGeom>
+          <a:noFill/>
+          <a:ln/>
+        </p:spPr>
+        <p:txBody>
+          <a:bodyPr wrap="square" lIns="0" tIns="0" rIns="0" bIns="0" rtlCol="0" anchor="t"/>
+          <a:lstStyle/>
+          <a:p>
+            <a:pPr algn="l" indent="0" marL="0">
+              <a:lnSpc>
+                <a:spcPct val="105000"/>
+              </a:lnSpc>
+              <a:buNone/>
+            </a:pPr>
+            <a:r>
+              <a:rPr lang="en-US" sz="1450" b="1" dirty="0">
+                <a:solidFill>
+                  <a:srgbClr val="1B2A38"/>
+                </a:solidFill>
+                <a:latin typeface="Calibri" pitchFamily="34" charset="0"/>
+                <a:ea typeface="Calibri" pitchFamily="34" charset="-122"/>
+                <a:cs typeface="Calibri" pitchFamily="34" charset="-120"/>
+              </a:rPr>
+              <a:t>A 10x rule (ten consecutive points on one side of the mean) indicates:</a:t>
+            </a:r>
+            <a:endParaRPr lang="en-US" sz="1450" dirty="0"/>
+          </a:p>
+        </p:txBody>
+      </p:sp>
+      <p:sp>
+        <p:nvSpPr>
+          <p:cNvPr id="5" name="Text 3"/>
+          <p:cNvSpPr/>
+          <p:nvPr/>
+        </p:nvSpPr>
+        <p:spPr>
+          <a:xfrm>
+            <a:off x="658368" y="2395728"/>
+            <a:ext cx="6192390" cy="3017520"/>
+          </a:xfrm>
+          <a:prstGeom prst="rect">
+            <a:avLst/>
+          </a:prstGeom>
+          <a:noFill/>
+          <a:ln/>
+        </p:spPr>
+        <p:txBody>
+          <a:bodyPr wrap="square" lIns="0" tIns="0" rIns="0" bIns="0" rtlCol="0" anchor="t"/>
+          <a:lstStyle/>
+          <a:p>
+            <a:pPr algn="l" indent="0" marL="0">
+              <a:spcAft>
+                <a:spcPts val="600"/>
+              </a:spcAft>
+              <a:buNone/>
+            </a:pPr>
+            <a:r>
+              <a:rPr lang="en-US" sz="1350" dirty="0">
+                <a:solidFill>
+                  <a:srgbClr val="33444F"/>
+                </a:solidFill>
+                <a:latin typeface="Calibri" pitchFamily="34" charset="0"/>
+                <a:ea typeface="Calibri" pitchFamily="34" charset="-122"/>
+                <a:cs typeface="Calibri" pitchFamily="34" charset="-120"/>
+              </a:rPr>
+              <a:t>A. Random error</a:t>
+            </a:r>
+            <a:endParaRPr lang="en-US" sz="1350" dirty="0"/>
+          </a:p>
+          <a:p>
+            <a:pPr algn="l" indent="0" marL="0">
+              <a:spcAft>
+                <a:spcPts val="600"/>
+              </a:spcAft>
+              <a:buNone/>
+            </a:pPr>
+            <a:r>
+              <a:rPr lang="en-US" sz="1350" b="1" dirty="0">
+                <a:solidFill>
+                  <a:srgbClr val="2C3A41"/>
+                </a:solidFill>
+                <a:latin typeface="Calibri" pitchFamily="34" charset="0"/>
+                <a:ea typeface="Calibri" pitchFamily="34" charset="-122"/>
+                <a:cs typeface="Calibri" pitchFamily="34" charset="-120"/>
+              </a:rPr>
+              <a:t>B. Systematic error (shift/bias)</a:t>
+            </a:r>
+            <a:endParaRPr lang="en-US" sz="1350" dirty="0"/>
+          </a:p>
+          <a:p>
+            <a:pPr algn="l" indent="0" marL="0">
+              <a:spcAft>
+                <a:spcPts val="600"/>
+              </a:spcAft>
+              <a:buNone/>
+            </a:pPr>
+            <a:r>
+              <a:rPr lang="en-US" sz="1350" dirty="0">
+                <a:solidFill>
+                  <a:srgbClr val="33444F"/>
+                </a:solidFill>
+                <a:latin typeface="Calibri" pitchFamily="34" charset="0"/>
+                <a:ea typeface="Calibri" pitchFamily="34" charset="-122"/>
+                <a:cs typeface="Calibri" pitchFamily="34" charset="-120"/>
+              </a:rPr>
+              <a:t>C. Acceptable performance</a:t>
+            </a:r>
+            <a:endParaRPr lang="en-US" sz="1350" dirty="0"/>
+          </a:p>
+          <a:p>
+            <a:pPr algn="l" indent="0" marL="0">
+              <a:spcAft>
+                <a:spcPts val="600"/>
+              </a:spcAft>
+              <a:buNone/>
+            </a:pPr>
+            <a:r>
+              <a:rPr lang="en-US" sz="1350" dirty="0">
+                <a:solidFill>
+                  <a:srgbClr val="33444F"/>
+                </a:solidFill>
+                <a:latin typeface="Calibri" pitchFamily="34" charset="0"/>
+                <a:ea typeface="Calibri" pitchFamily="34" charset="-122"/>
+                <a:cs typeface="Calibri" pitchFamily="34" charset="-120"/>
+              </a:rPr>
+              <a:t>D. A warning to ignore</a:t>
+            </a:r>
+            <a:endParaRPr lang="en-US" sz="1350" dirty="0"/>
+          </a:p>
+          <a:p>
+            <a:pPr algn="l" indent="0" marL="0">
+              <a:spcAft>
+                <a:spcPts val="600"/>
+              </a:spcAft>
+              <a:buNone/>
+            </a:pPr>
+            <a:r>
+              <a:rPr lang="en-US" sz="1350" dirty="0">
+                <a:solidFill>
+                  <a:srgbClr val="33444F"/>
+                </a:solidFill>
+                <a:latin typeface="Calibri" pitchFamily="34" charset="0"/>
+                <a:ea typeface="Calibri" pitchFamily="34" charset="-122"/>
+                <a:cs typeface="Calibri" pitchFamily="34" charset="-120"/>
+              </a:rPr>
+              <a:t>E. Improved precision</a:t>
+            </a:r>
+            <a:endParaRPr lang="en-US" sz="1350" dirty="0"/>
+          </a:p>
+        </p:txBody>
+      </p:sp>
+      <p:sp>
+        <p:nvSpPr>
+          <p:cNvPr id="6" name="Shape 4"/>
+          <p:cNvSpPr/>
+          <p:nvPr/>
+        </p:nvSpPr>
+        <p:spPr>
+          <a:xfrm>
+            <a:off x="7201632" y="2395728"/>
+            <a:ext cx="4423136" cy="3246120"/>
+          </a:xfrm>
+          <a:prstGeom prst="roundRect">
+            <a:avLst>
+              <a:gd name="adj" fmla="val 2535"/>
+            </a:avLst>
+          </a:prstGeom>
+          <a:solidFill>
+            <a:srgbClr val="ECEFF1"/>
+          </a:solidFill>
+          <a:ln/>
+          <a:effectLst>
+            <a:outerShdw sx="100000" sy="100000" kx="0" ky="0" algn="bl" rotWithShape="0" blurRad="88900" dist="25400" dir="5400000">
+              <a:srgbClr val="22303C">
+                <a:alpha val="12000"/>
+              </a:srgbClr>
+            </a:outerShdw>
+          </a:effectLst>
+        </p:spPr>
+      </p:sp>
+      <p:sp>
+        <p:nvSpPr>
+          <p:cNvPr id="7" name="Text 5"/>
+          <p:cNvSpPr/>
+          <p:nvPr/>
+        </p:nvSpPr>
+        <p:spPr>
+          <a:xfrm>
+            <a:off x="7439376" y="2578608"/>
+            <a:ext cx="3965936" cy="457200"/>
+          </a:xfrm>
+          <a:prstGeom prst="rect">
+            <a:avLst/>
+          </a:prstGeom>
+          <a:noFill/>
+          <a:ln/>
+        </p:spPr>
+        <p:txBody>
+          <a:bodyPr wrap="square" lIns="0" tIns="0" rIns="0" bIns="0" rtlCol="0" anchor="ctr"/>
+          <a:lstStyle/>
+          <a:p>
+            <a:pPr indent="0" marL="0">
+              <a:buNone/>
+            </a:pPr>
+            <a:r>
+              <a:rPr lang="en-US" sz="1500" b="1" dirty="0">
+                <a:solidFill>
+                  <a:srgbClr val="455A64"/>
+                </a:solidFill>
+                <a:latin typeface="Calibri" pitchFamily="34" charset="0"/>
+                <a:ea typeface="Calibri" pitchFamily="34" charset="-122"/>
+                <a:cs typeface="Calibri" pitchFamily="34" charset="-120"/>
+              </a:rPr>
+              <a:t>ANSWER  </a:t>
+            </a:r>
+            <a:pPr indent="0" marL="0">
+              <a:buNone/>
+            </a:pPr>
+            <a:r>
+              <a:rPr lang="en-US" sz="1500" b="1" dirty="0">
+                <a:solidFill>
+                  <a:srgbClr val="1B2A38"/>
+                </a:solidFill>
+                <a:latin typeface="Calibri" pitchFamily="34" charset="0"/>
+                <a:ea typeface="Calibri" pitchFamily="34" charset="-122"/>
+                <a:cs typeface="Calibri" pitchFamily="34" charset="-120"/>
+              </a:rPr>
+              <a:t>B — Systematic error</a:t>
+            </a:r>
+            <a:endParaRPr lang="en-US" sz="1500" dirty="0"/>
+          </a:p>
+        </p:txBody>
+      </p:sp>
+      <p:sp>
+        <p:nvSpPr>
+          <p:cNvPr id="8" name="Text 6"/>
+          <p:cNvSpPr/>
+          <p:nvPr/>
+        </p:nvSpPr>
+        <p:spPr>
+          <a:xfrm>
+            <a:off x="7439376" y="3127248"/>
+            <a:ext cx="3947648" cy="2377440"/>
+          </a:xfrm>
+          <a:prstGeom prst="rect">
+            <a:avLst/>
+          </a:prstGeom>
+          <a:noFill/>
+          <a:ln/>
+        </p:spPr>
+        <p:txBody>
+          <a:bodyPr wrap="square" lIns="0" tIns="0" rIns="0" bIns="0" rtlCol="0" anchor="t"/>
+          <a:lstStyle/>
+          <a:p>
+            <a:pPr algn="l" indent="0" marL="0">
+              <a:lnSpc>
+                <a:spcPct val="108000"/>
+              </a:lnSpc>
+              <a:buNone/>
+            </a:pPr>
+            <a:r>
+              <a:rPr lang="en-US" sz="1250" dirty="0">
+                <a:solidFill>
+                  <a:srgbClr val="33444F"/>
+                </a:solidFill>
+                <a:latin typeface="Calibri" pitchFamily="34" charset="0"/>
+                <a:ea typeface="Calibri" pitchFamily="34" charset="-122"/>
+                <a:cs typeface="Calibri" pitchFamily="34" charset="-120"/>
+              </a:rPr>
+              <a:t>A run of points on one side reflects a shift/bias, often from calibration or reagent changes.</a:t>
+            </a:r>
+            <a:endParaRPr lang="en-US" sz="1250" dirty="0"/>
+          </a:p>
+        </p:txBody>
+      </p:sp>
+      <p:sp>
+        <p:nvSpPr>
+          <p:cNvPr id="9" name="Text 7"/>
+          <p:cNvSpPr/>
+          <p:nvPr/>
+        </p:nvSpPr>
+        <p:spPr>
+          <a:xfrm>
+            <a:off x="566928" y="6473952"/>
+            <a:ext cx="7772400" cy="274320"/>
+          </a:xfrm>
+          <a:prstGeom prst="rect">
+            <a:avLst/>
+          </a:prstGeom>
+          <a:noFill/>
+          <a:ln/>
+        </p:spPr>
+        <p:txBody>
+          <a:bodyPr wrap="square" lIns="0" tIns="0" rIns="0" bIns="0" rtlCol="0" anchor="ctr"/>
+          <a:lstStyle/>
+          <a:p>
+            <a:pPr algn="l" indent="0" marL="0">
+              <a:buNone/>
+            </a:pPr>
+            <a:r>
+              <a:rPr lang="en-US" sz="850" dirty="0">
+                <a:solidFill>
+                  <a:srgbClr val="9AA8B4"/>
+                </a:solidFill>
+                <a:latin typeface="Calibri" pitchFamily="34" charset="0"/>
+                <a:ea typeface="Calibri" pitchFamily="34" charset="-122"/>
+                <a:cs typeface="Calibri" pitchFamily="34" charset="-120"/>
+              </a:rPr>
+              <a:t>Makassed General Hospital  ·  Department of Laboratory Medicine</a:t>
+            </a:r>
+            <a:endParaRPr lang="en-US" sz="850" dirty="0"/>
+          </a:p>
+        </p:txBody>
+      </p:sp>
+      <p:sp>
+        <p:nvSpPr>
+          <p:cNvPr id="10" name="Text 8"/>
+          <p:cNvSpPr/>
+          <p:nvPr/>
+        </p:nvSpPr>
+        <p:spPr>
+          <a:xfrm>
+            <a:off x="9814255" y="6473952"/>
+            <a:ext cx="1828800" cy="274320"/>
+          </a:xfrm>
+          <a:prstGeom prst="rect">
+            <a:avLst/>
+          </a:prstGeom>
+          <a:noFill/>
+          <a:ln/>
+        </p:spPr>
+        <p:txBody>
+          <a:bodyPr wrap="square" lIns="0" tIns="0" rIns="0" bIns="0" rtlCol="0" anchor="ctr"/>
+          <a:lstStyle/>
+          <a:p>
+            <a:pPr algn="r" indent="0" marL="0">
+              <a:buNone/>
+            </a:pPr>
+            <a:r>
+              <a:rPr lang="en-US" sz="850" dirty="0">
+                <a:solidFill>
+                  <a:srgbClr val="9AA8B4"/>
+                </a:solidFill>
+                <a:latin typeface="Calibri" pitchFamily="34" charset="0"/>
+                <a:ea typeface="Calibri" pitchFamily="34" charset="-122"/>
+                <a:cs typeface="Calibri" pitchFamily="34" charset="-120"/>
+              </a:rPr>
+              <a:t>CP Lecture Series</a:t>
+            </a:r>
+            <a:pPr algn="r" indent="0" marL="0">
+              <a:buNone/>
+            </a:pPr>
+            <a:r>
+              <a:rPr lang="en-US" sz="850" dirty="0">
+                <a:solidFill>
+                  <a:srgbClr val="DCE4EC"/>
+                </a:solidFill>
+                <a:latin typeface="Calibri" pitchFamily="34" charset="0"/>
+                <a:ea typeface="Calibri" pitchFamily="34" charset="-122"/>
+                <a:cs typeface="Calibri" pitchFamily="34" charset="-120"/>
+              </a:rPr>
+              <a:t>   ·   </a:t>
+            </a:r>
+            <a:pPr algn="r" indent="0" marL="0">
+              <a:buNone/>
+            </a:pPr>
+            <a:r>
+              <a:rPr lang="en-US" sz="850" b="1" dirty="0">
+                <a:solidFill>
+                  <a:srgbClr val="455A64"/>
+                </a:solidFill>
+                <a:latin typeface="Calibri" pitchFamily="34" charset="0"/>
+                <a:ea typeface="Calibri" pitchFamily="34" charset="-122"/>
+                <a:cs typeface="Calibri" pitchFamily="34" charset="-120"/>
+              </a:rPr>
+              <a:t>18</a:t>
+            </a:r>
+            <a:endParaRPr lang="en-US" sz="850" dirty="0"/>
+          </a:p>
+        </p:txBody>
+      </p:sp>
+    </p:spTree>
+  </p:cSld>
+  <p:clrMapOvr>
+    <a:masterClrMapping/>
+  </p:clrMapOvr>
+</p:sld>
+</file>
+
+<file path=ppt/slides/slide22.xml><?xml version="1.0" encoding="utf-8"?>
+<p:sld xmlns:a="http://schemas.openxmlformats.org/drawingml/2006/main" xmlns:r="http://schemas.openxmlformats.org/officeDocument/2006/relationships" xmlns:p="http://schemas.openxmlformats.org/presentationml/2006/main">
+  <p:cSld name="Slide 22">
+    <p:bg>
+      <p:bgPr>
+        <a:solidFill>
+          <a:srgbClr val="FFFFFF"/>
+        </a:solidFill>
+      </p:bgPr>
+    </p:bg>
+    <p:spTree>
+      <p:nvGrpSpPr>
+        <p:cNvPr id="1" name=""/>
+        <p:cNvGrpSpPr/>
+        <p:nvPr/>
+      </p:nvGrpSpPr>
+      <p:grpSpPr>
+        <a:xfrm>
+          <a:off x="0" y="0"/>
+          <a:ext cx="0" cy="0"/>
+          <a:chOff x="0" y="0"/>
+          <a:chExt cx="0" cy="0"/>
+        </a:xfrm>
+      </p:grpSpPr>
+      <p:sp>
+        <p:nvSpPr>
+          <p:cNvPr id="2" name="Text 0"/>
+          <p:cNvSpPr/>
+          <p:nvPr/>
+        </p:nvSpPr>
+        <p:spPr>
+          <a:xfrm>
+            <a:off x="566928" y="329184"/>
+            <a:ext cx="10515600" cy="310896"/>
+          </a:xfrm>
+          <a:prstGeom prst="rect">
+            <a:avLst/>
+          </a:prstGeom>
+          <a:noFill/>
+          <a:ln/>
+        </p:spPr>
+        <p:txBody>
+          <a:bodyPr wrap="square" lIns="0" tIns="0" rIns="0" bIns="0" rtlCol="0" anchor="ctr"/>
+          <a:lstStyle/>
+          <a:p>
+            <a:pPr algn="l" indent="0" marL="0">
+              <a:buNone/>
+            </a:pPr>
+            <a:r>
+              <a:rPr lang="en-US" sz="1100" b="1" spc="150" kern="0" dirty="0">
+                <a:solidFill>
+                  <a:srgbClr val="455A64"/>
+                </a:solidFill>
+                <a:latin typeface="Calibri" pitchFamily="34" charset="0"/>
+                <a:ea typeface="Calibri" pitchFamily="34" charset="-122"/>
+                <a:cs typeface="Calibri" pitchFamily="34" charset="-120"/>
+              </a:rPr>
+              <a:t>LAB MANAGEMENT &amp; QUALITY   ·   BOARD REVIEW  ·  Q3</a:t>
+            </a:r>
+            <a:endParaRPr lang="en-US" sz="1100" dirty="0"/>
+          </a:p>
+        </p:txBody>
+      </p:sp>
+      <p:sp>
+        <p:nvSpPr>
+          <p:cNvPr id="3" name="Text 1"/>
+          <p:cNvSpPr/>
+          <p:nvPr/>
+        </p:nvSpPr>
+        <p:spPr>
+          <a:xfrm>
+            <a:off x="566928" y="713232"/>
+            <a:ext cx="11064240" cy="749808"/>
+          </a:xfrm>
+          <a:prstGeom prst="rect">
+            <a:avLst/>
+          </a:prstGeom>
+          <a:noFill/>
+          <a:ln/>
+        </p:spPr>
+        <p:txBody>
+          <a:bodyPr wrap="square" lIns="0" tIns="0" rIns="0" bIns="0" rtlCol="0" anchor="ctr"/>
+          <a:lstStyle/>
+          <a:p>
+            <a:pPr algn="l" indent="0" marL="0">
+              <a:buNone/>
+            </a:pPr>
+            <a:r>
+              <a:rPr lang="en-US" sz="2600" b="1" dirty="0">
+                <a:solidFill>
+                  <a:srgbClr val="0E3A5F"/>
+                </a:solidFill>
+                <a:latin typeface="Calibri" pitchFamily="34" charset="0"/>
+                <a:ea typeface="Calibri" pitchFamily="34" charset="-122"/>
+                <a:cs typeface="Calibri" pitchFamily="34" charset="-120"/>
+              </a:rPr>
+              <a:t>Board-Style Review</a:t>
+            </a:r>
+            <a:endParaRPr lang="en-US" sz="2600" dirty="0"/>
+          </a:p>
+        </p:txBody>
+      </p:sp>
+      <p:sp>
+        <p:nvSpPr>
+          <p:cNvPr id="4" name="Text 2"/>
+          <p:cNvSpPr/>
+          <p:nvPr/>
+        </p:nvSpPr>
+        <p:spPr>
+          <a:xfrm>
+            <a:off x="566928" y="1417320"/>
+            <a:ext cx="11057839" cy="914400"/>
+          </a:xfrm>
+          <a:prstGeom prst="rect">
+            <a:avLst/>
+          </a:prstGeom>
+          <a:noFill/>
+          <a:ln/>
+        </p:spPr>
+        <p:txBody>
+          <a:bodyPr wrap="square" lIns="0" tIns="0" rIns="0" bIns="0" rtlCol="0" anchor="t"/>
+          <a:lstStyle/>
+          <a:p>
+            <a:pPr algn="l" indent="0" marL="0">
+              <a:lnSpc>
+                <a:spcPct val="105000"/>
+              </a:lnSpc>
+              <a:buNone/>
+            </a:pPr>
+            <a:r>
+              <a:rPr lang="en-US" sz="1450" b="1" dirty="0">
+                <a:solidFill>
+                  <a:srgbClr val="1B2A38"/>
+                </a:solidFill>
+                <a:latin typeface="Calibri" pitchFamily="34" charset="0"/>
+                <a:ea typeface="Calibri" pitchFamily="34" charset="-122"/>
+                <a:cs typeface="Calibri" pitchFamily="34" charset="-120"/>
+              </a:rPr>
+              <a:t>Most laboratory errors occur in which phase?</a:t>
+            </a:r>
+            <a:endParaRPr lang="en-US" sz="1450" dirty="0"/>
+          </a:p>
+        </p:txBody>
+      </p:sp>
+      <p:sp>
+        <p:nvSpPr>
+          <p:cNvPr id="5" name="Text 3"/>
+          <p:cNvSpPr/>
+          <p:nvPr/>
+        </p:nvSpPr>
+        <p:spPr>
+          <a:xfrm>
+            <a:off x="658368" y="2395728"/>
+            <a:ext cx="6192390" cy="3017520"/>
+          </a:xfrm>
+          <a:prstGeom prst="rect">
+            <a:avLst/>
+          </a:prstGeom>
+          <a:noFill/>
+          <a:ln/>
+        </p:spPr>
+        <p:txBody>
+          <a:bodyPr wrap="square" lIns="0" tIns="0" rIns="0" bIns="0" rtlCol="0" anchor="t"/>
+          <a:lstStyle/>
+          <a:p>
+            <a:pPr algn="l" indent="0" marL="0">
+              <a:spcAft>
+                <a:spcPts val="600"/>
+              </a:spcAft>
+              <a:buNone/>
+            </a:pPr>
+            <a:r>
+              <a:rPr lang="en-US" sz="1350" dirty="0">
+                <a:solidFill>
+                  <a:srgbClr val="33444F"/>
+                </a:solidFill>
+                <a:latin typeface="Calibri" pitchFamily="34" charset="0"/>
+                <a:ea typeface="Calibri" pitchFamily="34" charset="-122"/>
+                <a:cs typeface="Calibri" pitchFamily="34" charset="-120"/>
+              </a:rPr>
+              <a:t>A. Analytic</a:t>
+            </a:r>
+            <a:endParaRPr lang="en-US" sz="1350" dirty="0"/>
+          </a:p>
+          <a:p>
+            <a:pPr algn="l" indent="0" marL="0">
+              <a:spcAft>
+                <a:spcPts val="600"/>
+              </a:spcAft>
+              <a:buNone/>
+            </a:pPr>
+            <a:r>
+              <a:rPr lang="en-US" sz="1350" b="1" dirty="0">
+                <a:solidFill>
+                  <a:srgbClr val="2C3A41"/>
+                </a:solidFill>
+                <a:latin typeface="Calibri" pitchFamily="34" charset="0"/>
+                <a:ea typeface="Calibri" pitchFamily="34" charset="-122"/>
+                <a:cs typeface="Calibri" pitchFamily="34" charset="-120"/>
+              </a:rPr>
+              <a:t>B. Pre-analytic</a:t>
+            </a:r>
+            <a:endParaRPr lang="en-US" sz="1350" dirty="0"/>
+          </a:p>
+          <a:p>
+            <a:pPr algn="l" indent="0" marL="0">
+              <a:spcAft>
+                <a:spcPts val="600"/>
+              </a:spcAft>
+              <a:buNone/>
+            </a:pPr>
+            <a:r>
+              <a:rPr lang="en-US" sz="1350" dirty="0">
+                <a:solidFill>
+                  <a:srgbClr val="33444F"/>
+                </a:solidFill>
+                <a:latin typeface="Calibri" pitchFamily="34" charset="0"/>
+                <a:ea typeface="Calibri" pitchFamily="34" charset="-122"/>
+                <a:cs typeface="Calibri" pitchFamily="34" charset="-120"/>
+              </a:rPr>
+              <a:t>C. Post-analytic</a:t>
+            </a:r>
+            <a:endParaRPr lang="en-US" sz="1350" dirty="0"/>
+          </a:p>
+          <a:p>
+            <a:pPr algn="l" indent="0" marL="0">
+              <a:spcAft>
+                <a:spcPts val="600"/>
+              </a:spcAft>
+              <a:buNone/>
+            </a:pPr>
+            <a:r>
+              <a:rPr lang="en-US" sz="1350" dirty="0">
+                <a:solidFill>
+                  <a:srgbClr val="33444F"/>
+                </a:solidFill>
+                <a:latin typeface="Calibri" pitchFamily="34" charset="0"/>
+                <a:ea typeface="Calibri" pitchFamily="34" charset="-122"/>
+                <a:cs typeface="Calibri" pitchFamily="34" charset="-120"/>
+              </a:rPr>
+              <a:t>D. Calibration</a:t>
+            </a:r>
+            <a:endParaRPr lang="en-US" sz="1350" dirty="0"/>
+          </a:p>
+          <a:p>
+            <a:pPr algn="l" indent="0" marL="0">
+              <a:spcAft>
+                <a:spcPts val="600"/>
+              </a:spcAft>
+              <a:buNone/>
+            </a:pPr>
+            <a:r>
+              <a:rPr lang="en-US" sz="1350" dirty="0">
+                <a:solidFill>
+                  <a:srgbClr val="33444F"/>
+                </a:solidFill>
+                <a:latin typeface="Calibri" pitchFamily="34" charset="0"/>
+                <a:ea typeface="Calibri" pitchFamily="34" charset="-122"/>
+                <a:cs typeface="Calibri" pitchFamily="34" charset="-120"/>
+              </a:rPr>
+              <a:t>E. Maintenance</a:t>
+            </a:r>
+            <a:endParaRPr lang="en-US" sz="1350" dirty="0"/>
+          </a:p>
+        </p:txBody>
+      </p:sp>
+      <p:sp>
+        <p:nvSpPr>
+          <p:cNvPr id="6" name="Shape 4"/>
+          <p:cNvSpPr/>
+          <p:nvPr/>
+        </p:nvSpPr>
+        <p:spPr>
+          <a:xfrm>
+            <a:off x="7201632" y="2395728"/>
+            <a:ext cx="4423136" cy="3246120"/>
+          </a:xfrm>
+          <a:prstGeom prst="roundRect">
+            <a:avLst>
+              <a:gd name="adj" fmla="val 2535"/>
+            </a:avLst>
+          </a:prstGeom>
+          <a:solidFill>
+            <a:srgbClr val="ECEFF1"/>
+          </a:solidFill>
+          <a:ln/>
+          <a:effectLst>
+            <a:outerShdw sx="100000" sy="100000" kx="0" ky="0" algn="bl" rotWithShape="0" blurRad="88900" dist="25400" dir="5400000">
+              <a:srgbClr val="22303C">
+                <a:alpha val="12000"/>
+              </a:srgbClr>
+            </a:outerShdw>
+          </a:effectLst>
+        </p:spPr>
+      </p:sp>
+      <p:sp>
+        <p:nvSpPr>
+          <p:cNvPr id="7" name="Text 5"/>
+          <p:cNvSpPr/>
+          <p:nvPr/>
+        </p:nvSpPr>
+        <p:spPr>
+          <a:xfrm>
+            <a:off x="7439376" y="2578608"/>
+            <a:ext cx="3965936" cy="457200"/>
+          </a:xfrm>
+          <a:prstGeom prst="rect">
+            <a:avLst/>
+          </a:prstGeom>
+          <a:noFill/>
+          <a:ln/>
+        </p:spPr>
+        <p:txBody>
+          <a:bodyPr wrap="square" lIns="0" tIns="0" rIns="0" bIns="0" rtlCol="0" anchor="ctr"/>
+          <a:lstStyle/>
+          <a:p>
+            <a:pPr indent="0" marL="0">
+              <a:buNone/>
+            </a:pPr>
+            <a:r>
+              <a:rPr lang="en-US" sz="1500" b="1" dirty="0">
+                <a:solidFill>
+                  <a:srgbClr val="455A64"/>
+                </a:solidFill>
+                <a:latin typeface="Calibri" pitchFamily="34" charset="0"/>
+                <a:ea typeface="Calibri" pitchFamily="34" charset="-122"/>
+                <a:cs typeface="Calibri" pitchFamily="34" charset="-120"/>
+              </a:rPr>
+              <a:t>ANSWER  </a:t>
+            </a:r>
+            <a:pPr indent="0" marL="0">
+              <a:buNone/>
+            </a:pPr>
+            <a:r>
+              <a:rPr lang="en-US" sz="1500" b="1" dirty="0">
+                <a:solidFill>
+                  <a:srgbClr val="1B2A38"/>
+                </a:solidFill>
+                <a:latin typeface="Calibri" pitchFamily="34" charset="0"/>
+                <a:ea typeface="Calibri" pitchFamily="34" charset="-122"/>
+                <a:cs typeface="Calibri" pitchFamily="34" charset="-120"/>
+              </a:rPr>
+              <a:t>B — Pre-analytic</a:t>
+            </a:r>
+            <a:endParaRPr lang="en-US" sz="1500" dirty="0"/>
+          </a:p>
+        </p:txBody>
+      </p:sp>
+      <p:sp>
+        <p:nvSpPr>
+          <p:cNvPr id="8" name="Text 6"/>
+          <p:cNvSpPr/>
+          <p:nvPr/>
+        </p:nvSpPr>
+        <p:spPr>
+          <a:xfrm>
+            <a:off x="7439376" y="3127248"/>
+            <a:ext cx="3947648" cy="2377440"/>
+          </a:xfrm>
+          <a:prstGeom prst="rect">
+            <a:avLst/>
+          </a:prstGeom>
+          <a:noFill/>
+          <a:ln/>
+        </p:spPr>
+        <p:txBody>
+          <a:bodyPr wrap="square" lIns="0" tIns="0" rIns="0" bIns="0" rtlCol="0" anchor="t"/>
+          <a:lstStyle/>
+          <a:p>
+            <a:pPr algn="l" indent="0" marL="0">
+              <a:lnSpc>
+                <a:spcPct val="108000"/>
+              </a:lnSpc>
+              <a:buNone/>
+            </a:pPr>
+            <a:r>
+              <a:rPr lang="en-US" sz="1250" dirty="0">
+                <a:solidFill>
+                  <a:srgbClr val="33444F"/>
+                </a:solidFill>
+                <a:latin typeface="Calibri" pitchFamily="34" charset="0"/>
+                <a:ea typeface="Calibri" pitchFamily="34" charset="-122"/>
+                <a:cs typeface="Calibri" pitchFamily="34" charset="-120"/>
+              </a:rPr>
+              <a:t>The majority of errors arise pre-analytically (ordering, collection, transport), so quality systems must extend beyond the bench.</a:t>
+            </a:r>
+            <a:endParaRPr lang="en-US" sz="1250" dirty="0"/>
+          </a:p>
+        </p:txBody>
+      </p:sp>
+      <p:sp>
+        <p:nvSpPr>
+          <p:cNvPr id="9" name="Text 7"/>
+          <p:cNvSpPr/>
+          <p:nvPr/>
+        </p:nvSpPr>
+        <p:spPr>
+          <a:xfrm>
+            <a:off x="566928" y="6473952"/>
+            <a:ext cx="7772400" cy="274320"/>
+          </a:xfrm>
+          <a:prstGeom prst="rect">
+            <a:avLst/>
+          </a:prstGeom>
+          <a:noFill/>
+          <a:ln/>
+        </p:spPr>
+        <p:txBody>
+          <a:bodyPr wrap="square" lIns="0" tIns="0" rIns="0" bIns="0" rtlCol="0" anchor="ctr"/>
+          <a:lstStyle/>
+          <a:p>
+            <a:pPr algn="l" indent="0" marL="0">
+              <a:buNone/>
+            </a:pPr>
+            <a:r>
+              <a:rPr lang="en-US" sz="850" dirty="0">
+                <a:solidFill>
+                  <a:srgbClr val="9AA8B4"/>
+                </a:solidFill>
+                <a:latin typeface="Calibri" pitchFamily="34" charset="0"/>
+                <a:ea typeface="Calibri" pitchFamily="34" charset="-122"/>
+                <a:cs typeface="Calibri" pitchFamily="34" charset="-120"/>
+              </a:rPr>
+              <a:t>Makassed General Hospital  ·  Department of Laboratory Medicine</a:t>
+            </a:r>
+            <a:endParaRPr lang="en-US" sz="850" dirty="0"/>
+          </a:p>
+        </p:txBody>
+      </p:sp>
+      <p:sp>
+        <p:nvSpPr>
+          <p:cNvPr id="10" name="Text 8"/>
+          <p:cNvSpPr/>
+          <p:nvPr/>
+        </p:nvSpPr>
+        <p:spPr>
+          <a:xfrm>
+            <a:off x="9814255" y="6473952"/>
+            <a:ext cx="1828800" cy="274320"/>
+          </a:xfrm>
+          <a:prstGeom prst="rect">
+            <a:avLst/>
+          </a:prstGeom>
+          <a:noFill/>
+          <a:ln/>
+        </p:spPr>
+        <p:txBody>
+          <a:bodyPr wrap="square" lIns="0" tIns="0" rIns="0" bIns="0" rtlCol="0" anchor="ctr"/>
+          <a:lstStyle/>
+          <a:p>
+            <a:pPr algn="r" indent="0" marL="0">
+              <a:buNone/>
+            </a:pPr>
+            <a:r>
+              <a:rPr lang="en-US" sz="850" dirty="0">
+                <a:solidFill>
+                  <a:srgbClr val="9AA8B4"/>
+                </a:solidFill>
+                <a:latin typeface="Calibri" pitchFamily="34" charset="0"/>
+                <a:ea typeface="Calibri" pitchFamily="34" charset="-122"/>
+                <a:cs typeface="Calibri" pitchFamily="34" charset="-120"/>
+              </a:rPr>
+              <a:t>CP Lecture Series</a:t>
+            </a:r>
+            <a:pPr algn="r" indent="0" marL="0">
+              <a:buNone/>
+            </a:pPr>
+            <a:r>
+              <a:rPr lang="en-US" sz="850" dirty="0">
+                <a:solidFill>
+                  <a:srgbClr val="DCE4EC"/>
+                </a:solidFill>
+                <a:latin typeface="Calibri" pitchFamily="34" charset="0"/>
+                <a:ea typeface="Calibri" pitchFamily="34" charset="-122"/>
+                <a:cs typeface="Calibri" pitchFamily="34" charset="-120"/>
+              </a:rPr>
+              <a:t>   ·   </a:t>
+            </a:r>
+            <a:pPr algn="r" indent="0" marL="0">
+              <a:buNone/>
+            </a:pPr>
+            <a:r>
+              <a:rPr lang="en-US" sz="850" b="1" dirty="0">
+                <a:solidFill>
+                  <a:srgbClr val="455A64"/>
+                </a:solidFill>
+                <a:latin typeface="Calibri" pitchFamily="34" charset="0"/>
+                <a:ea typeface="Calibri" pitchFamily="34" charset="-122"/>
+                <a:cs typeface="Calibri" pitchFamily="34" charset="-120"/>
+              </a:rPr>
+              <a:t>19</a:t>
+            </a:r>
+            <a:endParaRPr lang="en-US" sz="850" dirty="0"/>
+          </a:p>
+        </p:txBody>
+      </p:sp>
+    </p:spTree>
+  </p:cSld>
+  <p:clrMapOvr>
+    <a:masterClrMapping/>
+  </p:clrMapOvr>
+</p:sld>
+</file>
+
+<file path=ppt/slides/slide23.xml><?xml version="1.0" encoding="utf-8"?>
+<p:sld xmlns:a="http://schemas.openxmlformats.org/drawingml/2006/main" xmlns:r="http://schemas.openxmlformats.org/officeDocument/2006/relationships" xmlns:p="http://schemas.openxmlformats.org/presentationml/2006/main">
+  <p:cSld name="Slide 23">
+    <p:bg>
+      <p:bgPr>
+        <a:solidFill>
+          <a:srgbClr val="FFFFFF"/>
+        </a:solidFill>
+      </p:bgPr>
+    </p:bg>
+    <p:spTree>
+      <p:nvGrpSpPr>
+        <p:cNvPr id="1" name=""/>
+        <p:cNvGrpSpPr/>
+        <p:nvPr/>
+      </p:nvGrpSpPr>
+      <p:grpSpPr>
+        <a:xfrm>
+          <a:off x="0" y="0"/>
+          <a:ext cx="0" cy="0"/>
+          <a:chOff x="0" y="0"/>
+          <a:chExt cx="0" cy="0"/>
+        </a:xfrm>
+      </p:grpSpPr>
+      <p:sp>
+        <p:nvSpPr>
+          <p:cNvPr id="2" name="Text 0"/>
+          <p:cNvSpPr/>
+          <p:nvPr/>
+        </p:nvSpPr>
+        <p:spPr>
+          <a:xfrm>
+            <a:off x="566928" y="329184"/>
+            <a:ext cx="10515600" cy="310896"/>
+          </a:xfrm>
+          <a:prstGeom prst="rect">
+            <a:avLst/>
+          </a:prstGeom>
+          <a:noFill/>
+          <a:ln/>
+        </p:spPr>
+        <p:txBody>
+          <a:bodyPr wrap="square" lIns="0" tIns="0" rIns="0" bIns="0" rtlCol="0" anchor="ctr"/>
+          <a:lstStyle/>
+          <a:p>
+            <a:pPr algn="l" indent="0" marL="0">
+              <a:buNone/>
+            </a:pPr>
+            <a:r>
+              <a:rPr lang="en-US" sz="1100" b="1" spc="150" kern="0" dirty="0">
+                <a:solidFill>
+                  <a:srgbClr val="455A64"/>
+                </a:solidFill>
+                <a:latin typeface="Calibri" pitchFamily="34" charset="0"/>
+                <a:ea typeface="Calibri" pitchFamily="34" charset="-122"/>
+                <a:cs typeface="Calibri" pitchFamily="34" charset="-120"/>
+              </a:rPr>
+              <a:t>LAB MANAGEMENT &amp; QUALITY   ·   BOARD REVIEW  ·  Q4</a:t>
+            </a:r>
+            <a:endParaRPr lang="en-US" sz="1100" dirty="0"/>
+          </a:p>
+        </p:txBody>
+      </p:sp>
+      <p:sp>
+        <p:nvSpPr>
+          <p:cNvPr id="3" name="Text 1"/>
+          <p:cNvSpPr/>
+          <p:nvPr/>
+        </p:nvSpPr>
+        <p:spPr>
+          <a:xfrm>
+            <a:off x="566928" y="713232"/>
+            <a:ext cx="11064240" cy="749808"/>
+          </a:xfrm>
+          <a:prstGeom prst="rect">
+            <a:avLst/>
+          </a:prstGeom>
+          <a:noFill/>
+          <a:ln/>
+        </p:spPr>
+        <p:txBody>
+          <a:bodyPr wrap="square" lIns="0" tIns="0" rIns="0" bIns="0" rtlCol="0" anchor="ctr"/>
+          <a:lstStyle/>
+          <a:p>
+            <a:pPr algn="l" indent="0" marL="0">
+              <a:buNone/>
+            </a:pPr>
+            <a:r>
+              <a:rPr lang="en-US" sz="2600" b="1" dirty="0">
+                <a:solidFill>
+                  <a:srgbClr val="0E3A5F"/>
+                </a:solidFill>
+                <a:latin typeface="Calibri" pitchFamily="34" charset="0"/>
+                <a:ea typeface="Calibri" pitchFamily="34" charset="-122"/>
+                <a:cs typeface="Calibri" pitchFamily="34" charset="-120"/>
+              </a:rPr>
+              <a:t>Board-Style Review</a:t>
+            </a:r>
+            <a:endParaRPr lang="en-US" sz="2600" dirty="0"/>
+          </a:p>
+        </p:txBody>
+      </p:sp>
+      <p:sp>
+        <p:nvSpPr>
+          <p:cNvPr id="4" name="Text 2"/>
+          <p:cNvSpPr/>
+          <p:nvPr/>
+        </p:nvSpPr>
+        <p:spPr>
+          <a:xfrm>
+            <a:off x="566928" y="1417320"/>
+            <a:ext cx="11057839" cy="914400"/>
+          </a:xfrm>
+          <a:prstGeom prst="rect">
+            <a:avLst/>
+          </a:prstGeom>
+          <a:noFill/>
+          <a:ln/>
+        </p:spPr>
+        <p:txBody>
+          <a:bodyPr wrap="square" lIns="0" tIns="0" rIns="0" bIns="0" rtlCol="0" anchor="t"/>
+          <a:lstStyle/>
+          <a:p>
+            <a:pPr algn="l" indent="0" marL="0">
+              <a:lnSpc>
+                <a:spcPct val="105000"/>
+              </a:lnSpc>
+              <a:buNone/>
+            </a:pPr>
+            <a:r>
+              <a:rPr lang="en-US" sz="1450" b="1" dirty="0">
+                <a:solidFill>
+                  <a:srgbClr val="1B2A38"/>
+                </a:solidFill>
+                <a:latin typeface="Calibri" pitchFamily="34" charset="0"/>
+                <a:ea typeface="Calibri" pitchFamily="34" charset="-122"/>
+                <a:cs typeface="Calibri" pitchFamily="34" charset="-120"/>
+              </a:rPr>
+              <a:t>The 1_2s rule is best used as:</a:t>
+            </a:r>
+            <a:endParaRPr lang="en-US" sz="1450" dirty="0"/>
+          </a:p>
+        </p:txBody>
+      </p:sp>
+      <p:sp>
+        <p:nvSpPr>
+          <p:cNvPr id="5" name="Text 3"/>
+          <p:cNvSpPr/>
+          <p:nvPr/>
+        </p:nvSpPr>
+        <p:spPr>
+          <a:xfrm>
+            <a:off x="658368" y="2395728"/>
+            <a:ext cx="6192390" cy="3017520"/>
+          </a:xfrm>
+          <a:prstGeom prst="rect">
+            <a:avLst/>
+          </a:prstGeom>
+          <a:noFill/>
+          <a:ln/>
+        </p:spPr>
+        <p:txBody>
+          <a:bodyPr wrap="square" lIns="0" tIns="0" rIns="0" bIns="0" rtlCol="0" anchor="t"/>
+          <a:lstStyle/>
+          <a:p>
+            <a:pPr algn="l" indent="0" marL="0">
+              <a:spcAft>
+                <a:spcPts val="600"/>
+              </a:spcAft>
+              <a:buNone/>
+            </a:pPr>
+            <a:r>
+              <a:rPr lang="en-US" sz="1350" dirty="0">
+                <a:solidFill>
+                  <a:srgbClr val="33444F"/>
+                </a:solidFill>
+                <a:latin typeface="Calibri" pitchFamily="34" charset="0"/>
+                <a:ea typeface="Calibri" pitchFamily="34" charset="-122"/>
+                <a:cs typeface="Calibri" pitchFamily="34" charset="-120"/>
+              </a:rPr>
+              <a:t>A. An automatic rejection rule</a:t>
+            </a:r>
+            <a:endParaRPr lang="en-US" sz="1350" dirty="0"/>
+          </a:p>
+          <a:p>
+            <a:pPr algn="l" indent="0" marL="0">
+              <a:spcAft>
+                <a:spcPts val="600"/>
+              </a:spcAft>
+              <a:buNone/>
+            </a:pPr>
+            <a:r>
+              <a:rPr lang="en-US" sz="1350" b="1" dirty="0">
+                <a:solidFill>
+                  <a:srgbClr val="2C3A41"/>
+                </a:solidFill>
+                <a:latin typeface="Calibri" pitchFamily="34" charset="0"/>
+                <a:ea typeface="Calibri" pitchFamily="34" charset="-122"/>
+                <a:cs typeface="Calibri" pitchFamily="34" charset="-120"/>
+              </a:rPr>
+              <a:t>B. A warning rule prompting inspection</a:t>
+            </a:r>
+            <a:endParaRPr lang="en-US" sz="1350" dirty="0"/>
+          </a:p>
+          <a:p>
+            <a:pPr algn="l" indent="0" marL="0">
+              <a:spcAft>
+                <a:spcPts val="600"/>
+              </a:spcAft>
+              <a:buNone/>
+            </a:pPr>
+            <a:r>
+              <a:rPr lang="en-US" sz="1350" dirty="0">
+                <a:solidFill>
+                  <a:srgbClr val="33444F"/>
+                </a:solidFill>
+                <a:latin typeface="Calibri" pitchFamily="34" charset="0"/>
+                <a:ea typeface="Calibri" pitchFamily="34" charset="-122"/>
+                <a:cs typeface="Calibri" pitchFamily="34" charset="-120"/>
+              </a:rPr>
+              <a:t>C. A systematic-error rule</a:t>
+            </a:r>
+            <a:endParaRPr lang="en-US" sz="1350" dirty="0"/>
+          </a:p>
+          <a:p>
+            <a:pPr algn="l" indent="0" marL="0">
+              <a:spcAft>
+                <a:spcPts val="600"/>
+              </a:spcAft>
+              <a:buNone/>
+            </a:pPr>
+            <a:r>
+              <a:rPr lang="en-US" sz="1350" dirty="0">
+                <a:solidFill>
+                  <a:srgbClr val="33444F"/>
+                </a:solidFill>
+                <a:latin typeface="Calibri" pitchFamily="34" charset="0"/>
+                <a:ea typeface="Calibri" pitchFamily="34" charset="-122"/>
+                <a:cs typeface="Calibri" pitchFamily="34" charset="-120"/>
+              </a:rPr>
+              <a:t>D. A calibration rule</a:t>
+            </a:r>
+            <a:endParaRPr lang="en-US" sz="1350" dirty="0"/>
+          </a:p>
+          <a:p>
+            <a:pPr algn="l" indent="0" marL="0">
+              <a:spcAft>
+                <a:spcPts val="600"/>
+              </a:spcAft>
+              <a:buNone/>
+            </a:pPr>
+            <a:r>
+              <a:rPr lang="en-US" sz="1350" dirty="0">
+                <a:solidFill>
+                  <a:srgbClr val="33444F"/>
+                </a:solidFill>
+                <a:latin typeface="Calibri" pitchFamily="34" charset="0"/>
+                <a:ea typeface="Calibri" pitchFamily="34" charset="-122"/>
+                <a:cs typeface="Calibri" pitchFamily="34" charset="-120"/>
+              </a:rPr>
+              <a:t>E. A proficiency-testing rule</a:t>
+            </a:r>
+            <a:endParaRPr lang="en-US" sz="1350" dirty="0"/>
+          </a:p>
+        </p:txBody>
+      </p:sp>
+      <p:sp>
+        <p:nvSpPr>
+          <p:cNvPr id="6" name="Shape 4"/>
+          <p:cNvSpPr/>
+          <p:nvPr/>
+        </p:nvSpPr>
+        <p:spPr>
+          <a:xfrm>
+            <a:off x="7201632" y="2395728"/>
+            <a:ext cx="4423136" cy="3246120"/>
+          </a:xfrm>
+          <a:prstGeom prst="roundRect">
+            <a:avLst>
+              <a:gd name="adj" fmla="val 2535"/>
+            </a:avLst>
+          </a:prstGeom>
+          <a:solidFill>
+            <a:srgbClr val="ECEFF1"/>
+          </a:solidFill>
+          <a:ln/>
+          <a:effectLst>
+            <a:outerShdw sx="100000" sy="100000" kx="0" ky="0" algn="bl" rotWithShape="0" blurRad="88900" dist="25400" dir="5400000">
+              <a:srgbClr val="22303C">
+                <a:alpha val="12000"/>
+              </a:srgbClr>
+            </a:outerShdw>
+          </a:effectLst>
+        </p:spPr>
+      </p:sp>
+      <p:sp>
+        <p:nvSpPr>
+          <p:cNvPr id="7" name="Text 5"/>
+          <p:cNvSpPr/>
+          <p:nvPr/>
+        </p:nvSpPr>
+        <p:spPr>
+          <a:xfrm>
+            <a:off x="7439376" y="2578608"/>
+            <a:ext cx="3965936" cy="457200"/>
+          </a:xfrm>
+          <a:prstGeom prst="rect">
+            <a:avLst/>
+          </a:prstGeom>
+          <a:noFill/>
+          <a:ln/>
+        </p:spPr>
+        <p:txBody>
+          <a:bodyPr wrap="square" lIns="0" tIns="0" rIns="0" bIns="0" rtlCol="0" anchor="ctr"/>
+          <a:lstStyle/>
+          <a:p>
+            <a:pPr indent="0" marL="0">
+              <a:buNone/>
+            </a:pPr>
+            <a:r>
+              <a:rPr lang="en-US" sz="1500" b="1" dirty="0">
+                <a:solidFill>
+                  <a:srgbClr val="455A64"/>
+                </a:solidFill>
+                <a:latin typeface="Calibri" pitchFamily="34" charset="0"/>
+                <a:ea typeface="Calibri" pitchFamily="34" charset="-122"/>
+                <a:cs typeface="Calibri" pitchFamily="34" charset="-120"/>
+              </a:rPr>
+              <a:t>ANSWER  </a:t>
+            </a:r>
+            <a:pPr indent="0" marL="0">
+              <a:buNone/>
+            </a:pPr>
+            <a:r>
+              <a:rPr lang="en-US" sz="1500" b="1" dirty="0">
+                <a:solidFill>
+                  <a:srgbClr val="1B2A38"/>
+                </a:solidFill>
+                <a:latin typeface="Calibri" pitchFamily="34" charset="0"/>
+                <a:ea typeface="Calibri" pitchFamily="34" charset="-122"/>
+                <a:cs typeface="Calibri" pitchFamily="34" charset="-120"/>
+              </a:rPr>
+              <a:t>B — A warning rule</a:t>
+            </a:r>
+            <a:endParaRPr lang="en-US" sz="1500" dirty="0"/>
+          </a:p>
+        </p:txBody>
+      </p:sp>
+      <p:sp>
+        <p:nvSpPr>
+          <p:cNvPr id="8" name="Text 6"/>
+          <p:cNvSpPr/>
+          <p:nvPr/>
+        </p:nvSpPr>
+        <p:spPr>
+          <a:xfrm>
+            <a:off x="7439376" y="3127248"/>
+            <a:ext cx="3947648" cy="2377440"/>
+          </a:xfrm>
+          <a:prstGeom prst="rect">
+            <a:avLst/>
+          </a:prstGeom>
+          <a:noFill/>
+          <a:ln/>
+        </p:spPr>
+        <p:txBody>
+          <a:bodyPr wrap="square" lIns="0" tIns="0" rIns="0" bIns="0" rtlCol="0" anchor="t"/>
+          <a:lstStyle/>
+          <a:p>
+            <a:pPr algn="l" indent="0" marL="0">
+              <a:lnSpc>
+                <a:spcPct val="108000"/>
+              </a:lnSpc>
+              <a:buNone/>
+            </a:pPr>
+            <a:r>
+              <a:rPr lang="en-US" sz="1250" dirty="0">
+                <a:solidFill>
+                  <a:srgbClr val="33444F"/>
+                </a:solidFill>
+                <a:latin typeface="Calibri" pitchFamily="34" charset="0"/>
+                <a:ea typeface="Calibri" pitchFamily="34" charset="-122"/>
+                <a:cs typeface="Calibri" pitchFamily="34" charset="-120"/>
+              </a:rPr>
+              <a:t>1_2s is a warning that triggers review of other rules; it is not an automatic rejection by itself.</a:t>
+            </a:r>
+            <a:endParaRPr lang="en-US" sz="1250" dirty="0"/>
+          </a:p>
+        </p:txBody>
+      </p:sp>
+      <p:sp>
+        <p:nvSpPr>
+          <p:cNvPr id="9" name="Text 7"/>
+          <p:cNvSpPr/>
+          <p:nvPr/>
+        </p:nvSpPr>
+        <p:spPr>
+          <a:xfrm>
+            <a:off x="566928" y="6473952"/>
+            <a:ext cx="7772400" cy="274320"/>
+          </a:xfrm>
+          <a:prstGeom prst="rect">
+            <a:avLst/>
+          </a:prstGeom>
+          <a:noFill/>
+          <a:ln/>
+        </p:spPr>
+        <p:txBody>
+          <a:bodyPr wrap="square" lIns="0" tIns="0" rIns="0" bIns="0" rtlCol="0" anchor="ctr"/>
+          <a:lstStyle/>
+          <a:p>
+            <a:pPr algn="l" indent="0" marL="0">
+              <a:buNone/>
+            </a:pPr>
+            <a:r>
+              <a:rPr lang="en-US" sz="850" dirty="0">
+                <a:solidFill>
+                  <a:srgbClr val="9AA8B4"/>
+                </a:solidFill>
+                <a:latin typeface="Calibri" pitchFamily="34" charset="0"/>
+                <a:ea typeface="Calibri" pitchFamily="34" charset="-122"/>
+                <a:cs typeface="Calibri" pitchFamily="34" charset="-120"/>
+              </a:rPr>
+              <a:t>Makassed General Hospital  ·  Department of Laboratory Medicine</a:t>
+            </a:r>
+            <a:endParaRPr lang="en-US" sz="850" dirty="0"/>
+          </a:p>
+        </p:txBody>
+      </p:sp>
+      <p:sp>
+        <p:nvSpPr>
+          <p:cNvPr id="10" name="Text 8"/>
+          <p:cNvSpPr/>
+          <p:nvPr/>
+        </p:nvSpPr>
+        <p:spPr>
+          <a:xfrm>
+            <a:off x="9814255" y="6473952"/>
+            <a:ext cx="1828800" cy="274320"/>
+          </a:xfrm>
+          <a:prstGeom prst="rect">
+            <a:avLst/>
+          </a:prstGeom>
+          <a:noFill/>
+          <a:ln/>
+        </p:spPr>
+        <p:txBody>
+          <a:bodyPr wrap="square" lIns="0" tIns="0" rIns="0" bIns="0" rtlCol="0" anchor="ctr"/>
+          <a:lstStyle/>
+          <a:p>
+            <a:pPr algn="r" indent="0" marL="0">
+              <a:buNone/>
+            </a:pPr>
+            <a:r>
+              <a:rPr lang="en-US" sz="850" dirty="0">
+                <a:solidFill>
+                  <a:srgbClr val="9AA8B4"/>
+                </a:solidFill>
+                <a:latin typeface="Calibri" pitchFamily="34" charset="0"/>
+                <a:ea typeface="Calibri" pitchFamily="34" charset="-122"/>
+                <a:cs typeface="Calibri" pitchFamily="34" charset="-120"/>
+              </a:rPr>
+              <a:t>CP Lecture Series</a:t>
+            </a:r>
+            <a:pPr algn="r" indent="0" marL="0">
+              <a:buNone/>
+            </a:pPr>
+            <a:r>
+              <a:rPr lang="en-US" sz="850" dirty="0">
+                <a:solidFill>
+                  <a:srgbClr val="DCE4EC"/>
+                </a:solidFill>
+                <a:latin typeface="Calibri" pitchFamily="34" charset="0"/>
+                <a:ea typeface="Calibri" pitchFamily="34" charset="-122"/>
+                <a:cs typeface="Calibri" pitchFamily="34" charset="-120"/>
+              </a:rPr>
+              <a:t>   ·   </a:t>
+            </a:r>
+            <a:pPr algn="r" indent="0" marL="0">
+              <a:buNone/>
+            </a:pPr>
+            <a:r>
+              <a:rPr lang="en-US" sz="850" b="1" dirty="0">
+                <a:solidFill>
+                  <a:srgbClr val="455A64"/>
+                </a:solidFill>
+                <a:latin typeface="Calibri" pitchFamily="34" charset="0"/>
+                <a:ea typeface="Calibri" pitchFamily="34" charset="-122"/>
+                <a:cs typeface="Calibri" pitchFamily="34" charset="-120"/>
+              </a:rPr>
+              <a:t>20</a:t>
+            </a:r>
+            <a:endParaRPr lang="en-US" sz="850" dirty="0"/>
+          </a:p>
+        </p:txBody>
+      </p:sp>
+    </p:spTree>
+  </p:cSld>
+  <p:clrMapOvr>
+    <a:masterClrMapping/>
+  </p:clrMapOvr>
+</p:sld>
+</file>
+
+<file path=ppt/slides/slide24.xml><?xml version="1.0" encoding="utf-8"?>
+<p:sld xmlns:a="http://schemas.openxmlformats.org/drawingml/2006/main" xmlns:r="http://schemas.openxmlformats.org/officeDocument/2006/relationships" xmlns:p="http://schemas.openxmlformats.org/presentationml/2006/main">
+  <p:cSld name="Slide 24">
+    <p:bg>
+      <p:bgPr>
+        <a:solidFill>
+          <a:srgbClr val="0A2A45"/>
+        </a:solidFill>
+      </p:bgPr>
+    </p:bg>
+    <p:spTree>
+      <p:nvGrpSpPr>
+        <p:cNvPr id="1" name=""/>
+        <p:cNvGrpSpPr/>
+        <p:nvPr/>
+      </p:nvGrpSpPr>
+      <p:grpSpPr>
+        <a:xfrm>
+          <a:off x="0" y="0"/>
+          <a:ext cx="0" cy="0"/>
+          <a:chOff x="0" y="0"/>
+          <a:chExt cx="0" cy="0"/>
+        </a:xfrm>
+      </p:grpSpPr>
+      <p:sp>
+        <p:nvSpPr>
+          <p:cNvPr id="2" name="Text 0"/>
+          <p:cNvSpPr/>
+          <p:nvPr/>
+        </p:nvSpPr>
+        <p:spPr>
+          <a:xfrm>
+            <a:off x="566928" y="329184"/>
+            <a:ext cx="10058400" cy="310896"/>
+          </a:xfrm>
+          <a:prstGeom prst="rect">
+            <a:avLst/>
+          </a:prstGeom>
+          <a:noFill/>
+          <a:ln/>
+        </p:spPr>
+        <p:txBody>
+          <a:bodyPr wrap="square" lIns="0" tIns="0" rIns="0" bIns="0" rtlCol="0" anchor="ctr"/>
+          <a:lstStyle/>
+          <a:p>
+            <a:pPr indent="0" marL="0">
+              <a:buNone/>
+            </a:pPr>
+            <a:r>
+              <a:rPr lang="en-US" sz="1100" b="1" spc="150" kern="0" dirty="0">
+                <a:solidFill>
+                  <a:srgbClr val="455A64"/>
+                </a:solidFill>
+                <a:latin typeface="Calibri" pitchFamily="34" charset="0"/>
+                <a:ea typeface="Calibri" pitchFamily="34" charset="-122"/>
+                <a:cs typeface="Calibri" pitchFamily="34" charset="-120"/>
+              </a:rPr>
+              <a:t>LAB MANAGEMENT &amp; QUALITY</a:t>
+            </a:r>
+            <a:endParaRPr lang="en-US" sz="1100" dirty="0"/>
+          </a:p>
+        </p:txBody>
+      </p:sp>
+      <p:sp>
+        <p:nvSpPr>
+          <p:cNvPr id="3" name="Text 1"/>
+          <p:cNvSpPr/>
+          <p:nvPr/>
+        </p:nvSpPr>
+        <p:spPr>
+          <a:xfrm>
+            <a:off x="566928" y="676656"/>
+            <a:ext cx="10972800" cy="749808"/>
+          </a:xfrm>
+          <a:prstGeom prst="rect">
+            <a:avLst/>
+          </a:prstGeom>
+          <a:noFill/>
+          <a:ln/>
+        </p:spPr>
+        <p:txBody>
+          <a:bodyPr wrap="square" lIns="0" tIns="0" rIns="0" bIns="0" rtlCol="0" anchor="ctr"/>
+          <a:lstStyle/>
+          <a:p>
+            <a:pPr indent="0" marL="0">
+              <a:buNone/>
+            </a:pPr>
+            <a:r>
+              <a:rPr lang="en-US" sz="3000" b="1" dirty="0">
+                <a:solidFill>
+                  <a:srgbClr val="FFFFFF"/>
+                </a:solidFill>
+                <a:latin typeface="Calibri" pitchFamily="34" charset="0"/>
+                <a:ea typeface="Calibri" pitchFamily="34" charset="-122"/>
+                <a:cs typeface="Calibri" pitchFamily="34" charset="-120"/>
+              </a:rPr>
+              <a:t>Key Take-Home Points</a:t>
+            </a:r>
+            <a:endParaRPr lang="en-US" sz="3000" dirty="0"/>
+          </a:p>
+        </p:txBody>
+      </p:sp>
+      <p:sp>
+        <p:nvSpPr>
+          <p:cNvPr id="4" name="Shape 2"/>
+          <p:cNvSpPr/>
+          <p:nvPr/>
+        </p:nvSpPr>
+        <p:spPr>
+          <a:xfrm>
+            <a:off x="566928" y="1517904"/>
+            <a:ext cx="11057839" cy="841248"/>
+          </a:xfrm>
+          <a:prstGeom prst="roundRect">
+            <a:avLst>
+              <a:gd name="adj" fmla="val 7609"/>
+            </a:avLst>
+          </a:prstGeom>
+          <a:solidFill>
+            <a:srgbClr val="143651"/>
+          </a:solidFill>
+          <a:ln/>
+        </p:spPr>
+      </p:sp>
+      <p:sp>
+        <p:nvSpPr>
+          <p:cNvPr id="5" name="Shape 3"/>
+          <p:cNvSpPr/>
+          <p:nvPr/>
+        </p:nvSpPr>
+        <p:spPr>
+          <a:xfrm>
+            <a:off x="749808" y="1755648"/>
+            <a:ext cx="365760" cy="365760"/>
+          </a:xfrm>
+          <a:prstGeom prst="ellipse">
+            <a:avLst/>
+          </a:prstGeom>
+          <a:solidFill>
+            <a:srgbClr val="455A64"/>
+          </a:solidFill>
+          <a:ln/>
+          <a:effectLst>
+            <a:outerShdw sx="100000" sy="100000" kx="0" ky="0" algn="bl" rotWithShape="0" blurRad="88900" dist="25400" dir="5400000">
+              <a:srgbClr val="22303C">
+                <a:alpha val="12000"/>
+              </a:srgbClr>
+            </a:outerShdw>
+          </a:effectLst>
+        </p:spPr>
+      </p:sp>
+      <p:sp>
+        <p:nvSpPr>
+          <p:cNvPr id="6" name="Text 4"/>
+          <p:cNvSpPr/>
+          <p:nvPr/>
+        </p:nvSpPr>
+        <p:spPr>
+          <a:xfrm>
+            <a:off x="749808" y="1755648"/>
+            <a:ext cx="365760" cy="365760"/>
+          </a:xfrm>
+          <a:prstGeom prst="rect">
+            <a:avLst/>
+          </a:prstGeom>
+          <a:noFill/>
+          <a:ln/>
+        </p:spPr>
+        <p:txBody>
+          <a:bodyPr wrap="square" lIns="0" tIns="0" rIns="0" bIns="0" rtlCol="0" anchor="ctr"/>
+          <a:lstStyle/>
+          <a:p>
+            <a:pPr algn="ctr" indent="0" marL="0">
+              <a:buNone/>
+            </a:pPr>
+            <a:r>
+              <a:rPr lang="en-US" sz="1500" b="1" dirty="0">
+                <a:solidFill>
+                  <a:srgbClr val="FFFFFF"/>
+                </a:solidFill>
+                <a:latin typeface="Calibri" pitchFamily="34" charset="0"/>
+                <a:ea typeface="Calibri" pitchFamily="34" charset="-122"/>
+                <a:cs typeface="Calibri" pitchFamily="34" charset="-120"/>
+              </a:rPr>
+              <a:t>1</a:t>
+            </a:r>
+            <a:endParaRPr lang="en-US" sz="1500" dirty="0"/>
+          </a:p>
+        </p:txBody>
+      </p:sp>
+      <p:sp>
+        <p:nvSpPr>
+          <p:cNvPr id="7" name="Text 5"/>
+          <p:cNvSpPr/>
+          <p:nvPr/>
+        </p:nvSpPr>
+        <p:spPr>
+          <a:xfrm>
+            <a:off x="1280160" y="1517904"/>
+            <a:ext cx="10143439" cy="841248"/>
+          </a:xfrm>
+          <a:prstGeom prst="rect">
+            <a:avLst/>
+          </a:prstGeom>
+          <a:noFill/>
+          <a:ln/>
+        </p:spPr>
+        <p:txBody>
+          <a:bodyPr wrap="square" lIns="0" tIns="0" rIns="0" bIns="0" rtlCol="0" anchor="ctr"/>
+          <a:lstStyle/>
+          <a:p>
+            <a:pPr algn="l" indent="0" marL="0">
+              <a:buNone/>
+            </a:pPr>
+            <a:r>
+              <a:rPr lang="en-US" sz="1350" dirty="0">
+                <a:solidFill>
+                  <a:srgbClr val="E7EEF4"/>
+                </a:solidFill>
+                <a:latin typeface="Calibri" pitchFamily="34" charset="0"/>
+                <a:ea typeface="Calibri" pitchFamily="34" charset="-122"/>
+                <a:cs typeface="Calibri" pitchFamily="34" charset="-120"/>
+              </a:rPr>
+              <a:t>A QMS spans documents, equipment, personnel, process control, and occurrence management — QC is one part of it.</a:t>
+            </a:r>
+            <a:endParaRPr lang="en-US" sz="1350" dirty="0"/>
+          </a:p>
+        </p:txBody>
+      </p:sp>
+      <p:sp>
+        <p:nvSpPr>
+          <p:cNvPr id="8" name="Shape 6"/>
+          <p:cNvSpPr/>
+          <p:nvPr/>
+        </p:nvSpPr>
+        <p:spPr>
+          <a:xfrm>
+            <a:off x="566928" y="2505456"/>
+            <a:ext cx="11057839" cy="841248"/>
+          </a:xfrm>
+          <a:prstGeom prst="roundRect">
+            <a:avLst>
+              <a:gd name="adj" fmla="val 7609"/>
+            </a:avLst>
+          </a:prstGeom>
+          <a:solidFill>
+            <a:srgbClr val="143651"/>
+          </a:solidFill>
+          <a:ln/>
+        </p:spPr>
+      </p:sp>
+      <p:sp>
+        <p:nvSpPr>
+          <p:cNvPr id="9" name="Shape 7"/>
+          <p:cNvSpPr/>
+          <p:nvPr/>
+        </p:nvSpPr>
+        <p:spPr>
+          <a:xfrm>
+            <a:off x="749808" y="2743200"/>
+            <a:ext cx="365760" cy="365760"/>
+          </a:xfrm>
+          <a:prstGeom prst="ellipse">
+            <a:avLst/>
+          </a:prstGeom>
+          <a:solidFill>
+            <a:srgbClr val="455A64"/>
+          </a:solidFill>
+          <a:ln/>
+          <a:effectLst>
+            <a:outerShdw sx="100000" sy="100000" kx="0" ky="0" algn="bl" rotWithShape="0" blurRad="88900" dist="25400" dir="5400000">
+              <a:srgbClr val="22303C">
+                <a:alpha val="12000"/>
+              </a:srgbClr>
+            </a:outerShdw>
+          </a:effectLst>
+        </p:spPr>
+      </p:sp>
+      <p:sp>
+        <p:nvSpPr>
+          <p:cNvPr id="10" name="Text 8"/>
+          <p:cNvSpPr/>
+          <p:nvPr/>
+        </p:nvSpPr>
+        <p:spPr>
+          <a:xfrm>
+            <a:off x="749808" y="2743200"/>
+            <a:ext cx="365760" cy="365760"/>
+          </a:xfrm>
+          <a:prstGeom prst="rect">
+            <a:avLst/>
+          </a:prstGeom>
+          <a:noFill/>
+          <a:ln/>
+        </p:spPr>
+        <p:txBody>
+          <a:bodyPr wrap="square" lIns="0" tIns="0" rIns="0" bIns="0" rtlCol="0" anchor="ctr"/>
+          <a:lstStyle/>
+          <a:p>
+            <a:pPr algn="ctr" indent="0" marL="0">
+              <a:buNone/>
+            </a:pPr>
+            <a:r>
+              <a:rPr lang="en-US" sz="1500" b="1" dirty="0">
+                <a:solidFill>
+                  <a:srgbClr val="FFFFFF"/>
+                </a:solidFill>
+                <a:latin typeface="Calibri" pitchFamily="34" charset="0"/>
+                <a:ea typeface="Calibri" pitchFamily="34" charset="-122"/>
+                <a:cs typeface="Calibri" pitchFamily="34" charset="-120"/>
+              </a:rPr>
+              <a:t>2</a:t>
+            </a:r>
+            <a:endParaRPr lang="en-US" sz="1500" dirty="0"/>
+          </a:p>
+        </p:txBody>
+      </p:sp>
+      <p:sp>
+        <p:nvSpPr>
+          <p:cNvPr id="11" name="Text 9"/>
+          <p:cNvSpPr/>
+          <p:nvPr/>
+        </p:nvSpPr>
+        <p:spPr>
+          <a:xfrm>
+            <a:off x="1280160" y="2505456"/>
+            <a:ext cx="10143439" cy="841248"/>
+          </a:xfrm>
+          <a:prstGeom prst="rect">
+            <a:avLst/>
+          </a:prstGeom>
+          <a:noFill/>
+          <a:ln/>
+        </p:spPr>
+        <p:txBody>
+          <a:bodyPr wrap="square" lIns="0" tIns="0" rIns="0" bIns="0" rtlCol="0" anchor="ctr"/>
+          <a:lstStyle/>
+          <a:p>
+            <a:pPr algn="l" indent="0" marL="0">
+              <a:buNone/>
+            </a:pPr>
+            <a:r>
+              <a:rPr lang="en-US" sz="1350" dirty="0">
+                <a:solidFill>
+                  <a:srgbClr val="E7EEF4"/>
+                </a:solidFill>
+                <a:latin typeface="Calibri" pitchFamily="34" charset="0"/>
+                <a:ea typeface="Calibri" pitchFamily="34" charset="-122"/>
+                <a:cs typeface="Calibri" pitchFamily="34" charset="-120"/>
+              </a:rPr>
+              <a:t>Levey-Jennings charts plus Westgard multirules detect error; 1_3s/R_4s flag random, 2_2s/4_1s/10x flag systematic.</a:t>
+            </a:r>
+            <a:endParaRPr lang="en-US" sz="1350" dirty="0"/>
+          </a:p>
+        </p:txBody>
+      </p:sp>
+      <p:sp>
+        <p:nvSpPr>
+          <p:cNvPr id="12" name="Shape 10"/>
+          <p:cNvSpPr/>
+          <p:nvPr/>
+        </p:nvSpPr>
+        <p:spPr>
+          <a:xfrm>
+            <a:off x="566928" y="3493008"/>
+            <a:ext cx="11057839" cy="841248"/>
+          </a:xfrm>
+          <a:prstGeom prst="roundRect">
+            <a:avLst>
+              <a:gd name="adj" fmla="val 7609"/>
+            </a:avLst>
+          </a:prstGeom>
+          <a:solidFill>
+            <a:srgbClr val="143651"/>
+          </a:solidFill>
+          <a:ln/>
+        </p:spPr>
+      </p:sp>
+      <p:sp>
+        <p:nvSpPr>
+          <p:cNvPr id="13" name="Shape 11"/>
+          <p:cNvSpPr/>
+          <p:nvPr/>
+        </p:nvSpPr>
+        <p:spPr>
+          <a:xfrm>
+            <a:off x="749808" y="3730752"/>
+            <a:ext cx="365760" cy="365760"/>
+          </a:xfrm>
+          <a:prstGeom prst="ellipse">
+            <a:avLst/>
+          </a:prstGeom>
+          <a:solidFill>
+            <a:srgbClr val="455A64"/>
+          </a:solidFill>
+          <a:ln/>
+          <a:effectLst>
+            <a:outerShdw sx="100000" sy="100000" kx="0" ky="0" algn="bl" rotWithShape="0" blurRad="88900" dist="25400" dir="5400000">
+              <a:srgbClr val="22303C">
+                <a:alpha val="12000"/>
+              </a:srgbClr>
+            </a:outerShdw>
+          </a:effectLst>
+        </p:spPr>
+      </p:sp>
+      <p:sp>
+        <p:nvSpPr>
+          <p:cNvPr id="14" name="Text 12"/>
+          <p:cNvSpPr/>
+          <p:nvPr/>
+        </p:nvSpPr>
+        <p:spPr>
+          <a:xfrm>
+            <a:off x="749808" y="3730752"/>
+            <a:ext cx="365760" cy="365760"/>
+          </a:xfrm>
+          <a:prstGeom prst="rect">
+            <a:avLst/>
+          </a:prstGeom>
+          <a:noFill/>
+          <a:ln/>
+        </p:spPr>
+        <p:txBody>
+          <a:bodyPr wrap="square" lIns="0" tIns="0" rIns="0" bIns="0" rtlCol="0" anchor="ctr"/>
+          <a:lstStyle/>
+          <a:p>
+            <a:pPr algn="ctr" indent="0" marL="0">
+              <a:buNone/>
+            </a:pPr>
+            <a:r>
+              <a:rPr lang="en-US" sz="1500" b="1" dirty="0">
+                <a:solidFill>
+                  <a:srgbClr val="FFFFFF"/>
+                </a:solidFill>
+                <a:latin typeface="Calibri" pitchFamily="34" charset="0"/>
+                <a:ea typeface="Calibri" pitchFamily="34" charset="-122"/>
+                <a:cs typeface="Calibri" pitchFamily="34" charset="-120"/>
+              </a:rPr>
+              <a:t>3</a:t>
+            </a:r>
+            <a:endParaRPr lang="en-US" sz="1500" dirty="0"/>
+          </a:p>
+        </p:txBody>
+      </p:sp>
+      <p:sp>
+        <p:nvSpPr>
+          <p:cNvPr id="15" name="Text 13"/>
+          <p:cNvSpPr/>
+          <p:nvPr/>
+        </p:nvSpPr>
+        <p:spPr>
+          <a:xfrm>
+            <a:off x="1280160" y="3493008"/>
+            <a:ext cx="10143439" cy="841248"/>
+          </a:xfrm>
+          <a:prstGeom prst="rect">
+            <a:avLst/>
+          </a:prstGeom>
+          <a:noFill/>
+          <a:ln/>
+        </p:spPr>
+        <p:txBody>
+          <a:bodyPr wrap="square" lIns="0" tIns="0" rIns="0" bIns="0" rtlCol="0" anchor="ctr"/>
+          <a:lstStyle/>
+          <a:p>
+            <a:pPr algn="l" indent="0" marL="0">
+              <a:buNone/>
+            </a:pPr>
+            <a:r>
+              <a:rPr lang="en-US" sz="1350" dirty="0">
+                <a:solidFill>
+                  <a:srgbClr val="E7EEF4"/>
+                </a:solidFill>
+                <a:latin typeface="Calibri" pitchFamily="34" charset="0"/>
+                <a:ea typeface="Calibri" pitchFamily="34" charset="-122"/>
+                <a:cs typeface="Calibri" pitchFamily="34" charset="-120"/>
+              </a:rPr>
+              <a:t>Distinguish random error (imprecision) from systematic error (bias) to target the correct fix.</a:t>
+            </a:r>
+            <a:endParaRPr lang="en-US" sz="1350" dirty="0"/>
+          </a:p>
+        </p:txBody>
+      </p:sp>
+      <p:sp>
+        <p:nvSpPr>
+          <p:cNvPr id="16" name="Shape 14"/>
+          <p:cNvSpPr/>
+          <p:nvPr/>
+        </p:nvSpPr>
+        <p:spPr>
+          <a:xfrm>
+            <a:off x="566928" y="4480560"/>
+            <a:ext cx="11057839" cy="841248"/>
+          </a:xfrm>
+          <a:prstGeom prst="roundRect">
+            <a:avLst>
+              <a:gd name="adj" fmla="val 7609"/>
+            </a:avLst>
+          </a:prstGeom>
+          <a:solidFill>
+            <a:srgbClr val="143651"/>
+          </a:solidFill>
+          <a:ln/>
+        </p:spPr>
+      </p:sp>
+      <p:sp>
+        <p:nvSpPr>
+          <p:cNvPr id="17" name="Shape 15"/>
+          <p:cNvSpPr/>
+          <p:nvPr/>
+        </p:nvSpPr>
+        <p:spPr>
+          <a:xfrm>
+            <a:off x="749808" y="4718304"/>
+            <a:ext cx="365760" cy="365760"/>
+          </a:xfrm>
+          <a:prstGeom prst="ellipse">
+            <a:avLst/>
+          </a:prstGeom>
+          <a:solidFill>
+            <a:srgbClr val="455A64"/>
+          </a:solidFill>
+          <a:ln/>
+          <a:effectLst>
+            <a:outerShdw sx="100000" sy="100000" kx="0" ky="0" algn="bl" rotWithShape="0" blurRad="88900" dist="25400" dir="5400000">
+              <a:srgbClr val="22303C">
+                <a:alpha val="12000"/>
+              </a:srgbClr>
+            </a:outerShdw>
+          </a:effectLst>
+        </p:spPr>
+      </p:sp>
+      <p:sp>
+        <p:nvSpPr>
+          <p:cNvPr id="18" name="Text 16"/>
+          <p:cNvSpPr/>
+          <p:nvPr/>
+        </p:nvSpPr>
+        <p:spPr>
+          <a:xfrm>
+            <a:off x="749808" y="4718304"/>
+            <a:ext cx="365760" cy="365760"/>
+          </a:xfrm>
+          <a:prstGeom prst="rect">
+            <a:avLst/>
+          </a:prstGeom>
+          <a:noFill/>
+          <a:ln/>
+        </p:spPr>
+        <p:txBody>
+          <a:bodyPr wrap="square" lIns="0" tIns="0" rIns="0" bIns="0" rtlCol="0" anchor="ctr"/>
+          <a:lstStyle/>
+          <a:p>
+            <a:pPr algn="ctr" indent="0" marL="0">
+              <a:buNone/>
+            </a:pPr>
+            <a:r>
+              <a:rPr lang="en-US" sz="1500" b="1" dirty="0">
+                <a:solidFill>
+                  <a:srgbClr val="FFFFFF"/>
+                </a:solidFill>
+                <a:latin typeface="Calibri" pitchFamily="34" charset="0"/>
+                <a:ea typeface="Calibri" pitchFamily="34" charset="-122"/>
+                <a:cs typeface="Calibri" pitchFamily="34" charset="-120"/>
+              </a:rPr>
+              <a:t>4</a:t>
+            </a:r>
+            <a:endParaRPr lang="en-US" sz="1500" dirty="0"/>
+          </a:p>
+        </p:txBody>
+      </p:sp>
+      <p:sp>
+        <p:nvSpPr>
+          <p:cNvPr id="19" name="Text 17"/>
+          <p:cNvSpPr/>
+          <p:nvPr/>
+        </p:nvSpPr>
+        <p:spPr>
+          <a:xfrm>
+            <a:off x="1280160" y="4480560"/>
+            <a:ext cx="10143439" cy="841248"/>
+          </a:xfrm>
+          <a:prstGeom prst="rect">
+            <a:avLst/>
+          </a:prstGeom>
+          <a:noFill/>
+          <a:ln/>
+        </p:spPr>
+        <p:txBody>
+          <a:bodyPr wrap="square" lIns="0" tIns="0" rIns="0" bIns="0" rtlCol="0" anchor="ctr"/>
+          <a:lstStyle/>
+          <a:p>
+            <a:pPr algn="l" indent="0" marL="0">
+              <a:buNone/>
+            </a:pPr>
+            <a:r>
+              <a:rPr lang="en-US" sz="1350" dirty="0">
+                <a:solidFill>
+                  <a:srgbClr val="E7EEF4"/>
+                </a:solidFill>
+                <a:latin typeface="Calibri" pitchFamily="34" charset="0"/>
+                <a:ea typeface="Calibri" pitchFamily="34" charset="-122"/>
+                <a:cs typeface="Calibri" pitchFamily="34" charset="-120"/>
+              </a:rPr>
+              <a:t>Monitor quality indicators across the total testing process — most errors are pre- and post-analytic.</a:t>
+            </a:r>
+            <a:endParaRPr lang="en-US" sz="1350" dirty="0"/>
+          </a:p>
+        </p:txBody>
+      </p:sp>
+      <p:sp>
+        <p:nvSpPr>
+          <p:cNvPr id="20" name="Shape 18"/>
+          <p:cNvSpPr/>
+          <p:nvPr/>
+        </p:nvSpPr>
+        <p:spPr>
+          <a:xfrm>
+            <a:off x="566928" y="5468112"/>
+            <a:ext cx="11057839" cy="841248"/>
+          </a:xfrm>
+          <a:prstGeom prst="roundRect">
+            <a:avLst>
+              <a:gd name="adj" fmla="val 7609"/>
+            </a:avLst>
+          </a:prstGeom>
+          <a:solidFill>
+            <a:srgbClr val="143651"/>
+          </a:solidFill>
+          <a:ln/>
+        </p:spPr>
+      </p:sp>
+      <p:sp>
+        <p:nvSpPr>
+          <p:cNvPr id="21" name="Shape 19"/>
+          <p:cNvSpPr/>
+          <p:nvPr/>
+        </p:nvSpPr>
+        <p:spPr>
+          <a:xfrm>
+            <a:off x="749808" y="5705856"/>
+            <a:ext cx="365760" cy="365760"/>
+          </a:xfrm>
+          <a:prstGeom prst="ellipse">
+            <a:avLst/>
+          </a:prstGeom>
+          <a:solidFill>
+            <a:srgbClr val="455A64"/>
+          </a:solidFill>
+          <a:ln/>
+          <a:effectLst>
+            <a:outerShdw sx="100000" sy="100000" kx="0" ky="0" algn="bl" rotWithShape="0" blurRad="88900" dist="25400" dir="5400000">
+              <a:srgbClr val="22303C">
+                <a:alpha val="12000"/>
+              </a:srgbClr>
+            </a:outerShdw>
+          </a:effectLst>
+        </p:spPr>
+      </p:sp>
+      <p:sp>
+        <p:nvSpPr>
+          <p:cNvPr id="22" name="Text 20"/>
+          <p:cNvSpPr/>
+          <p:nvPr/>
+        </p:nvSpPr>
+        <p:spPr>
+          <a:xfrm>
+            <a:off x="749808" y="5705856"/>
+            <a:ext cx="365760" cy="365760"/>
+          </a:xfrm>
+          <a:prstGeom prst="rect">
+            <a:avLst/>
+          </a:prstGeom>
+          <a:noFill/>
+          <a:ln/>
+        </p:spPr>
+        <p:txBody>
+          <a:bodyPr wrap="square" lIns="0" tIns="0" rIns="0" bIns="0" rtlCol="0" anchor="ctr"/>
+          <a:lstStyle/>
+          <a:p>
+            <a:pPr algn="ctr" indent="0" marL="0">
+              <a:buNone/>
+            </a:pPr>
+            <a:r>
+              <a:rPr lang="en-US" sz="1500" b="1" dirty="0">
+                <a:solidFill>
+                  <a:srgbClr val="FFFFFF"/>
+                </a:solidFill>
+                <a:latin typeface="Calibri" pitchFamily="34" charset="0"/>
+                <a:ea typeface="Calibri" pitchFamily="34" charset="-122"/>
+                <a:cs typeface="Calibri" pitchFamily="34" charset="-120"/>
+              </a:rPr>
+              <a:t>5</a:t>
+            </a:r>
+            <a:endParaRPr lang="en-US" sz="1500" dirty="0"/>
+          </a:p>
+        </p:txBody>
+      </p:sp>
+      <p:sp>
+        <p:nvSpPr>
+          <p:cNvPr id="23" name="Text 21"/>
+          <p:cNvSpPr/>
+          <p:nvPr/>
+        </p:nvSpPr>
+        <p:spPr>
+          <a:xfrm>
+            <a:off x="1280160" y="5468112"/>
+            <a:ext cx="10143439" cy="841248"/>
+          </a:xfrm>
+          <a:prstGeom prst="rect">
+            <a:avLst/>
+          </a:prstGeom>
+          <a:noFill/>
+          <a:ln/>
+        </p:spPr>
+        <p:txBody>
+          <a:bodyPr wrap="square" lIns="0" tIns="0" rIns="0" bIns="0" rtlCol="0" anchor="ctr"/>
+          <a:lstStyle/>
+          <a:p>
+            <a:pPr algn="l" indent="0" marL="0">
+              <a:buNone/>
+            </a:pPr>
+            <a:r>
+              <a:rPr lang="en-US" sz="1350" dirty="0">
+                <a:solidFill>
+                  <a:srgbClr val="E7EEF4"/>
+                </a:solidFill>
+                <a:latin typeface="Calibri" pitchFamily="34" charset="0"/>
+                <a:ea typeface="Calibri" pitchFamily="34" charset="-122"/>
+                <a:cs typeface="Calibri" pitchFamily="34" charset="-120"/>
+              </a:rPr>
+              <a:t>Use PDCA and root-cause analysis to drive continuous improvement and verify effectiveness.</a:t>
+            </a:r>
+            <a:endParaRPr lang="en-US" sz="1350" dirty="0"/>
+          </a:p>
+        </p:txBody>
+      </p:sp>
+      <p:sp>
+        <p:nvSpPr>
+          <p:cNvPr id="24" name="Text 22"/>
+          <p:cNvSpPr/>
+          <p:nvPr/>
+        </p:nvSpPr>
+        <p:spPr>
+          <a:xfrm>
+            <a:off x="566928" y="6473952"/>
+            <a:ext cx="8229600" cy="274320"/>
+          </a:xfrm>
+          <a:prstGeom prst="rect">
+            <a:avLst/>
+          </a:prstGeom>
+          <a:noFill/>
+          <a:ln/>
+        </p:spPr>
+        <p:txBody>
+          <a:bodyPr wrap="square" lIns="0" tIns="0" rIns="0" bIns="0" rtlCol="0" anchor="ctr"/>
+          <a:lstStyle/>
+          <a:p>
+            <a:pPr indent="0" marL="0">
+              <a:buNone/>
+            </a:pPr>
+            <a:r>
+              <a:rPr lang="en-US" sz="850" dirty="0">
+                <a:solidFill>
+                  <a:srgbClr val="5E7488"/>
+                </a:solidFill>
+                <a:latin typeface="Calibri" pitchFamily="34" charset="0"/>
+                <a:ea typeface="Calibri" pitchFamily="34" charset="-122"/>
+                <a:cs typeface="Calibri" pitchFamily="34" charset="-120"/>
+              </a:rPr>
+              <a:t>Makassed General Hospital  ·  Department of Laboratory Medicine</a:t>
+            </a:r>
+            <a:endParaRPr lang="en-US" sz="850" dirty="0"/>
+          </a:p>
+        </p:txBody>
+      </p:sp>
+      <p:sp>
+        <p:nvSpPr>
+          <p:cNvPr id="25" name="Text 23"/>
+          <p:cNvSpPr/>
+          <p:nvPr/>
+        </p:nvSpPr>
+        <p:spPr>
+          <a:xfrm>
+            <a:off x="11002975" y="6473952"/>
+            <a:ext cx="640080" cy="274320"/>
+          </a:xfrm>
+          <a:prstGeom prst="rect">
+            <a:avLst/>
+          </a:prstGeom>
+          <a:noFill/>
+          <a:ln/>
+        </p:spPr>
+        <p:txBody>
+          <a:bodyPr wrap="square" lIns="0" tIns="0" rIns="0" bIns="0" rtlCol="0" anchor="ctr"/>
+          <a:lstStyle/>
+          <a:p>
+            <a:pPr algn="r" indent="0" marL="0">
+              <a:buNone/>
+            </a:pPr>
+            <a:r>
+              <a:rPr lang="en-US" sz="850" b="1" dirty="0">
+                <a:solidFill>
+                  <a:srgbClr val="455A64"/>
+                </a:solidFill>
+                <a:latin typeface="Calibri" pitchFamily="34" charset="0"/>
+                <a:ea typeface="Calibri" pitchFamily="34" charset="-122"/>
+                <a:cs typeface="Calibri" pitchFamily="34" charset="-120"/>
+              </a:rPr>
+              <a:t>21</a:t>
+            </a:r>
+            <a:endParaRPr lang="en-US" sz="850" dirty="0"/>
+          </a:p>
+        </p:txBody>
+      </p:sp>
+    </p:spTree>
+  </p:cSld>
+  <p:clrMapOvr>
+    <a:masterClrMapping/>
+  </p:clrMapOvr>
+</p:sld>
+</file>
+
+<file path=ppt/slides/slide25.xml><?xml version="1.0" encoding="utf-8"?>
+<p:sld xmlns:a="http://schemas.openxmlformats.org/drawingml/2006/main" xmlns:r="http://schemas.openxmlformats.org/officeDocument/2006/relationships" xmlns:p="http://schemas.openxmlformats.org/presentationml/2006/main">
+  <p:cSld name="Slide 25">
+    <p:bg>
+      <p:bgPr>
+        <a:solidFill>
+          <a:srgbClr val="FFFFFF"/>
+        </a:solidFill>
+      </p:bgPr>
+    </p:bg>
+    <p:spTree>
+      <p:nvGrpSpPr>
+        <p:cNvPr id="1" name=""/>
+        <p:cNvGrpSpPr/>
+        <p:nvPr/>
+      </p:nvGrpSpPr>
+      <p:grpSpPr>
+        <a:xfrm>
+          <a:off x="0" y="0"/>
+          <a:ext cx="0" cy="0"/>
+          <a:chOff x="0" y="0"/>
+          <a:chExt cx="0" cy="0"/>
+        </a:xfrm>
+      </p:grpSpPr>
+      <p:sp>
+        <p:nvSpPr>
+          <p:cNvPr id="2" name="Text 0"/>
+          <p:cNvSpPr/>
+          <p:nvPr/>
+        </p:nvSpPr>
+        <p:spPr>
+          <a:xfrm>
+            <a:off x="566928" y="329184"/>
+            <a:ext cx="10515600" cy="310896"/>
+          </a:xfrm>
+          <a:prstGeom prst="rect">
+            <a:avLst/>
+          </a:prstGeom>
+          <a:noFill/>
+          <a:ln/>
+        </p:spPr>
+        <p:txBody>
+          <a:bodyPr wrap="square" lIns="0" tIns="0" rIns="0" bIns="0" rtlCol="0" anchor="ctr"/>
+          <a:lstStyle/>
+          <a:p>
+            <a:pPr algn="l" indent="0" marL="0">
+              <a:buNone/>
+            </a:pPr>
+            <a:r>
+              <a:rPr lang="en-US" sz="1100" b="1" spc="150" kern="0" dirty="0">
+                <a:solidFill>
+                  <a:srgbClr val="455A64"/>
+                </a:solidFill>
+                <a:latin typeface="Calibri" pitchFamily="34" charset="0"/>
+                <a:ea typeface="Calibri" pitchFamily="34" charset="-122"/>
+                <a:cs typeface="Calibri" pitchFamily="34" charset="-120"/>
+              </a:rPr>
               <a:t>LAB MANAGEMENT &amp; QUALITY   ·   REFERENCES &amp; FURTHER READING</a:t>
             </a:r>
             <a:endParaRPr lang="en-US" sz="1100" dirty="0"/>
@@ -9203,7 +11241,7 @@
                 <a:ea typeface="Calibri" pitchFamily="34" charset="-122"/>
                 <a:cs typeface="Calibri" pitchFamily="34" charset="-120"/>
               </a:rPr>
-              <a:t>1.   CLSI C24: Statistical Quality Control for Quantitative Measurement Procedures.</a:t>
+              <a:t>1.   Westgard JO. Basic QC Practices, 4th ed.</a:t>
             </a:r>
             <a:endParaRPr lang="en-US" sz="1150" dirty="0"/>
           </a:p>
@@ -9223,7 +11261,7 @@
                 <a:ea typeface="Calibri" pitchFamily="34" charset="-122"/>
                 <a:cs typeface="Calibri" pitchFamily="34" charset="-120"/>
               </a:rPr>
-              <a:t>2.   Westgard JO. Basic QC Practices, 4th ed. Westgard QC, 2016.</a:t>
+              <a:t>2.   CLSI C24: Statistical Quality Control for Quantitative Measurement Procedures.</a:t>
             </a:r>
             <a:endParaRPr lang="en-US" sz="1150" dirty="0"/>
           </a:p>
@@ -9243,7 +11281,7 @@
                 <a:ea typeface="Calibri" pitchFamily="34" charset="-122"/>
                 <a:cs typeface="Calibri" pitchFamily="34" charset="-120"/>
               </a:rPr>
-              <a:t>3.   CLSI QMS01: A Quality Management System Model for Laboratory Services.</a:t>
+              <a:t>3.   CLSI QMS01: A Quality Management System Model.</a:t>
             </a:r>
             <a:endParaRPr lang="en-US" sz="1150" dirty="0"/>
           </a:p>
@@ -9263,7 +11301,7 @@
                 <a:ea typeface="Calibri" pitchFamily="34" charset="-122"/>
                 <a:cs typeface="Calibri" pitchFamily="34" charset="-120"/>
               </a:rPr>
-              <a:t>4.   CAP/CLIA proficiency testing requirements (current).</a:t>
+              <a:t>4.   Plebani M. Errors in the total testing process. Clin Chem Lab Med.</a:t>
             </a:r>
             <a:endParaRPr lang="en-US" sz="1150" dirty="0"/>
           </a:p>
@@ -9369,7 +11407,7 @@
                 <a:ea typeface="Calibri" pitchFamily="34" charset="-122"/>
                 <a:cs typeface="Calibri" pitchFamily="34" charset="-120"/>
               </a:rPr>
-              <a:t>18</a:t>
+              <a:t>22</a:t>
             </a:r>
             <a:endParaRPr lang="en-US" sz="850" dirty="0"/>
           </a:p>
@@ -9613,7 +11651,7 @@
                 <a:ea typeface="Calibri" pitchFamily="34" charset="-122"/>
                 <a:cs typeface="Calibri" pitchFamily="34" charset="-120"/>
               </a:rPr>
-              <a:t>Differentiate QC and QA within a quality management system.</a:t>
+              <a:t>Describe the elements of a laboratory quality management system.</a:t>
             </a:r>
             <a:endParaRPr lang="en-US" sz="1350" dirty="0"/>
           </a:p>
@@ -9747,7 +11785,7 @@
                 <a:ea typeface="Calibri" pitchFamily="34" charset="-122"/>
                 <a:cs typeface="Calibri" pitchFamily="34" charset="-120"/>
               </a:rPr>
-              <a:t>Apply Westgard rules and Levey-Jennings interpretation.</a:t>
+              <a:t>Apply Levey-Jennings charts and Westgard rules.</a:t>
             </a:r>
             <a:endParaRPr lang="en-US" sz="1350" dirty="0"/>
           </a:p>
@@ -9881,7 +11919,7 @@
                 <a:ea typeface="Calibri" pitchFamily="34" charset="-122"/>
                 <a:cs typeface="Calibri" pitchFamily="34" charset="-120"/>
               </a:rPr>
-              <a:t>Use quality indicators and proficiency testing.</a:t>
+              <a:t>Distinguish random from systematic error.</a:t>
             </a:r>
             <a:endParaRPr lang="en-US" sz="1350" dirty="0"/>
           </a:p>
@@ -10015,7 +12053,7 @@
                 <a:ea typeface="Calibri" pitchFamily="34" charset="-122"/>
                 <a:cs typeface="Calibri" pitchFamily="34" charset="-120"/>
               </a:rPr>
-              <a:t>Explain delta checks and their role.</a:t>
+              <a:t>Use quality indicators across the total testing process.</a:t>
             </a:r>
             <a:endParaRPr lang="en-US" sz="1350" dirty="0"/>
           </a:p>
@@ -10149,7 +12187,7 @@
                 <a:ea typeface="Calibri" pitchFamily="34" charset="-122"/>
                 <a:cs typeface="Calibri" pitchFamily="34" charset="-120"/>
               </a:rPr>
-              <a:t>Manage occurrences with corrective and preventive action.</a:t>
+              <a:t>Apply continuous-improvement methods (PDCA, root-cause thinking).</a:t>
             </a:r>
             <a:endParaRPr lang="en-US" sz="1350" dirty="0"/>
           </a:p>
@@ -10283,7 +12321,7 @@
                 <a:ea typeface="Calibri" pitchFamily="34" charset="-122"/>
                 <a:cs typeface="Calibri" pitchFamily="34" charset="-120"/>
               </a:rPr>
-              <a:t>Distinguish random from systematic error.</a:t>
+              <a:t>Connect QC practice to patient safety.</a:t>
             </a:r>
             <a:endParaRPr lang="en-US" sz="1350" dirty="0"/>
           </a:p>
@@ -10633,7 +12671,7 @@
                 <a:ea typeface="Calibri" pitchFamily="34" charset="-122"/>
                 <a:cs typeface="Calibri" pitchFamily="34" charset="-120"/>
               </a:rPr>
-              <a:t>QMS, QC, and QA</a:t>
+              <a:t>QMS elements</a:t>
             </a:r>
             <a:pPr algn="l" indent="0" marL="0">
               <a:buNone/>
@@ -10647,7 +12685,7 @@
                 <a:ea typeface="Calibri" pitchFamily="34" charset="-122"/>
                 <a:cs typeface="Calibri" pitchFamily="34" charset="-120"/>
               </a:rPr>
-              <a:t>   —  the framework</a:t>
+              <a:t>   —  the quality system essentials</a:t>
             </a:r>
             <a:endParaRPr lang="en-US" sz="1400" dirty="0"/>
           </a:p>
@@ -10774,7 +12812,7 @@
                 <a:ea typeface="Calibri" pitchFamily="34" charset="-122"/>
                 <a:cs typeface="Calibri" pitchFamily="34" charset="-120"/>
               </a:rPr>
-              <a:t>Levey-Jennings &amp; Westgard</a:t>
+              <a:t>Statistical QC</a:t>
             </a:r>
             <a:pPr algn="l" indent="0" marL="0">
               <a:buNone/>
@@ -10788,7 +12826,7 @@
                 <a:ea typeface="Calibri" pitchFamily="34" charset="-122"/>
                 <a:cs typeface="Calibri" pitchFamily="34" charset="-120"/>
               </a:rPr>
-              <a:t>   —  detecting analytic error</a:t>
+              <a:t>   —  Levey-Jennings &amp; Westgard</a:t>
             </a:r>
             <a:endParaRPr lang="en-US" sz="1400" dirty="0"/>
           </a:p>
@@ -10922,7 +12960,7 @@
                 <a:ea typeface="Calibri" pitchFamily="34" charset="-122"/>
                 <a:cs typeface="Calibri" pitchFamily="34" charset="-120"/>
               </a:rPr>
-              <a:t>Proficiency testing &amp; indicators</a:t>
+              <a:t>Error types</a:t>
             </a:r>
             <a:pPr algn="l" indent="0" marL="0">
               <a:buNone/>
@@ -10936,7 +12974,7 @@
                 <a:ea typeface="Calibri" pitchFamily="34" charset="-122"/>
                 <a:cs typeface="Calibri" pitchFamily="34" charset="-120"/>
               </a:rPr>
-              <a:t>   —  external benchmarking</a:t>
+              <a:t>   —  random vs systematic</a:t>
             </a:r>
             <a:endParaRPr lang="en-US" sz="1400" dirty="0"/>
           </a:p>
@@ -11063,7 +13101,7 @@
                 <a:ea typeface="Calibri" pitchFamily="34" charset="-122"/>
                 <a:cs typeface="Calibri" pitchFamily="34" charset="-120"/>
               </a:rPr>
-              <a:t>Occurrence management</a:t>
+              <a:t>Indicators &amp; improvement</a:t>
             </a:r>
             <a:pPr algn="l" indent="0" marL="0">
               <a:buNone/>
@@ -11077,7 +13115,7 @@
                 <a:ea typeface="Calibri" pitchFamily="34" charset="-122"/>
                 <a:cs typeface="Calibri" pitchFamily="34" charset="-120"/>
               </a:rPr>
-              <a:t>   —  CAPA and improvement</a:t>
+              <a:t>   —  monitoring and PDCA</a:t>
             </a:r>
             <a:endParaRPr lang="en-US" sz="1400" dirty="0"/>
           </a:p>
@@ -11211,7 +13249,7 @@
                 <a:ea typeface="Calibri" pitchFamily="34" charset="-122"/>
                 <a:cs typeface="Calibri" pitchFamily="34" charset="-120"/>
               </a:rPr>
-              <a:t>Cases &amp; board</a:t>
+              <a:t>Cases &amp; board review</a:t>
             </a:r>
             <a:endParaRPr lang="en-US" sz="1400" dirty="0"/>
           </a:p>
@@ -11510,7 +13548,7 @@
                 <a:ea typeface="Calibri" pitchFamily="34" charset="-122"/>
                 <a:cs typeface="Calibri" pitchFamily="34" charset="-120"/>
               </a:rPr>
-              <a:t>The QMS and Statistical QC</a:t>
+              <a:t>The Quality System &amp; Statistical QC</a:t>
             </a:r>
             <a:endParaRPr lang="en-US" sz="3800" dirty="0"/>
           </a:p>
@@ -11581,7 +13619,7 @@
                 <a:ea typeface="Calibri" pitchFamily="34" charset="-122"/>
                 <a:cs typeface="Calibri" pitchFamily="34" charset="-120"/>
               </a:rPr>
-              <a:t>LAB MANAGEMENT &amp; QUALITY   ·   FRAMEWORK</a:t>
+              <a:t>LAB MANAGEMENT &amp; QUALITY   ·   QMS</a:t>
             </a:r>
             <a:endParaRPr lang="en-US" sz="1100" dirty="0"/>
           </a:p>
@@ -11620,7 +13658,7 @@
                 <a:ea typeface="Calibri" pitchFamily="34" charset="-122"/>
                 <a:cs typeface="Calibri" pitchFamily="34" charset="-120"/>
               </a:rPr>
-              <a:t>QC, QA, and the Quality Management System</a:t>
+              <a:t>What a Quality System Includes</a:t>
             </a:r>
             <a:endParaRPr lang="en-US" sz="3000" dirty="0"/>
           </a:p>
@@ -11688,7 +13726,7 @@
                 <a:ea typeface="Calibri" pitchFamily="34" charset="-122"/>
                 <a:cs typeface="Calibri" pitchFamily="34" charset="-120"/>
               </a:rPr>
-              <a:t>DEFINITIONS</a:t>
+              <a:t>SYSTEM ELEMENTS</a:t>
             </a:r>
             <a:endParaRPr lang="en-US" sz="1200" dirty="0"/>
           </a:p>
@@ -11731,7 +13769,7 @@
                 <a:ea typeface="Calibri" pitchFamily="34" charset="-122"/>
                 <a:cs typeface="Calibri" pitchFamily="34" charset="-120"/>
               </a:rPr>
-              <a:t>QC (quality control): real-time checks that the analytic process is working (e.g., control materials).</a:t>
+              <a:t>Documents/records, equipment, personnel competency, process control, and occurrence management.</a:t>
             </a:r>
             <a:endParaRPr lang="en-US" sz="1250" dirty="0"/>
           </a:p>
@@ -11752,7 +13790,7 @@
                 <a:ea typeface="Calibri" pitchFamily="34" charset="-122"/>
                 <a:cs typeface="Calibri" pitchFamily="34" charset="-120"/>
               </a:rPr>
-              <a:t>QA (quality assurance): broader monitoring that the whole process meets requirements.</a:t>
+              <a:t>Quality control and quality assurance across all phases.</a:t>
             </a:r>
             <a:endParaRPr lang="en-US" sz="1250" dirty="0"/>
           </a:p>
@@ -11773,7 +13811,7 @@
                 <a:ea typeface="Calibri" pitchFamily="34" charset="-122"/>
                 <a:cs typeface="Calibri" pitchFamily="34" charset="-120"/>
               </a:rPr>
-              <a:t>QMS: the overarching system — documents, personnel, equipment, processes, and continual improvement.</a:t>
+              <a:t>Defined SOPs and a document-control system.</a:t>
             </a:r>
             <a:endParaRPr lang="en-US" sz="1250" dirty="0"/>
           </a:p>
@@ -11794,7 +13832,7 @@
                 <a:ea typeface="Calibri" pitchFamily="34" charset="-122"/>
                 <a:cs typeface="Calibri" pitchFamily="34" charset="-120"/>
               </a:rPr>
-              <a:t>The 12 quality system essentials organize a QMS.</a:t>
+              <a:t>Management review and continual improvement.</a:t>
             </a:r>
             <a:endParaRPr lang="en-US" sz="1250" dirty="0"/>
           </a:p>
@@ -11817,7 +13855,7 @@
             </a:avLst>
           </a:prstGeom>
           <a:solidFill>
-            <a:srgbClr val="ECEFF1"/>
+            <a:srgbClr val="E6EAED"/>
           </a:solidFill>
           <a:ln/>
           <a:effectLst>
@@ -11862,7 +13900,7 @@
                 <a:ea typeface="Calibri" pitchFamily="34" charset="-122"/>
                 <a:cs typeface="Calibri" pitchFamily="34" charset="-120"/>
               </a:rPr>
-              <a:t>WHY THE DISTINCTION MATTERS</a:t>
+              <a:t>QC VS QA</a:t>
             </a:r>
             <a:endParaRPr lang="en-US" sz="1200" dirty="0"/>
           </a:p>
@@ -11905,7 +13943,7 @@
                 <a:ea typeface="Calibri" pitchFamily="34" charset="-122"/>
                 <a:cs typeface="Calibri" pitchFamily="34" charset="-120"/>
               </a:rPr>
-              <a:t>QC catches the failing run; QA and the QMS prevent and reduce future failures.</a:t>
+              <a:t>QC monitors the analytic process in real time; QA evaluates the whole system over time.</a:t>
             </a:r>
             <a:endParaRPr lang="en-US" sz="1250" dirty="0"/>
           </a:p>
@@ -11926,7 +13964,7 @@
                 <a:ea typeface="Calibri" pitchFamily="34" charset="-122"/>
                 <a:cs typeface="Calibri" pitchFamily="34" charset="-120"/>
               </a:rPr>
-              <a:t>Quality indicators track performance across the testing cycle.</a:t>
+              <a:t>QC: control materials, rules, corrective action.</a:t>
             </a:r>
             <a:endParaRPr lang="en-US" sz="1250" dirty="0"/>
           </a:p>
@@ -11947,7 +13985,7 @@
                 <a:ea typeface="Calibri" pitchFamily="34" charset="-122"/>
                 <a:cs typeface="Calibri" pitchFamily="34" charset="-120"/>
               </a:rPr>
-              <a:t>A culture of quality spans pre-, intra-, and post-analytic phases.</a:t>
+              <a:t>QA: indicators, audits, proficiency testing.</a:t>
             </a:r>
             <a:endParaRPr lang="en-US" sz="1250" dirty="0"/>
           </a:p>
@@ -11968,7 +14006,7 @@
                 <a:ea typeface="Calibri" pitchFamily="34" charset="-122"/>
                 <a:cs typeface="Calibri" pitchFamily="34" charset="-120"/>
               </a:rPr>
-              <a:t>Leadership and documentation hold it together.</a:t>
+              <a:t>Both feed continuous improvement.</a:t>
             </a:r>
             <a:endParaRPr lang="en-US" sz="1250" dirty="0"/>
           </a:p>
@@ -12184,7 +14222,7 @@
                 <a:ea typeface="Calibri" pitchFamily="34" charset="-122"/>
                 <a:cs typeface="Calibri" pitchFamily="34" charset="-120"/>
               </a:rPr>
-              <a:t>Levey-Jennings and Westgard Rules</a:t>
+              <a:t>Levey-Jennings Charts &amp; Westgard Rules</a:t>
             </a:r>
             <a:endParaRPr lang="en-US" sz="3000" dirty="0"/>
           </a:p>
@@ -12198,12 +14236,12 @@
         </p:nvSpPr>
         <p:spPr>
           <a:xfrm>
-            <a:off x="1066648" y="1481328"/>
-            <a:ext cx="10058400" cy="4160520"/>
+            <a:off x="792328" y="1481328"/>
+            <a:ext cx="10607040" cy="4416552"/>
           </a:xfrm>
           <a:prstGeom prst="roundRect">
             <a:avLst>
-              <a:gd name="adj" fmla="val 1978"/>
+              <a:gd name="adj" fmla="val 1863"/>
             </a:avLst>
           </a:prstGeom>
           <a:solidFill>
@@ -12226,7 +14264,7 @@
       </p:sp>
       <p:pic>
         <p:nvPicPr>
-          <p:cNvPr id="5" name="Image 0" descr="/tmp/cp_work2/art/lab_qc.png">    </p:cNvPr>
+          <p:cNvPr id="5" name="Image 0" descr="/tmp/cp_work2/art/lab_westgard.png">    </p:cNvPr>
           <p:cNvPicPr>
             <a:picLocks noChangeAspect="1"/>
           </p:cNvPicPr>
@@ -12240,8 +14278,8 @@
         </p:blipFill>
         <p:spPr>
           <a:xfrm>
-            <a:off x="1194664" y="1609344"/>
-            <a:ext cx="9802368" cy="3904488"/>
+            <a:off x="920344" y="1609344"/>
+            <a:ext cx="10351008" cy="4160520"/>
           </a:xfrm>
           <a:prstGeom prst="rect">
             <a:avLst/>
@@ -12256,7 +14294,7 @@
         </p:nvSpPr>
         <p:spPr>
           <a:xfrm>
-            <a:off x="566928" y="5715000"/>
+            <a:off x="566928" y="5971032"/>
             <a:ext cx="11057839" cy="365760"/>
           </a:xfrm>
           <a:prstGeom prst="rect">
@@ -12281,7 +14319,7 @@
                 <a:ea typeface="Calibri" pitchFamily="34" charset="-122"/>
                 <a:cs typeface="Calibri" pitchFamily="34" charset="-120"/>
               </a:rPr>
-              <a:t>Original schematic. Control values plotted against mean ± SD; multirules flag out-of-control runs and the type of error.</a:t>
+              <a:t>Original schematic. Control values are plotted against mean ± SD; multirules flag rejectable random and systematic error.</a:t>
             </a:r>
             <a:endParaRPr lang="en-US" sz="1150" dirty="0"/>
           </a:p>
@@ -12497,7 +14535,7 @@
                 <a:ea typeface="Calibri" pitchFamily="34" charset="-122"/>
                 <a:cs typeface="Calibri" pitchFamily="34" charset="-120"/>
               </a:rPr>
-              <a:t>Reading the Chart</a:t>
+              <a:t>Reading the Control Chart</a:t>
             </a:r>
             <a:endParaRPr lang="en-US" sz="3000" dirty="0"/>
           </a:p>
@@ -12565,7 +14603,7 @@
                 <a:ea typeface="Calibri" pitchFamily="34" charset="-122"/>
                 <a:cs typeface="Calibri" pitchFamily="34" charset="-120"/>
               </a:rPr>
-              <a:t>RANDOM VS SYSTEMATIC ERROR</a:t>
+              <a:t>LEVEY-JENNINGS</a:t>
             </a:r>
             <a:endParaRPr lang="en-US" sz="1200" dirty="0"/>
           </a:p>
@@ -12608,7 +14646,7 @@
                 <a:ea typeface="Calibri" pitchFamily="34" charset="-122"/>
                 <a:cs typeface="Calibri" pitchFamily="34" charset="-120"/>
               </a:rPr>
-              <a:t>Random error widens the scatter (a precision problem) — flagged by rules like 1₃ₛ and R₄ₛ.</a:t>
+              <a:t>Plot control results against the mean and standard-deviation limits over time.</a:t>
             </a:r>
             <a:endParaRPr lang="en-US" sz="1250" dirty="0"/>
           </a:p>
@@ -12629,7 +14667,7 @@
                 <a:ea typeface="Calibri" pitchFamily="34" charset="-122"/>
                 <a:cs typeface="Calibri" pitchFamily="34" charset="-120"/>
               </a:rPr>
-              <a:t>Systematic error shifts or trends the mean (an accuracy problem) — flagged by 2₂ₛ, 4₁ₛ, 10ₓ.</a:t>
+              <a:t>Visualizes drift, shift, and scatter.</a:t>
             </a:r>
             <a:endParaRPr lang="en-US" sz="1250" dirty="0"/>
           </a:p>
@@ -12650,7 +14688,7 @@
                 <a:ea typeface="Calibri" pitchFamily="34" charset="-122"/>
                 <a:cs typeface="Calibri" pitchFamily="34" charset="-120"/>
               </a:rPr>
-              <a:t>A sudden SHIFT suggests a new reagent lot or calibration.</a:t>
+              <a:t>Establish the mean/SD from a stable control period.</a:t>
             </a:r>
             <a:endParaRPr lang="en-US" sz="1250" dirty="0"/>
           </a:p>
@@ -12671,7 +14709,7 @@
                 <a:ea typeface="Calibri" pitchFamily="34" charset="-122"/>
                 <a:cs typeface="Calibri" pitchFamily="34" charset="-120"/>
               </a:rPr>
-              <a:t>A gradual TREND suggests reagent or electrode deterioration.</a:t>
+              <a:t>Review before releasing patient results.</a:t>
             </a:r>
             <a:endParaRPr lang="en-US" sz="1250" dirty="0"/>
           </a:p>
@@ -12694,7 +14732,7 @@
             </a:avLst>
           </a:prstGeom>
           <a:solidFill>
-            <a:srgbClr val="ECEFF1"/>
+            <a:srgbClr val="E6EAED"/>
           </a:solidFill>
           <a:ln/>
           <a:effectLst>
@@ -12739,7 +14777,7 @@
                 <a:ea typeface="Calibri" pitchFamily="34" charset="-122"/>
                 <a:cs typeface="Calibri" pitchFamily="34" charset="-120"/>
               </a:rPr>
-              <a:t>ACTING ON VIOLATIONS</a:t>
+              <a:t>WESTGARD MULTIRULES</a:t>
             </a:r>
             <a:endParaRPr lang="en-US" sz="1200" dirty="0"/>
           </a:p>
@@ -12782,7 +14820,7 @@
                 <a:ea typeface="Calibri" pitchFamily="34" charset="-122"/>
                 <a:cs typeface="Calibri" pitchFamily="34" charset="-120"/>
               </a:rPr>
-              <a:t>A 1₂ₛ is a warning; rules like 1₃ₛ / 2₂ₛ / R₄ₛ indicate rejection — stop, investigate, fix, repeat QC.</a:t>
+              <a:t>1_3s and R_4s flag random error; 2_2s, 4_1s, and 10x flag systematic error.</a:t>
             </a:r>
             <a:endParaRPr lang="en-US" sz="1250" dirty="0"/>
           </a:p>
@@ -12803,7 +14841,7 @@
                 <a:ea typeface="Calibri" pitchFamily="34" charset="-122"/>
                 <a:cs typeface="Calibri" pitchFamily="34" charset="-120"/>
               </a:rPr>
-              <a:t>Do not report patient results from an out-of-control run.</a:t>
+              <a:t>1_2s is a warning, not an automatic rejection.</a:t>
             </a:r>
             <a:endParaRPr lang="en-US" sz="1250" dirty="0"/>
           </a:p>
@@ -12824,7 +14862,7 @@
                 <a:ea typeface="Calibri" pitchFamily="34" charset="-122"/>
                 <a:cs typeface="Calibri" pitchFamily="34" charset="-120"/>
               </a:rPr>
-              <a:t>Document the investigation and corrective action.</a:t>
+              <a:t>Multirules balance error detection and false rejection.</a:t>
             </a:r>
             <a:endParaRPr lang="en-US" sz="1250" dirty="0"/>
           </a:p>
@@ -12845,7 +14883,7 @@
                 <a:ea typeface="Calibri" pitchFamily="34" charset="-122"/>
                 <a:cs typeface="Calibri" pitchFamily="34" charset="-120"/>
               </a:rPr>
-              <a:t>Tune rules and QC frequency to assay risk (individualized QC plans).</a:t>
+              <a:t>Tie each rule to a corrective-action pathway.</a:t>
             </a:r>
             <a:endParaRPr lang="en-US" sz="1250" dirty="0"/>
           </a:p>
@@ -13144,7 +15182,7 @@
                 <a:ea typeface="Calibri" pitchFamily="34" charset="-122"/>
                 <a:cs typeface="Calibri" pitchFamily="34" charset="-120"/>
               </a:rPr>
-              <a:t>External Quality &amp; Occurrences</a:t>
+              <a:t>Error Types, Indicators &amp; Improvement</a:t>
             </a:r>
             <a:endParaRPr lang="en-US" sz="3800" dirty="0"/>
           </a:p>

--- a/decks/LabMgmt_01_Quality-Management-Systems.pptx
+++ b/decks/LabMgmt_01_Quality-Management-Systems.pptx
@@ -25,9 +25,13 @@
     <p:sldId id="273" r:id="rId19"/>
     <p:sldId id="274" r:id="rId20"/>
     <p:sldId id="275" r:id="rId21"/>
+    <p:sldId id="284" r:id="rId35"/>
     <p:sldId id="276" r:id="rId22"/>
+    <p:sldId id="283" r:id="rId34"/>
     <p:sldId id="277" r:id="rId23"/>
+    <p:sldId id="282" r:id="rId33"/>
     <p:sldId id="278" r:id="rId24"/>
+    <p:sldId id="281" r:id="rId32"/>
     <p:sldId id="279" r:id="rId25"/>
     <p:sldId id="280" r:id="rId26"/>
   </p:sldIdLst>
@@ -3032,6 +3036,10 @@
           </a:solidFill>
           <a:ln/>
         </p:spPr>
+        <p:txBody>
+          <a:bodyPr/>
+          <a:p/>
+        </p:txBody>
       </p:sp>
       <p:sp>
         <p:nvSpPr>
@@ -3054,6 +3062,10 @@
           </a:solidFill>
           <a:ln/>
         </p:spPr>
+        <p:txBody>
+          <a:bodyPr/>
+          <a:p/>
+        </p:txBody>
       </p:sp>
       <p:sp>
         <p:nvSpPr>
@@ -3076,6 +3088,10 @@
           </a:solidFill>
           <a:ln/>
         </p:spPr>
+        <p:txBody>
+          <a:bodyPr/>
+          <a:p/>
+        </p:txBody>
       </p:sp>
       <p:sp>
         <p:nvSpPr>
@@ -3098,6 +3114,10 @@
           </a:solidFill>
           <a:ln/>
         </p:spPr>
+        <p:txBody>
+          <a:bodyPr/>
+          <a:p/>
+        </p:txBody>
       </p:sp>
       <p:sp>
         <p:nvSpPr>
@@ -3514,6 +3534,10 @@
             </a:outerShdw>
           </a:effectLst>
         </p:spPr>
+        <p:txBody>
+          <a:bodyPr/>
+          <a:p/>
+        </p:txBody>
       </p:sp>
       <p:sp>
         <p:nvSpPr>
@@ -3688,6 +3712,10 @@
             </a:outerShdw>
           </a:effectLst>
         </p:spPr>
+        <p:txBody>
+          <a:bodyPr/>
+          <a:p/>
+        </p:txBody>
       </p:sp>
       <p:sp>
         <p:nvSpPr>
@@ -4083,6 +4111,10 @@
             </a:outerShdw>
           </a:effectLst>
         </p:spPr>
+        <p:txBody>
+          <a:bodyPr/>
+          <a:p/>
+        </p:txBody>
       </p:sp>
       <p:pic>
         <p:nvPicPr>
@@ -4391,6 +4423,10 @@
             </a:outerShdw>
           </a:effectLst>
         </p:spPr>
+        <p:txBody>
+          <a:bodyPr/>
+          <a:p/>
+        </p:txBody>
       </p:sp>
       <p:sp>
         <p:nvSpPr>
@@ -4565,6 +4601,10 @@
             </a:outerShdw>
           </a:effectLst>
         </p:spPr>
+        <p:txBody>
+          <a:bodyPr/>
+          <a:p/>
+        </p:txBody>
       </p:sp>
       <p:sp>
         <p:nvSpPr>
@@ -4870,6 +4910,10 @@
           </a:solidFill>
           <a:ln/>
         </p:spPr>
+        <p:txBody>
+          <a:bodyPr/>
+          <a:p/>
+        </p:txBody>
       </p:sp>
       <p:sp>
         <p:nvSpPr>
@@ -4892,6 +4936,10 @@
           </a:solidFill>
           <a:ln/>
         </p:spPr>
+        <p:txBody>
+          <a:bodyPr/>
+          <a:p/>
+        </p:txBody>
       </p:sp>
       <p:sp>
         <p:nvSpPr>
@@ -5148,6 +5196,10 @@
             </a:outerShdw>
           </a:effectLst>
         </p:spPr>
+        <p:txBody>
+          <a:bodyPr/>
+          <a:p/>
+        </p:txBody>
       </p:sp>
       <p:sp>
         <p:nvSpPr>
@@ -5258,6 +5310,10 @@
             </a:outerShdw>
           </a:effectLst>
         </p:spPr>
+        <p:txBody>
+          <a:bodyPr/>
+          <a:p/>
+        </p:txBody>
       </p:sp>
       <p:sp>
         <p:nvSpPr>
@@ -5687,6 +5743,10 @@
             </a:outerShdw>
           </a:effectLst>
         </p:spPr>
+        <p:txBody>
+          <a:bodyPr/>
+          <a:p/>
+        </p:txBody>
       </p:sp>
       <p:sp>
         <p:nvSpPr>
@@ -6013,6 +6073,10 @@
             </a:outerShdw>
           </a:effectLst>
         </p:spPr>
+        <p:txBody>
+          <a:bodyPr/>
+          <a:p/>
+        </p:txBody>
       </p:sp>
       <p:sp>
         <p:nvSpPr>
@@ -6123,6 +6187,10 @@
             </a:outerShdw>
           </a:effectLst>
         </p:spPr>
+        <p:txBody>
+          <a:bodyPr/>
+          <a:p/>
+        </p:txBody>
       </p:sp>
       <p:sp>
         <p:nvSpPr>
@@ -6552,6 +6620,10 @@
             </a:outerShdw>
           </a:effectLst>
         </p:spPr>
+        <p:txBody>
+          <a:bodyPr/>
+          <a:p/>
+        </p:txBody>
       </p:sp>
       <p:sp>
         <p:nvSpPr>
@@ -6878,6 +6950,10 @@
             </a:outerShdw>
           </a:effectLst>
         </p:spPr>
+        <p:txBody>
+          <a:bodyPr/>
+          <a:p/>
+        </p:txBody>
       </p:sp>
       <p:sp>
         <p:nvSpPr>
@@ -6988,6 +7064,10 @@
             </a:outerShdw>
           </a:effectLst>
         </p:spPr>
+        <p:txBody>
+          <a:bodyPr/>
+          <a:p/>
+        </p:txBody>
       </p:sp>
       <p:sp>
         <p:nvSpPr>
@@ -7417,6 +7497,10 @@
             </a:outerShdw>
           </a:effectLst>
         </p:spPr>
+        <p:txBody>
+          <a:bodyPr/>
+          <a:p/>
+        </p:txBody>
       </p:sp>
       <p:sp>
         <p:nvSpPr>
@@ -7743,6 +7827,10 @@
             </a:outerShdw>
           </a:effectLst>
         </p:spPr>
+        <p:txBody>
+          <a:bodyPr/>
+          <a:p/>
+        </p:txBody>
       </p:sp>
       <p:sp>
         <p:nvSpPr>
@@ -7850,6 +7938,10 @@
             </a:outerShdw>
           </a:effectLst>
         </p:spPr>
+        <p:txBody>
+          <a:bodyPr/>
+          <a:p/>
+        </p:txBody>
       </p:sp>
       <p:sp>
         <p:nvSpPr>
@@ -7957,6 +8049,10 @@
             </a:outerShdw>
           </a:effectLst>
         </p:spPr>
+        <p:txBody>
+          <a:bodyPr/>
+          <a:p/>
+        </p:txBody>
       </p:sp>
       <p:sp>
         <p:nvSpPr>
@@ -8064,6 +8160,10 @@
             </a:outerShdw>
           </a:effectLst>
         </p:spPr>
+        <p:txBody>
+          <a:bodyPr/>
+          <a:p/>
+        </p:txBody>
       </p:sp>
       <p:sp>
         <p:nvSpPr>
@@ -8456,9 +8556,9 @@
               <a:buNone/>
             </a:pPr>
             <a:r>
-              <a:rPr lang="en-US" sz="1350" b="1" dirty="0">
-                <a:solidFill>
-                  <a:srgbClr val="2C3A41"/>
+              <a:rPr lang="en-US" sz="1350" b="0" dirty="0">
+                <a:solidFill>
+                  <a:srgbClr val="33444F"/>
                 </a:solidFill>
                 <a:latin typeface="Calibri" pitchFamily="34" charset="0"/>
                 <a:ea typeface="Calibri" pitchFamily="34" charset="-122"/>
@@ -8527,130 +8627,6 @@
               <a:t>E. A warning only</a:t>
             </a:r>
             <a:endParaRPr lang="en-US" sz="1350" dirty="0"/>
-          </a:p>
-        </p:txBody>
-      </p:sp>
-      <p:sp>
-        <p:nvSpPr>
-          <p:cNvPr id="6" name="Shape 4"/>
-          <p:cNvSpPr/>
-          <p:nvPr/>
-        </p:nvSpPr>
-        <p:spPr>
-          <a:xfrm>
-            <a:off x="7201632" y="2395728"/>
-            <a:ext cx="4423136" cy="3246120"/>
-          </a:xfrm>
-          <a:prstGeom prst="roundRect">
-            <a:avLst>
-              <a:gd name="adj" fmla="val 2535"/>
-            </a:avLst>
-          </a:prstGeom>
-          <a:solidFill>
-            <a:srgbClr val="ECEFF1"/>
-          </a:solidFill>
-          <a:ln/>
-          <a:effectLst>
-            <a:outerShdw sx="100000" sy="100000" kx="0" ky="0" algn="bl" rotWithShape="0" blurRad="88900" dist="25400" dir="5400000">
-              <a:srgbClr val="22303C">
-                <a:alpha val="12000"/>
-              </a:srgbClr>
-            </a:outerShdw>
-          </a:effectLst>
-        </p:spPr>
-      </p:sp>
-      <p:sp>
-        <p:nvSpPr>
-          <p:cNvPr id="7" name="Text 5"/>
-          <p:cNvSpPr/>
-          <p:nvPr/>
-        </p:nvSpPr>
-        <p:spPr>
-          <a:xfrm>
-            <a:off x="7439376" y="2578608"/>
-            <a:ext cx="3965936" cy="457200"/>
-          </a:xfrm>
-          <a:prstGeom prst="rect">
-            <a:avLst/>
-          </a:prstGeom>
-          <a:noFill/>
-          <a:ln/>
-        </p:spPr>
-        <p:txBody>
-          <a:bodyPr wrap="square" lIns="0" tIns="0" rIns="0" bIns="0" rtlCol="0" anchor="ctr"/>
-          <a:lstStyle/>
-          <a:p>
-            <a:pPr indent="0" marL="0">
-              <a:buNone/>
-            </a:pPr>
-            <a:r>
-              <a:rPr lang="en-US" sz="1500" b="1" dirty="0">
-                <a:solidFill>
-                  <a:srgbClr val="455A64"/>
-                </a:solidFill>
-                <a:latin typeface="Calibri" pitchFamily="34" charset="0"/>
-                <a:ea typeface="Calibri" pitchFamily="34" charset="-122"/>
-                <a:cs typeface="Calibri" pitchFamily="34" charset="-120"/>
-              </a:rPr>
-              <a:t>ANSWER  </a:t>
-            </a:r>
-            <a:pPr indent="0" marL="0">
-              <a:buNone/>
-            </a:pPr>
-            <a:r>
-              <a:rPr lang="en-US" sz="1500" b="1" dirty="0">
-                <a:solidFill>
-                  <a:srgbClr val="1B2A38"/>
-                </a:solidFill>
-                <a:latin typeface="Calibri" pitchFamily="34" charset="0"/>
-                <a:ea typeface="Calibri" pitchFamily="34" charset="-122"/>
-                <a:cs typeface="Calibri" pitchFamily="34" charset="-120"/>
-              </a:rPr>
-              <a:t>B — Random error</a:t>
-            </a:r>
-            <a:endParaRPr lang="en-US" sz="1500" dirty="0"/>
-          </a:p>
-        </p:txBody>
-      </p:sp>
-      <p:sp>
-        <p:nvSpPr>
-          <p:cNvPr id="8" name="Text 6"/>
-          <p:cNvSpPr/>
-          <p:nvPr/>
-        </p:nvSpPr>
-        <p:spPr>
-          <a:xfrm>
-            <a:off x="7439376" y="3127248"/>
-            <a:ext cx="3947648" cy="2377440"/>
-          </a:xfrm>
-          <a:prstGeom prst="rect">
-            <a:avLst/>
-          </a:prstGeom>
-          <a:noFill/>
-          <a:ln/>
-        </p:spPr>
-        <p:txBody>
-          <a:bodyPr wrap="square" lIns="0" tIns="0" rIns="0" bIns="0" rtlCol="0" anchor="t"/>
-          <a:lstStyle/>
-          <a:p>
-            <a:pPr algn="l" indent="0" marL="0">
-              <a:lnSpc>
-                <a:spcPct val="108000"/>
-              </a:lnSpc>
-              <a:buNone/>
-            </a:pPr>
-            <a:r>
-              <a:rPr lang="en-US" sz="1250" dirty="0">
-                <a:solidFill>
-                  <a:srgbClr val="33444F"/>
-                </a:solidFill>
-                <a:latin typeface="Calibri" pitchFamily="34" charset="0"/>
-                <a:ea typeface="Calibri" pitchFamily="34" charset="-122"/>
-                <a:cs typeface="Calibri" pitchFamily="34" charset="-120"/>
-              </a:rPr>
-              <a:t>A single point beyond ±3 SD indicates random error (imprecision); systematic rules involve consecutive directional violations.</a:t>
-            </a:r>
-            <a:endParaRPr lang="en-US" sz="1250" dirty="0"/>
           </a:p>
         </p:txBody>
       </p:sp>
@@ -8960,9 +8936,9 @@
               <a:buNone/>
             </a:pPr>
             <a:r>
-              <a:rPr lang="en-US" sz="1350" b="1" dirty="0">
-                <a:solidFill>
-                  <a:srgbClr val="2C3A41"/>
+              <a:rPr lang="en-US" sz="1350" b="0" dirty="0">
+                <a:solidFill>
+                  <a:srgbClr val="33444F"/>
                 </a:solidFill>
                 <a:latin typeface="Calibri" pitchFamily="34" charset="0"/>
                 <a:ea typeface="Calibri" pitchFamily="34" charset="-122"/>
@@ -9031,130 +9007,6 @@
               <a:t>E. Improved precision</a:t>
             </a:r>
             <a:endParaRPr lang="en-US" sz="1350" dirty="0"/>
-          </a:p>
-        </p:txBody>
-      </p:sp>
-      <p:sp>
-        <p:nvSpPr>
-          <p:cNvPr id="6" name="Shape 4"/>
-          <p:cNvSpPr/>
-          <p:nvPr/>
-        </p:nvSpPr>
-        <p:spPr>
-          <a:xfrm>
-            <a:off x="7201632" y="2395728"/>
-            <a:ext cx="4423136" cy="3246120"/>
-          </a:xfrm>
-          <a:prstGeom prst="roundRect">
-            <a:avLst>
-              <a:gd name="adj" fmla="val 2535"/>
-            </a:avLst>
-          </a:prstGeom>
-          <a:solidFill>
-            <a:srgbClr val="ECEFF1"/>
-          </a:solidFill>
-          <a:ln/>
-          <a:effectLst>
-            <a:outerShdw sx="100000" sy="100000" kx="0" ky="0" algn="bl" rotWithShape="0" blurRad="88900" dist="25400" dir="5400000">
-              <a:srgbClr val="22303C">
-                <a:alpha val="12000"/>
-              </a:srgbClr>
-            </a:outerShdw>
-          </a:effectLst>
-        </p:spPr>
-      </p:sp>
-      <p:sp>
-        <p:nvSpPr>
-          <p:cNvPr id="7" name="Text 5"/>
-          <p:cNvSpPr/>
-          <p:nvPr/>
-        </p:nvSpPr>
-        <p:spPr>
-          <a:xfrm>
-            <a:off x="7439376" y="2578608"/>
-            <a:ext cx="3965936" cy="457200"/>
-          </a:xfrm>
-          <a:prstGeom prst="rect">
-            <a:avLst/>
-          </a:prstGeom>
-          <a:noFill/>
-          <a:ln/>
-        </p:spPr>
-        <p:txBody>
-          <a:bodyPr wrap="square" lIns="0" tIns="0" rIns="0" bIns="0" rtlCol="0" anchor="ctr"/>
-          <a:lstStyle/>
-          <a:p>
-            <a:pPr indent="0" marL="0">
-              <a:buNone/>
-            </a:pPr>
-            <a:r>
-              <a:rPr lang="en-US" sz="1500" b="1" dirty="0">
-                <a:solidFill>
-                  <a:srgbClr val="455A64"/>
-                </a:solidFill>
-                <a:latin typeface="Calibri" pitchFamily="34" charset="0"/>
-                <a:ea typeface="Calibri" pitchFamily="34" charset="-122"/>
-                <a:cs typeface="Calibri" pitchFamily="34" charset="-120"/>
-              </a:rPr>
-              <a:t>ANSWER  </a:t>
-            </a:r>
-            <a:pPr indent="0" marL="0">
-              <a:buNone/>
-            </a:pPr>
-            <a:r>
-              <a:rPr lang="en-US" sz="1500" b="1" dirty="0">
-                <a:solidFill>
-                  <a:srgbClr val="1B2A38"/>
-                </a:solidFill>
-                <a:latin typeface="Calibri" pitchFamily="34" charset="0"/>
-                <a:ea typeface="Calibri" pitchFamily="34" charset="-122"/>
-                <a:cs typeface="Calibri" pitchFamily="34" charset="-120"/>
-              </a:rPr>
-              <a:t>B — Systematic error</a:t>
-            </a:r>
-            <a:endParaRPr lang="en-US" sz="1500" dirty="0"/>
-          </a:p>
-        </p:txBody>
-      </p:sp>
-      <p:sp>
-        <p:nvSpPr>
-          <p:cNvPr id="8" name="Text 6"/>
-          <p:cNvSpPr/>
-          <p:nvPr/>
-        </p:nvSpPr>
-        <p:spPr>
-          <a:xfrm>
-            <a:off x="7439376" y="3127248"/>
-            <a:ext cx="3947648" cy="2377440"/>
-          </a:xfrm>
-          <a:prstGeom prst="rect">
-            <a:avLst/>
-          </a:prstGeom>
-          <a:noFill/>
-          <a:ln/>
-        </p:spPr>
-        <p:txBody>
-          <a:bodyPr wrap="square" lIns="0" tIns="0" rIns="0" bIns="0" rtlCol="0" anchor="t"/>
-          <a:lstStyle/>
-          <a:p>
-            <a:pPr algn="l" indent="0" marL="0">
-              <a:lnSpc>
-                <a:spcPct val="108000"/>
-              </a:lnSpc>
-              <a:buNone/>
-            </a:pPr>
-            <a:r>
-              <a:rPr lang="en-US" sz="1250" dirty="0">
-                <a:solidFill>
-                  <a:srgbClr val="33444F"/>
-                </a:solidFill>
-                <a:latin typeface="Calibri" pitchFamily="34" charset="0"/>
-                <a:ea typeface="Calibri" pitchFamily="34" charset="-122"/>
-                <a:cs typeface="Calibri" pitchFamily="34" charset="-120"/>
-              </a:rPr>
-              <a:t>A run of points on one side reflects a shift/bias, often from calibration or reagent changes.</a:t>
-            </a:r>
-            <a:endParaRPr lang="en-US" sz="1250" dirty="0"/>
           </a:p>
         </p:txBody>
       </p:sp>
@@ -9464,9 +9316,9 @@
               <a:buNone/>
             </a:pPr>
             <a:r>
-              <a:rPr lang="en-US" sz="1350" b="1" dirty="0">
-                <a:solidFill>
-                  <a:srgbClr val="2C3A41"/>
+              <a:rPr lang="en-US" sz="1350" b="0" dirty="0">
+                <a:solidFill>
+                  <a:srgbClr val="33444F"/>
                 </a:solidFill>
                 <a:latin typeface="Calibri" pitchFamily="34" charset="0"/>
                 <a:ea typeface="Calibri" pitchFamily="34" charset="-122"/>
@@ -9535,130 +9387,6 @@
               <a:t>E. Maintenance</a:t>
             </a:r>
             <a:endParaRPr lang="en-US" sz="1350" dirty="0"/>
-          </a:p>
-        </p:txBody>
-      </p:sp>
-      <p:sp>
-        <p:nvSpPr>
-          <p:cNvPr id="6" name="Shape 4"/>
-          <p:cNvSpPr/>
-          <p:nvPr/>
-        </p:nvSpPr>
-        <p:spPr>
-          <a:xfrm>
-            <a:off x="7201632" y="2395728"/>
-            <a:ext cx="4423136" cy="3246120"/>
-          </a:xfrm>
-          <a:prstGeom prst="roundRect">
-            <a:avLst>
-              <a:gd name="adj" fmla="val 2535"/>
-            </a:avLst>
-          </a:prstGeom>
-          <a:solidFill>
-            <a:srgbClr val="ECEFF1"/>
-          </a:solidFill>
-          <a:ln/>
-          <a:effectLst>
-            <a:outerShdw sx="100000" sy="100000" kx="0" ky="0" algn="bl" rotWithShape="0" blurRad="88900" dist="25400" dir="5400000">
-              <a:srgbClr val="22303C">
-                <a:alpha val="12000"/>
-              </a:srgbClr>
-            </a:outerShdw>
-          </a:effectLst>
-        </p:spPr>
-      </p:sp>
-      <p:sp>
-        <p:nvSpPr>
-          <p:cNvPr id="7" name="Text 5"/>
-          <p:cNvSpPr/>
-          <p:nvPr/>
-        </p:nvSpPr>
-        <p:spPr>
-          <a:xfrm>
-            <a:off x="7439376" y="2578608"/>
-            <a:ext cx="3965936" cy="457200"/>
-          </a:xfrm>
-          <a:prstGeom prst="rect">
-            <a:avLst/>
-          </a:prstGeom>
-          <a:noFill/>
-          <a:ln/>
-        </p:spPr>
-        <p:txBody>
-          <a:bodyPr wrap="square" lIns="0" tIns="0" rIns="0" bIns="0" rtlCol="0" anchor="ctr"/>
-          <a:lstStyle/>
-          <a:p>
-            <a:pPr indent="0" marL="0">
-              <a:buNone/>
-            </a:pPr>
-            <a:r>
-              <a:rPr lang="en-US" sz="1500" b="1" dirty="0">
-                <a:solidFill>
-                  <a:srgbClr val="455A64"/>
-                </a:solidFill>
-                <a:latin typeface="Calibri" pitchFamily="34" charset="0"/>
-                <a:ea typeface="Calibri" pitchFamily="34" charset="-122"/>
-                <a:cs typeface="Calibri" pitchFamily="34" charset="-120"/>
-              </a:rPr>
-              <a:t>ANSWER  </a:t>
-            </a:r>
-            <a:pPr indent="0" marL="0">
-              <a:buNone/>
-            </a:pPr>
-            <a:r>
-              <a:rPr lang="en-US" sz="1500" b="1" dirty="0">
-                <a:solidFill>
-                  <a:srgbClr val="1B2A38"/>
-                </a:solidFill>
-                <a:latin typeface="Calibri" pitchFamily="34" charset="0"/>
-                <a:ea typeface="Calibri" pitchFamily="34" charset="-122"/>
-                <a:cs typeface="Calibri" pitchFamily="34" charset="-120"/>
-              </a:rPr>
-              <a:t>B — Pre-analytic</a:t>
-            </a:r>
-            <a:endParaRPr lang="en-US" sz="1500" dirty="0"/>
-          </a:p>
-        </p:txBody>
-      </p:sp>
-      <p:sp>
-        <p:nvSpPr>
-          <p:cNvPr id="8" name="Text 6"/>
-          <p:cNvSpPr/>
-          <p:nvPr/>
-        </p:nvSpPr>
-        <p:spPr>
-          <a:xfrm>
-            <a:off x="7439376" y="3127248"/>
-            <a:ext cx="3947648" cy="2377440"/>
-          </a:xfrm>
-          <a:prstGeom prst="rect">
-            <a:avLst/>
-          </a:prstGeom>
-          <a:noFill/>
-          <a:ln/>
-        </p:spPr>
-        <p:txBody>
-          <a:bodyPr wrap="square" lIns="0" tIns="0" rIns="0" bIns="0" rtlCol="0" anchor="t"/>
-          <a:lstStyle/>
-          <a:p>
-            <a:pPr algn="l" indent="0" marL="0">
-              <a:lnSpc>
-                <a:spcPct val="108000"/>
-              </a:lnSpc>
-              <a:buNone/>
-            </a:pPr>
-            <a:r>
-              <a:rPr lang="en-US" sz="1250" dirty="0">
-                <a:solidFill>
-                  <a:srgbClr val="33444F"/>
-                </a:solidFill>
-                <a:latin typeface="Calibri" pitchFamily="34" charset="0"/>
-                <a:ea typeface="Calibri" pitchFamily="34" charset="-122"/>
-                <a:cs typeface="Calibri" pitchFamily="34" charset="-120"/>
-              </a:rPr>
-              <a:t>The majority of errors arise pre-analytically (ordering, collection, transport), so quality systems must extend beyond the bench.</a:t>
-            </a:r>
-            <a:endParaRPr lang="en-US" sz="1250" dirty="0"/>
           </a:p>
         </p:txBody>
       </p:sp>
@@ -9968,9 +9696,9 @@
               <a:buNone/>
             </a:pPr>
             <a:r>
-              <a:rPr lang="en-US" sz="1350" b="1" dirty="0">
-                <a:solidFill>
-                  <a:srgbClr val="2C3A41"/>
+              <a:rPr lang="en-US" sz="1350" b="0" dirty="0">
+                <a:solidFill>
+                  <a:srgbClr val="33444F"/>
                 </a:solidFill>
                 <a:latin typeface="Calibri" pitchFamily="34" charset="0"/>
                 <a:ea typeface="Calibri" pitchFamily="34" charset="-122"/>
@@ -10039,130 +9767,6 @@
               <a:t>E. A proficiency-testing rule</a:t>
             </a:r>
             <a:endParaRPr lang="en-US" sz="1350" dirty="0"/>
-          </a:p>
-        </p:txBody>
-      </p:sp>
-      <p:sp>
-        <p:nvSpPr>
-          <p:cNvPr id="6" name="Shape 4"/>
-          <p:cNvSpPr/>
-          <p:nvPr/>
-        </p:nvSpPr>
-        <p:spPr>
-          <a:xfrm>
-            <a:off x="7201632" y="2395728"/>
-            <a:ext cx="4423136" cy="3246120"/>
-          </a:xfrm>
-          <a:prstGeom prst="roundRect">
-            <a:avLst>
-              <a:gd name="adj" fmla="val 2535"/>
-            </a:avLst>
-          </a:prstGeom>
-          <a:solidFill>
-            <a:srgbClr val="ECEFF1"/>
-          </a:solidFill>
-          <a:ln/>
-          <a:effectLst>
-            <a:outerShdw sx="100000" sy="100000" kx="0" ky="0" algn="bl" rotWithShape="0" blurRad="88900" dist="25400" dir="5400000">
-              <a:srgbClr val="22303C">
-                <a:alpha val="12000"/>
-              </a:srgbClr>
-            </a:outerShdw>
-          </a:effectLst>
-        </p:spPr>
-      </p:sp>
-      <p:sp>
-        <p:nvSpPr>
-          <p:cNvPr id="7" name="Text 5"/>
-          <p:cNvSpPr/>
-          <p:nvPr/>
-        </p:nvSpPr>
-        <p:spPr>
-          <a:xfrm>
-            <a:off x="7439376" y="2578608"/>
-            <a:ext cx="3965936" cy="457200"/>
-          </a:xfrm>
-          <a:prstGeom prst="rect">
-            <a:avLst/>
-          </a:prstGeom>
-          <a:noFill/>
-          <a:ln/>
-        </p:spPr>
-        <p:txBody>
-          <a:bodyPr wrap="square" lIns="0" tIns="0" rIns="0" bIns="0" rtlCol="0" anchor="ctr"/>
-          <a:lstStyle/>
-          <a:p>
-            <a:pPr indent="0" marL="0">
-              <a:buNone/>
-            </a:pPr>
-            <a:r>
-              <a:rPr lang="en-US" sz="1500" b="1" dirty="0">
-                <a:solidFill>
-                  <a:srgbClr val="455A64"/>
-                </a:solidFill>
-                <a:latin typeface="Calibri" pitchFamily="34" charset="0"/>
-                <a:ea typeface="Calibri" pitchFamily="34" charset="-122"/>
-                <a:cs typeface="Calibri" pitchFamily="34" charset="-120"/>
-              </a:rPr>
-              <a:t>ANSWER  </a:t>
-            </a:r>
-            <a:pPr indent="0" marL="0">
-              <a:buNone/>
-            </a:pPr>
-            <a:r>
-              <a:rPr lang="en-US" sz="1500" b="1" dirty="0">
-                <a:solidFill>
-                  <a:srgbClr val="1B2A38"/>
-                </a:solidFill>
-                <a:latin typeface="Calibri" pitchFamily="34" charset="0"/>
-                <a:ea typeface="Calibri" pitchFamily="34" charset="-122"/>
-                <a:cs typeface="Calibri" pitchFamily="34" charset="-120"/>
-              </a:rPr>
-              <a:t>B — A warning rule</a:t>
-            </a:r>
-            <a:endParaRPr lang="en-US" sz="1500" dirty="0"/>
-          </a:p>
-        </p:txBody>
-      </p:sp>
-      <p:sp>
-        <p:nvSpPr>
-          <p:cNvPr id="8" name="Text 6"/>
-          <p:cNvSpPr/>
-          <p:nvPr/>
-        </p:nvSpPr>
-        <p:spPr>
-          <a:xfrm>
-            <a:off x="7439376" y="3127248"/>
-            <a:ext cx="3947648" cy="2377440"/>
-          </a:xfrm>
-          <a:prstGeom prst="rect">
-            <a:avLst/>
-          </a:prstGeom>
-          <a:noFill/>
-          <a:ln/>
-        </p:spPr>
-        <p:txBody>
-          <a:bodyPr wrap="square" lIns="0" tIns="0" rIns="0" bIns="0" rtlCol="0" anchor="t"/>
-          <a:lstStyle/>
-          <a:p>
-            <a:pPr algn="l" indent="0" marL="0">
-              <a:lnSpc>
-                <a:spcPct val="108000"/>
-              </a:lnSpc>
-              <a:buNone/>
-            </a:pPr>
-            <a:r>
-              <a:rPr lang="en-US" sz="1250" dirty="0">
-                <a:solidFill>
-                  <a:srgbClr val="33444F"/>
-                </a:solidFill>
-                <a:latin typeface="Calibri" pitchFamily="34" charset="0"/>
-                <a:ea typeface="Calibri" pitchFamily="34" charset="-122"/>
-                <a:cs typeface="Calibri" pitchFamily="34" charset="-120"/>
-              </a:rPr>
-              <a:t>1_2s is a warning that triggers review of other rules; it is not an automatic rejection by itself.</a:t>
-            </a:r>
-            <a:endParaRPr lang="en-US" sz="1250" dirty="0"/>
           </a:p>
         </p:txBody>
       </p:sp>
@@ -10403,6 +10007,10 @@
           </a:solidFill>
           <a:ln/>
         </p:spPr>
+        <p:txBody>
+          <a:bodyPr/>
+          <a:p/>
+        </p:txBody>
       </p:sp>
       <p:sp>
         <p:nvSpPr>
@@ -10430,6 +10038,10 @@
             </a:outerShdw>
           </a:effectLst>
         </p:spPr>
+        <p:txBody>
+          <a:bodyPr/>
+          <a:p/>
+        </p:txBody>
       </p:sp>
       <p:sp>
         <p:nvSpPr>
@@ -10530,6 +10142,10 @@
           </a:solidFill>
           <a:ln/>
         </p:spPr>
+        <p:txBody>
+          <a:bodyPr/>
+          <a:p/>
+        </p:txBody>
       </p:sp>
       <p:sp>
         <p:nvSpPr>
@@ -10557,6 +10173,10 @@
             </a:outerShdw>
           </a:effectLst>
         </p:spPr>
+        <p:txBody>
+          <a:bodyPr/>
+          <a:p/>
+        </p:txBody>
       </p:sp>
       <p:sp>
         <p:nvSpPr>
@@ -10657,6 +10277,10 @@
           </a:solidFill>
           <a:ln/>
         </p:spPr>
+        <p:txBody>
+          <a:bodyPr/>
+          <a:p/>
+        </p:txBody>
       </p:sp>
       <p:sp>
         <p:nvSpPr>
@@ -10684,6 +10308,10 @@
             </a:outerShdw>
           </a:effectLst>
         </p:spPr>
+        <p:txBody>
+          <a:bodyPr/>
+          <a:p/>
+        </p:txBody>
       </p:sp>
       <p:sp>
         <p:nvSpPr>
@@ -10784,6 +10412,10 @@
           </a:solidFill>
           <a:ln/>
         </p:spPr>
+        <p:txBody>
+          <a:bodyPr/>
+          <a:p/>
+        </p:txBody>
       </p:sp>
       <p:sp>
         <p:nvSpPr>
@@ -10811,6 +10443,10 @@
             </a:outerShdw>
           </a:effectLst>
         </p:spPr>
+        <p:txBody>
+          <a:bodyPr/>
+          <a:p/>
+        </p:txBody>
       </p:sp>
       <p:sp>
         <p:nvSpPr>
@@ -10911,6 +10547,10 @@
           </a:solidFill>
           <a:ln/>
         </p:spPr>
+        <p:txBody>
+          <a:bodyPr/>
+          <a:p/>
+        </p:txBody>
       </p:sp>
       <p:sp>
         <p:nvSpPr>
@@ -10938,6 +10578,10 @@
             </a:outerShdw>
           </a:effectLst>
         </p:spPr>
+        <p:txBody>
+          <a:bodyPr/>
+          <a:p/>
+        </p:txBody>
       </p:sp>
       <p:sp>
         <p:nvSpPr>
@@ -11421,6 +11065,1982 @@
 </p:sld>
 </file>
 
+<file path=ppt/slides/slide26.xml><?xml version="1.0" encoding="utf-8"?>
+<p:sld xmlns:a="http://schemas.openxmlformats.org/drawingml/2006/main" xmlns:p="http://schemas.openxmlformats.org/presentationml/2006/main" xmlns:r="http://schemas.openxmlformats.org/officeDocument/2006/relationships">
+  <p:cSld>
+    <p:spTree>
+      <p:nvGrpSpPr>
+        <p:cNvPr id="1" name=""/>
+        <p:cNvGrpSpPr/>
+        <p:nvPr/>
+      </p:nvGrpSpPr>
+      <p:grpSpPr/>
+      <p:sp>
+        <p:nvSpPr>
+          <p:cNvPr id="2" name="Text 0"/>
+          <p:cNvSpPr/>
+          <p:nvPr/>
+        </p:nvSpPr>
+        <p:spPr>
+          <a:xfrm>
+            <a:off x="566928" y="329184"/>
+            <a:ext cx="10515600" cy="310896"/>
+          </a:xfrm>
+          <a:prstGeom prst="rect">
+            <a:avLst/>
+          </a:prstGeom>
+          <a:noFill/>
+          <a:ln/>
+        </p:spPr>
+        <p:txBody>
+          <a:bodyPr wrap="square" lIns="0" tIns="0" rIns="0" bIns="0" rtlCol="0" anchor="ctr"/>
+          <a:lstStyle/>
+          <a:p>
+            <a:pPr algn="l" indent="0" marL="0">
+              <a:buNone/>
+            </a:pPr>
+            <a:r>
+              <a:rPr lang="en-US" sz="1100" b="1" spc="150" kern="0" dirty="0">
+                <a:solidFill>
+                  <a:srgbClr val="455A64"/>
+                </a:solidFill>
+                <a:latin typeface="Calibri" pitchFamily="34" charset="0"/>
+                <a:ea typeface="Calibri" pitchFamily="34" charset="-122"/>
+                <a:cs typeface="Calibri" pitchFamily="34" charset="-120"/>
+              </a:rPr>
+              <a:t>LAB MANAGEMENT &amp; QUALITY   ·   BOARD REVIEW  ·  Q4</a:t>
+            </a:r>
+            <a:endParaRPr lang="en-US" sz="1100" dirty="0"/>
+          </a:p>
+        </p:txBody>
+      </p:sp>
+      <p:sp>
+        <p:nvSpPr>
+          <p:cNvPr id="3" name="Text 1"/>
+          <p:cNvSpPr/>
+          <p:nvPr/>
+        </p:nvSpPr>
+        <p:spPr>
+          <a:xfrm>
+            <a:off x="566928" y="713232"/>
+            <a:ext cx="11064240" cy="749808"/>
+          </a:xfrm>
+          <a:prstGeom prst="rect">
+            <a:avLst/>
+          </a:prstGeom>
+          <a:noFill/>
+          <a:ln/>
+        </p:spPr>
+        <p:txBody>
+          <a:bodyPr wrap="square" lIns="0" tIns="0" rIns="0" bIns="0" rtlCol="0" anchor="ctr"/>
+          <a:lstStyle/>
+          <a:p>
+            <a:pPr algn="l" indent="0" marL="0">
+              <a:buNone/>
+            </a:pPr>
+            <a:r>
+              <a:rPr lang="en-US" sz="2600" b="1" dirty="0">
+                <a:solidFill>
+                  <a:srgbClr val="0E3A5F"/>
+                </a:solidFill>
+                <a:latin typeface="Calibri" pitchFamily="34" charset="0"/>
+                <a:ea typeface="Calibri" pitchFamily="34" charset="-122"/>
+                <a:cs typeface="Calibri" pitchFamily="34" charset="-120"/>
+              </a:rPr>
+              <a:t>Board-Style Review</a:t>
+            </a:r>
+            <a:endParaRPr lang="en-US" sz="2600" dirty="0"/>
+          </a:p>
+        </p:txBody>
+      </p:sp>
+      <p:sp>
+        <p:nvSpPr>
+          <p:cNvPr id="4" name="Text 2"/>
+          <p:cNvSpPr/>
+          <p:nvPr/>
+        </p:nvSpPr>
+        <p:spPr>
+          <a:xfrm>
+            <a:off x="566928" y="1417320"/>
+            <a:ext cx="11057839" cy="914400"/>
+          </a:xfrm>
+          <a:prstGeom prst="rect">
+            <a:avLst/>
+          </a:prstGeom>
+          <a:noFill/>
+          <a:ln/>
+        </p:spPr>
+        <p:txBody>
+          <a:bodyPr wrap="square" lIns="0" tIns="0" rIns="0" bIns="0" rtlCol="0" anchor="t"/>
+          <a:lstStyle/>
+          <a:p>
+            <a:pPr algn="l" indent="0" marL="0">
+              <a:lnSpc>
+                <a:spcPct val="105000"/>
+              </a:lnSpc>
+              <a:buNone/>
+            </a:pPr>
+            <a:r>
+              <a:rPr lang="en-US" sz="1450" b="1" dirty="0">
+                <a:solidFill>
+                  <a:srgbClr val="1B2A38"/>
+                </a:solidFill>
+                <a:latin typeface="Calibri" pitchFamily="34" charset="0"/>
+                <a:ea typeface="Calibri" pitchFamily="34" charset="-122"/>
+                <a:cs typeface="Calibri" pitchFamily="34" charset="-120"/>
+              </a:rPr>
+              <a:t>The 1_2s rule is best used as:</a:t>
+            </a:r>
+            <a:endParaRPr lang="en-US" sz="1450" dirty="0"/>
+          </a:p>
+        </p:txBody>
+      </p:sp>
+      <p:sp>
+        <p:nvSpPr>
+          <p:cNvPr id="5" name="Text 3"/>
+          <p:cNvSpPr/>
+          <p:nvPr/>
+        </p:nvSpPr>
+        <p:spPr>
+          <a:xfrm>
+            <a:off x="658368" y="2395728"/>
+            <a:ext cx="6192390" cy="3017520"/>
+          </a:xfrm>
+          <a:prstGeom prst="rect">
+            <a:avLst/>
+          </a:prstGeom>
+          <a:noFill/>
+          <a:ln/>
+        </p:spPr>
+        <p:txBody>
+          <a:bodyPr wrap="square" lIns="0" tIns="0" rIns="0" bIns="0" rtlCol="0" anchor="t"/>
+          <a:lstStyle/>
+          <a:p>
+            <a:pPr algn="l" indent="0" marL="0">
+              <a:spcAft>
+                <a:spcPts val="600"/>
+              </a:spcAft>
+              <a:buNone/>
+            </a:pPr>
+            <a:r>
+              <a:rPr lang="en-US" sz="1350" dirty="0">
+                <a:solidFill>
+                  <a:srgbClr val="33444F"/>
+                </a:solidFill>
+                <a:latin typeface="Calibri" pitchFamily="34" charset="0"/>
+                <a:ea typeface="Calibri" pitchFamily="34" charset="-122"/>
+                <a:cs typeface="Calibri" pitchFamily="34" charset="-120"/>
+              </a:rPr>
+              <a:t>A. An automatic rejection rule</a:t>
+            </a:r>
+            <a:endParaRPr lang="en-US" sz="1350" dirty="0"/>
+          </a:p>
+          <a:p>
+            <a:pPr algn="l" indent="0" marL="0">
+              <a:spcAft>
+                <a:spcPts val="600"/>
+              </a:spcAft>
+              <a:buNone/>
+            </a:pPr>
+            <a:r>
+              <a:rPr lang="en-US" sz="1350" b="1" dirty="0">
+                <a:solidFill>
+                  <a:srgbClr val="2C3A41"/>
+                </a:solidFill>
+                <a:latin typeface="Calibri" pitchFamily="34" charset="0"/>
+                <a:ea typeface="Calibri" pitchFamily="34" charset="-122"/>
+                <a:cs typeface="Calibri" pitchFamily="34" charset="-120"/>
+              </a:rPr>
+              <a:t>B. A warning rule prompting inspection</a:t>
+            </a:r>
+            <a:endParaRPr lang="en-US" sz="1350" dirty="0"/>
+          </a:p>
+          <a:p>
+            <a:pPr algn="l" indent="0" marL="0">
+              <a:spcAft>
+                <a:spcPts val="600"/>
+              </a:spcAft>
+              <a:buNone/>
+            </a:pPr>
+            <a:r>
+              <a:rPr lang="en-US" sz="1350" dirty="0">
+                <a:solidFill>
+                  <a:srgbClr val="33444F"/>
+                </a:solidFill>
+                <a:latin typeface="Calibri" pitchFamily="34" charset="0"/>
+                <a:ea typeface="Calibri" pitchFamily="34" charset="-122"/>
+                <a:cs typeface="Calibri" pitchFamily="34" charset="-120"/>
+              </a:rPr>
+              <a:t>C. A systematic-error rule</a:t>
+            </a:r>
+            <a:endParaRPr lang="en-US" sz="1350" dirty="0"/>
+          </a:p>
+          <a:p>
+            <a:pPr algn="l" indent="0" marL="0">
+              <a:spcAft>
+                <a:spcPts val="600"/>
+              </a:spcAft>
+              <a:buNone/>
+            </a:pPr>
+            <a:r>
+              <a:rPr lang="en-US" sz="1350" dirty="0">
+                <a:solidFill>
+                  <a:srgbClr val="33444F"/>
+                </a:solidFill>
+                <a:latin typeface="Calibri" pitchFamily="34" charset="0"/>
+                <a:ea typeface="Calibri" pitchFamily="34" charset="-122"/>
+                <a:cs typeface="Calibri" pitchFamily="34" charset="-120"/>
+              </a:rPr>
+              <a:t>D. A calibration rule</a:t>
+            </a:r>
+            <a:endParaRPr lang="en-US" sz="1350" dirty="0"/>
+          </a:p>
+          <a:p>
+            <a:pPr algn="l" indent="0" marL="0">
+              <a:spcAft>
+                <a:spcPts val="600"/>
+              </a:spcAft>
+              <a:buNone/>
+            </a:pPr>
+            <a:r>
+              <a:rPr lang="en-US" sz="1350" dirty="0">
+                <a:solidFill>
+                  <a:srgbClr val="33444F"/>
+                </a:solidFill>
+                <a:latin typeface="Calibri" pitchFamily="34" charset="0"/>
+                <a:ea typeface="Calibri" pitchFamily="34" charset="-122"/>
+                <a:cs typeface="Calibri" pitchFamily="34" charset="-120"/>
+              </a:rPr>
+              <a:t>E. A proficiency-testing rule</a:t>
+            </a:r>
+            <a:endParaRPr lang="en-US" sz="1350" dirty="0"/>
+          </a:p>
+        </p:txBody>
+      </p:sp>
+      <p:sp>
+        <p:nvSpPr>
+          <p:cNvPr id="6" name="Shape 4"/>
+          <p:cNvSpPr/>
+          <p:nvPr/>
+        </p:nvSpPr>
+        <p:spPr>
+          <a:xfrm>
+            <a:off x="7201632" y="2395728"/>
+            <a:ext cx="4423136" cy="3246120"/>
+          </a:xfrm>
+          <a:prstGeom prst="roundRect">
+            <a:avLst>
+              <a:gd name="adj" fmla="val 2535"/>
+            </a:avLst>
+          </a:prstGeom>
+          <a:solidFill>
+            <a:srgbClr val="ECEFF1"/>
+          </a:solidFill>
+          <a:ln/>
+          <a:effectLst>
+            <a:outerShdw sx="100000" sy="100000" kx="0" ky="0" algn="bl" rotWithShape="0" blurRad="88900" dist="25400" dir="5400000">
+              <a:srgbClr val="22303C">
+                <a:alpha val="12000"/>
+              </a:srgbClr>
+            </a:outerShdw>
+          </a:effectLst>
+        </p:spPr>
+        <p:txBody>
+          <a:bodyPr/>
+          <a:p/>
+        </p:txBody>
+      </p:sp>
+      <p:sp>
+        <p:nvSpPr>
+          <p:cNvPr id="7" name="Text 5"/>
+          <p:cNvSpPr/>
+          <p:nvPr/>
+        </p:nvSpPr>
+        <p:spPr>
+          <a:xfrm>
+            <a:off x="7439376" y="2578608"/>
+            <a:ext cx="3965936" cy="457200"/>
+          </a:xfrm>
+          <a:prstGeom prst="rect">
+            <a:avLst/>
+          </a:prstGeom>
+          <a:noFill/>
+          <a:ln/>
+        </p:spPr>
+        <p:txBody>
+          <a:bodyPr wrap="square" lIns="0" tIns="0" rIns="0" bIns="0" rtlCol="0" anchor="ctr"/>
+          <a:lstStyle/>
+          <a:p>
+            <a:pPr indent="0" marL="0">
+              <a:buNone/>
+            </a:pPr>
+            <a:r>
+              <a:rPr lang="en-US" sz="1500" b="1" dirty="0">
+                <a:solidFill>
+                  <a:srgbClr val="455A64"/>
+                </a:solidFill>
+                <a:latin typeface="Calibri" pitchFamily="34" charset="0"/>
+                <a:ea typeface="Calibri" pitchFamily="34" charset="-122"/>
+                <a:cs typeface="Calibri" pitchFamily="34" charset="-120"/>
+              </a:rPr>
+              <a:t>ANSWER  </a:t>
+            </a:r>
+            <a:pPr indent="0" marL="0">
+              <a:buNone/>
+            </a:pPr>
+            <a:r>
+              <a:rPr lang="en-US" sz="1500" b="1" dirty="0">
+                <a:solidFill>
+                  <a:srgbClr val="1B2A38"/>
+                </a:solidFill>
+                <a:latin typeface="Calibri" pitchFamily="34" charset="0"/>
+                <a:ea typeface="Calibri" pitchFamily="34" charset="-122"/>
+                <a:cs typeface="Calibri" pitchFamily="34" charset="-120"/>
+              </a:rPr>
+              <a:t>B — A warning rule</a:t>
+            </a:r>
+            <a:endParaRPr lang="en-US" sz="1500" dirty="0"/>
+          </a:p>
+        </p:txBody>
+      </p:sp>
+      <p:sp>
+        <p:nvSpPr>
+          <p:cNvPr id="8" name="Text 6"/>
+          <p:cNvSpPr/>
+          <p:nvPr/>
+        </p:nvSpPr>
+        <p:spPr>
+          <a:xfrm>
+            <a:off x="7439376" y="3127248"/>
+            <a:ext cx="3947648" cy="2377440"/>
+          </a:xfrm>
+          <a:prstGeom prst="rect">
+            <a:avLst/>
+          </a:prstGeom>
+          <a:noFill/>
+          <a:ln/>
+        </p:spPr>
+        <p:txBody>
+          <a:bodyPr wrap="square" lIns="0" tIns="0" rIns="0" bIns="0" rtlCol="0" anchor="t"/>
+          <a:lstStyle/>
+          <a:p>
+            <a:pPr algn="l" indent="0" marL="0">
+              <a:lnSpc>
+                <a:spcPct val="108000"/>
+              </a:lnSpc>
+              <a:buNone/>
+            </a:pPr>
+            <a:r>
+              <a:rPr lang="en-US" sz="1250" dirty="0">
+                <a:solidFill>
+                  <a:srgbClr val="33444F"/>
+                </a:solidFill>
+                <a:latin typeface="Calibri" pitchFamily="34" charset="0"/>
+                <a:ea typeface="Calibri" pitchFamily="34" charset="-122"/>
+                <a:cs typeface="Calibri" pitchFamily="34" charset="-120"/>
+              </a:rPr>
+              <a:t>1_2s is a warning that triggers review of other rules; it is not an automatic rejection by itself.</a:t>
+            </a:r>
+            <a:endParaRPr lang="en-US" sz="1250" dirty="0"/>
+          </a:p>
+        </p:txBody>
+      </p:sp>
+      <p:sp>
+        <p:nvSpPr>
+          <p:cNvPr id="9" name="Text 7"/>
+          <p:cNvSpPr/>
+          <p:nvPr/>
+        </p:nvSpPr>
+        <p:spPr>
+          <a:xfrm>
+            <a:off x="566928" y="6473952"/>
+            <a:ext cx="7772400" cy="274320"/>
+          </a:xfrm>
+          <a:prstGeom prst="rect">
+            <a:avLst/>
+          </a:prstGeom>
+          <a:noFill/>
+          <a:ln/>
+        </p:spPr>
+        <p:txBody>
+          <a:bodyPr wrap="square" lIns="0" tIns="0" rIns="0" bIns="0" rtlCol="0" anchor="ctr"/>
+          <a:lstStyle/>
+          <a:p>
+            <a:pPr algn="l" indent="0" marL="0">
+              <a:buNone/>
+            </a:pPr>
+            <a:r>
+              <a:rPr lang="en-US" sz="850" dirty="0">
+                <a:solidFill>
+                  <a:srgbClr val="9AA8B4"/>
+                </a:solidFill>
+                <a:latin typeface="Calibri" pitchFamily="34" charset="0"/>
+                <a:ea typeface="Calibri" pitchFamily="34" charset="-122"/>
+                <a:cs typeface="Calibri" pitchFamily="34" charset="-120"/>
+              </a:rPr>
+              <a:t>Makassed General Hospital  ·  Department of Laboratory Medicine</a:t>
+            </a:r>
+            <a:endParaRPr lang="en-US" sz="850" dirty="0"/>
+          </a:p>
+        </p:txBody>
+      </p:sp>
+      <p:sp>
+        <p:nvSpPr>
+          <p:cNvPr id="10" name="Text 8"/>
+          <p:cNvSpPr/>
+          <p:nvPr/>
+        </p:nvSpPr>
+        <p:spPr>
+          <a:xfrm>
+            <a:off x="9814255" y="6473952"/>
+            <a:ext cx="1828800" cy="274320"/>
+          </a:xfrm>
+          <a:prstGeom prst="rect">
+            <a:avLst/>
+          </a:prstGeom>
+          <a:noFill/>
+          <a:ln/>
+        </p:spPr>
+        <p:txBody>
+          <a:bodyPr wrap="square" lIns="0" tIns="0" rIns="0" bIns="0" rtlCol="0" anchor="ctr"/>
+          <a:lstStyle/>
+          <a:p>
+            <a:pPr algn="r" indent="0" marL="0">
+              <a:buNone/>
+            </a:pPr>
+            <a:r>
+              <a:rPr lang="en-US" sz="850" dirty="0">
+                <a:solidFill>
+                  <a:srgbClr val="9AA8B4"/>
+                </a:solidFill>
+                <a:latin typeface="Calibri" pitchFamily="34" charset="0"/>
+                <a:ea typeface="Calibri" pitchFamily="34" charset="-122"/>
+                <a:cs typeface="Calibri" pitchFamily="34" charset="-120"/>
+              </a:rPr>
+              <a:t>CP Lecture Series</a:t>
+            </a:r>
+            <a:pPr algn="r" indent="0" marL="0">
+              <a:buNone/>
+            </a:pPr>
+            <a:r>
+              <a:rPr lang="en-US" sz="850" dirty="0">
+                <a:solidFill>
+                  <a:srgbClr val="DCE4EC"/>
+                </a:solidFill>
+                <a:latin typeface="Calibri" pitchFamily="34" charset="0"/>
+                <a:ea typeface="Calibri" pitchFamily="34" charset="-122"/>
+                <a:cs typeface="Calibri" pitchFamily="34" charset="-120"/>
+              </a:rPr>
+              <a:t>   ·   </a:t>
+            </a:r>
+            <a:pPr algn="r" indent="0" marL="0">
+              <a:buNone/>
+            </a:pPr>
+            <a:r>
+              <a:rPr lang="en-US" sz="850" b="1" dirty="0">
+                <a:solidFill>
+                  <a:srgbClr val="455A64"/>
+                </a:solidFill>
+                <a:latin typeface="Calibri" pitchFamily="34" charset="0"/>
+                <a:ea typeface="Calibri" pitchFamily="34" charset="-122"/>
+                <a:cs typeface="Calibri" pitchFamily="34" charset="-120"/>
+              </a:rPr>
+              <a:t>20</a:t>
+            </a:r>
+            <a:endParaRPr lang="en-US" sz="850" dirty="0"/>
+          </a:p>
+        </p:txBody>
+      </p:sp>
+    </p:spTree>
+  </p:cSld>
+  <p:clrMapOvr>
+    <a:masterClrMapping/>
+  </p:clrMapOvr>
+</p:sld>
+</file>
+
+<file path=ppt/slides/slide27.xml><?xml version="1.0" encoding="utf-8"?>
+<p:sld xmlns:a="http://schemas.openxmlformats.org/drawingml/2006/main" xmlns:p="http://schemas.openxmlformats.org/presentationml/2006/main" xmlns:r="http://schemas.openxmlformats.org/officeDocument/2006/relationships">
+  <p:cSld>
+    <p:spTree>
+      <p:nvGrpSpPr>
+        <p:cNvPr id="1" name=""/>
+        <p:cNvGrpSpPr/>
+        <p:nvPr/>
+      </p:nvGrpSpPr>
+      <p:grpSpPr/>
+      <p:sp>
+        <p:nvSpPr>
+          <p:cNvPr id="2" name="Text 0"/>
+          <p:cNvSpPr/>
+          <p:nvPr/>
+        </p:nvSpPr>
+        <p:spPr>
+          <a:xfrm>
+            <a:off x="566928" y="329184"/>
+            <a:ext cx="10515600" cy="310896"/>
+          </a:xfrm>
+          <a:prstGeom prst="rect">
+            <a:avLst/>
+          </a:prstGeom>
+          <a:noFill/>
+          <a:ln/>
+        </p:spPr>
+        <p:txBody>
+          <a:bodyPr wrap="square" lIns="0" tIns="0" rIns="0" bIns="0" rtlCol="0" anchor="ctr"/>
+          <a:lstStyle/>
+          <a:p>
+            <a:pPr algn="l" indent="0" marL="0">
+              <a:buNone/>
+            </a:pPr>
+            <a:r>
+              <a:rPr lang="en-US" sz="1100" b="1" spc="150" kern="0" dirty="0">
+                <a:solidFill>
+                  <a:srgbClr val="455A64"/>
+                </a:solidFill>
+                <a:latin typeface="Calibri" pitchFamily="34" charset="0"/>
+                <a:ea typeface="Calibri" pitchFamily="34" charset="-122"/>
+                <a:cs typeface="Calibri" pitchFamily="34" charset="-120"/>
+              </a:rPr>
+              <a:t>LAB MANAGEMENT &amp; QUALITY   ·   BOARD REVIEW  ·  Q3</a:t>
+            </a:r>
+            <a:endParaRPr lang="en-US" sz="1100" dirty="0"/>
+          </a:p>
+        </p:txBody>
+      </p:sp>
+      <p:sp>
+        <p:nvSpPr>
+          <p:cNvPr id="3" name="Text 1"/>
+          <p:cNvSpPr/>
+          <p:nvPr/>
+        </p:nvSpPr>
+        <p:spPr>
+          <a:xfrm>
+            <a:off x="566928" y="713232"/>
+            <a:ext cx="11064240" cy="749808"/>
+          </a:xfrm>
+          <a:prstGeom prst="rect">
+            <a:avLst/>
+          </a:prstGeom>
+          <a:noFill/>
+          <a:ln/>
+        </p:spPr>
+        <p:txBody>
+          <a:bodyPr wrap="square" lIns="0" tIns="0" rIns="0" bIns="0" rtlCol="0" anchor="ctr"/>
+          <a:lstStyle/>
+          <a:p>
+            <a:pPr algn="l" indent="0" marL="0">
+              <a:buNone/>
+            </a:pPr>
+            <a:r>
+              <a:rPr lang="en-US" sz="2600" b="1" dirty="0">
+                <a:solidFill>
+                  <a:srgbClr val="0E3A5F"/>
+                </a:solidFill>
+                <a:latin typeface="Calibri" pitchFamily="34" charset="0"/>
+                <a:ea typeface="Calibri" pitchFamily="34" charset="-122"/>
+                <a:cs typeface="Calibri" pitchFamily="34" charset="-120"/>
+              </a:rPr>
+              <a:t>Board-Style Review</a:t>
+            </a:r>
+            <a:endParaRPr lang="en-US" sz="2600" dirty="0"/>
+          </a:p>
+        </p:txBody>
+      </p:sp>
+      <p:sp>
+        <p:nvSpPr>
+          <p:cNvPr id="4" name="Text 2"/>
+          <p:cNvSpPr/>
+          <p:nvPr/>
+        </p:nvSpPr>
+        <p:spPr>
+          <a:xfrm>
+            <a:off x="566928" y="1417320"/>
+            <a:ext cx="11057839" cy="914400"/>
+          </a:xfrm>
+          <a:prstGeom prst="rect">
+            <a:avLst/>
+          </a:prstGeom>
+          <a:noFill/>
+          <a:ln/>
+        </p:spPr>
+        <p:txBody>
+          <a:bodyPr wrap="square" lIns="0" tIns="0" rIns="0" bIns="0" rtlCol="0" anchor="t"/>
+          <a:lstStyle/>
+          <a:p>
+            <a:pPr algn="l" indent="0" marL="0">
+              <a:lnSpc>
+                <a:spcPct val="105000"/>
+              </a:lnSpc>
+              <a:buNone/>
+            </a:pPr>
+            <a:r>
+              <a:rPr lang="en-US" sz="1450" b="1" dirty="0">
+                <a:solidFill>
+                  <a:srgbClr val="1B2A38"/>
+                </a:solidFill>
+                <a:latin typeface="Calibri" pitchFamily="34" charset="0"/>
+                <a:ea typeface="Calibri" pitchFamily="34" charset="-122"/>
+                <a:cs typeface="Calibri" pitchFamily="34" charset="-120"/>
+              </a:rPr>
+              <a:t>Most laboratory errors occur in which phase?</a:t>
+            </a:r>
+            <a:endParaRPr lang="en-US" sz="1450" dirty="0"/>
+          </a:p>
+        </p:txBody>
+      </p:sp>
+      <p:sp>
+        <p:nvSpPr>
+          <p:cNvPr id="5" name="Text 3"/>
+          <p:cNvSpPr/>
+          <p:nvPr/>
+        </p:nvSpPr>
+        <p:spPr>
+          <a:xfrm>
+            <a:off x="658368" y="2395728"/>
+            <a:ext cx="6192390" cy="3017520"/>
+          </a:xfrm>
+          <a:prstGeom prst="rect">
+            <a:avLst/>
+          </a:prstGeom>
+          <a:noFill/>
+          <a:ln/>
+        </p:spPr>
+        <p:txBody>
+          <a:bodyPr wrap="square" lIns="0" tIns="0" rIns="0" bIns="0" rtlCol="0" anchor="t"/>
+          <a:lstStyle/>
+          <a:p>
+            <a:pPr algn="l" indent="0" marL="0">
+              <a:spcAft>
+                <a:spcPts val="600"/>
+              </a:spcAft>
+              <a:buNone/>
+            </a:pPr>
+            <a:r>
+              <a:rPr lang="en-US" sz="1350" dirty="0">
+                <a:solidFill>
+                  <a:srgbClr val="33444F"/>
+                </a:solidFill>
+                <a:latin typeface="Calibri" pitchFamily="34" charset="0"/>
+                <a:ea typeface="Calibri" pitchFamily="34" charset="-122"/>
+                <a:cs typeface="Calibri" pitchFamily="34" charset="-120"/>
+              </a:rPr>
+              <a:t>A. Analytic</a:t>
+            </a:r>
+            <a:endParaRPr lang="en-US" sz="1350" dirty="0"/>
+          </a:p>
+          <a:p>
+            <a:pPr algn="l" indent="0" marL="0">
+              <a:spcAft>
+                <a:spcPts val="600"/>
+              </a:spcAft>
+              <a:buNone/>
+            </a:pPr>
+            <a:r>
+              <a:rPr lang="en-US" sz="1350" b="1" dirty="0">
+                <a:solidFill>
+                  <a:srgbClr val="2C3A41"/>
+                </a:solidFill>
+                <a:latin typeface="Calibri" pitchFamily="34" charset="0"/>
+                <a:ea typeface="Calibri" pitchFamily="34" charset="-122"/>
+                <a:cs typeface="Calibri" pitchFamily="34" charset="-120"/>
+              </a:rPr>
+              <a:t>B. Pre-analytic</a:t>
+            </a:r>
+            <a:endParaRPr lang="en-US" sz="1350" dirty="0"/>
+          </a:p>
+          <a:p>
+            <a:pPr algn="l" indent="0" marL="0">
+              <a:spcAft>
+                <a:spcPts val="600"/>
+              </a:spcAft>
+              <a:buNone/>
+            </a:pPr>
+            <a:r>
+              <a:rPr lang="en-US" sz="1350" dirty="0">
+                <a:solidFill>
+                  <a:srgbClr val="33444F"/>
+                </a:solidFill>
+                <a:latin typeface="Calibri" pitchFamily="34" charset="0"/>
+                <a:ea typeface="Calibri" pitchFamily="34" charset="-122"/>
+                <a:cs typeface="Calibri" pitchFamily="34" charset="-120"/>
+              </a:rPr>
+              <a:t>C. Post-analytic</a:t>
+            </a:r>
+            <a:endParaRPr lang="en-US" sz="1350" dirty="0"/>
+          </a:p>
+          <a:p>
+            <a:pPr algn="l" indent="0" marL="0">
+              <a:spcAft>
+                <a:spcPts val="600"/>
+              </a:spcAft>
+              <a:buNone/>
+            </a:pPr>
+            <a:r>
+              <a:rPr lang="en-US" sz="1350" dirty="0">
+                <a:solidFill>
+                  <a:srgbClr val="33444F"/>
+                </a:solidFill>
+                <a:latin typeface="Calibri" pitchFamily="34" charset="0"/>
+                <a:ea typeface="Calibri" pitchFamily="34" charset="-122"/>
+                <a:cs typeface="Calibri" pitchFamily="34" charset="-120"/>
+              </a:rPr>
+              <a:t>D. Calibration</a:t>
+            </a:r>
+            <a:endParaRPr lang="en-US" sz="1350" dirty="0"/>
+          </a:p>
+          <a:p>
+            <a:pPr algn="l" indent="0" marL="0">
+              <a:spcAft>
+                <a:spcPts val="600"/>
+              </a:spcAft>
+              <a:buNone/>
+            </a:pPr>
+            <a:r>
+              <a:rPr lang="en-US" sz="1350" dirty="0">
+                <a:solidFill>
+                  <a:srgbClr val="33444F"/>
+                </a:solidFill>
+                <a:latin typeface="Calibri" pitchFamily="34" charset="0"/>
+                <a:ea typeface="Calibri" pitchFamily="34" charset="-122"/>
+                <a:cs typeface="Calibri" pitchFamily="34" charset="-120"/>
+              </a:rPr>
+              <a:t>E. Maintenance</a:t>
+            </a:r>
+            <a:endParaRPr lang="en-US" sz="1350" dirty="0"/>
+          </a:p>
+        </p:txBody>
+      </p:sp>
+      <p:sp>
+        <p:nvSpPr>
+          <p:cNvPr id="6" name="Shape 4"/>
+          <p:cNvSpPr/>
+          <p:nvPr/>
+        </p:nvSpPr>
+        <p:spPr>
+          <a:xfrm>
+            <a:off x="7201632" y="2395728"/>
+            <a:ext cx="4423136" cy="3246120"/>
+          </a:xfrm>
+          <a:prstGeom prst="roundRect">
+            <a:avLst>
+              <a:gd name="adj" fmla="val 2535"/>
+            </a:avLst>
+          </a:prstGeom>
+          <a:solidFill>
+            <a:srgbClr val="ECEFF1"/>
+          </a:solidFill>
+          <a:ln/>
+          <a:effectLst>
+            <a:outerShdw sx="100000" sy="100000" kx="0" ky="0" algn="bl" rotWithShape="0" blurRad="88900" dist="25400" dir="5400000">
+              <a:srgbClr val="22303C">
+                <a:alpha val="12000"/>
+              </a:srgbClr>
+            </a:outerShdw>
+          </a:effectLst>
+        </p:spPr>
+        <p:txBody>
+          <a:bodyPr/>
+          <a:p/>
+        </p:txBody>
+      </p:sp>
+      <p:sp>
+        <p:nvSpPr>
+          <p:cNvPr id="7" name="Text 5"/>
+          <p:cNvSpPr/>
+          <p:nvPr/>
+        </p:nvSpPr>
+        <p:spPr>
+          <a:xfrm>
+            <a:off x="7439376" y="2578608"/>
+            <a:ext cx="3965936" cy="457200"/>
+          </a:xfrm>
+          <a:prstGeom prst="rect">
+            <a:avLst/>
+          </a:prstGeom>
+          <a:noFill/>
+          <a:ln/>
+        </p:spPr>
+        <p:txBody>
+          <a:bodyPr wrap="square" lIns="0" tIns="0" rIns="0" bIns="0" rtlCol="0" anchor="ctr"/>
+          <a:lstStyle/>
+          <a:p>
+            <a:pPr indent="0" marL="0">
+              <a:buNone/>
+            </a:pPr>
+            <a:r>
+              <a:rPr lang="en-US" sz="1500" b="1" dirty="0">
+                <a:solidFill>
+                  <a:srgbClr val="455A64"/>
+                </a:solidFill>
+                <a:latin typeface="Calibri" pitchFamily="34" charset="0"/>
+                <a:ea typeface="Calibri" pitchFamily="34" charset="-122"/>
+                <a:cs typeface="Calibri" pitchFamily="34" charset="-120"/>
+              </a:rPr>
+              <a:t>ANSWER  </a:t>
+            </a:r>
+            <a:pPr indent="0" marL="0">
+              <a:buNone/>
+            </a:pPr>
+            <a:r>
+              <a:rPr lang="en-US" sz="1500" b="1" dirty="0">
+                <a:solidFill>
+                  <a:srgbClr val="1B2A38"/>
+                </a:solidFill>
+                <a:latin typeface="Calibri" pitchFamily="34" charset="0"/>
+                <a:ea typeface="Calibri" pitchFamily="34" charset="-122"/>
+                <a:cs typeface="Calibri" pitchFamily="34" charset="-120"/>
+              </a:rPr>
+              <a:t>B — Pre-analytic</a:t>
+            </a:r>
+            <a:endParaRPr lang="en-US" sz="1500" dirty="0"/>
+          </a:p>
+        </p:txBody>
+      </p:sp>
+      <p:sp>
+        <p:nvSpPr>
+          <p:cNvPr id="8" name="Text 6"/>
+          <p:cNvSpPr/>
+          <p:nvPr/>
+        </p:nvSpPr>
+        <p:spPr>
+          <a:xfrm>
+            <a:off x="7439376" y="3127248"/>
+            <a:ext cx="3947648" cy="2377440"/>
+          </a:xfrm>
+          <a:prstGeom prst="rect">
+            <a:avLst/>
+          </a:prstGeom>
+          <a:noFill/>
+          <a:ln/>
+        </p:spPr>
+        <p:txBody>
+          <a:bodyPr wrap="square" lIns="0" tIns="0" rIns="0" bIns="0" rtlCol="0" anchor="t"/>
+          <a:lstStyle/>
+          <a:p>
+            <a:pPr algn="l" indent="0" marL="0">
+              <a:lnSpc>
+                <a:spcPct val="108000"/>
+              </a:lnSpc>
+              <a:buNone/>
+            </a:pPr>
+            <a:r>
+              <a:rPr lang="en-US" sz="1250" dirty="0">
+                <a:solidFill>
+                  <a:srgbClr val="33444F"/>
+                </a:solidFill>
+                <a:latin typeface="Calibri" pitchFamily="34" charset="0"/>
+                <a:ea typeface="Calibri" pitchFamily="34" charset="-122"/>
+                <a:cs typeface="Calibri" pitchFamily="34" charset="-120"/>
+              </a:rPr>
+              <a:t>The majority of errors arise pre-analytically (ordering, collection, transport), so quality systems must extend beyond the bench.</a:t>
+            </a:r>
+            <a:endParaRPr lang="en-US" sz="1250" dirty="0"/>
+          </a:p>
+        </p:txBody>
+      </p:sp>
+      <p:sp>
+        <p:nvSpPr>
+          <p:cNvPr id="9" name="Text 7"/>
+          <p:cNvSpPr/>
+          <p:nvPr/>
+        </p:nvSpPr>
+        <p:spPr>
+          <a:xfrm>
+            <a:off x="566928" y="6473952"/>
+            <a:ext cx="7772400" cy="274320"/>
+          </a:xfrm>
+          <a:prstGeom prst="rect">
+            <a:avLst/>
+          </a:prstGeom>
+          <a:noFill/>
+          <a:ln/>
+        </p:spPr>
+        <p:txBody>
+          <a:bodyPr wrap="square" lIns="0" tIns="0" rIns="0" bIns="0" rtlCol="0" anchor="ctr"/>
+          <a:lstStyle/>
+          <a:p>
+            <a:pPr algn="l" indent="0" marL="0">
+              <a:buNone/>
+            </a:pPr>
+            <a:r>
+              <a:rPr lang="en-US" sz="850" dirty="0">
+                <a:solidFill>
+                  <a:srgbClr val="9AA8B4"/>
+                </a:solidFill>
+                <a:latin typeface="Calibri" pitchFamily="34" charset="0"/>
+                <a:ea typeface="Calibri" pitchFamily="34" charset="-122"/>
+                <a:cs typeface="Calibri" pitchFamily="34" charset="-120"/>
+              </a:rPr>
+              <a:t>Makassed General Hospital  ·  Department of Laboratory Medicine</a:t>
+            </a:r>
+            <a:endParaRPr lang="en-US" sz="850" dirty="0"/>
+          </a:p>
+        </p:txBody>
+      </p:sp>
+      <p:sp>
+        <p:nvSpPr>
+          <p:cNvPr id="10" name="Text 8"/>
+          <p:cNvSpPr/>
+          <p:nvPr/>
+        </p:nvSpPr>
+        <p:spPr>
+          <a:xfrm>
+            <a:off x="9814255" y="6473952"/>
+            <a:ext cx="1828800" cy="274320"/>
+          </a:xfrm>
+          <a:prstGeom prst="rect">
+            <a:avLst/>
+          </a:prstGeom>
+          <a:noFill/>
+          <a:ln/>
+        </p:spPr>
+        <p:txBody>
+          <a:bodyPr wrap="square" lIns="0" tIns="0" rIns="0" bIns="0" rtlCol="0" anchor="ctr"/>
+          <a:lstStyle/>
+          <a:p>
+            <a:pPr algn="r" indent="0" marL="0">
+              <a:buNone/>
+            </a:pPr>
+            <a:r>
+              <a:rPr lang="en-US" sz="850" dirty="0">
+                <a:solidFill>
+                  <a:srgbClr val="9AA8B4"/>
+                </a:solidFill>
+                <a:latin typeface="Calibri" pitchFamily="34" charset="0"/>
+                <a:ea typeface="Calibri" pitchFamily="34" charset="-122"/>
+                <a:cs typeface="Calibri" pitchFamily="34" charset="-120"/>
+              </a:rPr>
+              <a:t>CP Lecture Series</a:t>
+            </a:r>
+            <a:pPr algn="r" indent="0" marL="0">
+              <a:buNone/>
+            </a:pPr>
+            <a:r>
+              <a:rPr lang="en-US" sz="850" dirty="0">
+                <a:solidFill>
+                  <a:srgbClr val="DCE4EC"/>
+                </a:solidFill>
+                <a:latin typeface="Calibri" pitchFamily="34" charset="0"/>
+                <a:ea typeface="Calibri" pitchFamily="34" charset="-122"/>
+                <a:cs typeface="Calibri" pitchFamily="34" charset="-120"/>
+              </a:rPr>
+              <a:t>   ·   </a:t>
+            </a:r>
+            <a:pPr algn="r" indent="0" marL="0">
+              <a:buNone/>
+            </a:pPr>
+            <a:r>
+              <a:rPr lang="en-US" sz="850" b="1" dirty="0">
+                <a:solidFill>
+                  <a:srgbClr val="455A64"/>
+                </a:solidFill>
+                <a:latin typeface="Calibri" pitchFamily="34" charset="0"/>
+                <a:ea typeface="Calibri" pitchFamily="34" charset="-122"/>
+                <a:cs typeface="Calibri" pitchFamily="34" charset="-120"/>
+              </a:rPr>
+              <a:t>19</a:t>
+            </a:r>
+            <a:endParaRPr lang="en-US" sz="850" dirty="0"/>
+          </a:p>
+        </p:txBody>
+      </p:sp>
+    </p:spTree>
+  </p:cSld>
+  <p:clrMapOvr>
+    <a:masterClrMapping/>
+  </p:clrMapOvr>
+</p:sld>
+</file>
+
+<file path=ppt/slides/slide28.xml><?xml version="1.0" encoding="utf-8"?>
+<p:sld xmlns:a="http://schemas.openxmlformats.org/drawingml/2006/main" xmlns:p="http://schemas.openxmlformats.org/presentationml/2006/main" xmlns:r="http://schemas.openxmlformats.org/officeDocument/2006/relationships">
+  <p:cSld>
+    <p:spTree>
+      <p:nvGrpSpPr>
+        <p:cNvPr id="1" name=""/>
+        <p:cNvGrpSpPr/>
+        <p:nvPr/>
+      </p:nvGrpSpPr>
+      <p:grpSpPr/>
+      <p:sp>
+        <p:nvSpPr>
+          <p:cNvPr id="2" name="Text 0"/>
+          <p:cNvSpPr/>
+          <p:nvPr/>
+        </p:nvSpPr>
+        <p:spPr>
+          <a:xfrm>
+            <a:off x="566928" y="329184"/>
+            <a:ext cx="10515600" cy="310896"/>
+          </a:xfrm>
+          <a:prstGeom prst="rect">
+            <a:avLst/>
+          </a:prstGeom>
+          <a:noFill/>
+          <a:ln/>
+        </p:spPr>
+        <p:txBody>
+          <a:bodyPr wrap="square" lIns="0" tIns="0" rIns="0" bIns="0" rtlCol="0" anchor="ctr"/>
+          <a:lstStyle/>
+          <a:p>
+            <a:pPr algn="l" indent="0" marL="0">
+              <a:buNone/>
+            </a:pPr>
+            <a:r>
+              <a:rPr lang="en-US" sz="1100" b="1" spc="150" kern="0" dirty="0">
+                <a:solidFill>
+                  <a:srgbClr val="455A64"/>
+                </a:solidFill>
+                <a:latin typeface="Calibri" pitchFamily="34" charset="0"/>
+                <a:ea typeface="Calibri" pitchFamily="34" charset="-122"/>
+                <a:cs typeface="Calibri" pitchFamily="34" charset="-120"/>
+              </a:rPr>
+              <a:t>LAB MANAGEMENT &amp; QUALITY   ·   BOARD REVIEW  ·  Q2</a:t>
+            </a:r>
+            <a:endParaRPr lang="en-US" sz="1100" dirty="0"/>
+          </a:p>
+        </p:txBody>
+      </p:sp>
+      <p:sp>
+        <p:nvSpPr>
+          <p:cNvPr id="3" name="Text 1"/>
+          <p:cNvSpPr/>
+          <p:nvPr/>
+        </p:nvSpPr>
+        <p:spPr>
+          <a:xfrm>
+            <a:off x="566928" y="713232"/>
+            <a:ext cx="11064240" cy="749808"/>
+          </a:xfrm>
+          <a:prstGeom prst="rect">
+            <a:avLst/>
+          </a:prstGeom>
+          <a:noFill/>
+          <a:ln/>
+        </p:spPr>
+        <p:txBody>
+          <a:bodyPr wrap="square" lIns="0" tIns="0" rIns="0" bIns="0" rtlCol="0" anchor="ctr"/>
+          <a:lstStyle/>
+          <a:p>
+            <a:pPr algn="l" indent="0" marL="0">
+              <a:buNone/>
+            </a:pPr>
+            <a:r>
+              <a:rPr lang="en-US" sz="2600" b="1" dirty="0">
+                <a:solidFill>
+                  <a:srgbClr val="0E3A5F"/>
+                </a:solidFill>
+                <a:latin typeface="Calibri" pitchFamily="34" charset="0"/>
+                <a:ea typeface="Calibri" pitchFamily="34" charset="-122"/>
+                <a:cs typeface="Calibri" pitchFamily="34" charset="-120"/>
+              </a:rPr>
+              <a:t>Board-Style Review</a:t>
+            </a:r>
+            <a:endParaRPr lang="en-US" sz="2600" dirty="0"/>
+          </a:p>
+        </p:txBody>
+      </p:sp>
+      <p:sp>
+        <p:nvSpPr>
+          <p:cNvPr id="4" name="Text 2"/>
+          <p:cNvSpPr/>
+          <p:nvPr/>
+        </p:nvSpPr>
+        <p:spPr>
+          <a:xfrm>
+            <a:off x="566928" y="1417320"/>
+            <a:ext cx="11057839" cy="914400"/>
+          </a:xfrm>
+          <a:prstGeom prst="rect">
+            <a:avLst/>
+          </a:prstGeom>
+          <a:noFill/>
+          <a:ln/>
+        </p:spPr>
+        <p:txBody>
+          <a:bodyPr wrap="square" lIns="0" tIns="0" rIns="0" bIns="0" rtlCol="0" anchor="t"/>
+          <a:lstStyle/>
+          <a:p>
+            <a:pPr algn="l" indent="0" marL="0">
+              <a:lnSpc>
+                <a:spcPct val="105000"/>
+              </a:lnSpc>
+              <a:buNone/>
+            </a:pPr>
+            <a:r>
+              <a:rPr lang="en-US" sz="1450" b="1" dirty="0">
+                <a:solidFill>
+                  <a:srgbClr val="1B2A38"/>
+                </a:solidFill>
+                <a:latin typeface="Calibri" pitchFamily="34" charset="0"/>
+                <a:ea typeface="Calibri" pitchFamily="34" charset="-122"/>
+                <a:cs typeface="Calibri" pitchFamily="34" charset="-120"/>
+              </a:rPr>
+              <a:t>A 10x rule (ten consecutive points on one side of the mean) indicates:</a:t>
+            </a:r>
+            <a:endParaRPr lang="en-US" sz="1450" dirty="0"/>
+          </a:p>
+        </p:txBody>
+      </p:sp>
+      <p:sp>
+        <p:nvSpPr>
+          <p:cNvPr id="5" name="Text 3"/>
+          <p:cNvSpPr/>
+          <p:nvPr/>
+        </p:nvSpPr>
+        <p:spPr>
+          <a:xfrm>
+            <a:off x="658368" y="2395728"/>
+            <a:ext cx="6192390" cy="3017520"/>
+          </a:xfrm>
+          <a:prstGeom prst="rect">
+            <a:avLst/>
+          </a:prstGeom>
+          <a:noFill/>
+          <a:ln/>
+        </p:spPr>
+        <p:txBody>
+          <a:bodyPr wrap="square" lIns="0" tIns="0" rIns="0" bIns="0" rtlCol="0" anchor="t"/>
+          <a:lstStyle/>
+          <a:p>
+            <a:pPr algn="l" indent="0" marL="0">
+              <a:spcAft>
+                <a:spcPts val="600"/>
+              </a:spcAft>
+              <a:buNone/>
+            </a:pPr>
+            <a:r>
+              <a:rPr lang="en-US" sz="1350" dirty="0">
+                <a:solidFill>
+                  <a:srgbClr val="33444F"/>
+                </a:solidFill>
+                <a:latin typeface="Calibri" pitchFamily="34" charset="0"/>
+                <a:ea typeface="Calibri" pitchFamily="34" charset="-122"/>
+                <a:cs typeface="Calibri" pitchFamily="34" charset="-120"/>
+              </a:rPr>
+              <a:t>A. Random error</a:t>
+            </a:r>
+            <a:endParaRPr lang="en-US" sz="1350" dirty="0"/>
+          </a:p>
+          <a:p>
+            <a:pPr algn="l" indent="0" marL="0">
+              <a:spcAft>
+                <a:spcPts val="600"/>
+              </a:spcAft>
+              <a:buNone/>
+            </a:pPr>
+            <a:r>
+              <a:rPr lang="en-US" sz="1350" b="1" dirty="0">
+                <a:solidFill>
+                  <a:srgbClr val="2C3A41"/>
+                </a:solidFill>
+                <a:latin typeface="Calibri" pitchFamily="34" charset="0"/>
+                <a:ea typeface="Calibri" pitchFamily="34" charset="-122"/>
+                <a:cs typeface="Calibri" pitchFamily="34" charset="-120"/>
+              </a:rPr>
+              <a:t>B. Systematic error (shift/bias)</a:t>
+            </a:r>
+            <a:endParaRPr lang="en-US" sz="1350" dirty="0"/>
+          </a:p>
+          <a:p>
+            <a:pPr algn="l" indent="0" marL="0">
+              <a:spcAft>
+                <a:spcPts val="600"/>
+              </a:spcAft>
+              <a:buNone/>
+            </a:pPr>
+            <a:r>
+              <a:rPr lang="en-US" sz="1350" dirty="0">
+                <a:solidFill>
+                  <a:srgbClr val="33444F"/>
+                </a:solidFill>
+                <a:latin typeface="Calibri" pitchFamily="34" charset="0"/>
+                <a:ea typeface="Calibri" pitchFamily="34" charset="-122"/>
+                <a:cs typeface="Calibri" pitchFamily="34" charset="-120"/>
+              </a:rPr>
+              <a:t>C. Acceptable performance</a:t>
+            </a:r>
+            <a:endParaRPr lang="en-US" sz="1350" dirty="0"/>
+          </a:p>
+          <a:p>
+            <a:pPr algn="l" indent="0" marL="0">
+              <a:spcAft>
+                <a:spcPts val="600"/>
+              </a:spcAft>
+              <a:buNone/>
+            </a:pPr>
+            <a:r>
+              <a:rPr lang="en-US" sz="1350" dirty="0">
+                <a:solidFill>
+                  <a:srgbClr val="33444F"/>
+                </a:solidFill>
+                <a:latin typeface="Calibri" pitchFamily="34" charset="0"/>
+                <a:ea typeface="Calibri" pitchFamily="34" charset="-122"/>
+                <a:cs typeface="Calibri" pitchFamily="34" charset="-120"/>
+              </a:rPr>
+              <a:t>D. A warning to ignore</a:t>
+            </a:r>
+            <a:endParaRPr lang="en-US" sz="1350" dirty="0"/>
+          </a:p>
+          <a:p>
+            <a:pPr algn="l" indent="0" marL="0">
+              <a:spcAft>
+                <a:spcPts val="600"/>
+              </a:spcAft>
+              <a:buNone/>
+            </a:pPr>
+            <a:r>
+              <a:rPr lang="en-US" sz="1350" dirty="0">
+                <a:solidFill>
+                  <a:srgbClr val="33444F"/>
+                </a:solidFill>
+                <a:latin typeface="Calibri" pitchFamily="34" charset="0"/>
+                <a:ea typeface="Calibri" pitchFamily="34" charset="-122"/>
+                <a:cs typeface="Calibri" pitchFamily="34" charset="-120"/>
+              </a:rPr>
+              <a:t>E. Improved precision</a:t>
+            </a:r>
+            <a:endParaRPr lang="en-US" sz="1350" dirty="0"/>
+          </a:p>
+        </p:txBody>
+      </p:sp>
+      <p:sp>
+        <p:nvSpPr>
+          <p:cNvPr id="6" name="Shape 4"/>
+          <p:cNvSpPr/>
+          <p:nvPr/>
+        </p:nvSpPr>
+        <p:spPr>
+          <a:xfrm>
+            <a:off x="7201632" y="2395728"/>
+            <a:ext cx="4423136" cy="3246120"/>
+          </a:xfrm>
+          <a:prstGeom prst="roundRect">
+            <a:avLst>
+              <a:gd name="adj" fmla="val 2535"/>
+            </a:avLst>
+          </a:prstGeom>
+          <a:solidFill>
+            <a:srgbClr val="ECEFF1"/>
+          </a:solidFill>
+          <a:ln/>
+          <a:effectLst>
+            <a:outerShdw sx="100000" sy="100000" kx="0" ky="0" algn="bl" rotWithShape="0" blurRad="88900" dist="25400" dir="5400000">
+              <a:srgbClr val="22303C">
+                <a:alpha val="12000"/>
+              </a:srgbClr>
+            </a:outerShdw>
+          </a:effectLst>
+        </p:spPr>
+        <p:txBody>
+          <a:bodyPr/>
+          <a:p/>
+        </p:txBody>
+      </p:sp>
+      <p:sp>
+        <p:nvSpPr>
+          <p:cNvPr id="7" name="Text 5"/>
+          <p:cNvSpPr/>
+          <p:nvPr/>
+        </p:nvSpPr>
+        <p:spPr>
+          <a:xfrm>
+            <a:off x="7439376" y="2578608"/>
+            <a:ext cx="3965936" cy="457200"/>
+          </a:xfrm>
+          <a:prstGeom prst="rect">
+            <a:avLst/>
+          </a:prstGeom>
+          <a:noFill/>
+          <a:ln/>
+        </p:spPr>
+        <p:txBody>
+          <a:bodyPr wrap="square" lIns="0" tIns="0" rIns="0" bIns="0" rtlCol="0" anchor="ctr"/>
+          <a:lstStyle/>
+          <a:p>
+            <a:pPr indent="0" marL="0">
+              <a:buNone/>
+            </a:pPr>
+            <a:r>
+              <a:rPr lang="en-US" sz="1500" b="1" dirty="0">
+                <a:solidFill>
+                  <a:srgbClr val="455A64"/>
+                </a:solidFill>
+                <a:latin typeface="Calibri" pitchFamily="34" charset="0"/>
+                <a:ea typeface="Calibri" pitchFamily="34" charset="-122"/>
+                <a:cs typeface="Calibri" pitchFamily="34" charset="-120"/>
+              </a:rPr>
+              <a:t>ANSWER  </a:t>
+            </a:r>
+            <a:pPr indent="0" marL="0">
+              <a:buNone/>
+            </a:pPr>
+            <a:r>
+              <a:rPr lang="en-US" sz="1500" b="1" dirty="0">
+                <a:solidFill>
+                  <a:srgbClr val="1B2A38"/>
+                </a:solidFill>
+                <a:latin typeface="Calibri" pitchFamily="34" charset="0"/>
+                <a:ea typeface="Calibri" pitchFamily="34" charset="-122"/>
+                <a:cs typeface="Calibri" pitchFamily="34" charset="-120"/>
+              </a:rPr>
+              <a:t>B — Systematic error</a:t>
+            </a:r>
+            <a:endParaRPr lang="en-US" sz="1500" dirty="0"/>
+          </a:p>
+        </p:txBody>
+      </p:sp>
+      <p:sp>
+        <p:nvSpPr>
+          <p:cNvPr id="8" name="Text 6"/>
+          <p:cNvSpPr/>
+          <p:nvPr/>
+        </p:nvSpPr>
+        <p:spPr>
+          <a:xfrm>
+            <a:off x="7439376" y="3127248"/>
+            <a:ext cx="3947648" cy="2377440"/>
+          </a:xfrm>
+          <a:prstGeom prst="rect">
+            <a:avLst/>
+          </a:prstGeom>
+          <a:noFill/>
+          <a:ln/>
+        </p:spPr>
+        <p:txBody>
+          <a:bodyPr wrap="square" lIns="0" tIns="0" rIns="0" bIns="0" rtlCol="0" anchor="t"/>
+          <a:lstStyle/>
+          <a:p>
+            <a:pPr algn="l" indent="0" marL="0">
+              <a:lnSpc>
+                <a:spcPct val="108000"/>
+              </a:lnSpc>
+              <a:buNone/>
+            </a:pPr>
+            <a:r>
+              <a:rPr lang="en-US" sz="1250" dirty="0">
+                <a:solidFill>
+                  <a:srgbClr val="33444F"/>
+                </a:solidFill>
+                <a:latin typeface="Calibri" pitchFamily="34" charset="0"/>
+                <a:ea typeface="Calibri" pitchFamily="34" charset="-122"/>
+                <a:cs typeface="Calibri" pitchFamily="34" charset="-120"/>
+              </a:rPr>
+              <a:t>A run of points on one side reflects a shift/bias, often from calibration or reagent changes.</a:t>
+            </a:r>
+            <a:endParaRPr lang="en-US" sz="1250" dirty="0"/>
+          </a:p>
+        </p:txBody>
+      </p:sp>
+      <p:sp>
+        <p:nvSpPr>
+          <p:cNvPr id="9" name="Text 7"/>
+          <p:cNvSpPr/>
+          <p:nvPr/>
+        </p:nvSpPr>
+        <p:spPr>
+          <a:xfrm>
+            <a:off x="566928" y="6473952"/>
+            <a:ext cx="7772400" cy="274320"/>
+          </a:xfrm>
+          <a:prstGeom prst="rect">
+            <a:avLst/>
+          </a:prstGeom>
+          <a:noFill/>
+          <a:ln/>
+        </p:spPr>
+        <p:txBody>
+          <a:bodyPr wrap="square" lIns="0" tIns="0" rIns="0" bIns="0" rtlCol="0" anchor="ctr"/>
+          <a:lstStyle/>
+          <a:p>
+            <a:pPr algn="l" indent="0" marL="0">
+              <a:buNone/>
+            </a:pPr>
+            <a:r>
+              <a:rPr lang="en-US" sz="850" dirty="0">
+                <a:solidFill>
+                  <a:srgbClr val="9AA8B4"/>
+                </a:solidFill>
+                <a:latin typeface="Calibri" pitchFamily="34" charset="0"/>
+                <a:ea typeface="Calibri" pitchFamily="34" charset="-122"/>
+                <a:cs typeface="Calibri" pitchFamily="34" charset="-120"/>
+              </a:rPr>
+              <a:t>Makassed General Hospital  ·  Department of Laboratory Medicine</a:t>
+            </a:r>
+            <a:endParaRPr lang="en-US" sz="850" dirty="0"/>
+          </a:p>
+        </p:txBody>
+      </p:sp>
+      <p:sp>
+        <p:nvSpPr>
+          <p:cNvPr id="10" name="Text 8"/>
+          <p:cNvSpPr/>
+          <p:nvPr/>
+        </p:nvSpPr>
+        <p:spPr>
+          <a:xfrm>
+            <a:off x="9814255" y="6473952"/>
+            <a:ext cx="1828800" cy="274320"/>
+          </a:xfrm>
+          <a:prstGeom prst="rect">
+            <a:avLst/>
+          </a:prstGeom>
+          <a:noFill/>
+          <a:ln/>
+        </p:spPr>
+        <p:txBody>
+          <a:bodyPr wrap="square" lIns="0" tIns="0" rIns="0" bIns="0" rtlCol="0" anchor="ctr"/>
+          <a:lstStyle/>
+          <a:p>
+            <a:pPr algn="r" indent="0" marL="0">
+              <a:buNone/>
+            </a:pPr>
+            <a:r>
+              <a:rPr lang="en-US" sz="850" dirty="0">
+                <a:solidFill>
+                  <a:srgbClr val="9AA8B4"/>
+                </a:solidFill>
+                <a:latin typeface="Calibri" pitchFamily="34" charset="0"/>
+                <a:ea typeface="Calibri" pitchFamily="34" charset="-122"/>
+                <a:cs typeface="Calibri" pitchFamily="34" charset="-120"/>
+              </a:rPr>
+              <a:t>CP Lecture Series</a:t>
+            </a:r>
+            <a:pPr algn="r" indent="0" marL="0">
+              <a:buNone/>
+            </a:pPr>
+            <a:r>
+              <a:rPr lang="en-US" sz="850" dirty="0">
+                <a:solidFill>
+                  <a:srgbClr val="DCE4EC"/>
+                </a:solidFill>
+                <a:latin typeface="Calibri" pitchFamily="34" charset="0"/>
+                <a:ea typeface="Calibri" pitchFamily="34" charset="-122"/>
+                <a:cs typeface="Calibri" pitchFamily="34" charset="-120"/>
+              </a:rPr>
+              <a:t>   ·   </a:t>
+            </a:r>
+            <a:pPr algn="r" indent="0" marL="0">
+              <a:buNone/>
+            </a:pPr>
+            <a:r>
+              <a:rPr lang="en-US" sz="850" b="1" dirty="0">
+                <a:solidFill>
+                  <a:srgbClr val="455A64"/>
+                </a:solidFill>
+                <a:latin typeface="Calibri" pitchFamily="34" charset="0"/>
+                <a:ea typeface="Calibri" pitchFamily="34" charset="-122"/>
+                <a:cs typeface="Calibri" pitchFamily="34" charset="-120"/>
+              </a:rPr>
+              <a:t>18</a:t>
+            </a:r>
+            <a:endParaRPr lang="en-US" sz="850" dirty="0"/>
+          </a:p>
+        </p:txBody>
+      </p:sp>
+    </p:spTree>
+  </p:cSld>
+  <p:clrMapOvr>
+    <a:masterClrMapping/>
+  </p:clrMapOvr>
+</p:sld>
+</file>
+
+<file path=ppt/slides/slide29.xml><?xml version="1.0" encoding="utf-8"?>
+<p:sld xmlns:a="http://schemas.openxmlformats.org/drawingml/2006/main" xmlns:p="http://schemas.openxmlformats.org/presentationml/2006/main" xmlns:r="http://schemas.openxmlformats.org/officeDocument/2006/relationships">
+  <p:cSld>
+    <p:spTree>
+      <p:nvGrpSpPr>
+        <p:cNvPr id="1" name=""/>
+        <p:cNvGrpSpPr/>
+        <p:nvPr/>
+      </p:nvGrpSpPr>
+      <p:grpSpPr/>
+      <p:sp>
+        <p:nvSpPr>
+          <p:cNvPr id="2" name="Text 0"/>
+          <p:cNvSpPr/>
+          <p:nvPr/>
+        </p:nvSpPr>
+        <p:spPr>
+          <a:xfrm>
+            <a:off x="566928" y="329184"/>
+            <a:ext cx="10515600" cy="310896"/>
+          </a:xfrm>
+          <a:prstGeom prst="rect">
+            <a:avLst/>
+          </a:prstGeom>
+          <a:noFill/>
+          <a:ln/>
+        </p:spPr>
+        <p:txBody>
+          <a:bodyPr wrap="square" lIns="0" tIns="0" rIns="0" bIns="0" rtlCol="0" anchor="ctr"/>
+          <a:lstStyle/>
+          <a:p>
+            <a:pPr algn="l" indent="0" marL="0">
+              <a:buNone/>
+            </a:pPr>
+            <a:r>
+              <a:rPr lang="en-US" sz="1100" b="1" spc="150" kern="0" dirty="0">
+                <a:solidFill>
+                  <a:srgbClr val="455A64"/>
+                </a:solidFill>
+                <a:latin typeface="Calibri" pitchFamily="34" charset="0"/>
+                <a:ea typeface="Calibri" pitchFamily="34" charset="-122"/>
+                <a:cs typeface="Calibri" pitchFamily="34" charset="-120"/>
+              </a:rPr>
+              <a:t>LAB MANAGEMENT &amp; QUALITY   ·   BOARD REVIEW  ·  Q1</a:t>
+            </a:r>
+            <a:endParaRPr lang="en-US" sz="1100" dirty="0"/>
+          </a:p>
+        </p:txBody>
+      </p:sp>
+      <p:sp>
+        <p:nvSpPr>
+          <p:cNvPr id="3" name="Text 1"/>
+          <p:cNvSpPr/>
+          <p:nvPr/>
+        </p:nvSpPr>
+        <p:spPr>
+          <a:xfrm>
+            <a:off x="566928" y="713232"/>
+            <a:ext cx="11064240" cy="749808"/>
+          </a:xfrm>
+          <a:prstGeom prst="rect">
+            <a:avLst/>
+          </a:prstGeom>
+          <a:noFill/>
+          <a:ln/>
+        </p:spPr>
+        <p:txBody>
+          <a:bodyPr wrap="square" lIns="0" tIns="0" rIns="0" bIns="0" rtlCol="0" anchor="ctr"/>
+          <a:lstStyle/>
+          <a:p>
+            <a:pPr algn="l" indent="0" marL="0">
+              <a:buNone/>
+            </a:pPr>
+            <a:r>
+              <a:rPr lang="en-US" sz="2600" b="1" dirty="0">
+                <a:solidFill>
+                  <a:srgbClr val="0E3A5F"/>
+                </a:solidFill>
+                <a:latin typeface="Calibri" pitchFamily="34" charset="0"/>
+                <a:ea typeface="Calibri" pitchFamily="34" charset="-122"/>
+                <a:cs typeface="Calibri" pitchFamily="34" charset="-120"/>
+              </a:rPr>
+              <a:t>Board-Style Review</a:t>
+            </a:r>
+            <a:endParaRPr lang="en-US" sz="2600" dirty="0"/>
+          </a:p>
+        </p:txBody>
+      </p:sp>
+      <p:sp>
+        <p:nvSpPr>
+          <p:cNvPr id="4" name="Text 2"/>
+          <p:cNvSpPr/>
+          <p:nvPr/>
+        </p:nvSpPr>
+        <p:spPr>
+          <a:xfrm>
+            <a:off x="566928" y="1417320"/>
+            <a:ext cx="11057839" cy="914400"/>
+          </a:xfrm>
+          <a:prstGeom prst="rect">
+            <a:avLst/>
+          </a:prstGeom>
+          <a:noFill/>
+          <a:ln/>
+        </p:spPr>
+        <p:txBody>
+          <a:bodyPr wrap="square" lIns="0" tIns="0" rIns="0" bIns="0" rtlCol="0" anchor="t"/>
+          <a:lstStyle/>
+          <a:p>
+            <a:pPr algn="l" indent="0" marL="0">
+              <a:lnSpc>
+                <a:spcPct val="105000"/>
+              </a:lnSpc>
+              <a:buNone/>
+            </a:pPr>
+            <a:r>
+              <a:rPr lang="en-US" sz="1450" b="1" dirty="0">
+                <a:solidFill>
+                  <a:srgbClr val="1B2A38"/>
+                </a:solidFill>
+                <a:latin typeface="Calibri" pitchFamily="34" charset="0"/>
+                <a:ea typeface="Calibri" pitchFamily="34" charset="-122"/>
+                <a:cs typeface="Calibri" pitchFamily="34" charset="-120"/>
+              </a:rPr>
+              <a:t>A 1_3s Westgard rule violation most suggests:</a:t>
+            </a:r>
+            <a:endParaRPr lang="en-US" sz="1450" dirty="0"/>
+          </a:p>
+        </p:txBody>
+      </p:sp>
+      <p:sp>
+        <p:nvSpPr>
+          <p:cNvPr id="5" name="Text 3"/>
+          <p:cNvSpPr/>
+          <p:nvPr/>
+        </p:nvSpPr>
+        <p:spPr>
+          <a:xfrm>
+            <a:off x="658368" y="2395728"/>
+            <a:ext cx="6192390" cy="3017520"/>
+          </a:xfrm>
+          <a:prstGeom prst="rect">
+            <a:avLst/>
+          </a:prstGeom>
+          <a:noFill/>
+          <a:ln/>
+        </p:spPr>
+        <p:txBody>
+          <a:bodyPr wrap="square" lIns="0" tIns="0" rIns="0" bIns="0" rtlCol="0" anchor="t"/>
+          <a:lstStyle/>
+          <a:p>
+            <a:pPr algn="l" indent="0" marL="0">
+              <a:spcAft>
+                <a:spcPts val="600"/>
+              </a:spcAft>
+              <a:buNone/>
+            </a:pPr>
+            <a:r>
+              <a:rPr lang="en-US" sz="1350" dirty="0">
+                <a:solidFill>
+                  <a:srgbClr val="33444F"/>
+                </a:solidFill>
+                <a:latin typeface="Calibri" pitchFamily="34" charset="0"/>
+                <a:ea typeface="Calibri" pitchFamily="34" charset="-122"/>
+                <a:cs typeface="Calibri" pitchFamily="34" charset="-120"/>
+              </a:rPr>
+              <a:t>A. Systematic error</a:t>
+            </a:r>
+            <a:endParaRPr lang="en-US" sz="1350" dirty="0"/>
+          </a:p>
+          <a:p>
+            <a:pPr algn="l" indent="0" marL="0">
+              <a:spcAft>
+                <a:spcPts val="600"/>
+              </a:spcAft>
+              <a:buNone/>
+            </a:pPr>
+            <a:r>
+              <a:rPr lang="en-US" sz="1350" b="1" dirty="0">
+                <a:solidFill>
+                  <a:srgbClr val="2C3A41"/>
+                </a:solidFill>
+                <a:latin typeface="Calibri" pitchFamily="34" charset="0"/>
+                <a:ea typeface="Calibri" pitchFamily="34" charset="-122"/>
+                <a:cs typeface="Calibri" pitchFamily="34" charset="-120"/>
+              </a:rPr>
+              <a:t>B. Random error</a:t>
+            </a:r>
+            <a:endParaRPr lang="en-US" sz="1350" dirty="0"/>
+          </a:p>
+          <a:p>
+            <a:pPr algn="l" indent="0" marL="0">
+              <a:spcAft>
+                <a:spcPts val="600"/>
+              </a:spcAft>
+              <a:buNone/>
+            </a:pPr>
+            <a:r>
+              <a:rPr lang="en-US" sz="1350" dirty="0">
+                <a:solidFill>
+                  <a:srgbClr val="33444F"/>
+                </a:solidFill>
+                <a:latin typeface="Calibri" pitchFamily="34" charset="0"/>
+                <a:ea typeface="Calibri" pitchFamily="34" charset="-122"/>
+                <a:cs typeface="Calibri" pitchFamily="34" charset="-120"/>
+              </a:rPr>
+              <a:t>C. Calibration bias</a:t>
+            </a:r>
+            <a:endParaRPr lang="en-US" sz="1350" dirty="0"/>
+          </a:p>
+          <a:p>
+            <a:pPr algn="l" indent="0" marL="0">
+              <a:spcAft>
+                <a:spcPts val="600"/>
+              </a:spcAft>
+              <a:buNone/>
+            </a:pPr>
+            <a:r>
+              <a:rPr lang="en-US" sz="1350" dirty="0">
+                <a:solidFill>
+                  <a:srgbClr val="33444F"/>
+                </a:solidFill>
+                <a:latin typeface="Calibri" pitchFamily="34" charset="0"/>
+                <a:ea typeface="Calibri" pitchFamily="34" charset="-122"/>
+                <a:cs typeface="Calibri" pitchFamily="34" charset="-120"/>
+              </a:rPr>
+              <a:t>D. Reagent deterioration trend</a:t>
+            </a:r>
+            <a:endParaRPr lang="en-US" sz="1350" dirty="0"/>
+          </a:p>
+          <a:p>
+            <a:pPr algn="l" indent="0" marL="0">
+              <a:spcAft>
+                <a:spcPts val="600"/>
+              </a:spcAft>
+              <a:buNone/>
+            </a:pPr>
+            <a:r>
+              <a:rPr lang="en-US" sz="1350" dirty="0">
+                <a:solidFill>
+                  <a:srgbClr val="33444F"/>
+                </a:solidFill>
+                <a:latin typeface="Calibri" pitchFamily="34" charset="0"/>
+                <a:ea typeface="Calibri" pitchFamily="34" charset="-122"/>
+                <a:cs typeface="Calibri" pitchFamily="34" charset="-120"/>
+              </a:rPr>
+              <a:t>E. A warning only</a:t>
+            </a:r>
+            <a:endParaRPr lang="en-US" sz="1350" dirty="0"/>
+          </a:p>
+        </p:txBody>
+      </p:sp>
+      <p:sp>
+        <p:nvSpPr>
+          <p:cNvPr id="6" name="Shape 4"/>
+          <p:cNvSpPr/>
+          <p:nvPr/>
+        </p:nvSpPr>
+        <p:spPr>
+          <a:xfrm>
+            <a:off x="7201632" y="2395728"/>
+            <a:ext cx="4423136" cy="3246120"/>
+          </a:xfrm>
+          <a:prstGeom prst="roundRect">
+            <a:avLst>
+              <a:gd name="adj" fmla="val 2535"/>
+            </a:avLst>
+          </a:prstGeom>
+          <a:solidFill>
+            <a:srgbClr val="ECEFF1"/>
+          </a:solidFill>
+          <a:ln/>
+          <a:effectLst>
+            <a:outerShdw sx="100000" sy="100000" kx="0" ky="0" algn="bl" rotWithShape="0" blurRad="88900" dist="25400" dir="5400000">
+              <a:srgbClr val="22303C">
+                <a:alpha val="12000"/>
+              </a:srgbClr>
+            </a:outerShdw>
+          </a:effectLst>
+        </p:spPr>
+        <p:txBody>
+          <a:bodyPr/>
+          <a:p/>
+        </p:txBody>
+      </p:sp>
+      <p:sp>
+        <p:nvSpPr>
+          <p:cNvPr id="7" name="Text 5"/>
+          <p:cNvSpPr/>
+          <p:nvPr/>
+        </p:nvSpPr>
+        <p:spPr>
+          <a:xfrm>
+            <a:off x="7439376" y="2578608"/>
+            <a:ext cx="3965936" cy="457200"/>
+          </a:xfrm>
+          <a:prstGeom prst="rect">
+            <a:avLst/>
+          </a:prstGeom>
+          <a:noFill/>
+          <a:ln/>
+        </p:spPr>
+        <p:txBody>
+          <a:bodyPr wrap="square" lIns="0" tIns="0" rIns="0" bIns="0" rtlCol="0" anchor="ctr"/>
+          <a:lstStyle/>
+          <a:p>
+            <a:pPr indent="0" marL="0">
+              <a:buNone/>
+            </a:pPr>
+            <a:r>
+              <a:rPr lang="en-US" sz="1500" b="1" dirty="0">
+                <a:solidFill>
+                  <a:srgbClr val="455A64"/>
+                </a:solidFill>
+                <a:latin typeface="Calibri" pitchFamily="34" charset="0"/>
+                <a:ea typeface="Calibri" pitchFamily="34" charset="-122"/>
+                <a:cs typeface="Calibri" pitchFamily="34" charset="-120"/>
+              </a:rPr>
+              <a:t>ANSWER  </a:t>
+            </a:r>
+            <a:pPr indent="0" marL="0">
+              <a:buNone/>
+            </a:pPr>
+            <a:r>
+              <a:rPr lang="en-US" sz="1500" b="1" dirty="0">
+                <a:solidFill>
+                  <a:srgbClr val="1B2A38"/>
+                </a:solidFill>
+                <a:latin typeface="Calibri" pitchFamily="34" charset="0"/>
+                <a:ea typeface="Calibri" pitchFamily="34" charset="-122"/>
+                <a:cs typeface="Calibri" pitchFamily="34" charset="-120"/>
+              </a:rPr>
+              <a:t>B — Random error</a:t>
+            </a:r>
+            <a:endParaRPr lang="en-US" sz="1500" dirty="0"/>
+          </a:p>
+        </p:txBody>
+      </p:sp>
+      <p:sp>
+        <p:nvSpPr>
+          <p:cNvPr id="8" name="Text 6"/>
+          <p:cNvSpPr/>
+          <p:nvPr/>
+        </p:nvSpPr>
+        <p:spPr>
+          <a:xfrm>
+            <a:off x="7439376" y="3127248"/>
+            <a:ext cx="3947648" cy="2377440"/>
+          </a:xfrm>
+          <a:prstGeom prst="rect">
+            <a:avLst/>
+          </a:prstGeom>
+          <a:noFill/>
+          <a:ln/>
+        </p:spPr>
+        <p:txBody>
+          <a:bodyPr wrap="square" lIns="0" tIns="0" rIns="0" bIns="0" rtlCol="0" anchor="t"/>
+          <a:lstStyle/>
+          <a:p>
+            <a:pPr algn="l" indent="0" marL="0">
+              <a:lnSpc>
+                <a:spcPct val="108000"/>
+              </a:lnSpc>
+              <a:buNone/>
+            </a:pPr>
+            <a:r>
+              <a:rPr lang="en-US" sz="1250" dirty="0">
+                <a:solidFill>
+                  <a:srgbClr val="33444F"/>
+                </a:solidFill>
+                <a:latin typeface="Calibri" pitchFamily="34" charset="0"/>
+                <a:ea typeface="Calibri" pitchFamily="34" charset="-122"/>
+                <a:cs typeface="Calibri" pitchFamily="34" charset="-120"/>
+              </a:rPr>
+              <a:t>A single point beyond ±3 SD indicates random error (imprecision); systematic rules involve consecutive directional violations.</a:t>
+            </a:r>
+            <a:endParaRPr lang="en-US" sz="1250" dirty="0"/>
+          </a:p>
+        </p:txBody>
+      </p:sp>
+      <p:sp>
+        <p:nvSpPr>
+          <p:cNvPr id="9" name="Text 7"/>
+          <p:cNvSpPr/>
+          <p:nvPr/>
+        </p:nvSpPr>
+        <p:spPr>
+          <a:xfrm>
+            <a:off x="566928" y="6473952"/>
+            <a:ext cx="7772400" cy="274320"/>
+          </a:xfrm>
+          <a:prstGeom prst="rect">
+            <a:avLst/>
+          </a:prstGeom>
+          <a:noFill/>
+          <a:ln/>
+        </p:spPr>
+        <p:txBody>
+          <a:bodyPr wrap="square" lIns="0" tIns="0" rIns="0" bIns="0" rtlCol="0" anchor="ctr"/>
+          <a:lstStyle/>
+          <a:p>
+            <a:pPr algn="l" indent="0" marL="0">
+              <a:buNone/>
+            </a:pPr>
+            <a:r>
+              <a:rPr lang="en-US" sz="850" dirty="0">
+                <a:solidFill>
+                  <a:srgbClr val="9AA8B4"/>
+                </a:solidFill>
+                <a:latin typeface="Calibri" pitchFamily="34" charset="0"/>
+                <a:ea typeface="Calibri" pitchFamily="34" charset="-122"/>
+                <a:cs typeface="Calibri" pitchFamily="34" charset="-120"/>
+              </a:rPr>
+              <a:t>Makassed General Hospital  ·  Department of Laboratory Medicine</a:t>
+            </a:r>
+            <a:endParaRPr lang="en-US" sz="850" dirty="0"/>
+          </a:p>
+        </p:txBody>
+      </p:sp>
+      <p:sp>
+        <p:nvSpPr>
+          <p:cNvPr id="10" name="Text 8"/>
+          <p:cNvSpPr/>
+          <p:nvPr/>
+        </p:nvSpPr>
+        <p:spPr>
+          <a:xfrm>
+            <a:off x="9814255" y="6473952"/>
+            <a:ext cx="1828800" cy="274320"/>
+          </a:xfrm>
+          <a:prstGeom prst="rect">
+            <a:avLst/>
+          </a:prstGeom>
+          <a:noFill/>
+          <a:ln/>
+        </p:spPr>
+        <p:txBody>
+          <a:bodyPr wrap="square" lIns="0" tIns="0" rIns="0" bIns="0" rtlCol="0" anchor="ctr"/>
+          <a:lstStyle/>
+          <a:p>
+            <a:pPr algn="r" indent="0" marL="0">
+              <a:buNone/>
+            </a:pPr>
+            <a:r>
+              <a:rPr lang="en-US" sz="850" dirty="0">
+                <a:solidFill>
+                  <a:srgbClr val="9AA8B4"/>
+                </a:solidFill>
+                <a:latin typeface="Calibri" pitchFamily="34" charset="0"/>
+                <a:ea typeface="Calibri" pitchFamily="34" charset="-122"/>
+                <a:cs typeface="Calibri" pitchFamily="34" charset="-120"/>
+              </a:rPr>
+              <a:t>CP Lecture Series</a:t>
+            </a:r>
+            <a:pPr algn="r" indent="0" marL="0">
+              <a:buNone/>
+            </a:pPr>
+            <a:r>
+              <a:rPr lang="en-US" sz="850" dirty="0">
+                <a:solidFill>
+                  <a:srgbClr val="DCE4EC"/>
+                </a:solidFill>
+                <a:latin typeface="Calibri" pitchFamily="34" charset="0"/>
+                <a:ea typeface="Calibri" pitchFamily="34" charset="-122"/>
+                <a:cs typeface="Calibri" pitchFamily="34" charset="-120"/>
+              </a:rPr>
+              <a:t>   ·   </a:t>
+            </a:r>
+            <a:pPr algn="r" indent="0" marL="0">
+              <a:buNone/>
+            </a:pPr>
+            <a:r>
+              <a:rPr lang="en-US" sz="850" b="1" dirty="0">
+                <a:solidFill>
+                  <a:srgbClr val="455A64"/>
+                </a:solidFill>
+                <a:latin typeface="Calibri" pitchFamily="34" charset="0"/>
+                <a:ea typeface="Calibri" pitchFamily="34" charset="-122"/>
+                <a:cs typeface="Calibri" pitchFamily="34" charset="-120"/>
+              </a:rPr>
+              <a:t>17</a:t>
+            </a:r>
+            <a:endParaRPr lang="en-US" sz="850" dirty="0"/>
+          </a:p>
+        </p:txBody>
+      </p:sp>
+    </p:spTree>
+  </p:cSld>
+  <p:clrMapOvr>
+    <a:masterClrMapping/>
+  </p:clrMapOvr>
+</p:sld>
+</file>
+
 <file path=ppt/slides/slide3.xml><?xml version="1.0" encoding="utf-8"?>
 <p:sld xmlns:a="http://schemas.openxmlformats.org/drawingml/2006/main" xmlns:r="http://schemas.openxmlformats.org/officeDocument/2006/relationships" xmlns:p="http://schemas.openxmlformats.org/presentationml/2006/main">
   <p:cSld name="Slide 3">
@@ -11551,6 +13171,10 @@
             </a:outerShdw>
           </a:effectLst>
         </p:spPr>
+        <p:txBody>
+          <a:bodyPr/>
+          <a:p/>
+        </p:txBody>
       </p:sp>
       <p:sp>
         <p:nvSpPr>
@@ -11578,6 +13202,10 @@
             </a:outerShdw>
           </a:effectLst>
         </p:spPr>
+        <p:txBody>
+          <a:bodyPr/>
+          <a:p/>
+        </p:txBody>
       </p:sp>
       <p:sp>
         <p:nvSpPr>
@@ -11685,6 +13313,10 @@
             </a:outerShdw>
           </a:effectLst>
         </p:spPr>
+        <p:txBody>
+          <a:bodyPr/>
+          <a:p/>
+        </p:txBody>
       </p:sp>
       <p:sp>
         <p:nvSpPr>
@@ -11712,6 +13344,10 @@
             </a:outerShdw>
           </a:effectLst>
         </p:spPr>
+        <p:txBody>
+          <a:bodyPr/>
+          <a:p/>
+        </p:txBody>
       </p:sp>
       <p:sp>
         <p:nvSpPr>
@@ -11819,6 +13455,10 @@
             </a:outerShdw>
           </a:effectLst>
         </p:spPr>
+        <p:txBody>
+          <a:bodyPr/>
+          <a:p/>
+        </p:txBody>
       </p:sp>
       <p:sp>
         <p:nvSpPr>
@@ -11846,6 +13486,10 @@
             </a:outerShdw>
           </a:effectLst>
         </p:spPr>
+        <p:txBody>
+          <a:bodyPr/>
+          <a:p/>
+        </p:txBody>
       </p:sp>
       <p:sp>
         <p:nvSpPr>
@@ -11953,6 +13597,10 @@
             </a:outerShdw>
           </a:effectLst>
         </p:spPr>
+        <p:txBody>
+          <a:bodyPr/>
+          <a:p/>
+        </p:txBody>
       </p:sp>
       <p:sp>
         <p:nvSpPr>
@@ -11980,6 +13628,10 @@
             </a:outerShdw>
           </a:effectLst>
         </p:spPr>
+        <p:txBody>
+          <a:bodyPr/>
+          <a:p/>
+        </p:txBody>
       </p:sp>
       <p:sp>
         <p:nvSpPr>
@@ -12087,6 +13739,10 @@
             </a:outerShdw>
           </a:effectLst>
         </p:spPr>
+        <p:txBody>
+          <a:bodyPr/>
+          <a:p/>
+        </p:txBody>
       </p:sp>
       <p:sp>
         <p:nvSpPr>
@@ -12114,6 +13770,10 @@
             </a:outerShdw>
           </a:effectLst>
         </p:spPr>
+        <p:txBody>
+          <a:bodyPr/>
+          <a:p/>
+        </p:txBody>
       </p:sp>
       <p:sp>
         <p:nvSpPr>
@@ -12221,6 +13881,10 @@
             </a:outerShdw>
           </a:effectLst>
         </p:spPr>
+        <p:txBody>
+          <a:bodyPr/>
+          <a:p/>
+        </p:txBody>
       </p:sp>
       <p:sp>
         <p:nvSpPr>
@@ -12248,6 +13912,10 @@
             </a:outerShdw>
           </a:effectLst>
         </p:spPr>
+        <p:txBody>
+          <a:bodyPr/>
+          <a:p/>
+        </p:txBody>
       </p:sp>
       <p:sp>
         <p:nvSpPr>
@@ -12571,6 +14239,10 @@
             </a:outerShdw>
           </a:effectLst>
         </p:spPr>
+        <p:txBody>
+          <a:bodyPr/>
+          <a:p/>
+        </p:txBody>
       </p:sp>
       <p:sp>
         <p:nvSpPr>
@@ -12598,6 +14270,10 @@
             </a:outerShdw>
           </a:effectLst>
         </p:spPr>
+        <p:txBody>
+          <a:bodyPr/>
+          <a:p/>
+        </p:txBody>
       </p:sp>
       <p:sp>
         <p:nvSpPr>
@@ -12712,6 +14388,10 @@
           </a:solidFill>
           <a:ln/>
         </p:spPr>
+        <p:txBody>
+          <a:bodyPr/>
+          <a:p/>
+        </p:txBody>
       </p:sp>
       <p:sp>
         <p:nvSpPr>
@@ -12739,6 +14419,10 @@
             </a:outerShdw>
           </a:effectLst>
         </p:spPr>
+        <p:txBody>
+          <a:bodyPr/>
+          <a:p/>
+        </p:txBody>
       </p:sp>
       <p:sp>
         <p:nvSpPr>
@@ -12860,6 +14544,10 @@
             </a:outerShdw>
           </a:effectLst>
         </p:spPr>
+        <p:txBody>
+          <a:bodyPr/>
+          <a:p/>
+        </p:txBody>
       </p:sp>
       <p:sp>
         <p:nvSpPr>
@@ -12887,6 +14575,10 @@
             </a:outerShdw>
           </a:effectLst>
         </p:spPr>
+        <p:txBody>
+          <a:bodyPr/>
+          <a:p/>
+        </p:txBody>
       </p:sp>
       <p:sp>
         <p:nvSpPr>
@@ -13001,6 +14693,10 @@
           </a:solidFill>
           <a:ln/>
         </p:spPr>
+        <p:txBody>
+          <a:bodyPr/>
+          <a:p/>
+        </p:txBody>
       </p:sp>
       <p:sp>
         <p:nvSpPr>
@@ -13028,6 +14724,10 @@
             </a:outerShdw>
           </a:effectLst>
         </p:spPr>
+        <p:txBody>
+          <a:bodyPr/>
+          <a:p/>
+        </p:txBody>
       </p:sp>
       <p:sp>
         <p:nvSpPr>
@@ -13149,6 +14849,10 @@
             </a:outerShdw>
           </a:effectLst>
         </p:spPr>
+        <p:txBody>
+          <a:bodyPr/>
+          <a:p/>
+        </p:txBody>
       </p:sp>
       <p:sp>
         <p:nvSpPr>
@@ -13176,6 +14880,10 @@
             </a:outerShdw>
           </a:effectLst>
         </p:spPr>
+        <p:txBody>
+          <a:bodyPr/>
+          <a:p/>
+        </p:txBody>
       </p:sp>
       <p:sp>
         <p:nvSpPr>
@@ -13414,6 +15122,10 @@
           </a:solidFill>
           <a:ln/>
         </p:spPr>
+        <p:txBody>
+          <a:bodyPr/>
+          <a:p/>
+        </p:txBody>
       </p:sp>
       <p:sp>
         <p:nvSpPr>
@@ -13436,6 +15148,10 @@
           </a:solidFill>
           <a:ln/>
         </p:spPr>
+        <p:txBody>
+          <a:bodyPr/>
+          <a:p/>
+        </p:txBody>
       </p:sp>
       <p:sp>
         <p:nvSpPr>
@@ -13692,6 +15408,10 @@
             </a:outerShdw>
           </a:effectLst>
         </p:spPr>
+        <p:txBody>
+          <a:bodyPr/>
+          <a:p/>
+        </p:txBody>
       </p:sp>
       <p:sp>
         <p:nvSpPr>
@@ -13866,6 +15586,10 @@
             </a:outerShdw>
           </a:effectLst>
         </p:spPr>
+        <p:txBody>
+          <a:bodyPr/>
+          <a:p/>
+        </p:txBody>
       </p:sp>
       <p:sp>
         <p:nvSpPr>
@@ -14261,6 +15985,10 @@
             </a:outerShdw>
           </a:effectLst>
         </p:spPr>
+        <p:txBody>
+          <a:bodyPr/>
+          <a:p/>
+        </p:txBody>
       </p:sp>
       <p:pic>
         <p:nvPicPr>
@@ -14569,6 +16297,10 @@
             </a:outerShdw>
           </a:effectLst>
         </p:spPr>
+        <p:txBody>
+          <a:bodyPr/>
+          <a:p/>
+        </p:txBody>
       </p:sp>
       <p:sp>
         <p:nvSpPr>
@@ -14743,6 +16475,10 @@
             </a:outerShdw>
           </a:effectLst>
         </p:spPr>
+        <p:txBody>
+          <a:bodyPr/>
+          <a:p/>
+        </p:txBody>
       </p:sp>
       <p:sp>
         <p:nvSpPr>
@@ -15048,6 +16784,10 @@
           </a:solidFill>
           <a:ln/>
         </p:spPr>
+        <p:txBody>
+          <a:bodyPr/>
+          <a:p/>
+        </p:txBody>
       </p:sp>
       <p:sp>
         <p:nvSpPr>
@@ -15070,6 +16810,10 @@
           </a:solidFill>
           <a:ln/>
         </p:spPr>
+        <p:txBody>
+          <a:bodyPr/>
+          <a:p/>
+        </p:txBody>
       </p:sp>
       <p:sp>
         <p:nvSpPr>
